--- a/thesis/Nesterenko_Presentation.pptx
+++ b/thesis/Nesterenko_Presentation.pptx
@@ -8653,7 +8653,46 @@
       </p:grpSpPr>
       <p:sp>
         <p:nvSpPr>
-          <p:cNvPr id="2" name="Shape 0"/>
+          <p:cNvPr id="2" name="Text 0"/>
+          <p:cNvSpPr/>
+          <p:nvPr/>
+        </p:nvSpPr>
+        <p:spPr>
+          <a:xfrm>
+            <a:off x="411480" y="91440"/>
+            <a:ext cx="8321040" cy="182880"/>
+          </a:xfrm>
+          <a:prstGeom prst="rect">
+            <a:avLst/>
+          </a:prstGeom>
+          <a:noFill/>
+          <a:ln/>
+        </p:spPr>
+        <p:txBody>
+          <a:bodyPr wrap="square" lIns="0" tIns="0" rIns="0" bIns="0" rtlCol="0" anchor="ctr"/>
+          <a:lstStyle/>
+          <a:p>
+            <a:pPr algn="l" indent="0" marL="0">
+              <a:buNone/>
+            </a:pPr>
+            <a:r>
+              <a:rPr lang="en-US" sz="850" b="1" spc="300" kern="0" dirty="0">
+                <a:solidFill>
+                  <a:srgbClr val="64748B"/>
+                </a:solidFill>
+                <a:latin typeface="Calibri" pitchFamily="34" charset="0"/>
+                <a:ea typeface="Calibri" pitchFamily="34" charset="-122"/>
+                <a:cs typeface="Calibri" pitchFamily="34" charset="-120"/>
+              </a:rPr>
+              <a:t>РОЗДІЛ 6 · ПРОГРАМНЕ ЗАБЕЗПЕЧЕННЯ</a:t>
+            </a:r>
+            <a:endParaRPr lang="en-US" sz="850" dirty="0"/>
+          </a:p>
+        </p:txBody>
+      </p:sp>
+      <p:sp>
+        <p:nvSpPr>
+          <p:cNvPr id="3" name="Shape 1"/>
           <p:cNvSpPr/>
           <p:nvPr/>
         </p:nvSpPr>
@@ -8673,7 +8712,7 @@
       </p:sp>
       <p:sp>
         <p:nvSpPr>
-          <p:cNvPr id="3" name="Text 1"/>
+          <p:cNvPr id="4" name="Text 2"/>
           <p:cNvSpPr/>
           <p:nvPr/>
         </p:nvSpPr>
@@ -8712,7 +8751,7 @@
       </p:sp>
       <p:sp>
         <p:nvSpPr>
-          <p:cNvPr id="4" name="Shape 2"/>
+          <p:cNvPr id="5" name="Shape 3"/>
           <p:cNvSpPr/>
           <p:nvPr/>
         </p:nvSpPr>
@@ -8746,7 +8785,7 @@
       </p:sp>
       <p:sp>
         <p:nvSpPr>
-          <p:cNvPr id="5" name="Shape 3"/>
+          <p:cNvPr id="6" name="Shape 4"/>
           <p:cNvSpPr/>
           <p:nvPr/>
         </p:nvSpPr>
@@ -8766,7 +8805,7 @@
       </p:sp>
       <p:pic>
         <p:nvPicPr>
-          <p:cNvPr id="6" name="Image 0" descr="preencoded.png">    </p:cNvPr>
+          <p:cNvPr id="7" name="Image 0" descr="preencoded.png">    </p:cNvPr>
           <p:cNvPicPr>
             <a:picLocks noChangeAspect="1"/>
           </p:cNvPicPr>
@@ -8790,7 +8829,7 @@
       </p:pic>
       <p:sp>
         <p:nvSpPr>
-          <p:cNvPr id="7" name="Text 4"/>
+          <p:cNvPr id="8" name="Text 5"/>
           <p:cNvSpPr/>
           <p:nvPr/>
         </p:nvSpPr>
@@ -8829,7 +8868,7 @@
       </p:sp>
       <p:sp>
         <p:nvSpPr>
-          <p:cNvPr id="8" name="Shape 5"/>
+          <p:cNvPr id="9" name="Shape 6"/>
           <p:cNvSpPr/>
           <p:nvPr/>
         </p:nvSpPr>
@@ -8849,7 +8888,7 @@
       </p:sp>
       <p:sp>
         <p:nvSpPr>
-          <p:cNvPr id="9" name="Text 6"/>
+          <p:cNvPr id="10" name="Text 7"/>
           <p:cNvSpPr/>
           <p:nvPr/>
         </p:nvSpPr>
@@ -8888,7 +8927,7 @@
       </p:sp>
       <p:sp>
         <p:nvSpPr>
-          <p:cNvPr id="10" name="Shape 7"/>
+          <p:cNvPr id="11" name="Shape 8"/>
           <p:cNvSpPr/>
           <p:nvPr/>
         </p:nvSpPr>
@@ -8908,7 +8947,7 @@
       </p:sp>
       <p:sp>
         <p:nvSpPr>
-          <p:cNvPr id="11" name="Text 8"/>
+          <p:cNvPr id="12" name="Text 9"/>
           <p:cNvSpPr/>
           <p:nvPr/>
         </p:nvSpPr>
@@ -8947,7 +8986,7 @@
       </p:sp>
       <p:sp>
         <p:nvSpPr>
-          <p:cNvPr id="12" name="Shape 9"/>
+          <p:cNvPr id="13" name="Shape 10"/>
           <p:cNvSpPr/>
           <p:nvPr/>
         </p:nvSpPr>
@@ -8967,7 +9006,7 @@
       </p:sp>
       <p:sp>
         <p:nvSpPr>
-          <p:cNvPr id="13" name="Text 10"/>
+          <p:cNvPr id="14" name="Text 11"/>
           <p:cNvSpPr/>
           <p:nvPr/>
         </p:nvSpPr>
@@ -9006,7 +9045,7 @@
       </p:sp>
       <p:sp>
         <p:nvSpPr>
-          <p:cNvPr id="14" name="Shape 11"/>
+          <p:cNvPr id="15" name="Shape 12"/>
           <p:cNvSpPr/>
           <p:nvPr/>
         </p:nvSpPr>
@@ -9026,7 +9065,7 @@
       </p:sp>
       <p:sp>
         <p:nvSpPr>
-          <p:cNvPr id="15" name="Text 12"/>
+          <p:cNvPr id="16" name="Text 13"/>
           <p:cNvSpPr/>
           <p:nvPr/>
         </p:nvSpPr>
@@ -9065,7 +9104,7 @@
       </p:sp>
       <p:sp>
         <p:nvSpPr>
-          <p:cNvPr id="16" name="Shape 13"/>
+          <p:cNvPr id="17" name="Shape 14"/>
           <p:cNvSpPr/>
           <p:nvPr/>
         </p:nvSpPr>
@@ -9085,7 +9124,7 @@
       </p:sp>
       <p:sp>
         <p:nvSpPr>
-          <p:cNvPr id="17" name="Text 14"/>
+          <p:cNvPr id="18" name="Text 15"/>
           <p:cNvSpPr/>
           <p:nvPr/>
         </p:nvSpPr>
@@ -9124,7 +9163,7 @@
       </p:sp>
       <p:sp>
         <p:nvSpPr>
-          <p:cNvPr id="18" name="Shape 15"/>
+          <p:cNvPr id="19" name="Shape 16"/>
           <p:cNvSpPr/>
           <p:nvPr/>
         </p:nvSpPr>
@@ -9144,7 +9183,7 @@
       </p:sp>
       <p:sp>
         <p:nvSpPr>
-          <p:cNvPr id="19" name="Text 16"/>
+          <p:cNvPr id="20" name="Text 17"/>
           <p:cNvSpPr/>
           <p:nvPr/>
         </p:nvSpPr>
@@ -9183,7 +9222,7 @@
       </p:sp>
       <p:sp>
         <p:nvSpPr>
-          <p:cNvPr id="20" name="Shape 17"/>
+          <p:cNvPr id="21" name="Shape 18"/>
           <p:cNvSpPr/>
           <p:nvPr/>
         </p:nvSpPr>
@@ -9217,7 +9256,7 @@
       </p:sp>
       <p:sp>
         <p:nvSpPr>
-          <p:cNvPr id="21" name="Shape 18"/>
+          <p:cNvPr id="22" name="Shape 19"/>
           <p:cNvSpPr/>
           <p:nvPr/>
         </p:nvSpPr>
@@ -9237,7 +9276,7 @@
       </p:sp>
       <p:pic>
         <p:nvPicPr>
-          <p:cNvPr id="22" name="Image 1" descr="preencoded.png">    </p:cNvPr>
+          <p:cNvPr id="23" name="Image 1" descr="preencoded.png">    </p:cNvPr>
           <p:cNvPicPr>
             <a:picLocks noChangeAspect="1"/>
           </p:cNvPicPr>
@@ -9261,7 +9300,7 @@
       </p:pic>
       <p:sp>
         <p:nvSpPr>
-          <p:cNvPr id="23" name="Text 19"/>
+          <p:cNvPr id="24" name="Text 20"/>
           <p:cNvSpPr/>
           <p:nvPr/>
         </p:nvSpPr>
@@ -9300,7 +9339,7 @@
       </p:sp>
       <p:sp>
         <p:nvSpPr>
-          <p:cNvPr id="24" name="Shape 20"/>
+          <p:cNvPr id="25" name="Shape 21"/>
           <p:cNvSpPr/>
           <p:nvPr/>
         </p:nvSpPr>
@@ -9320,7 +9359,7 @@
       </p:sp>
       <p:sp>
         <p:nvSpPr>
-          <p:cNvPr id="25" name="Text 21"/>
+          <p:cNvPr id="26" name="Text 22"/>
           <p:cNvSpPr/>
           <p:nvPr/>
         </p:nvSpPr>
@@ -9359,7 +9398,7 @@
       </p:sp>
       <p:sp>
         <p:nvSpPr>
-          <p:cNvPr id="26" name="Shape 22"/>
+          <p:cNvPr id="27" name="Shape 23"/>
           <p:cNvSpPr/>
           <p:nvPr/>
         </p:nvSpPr>
@@ -9379,7 +9418,7 @@
       </p:sp>
       <p:sp>
         <p:nvSpPr>
-          <p:cNvPr id="27" name="Text 23"/>
+          <p:cNvPr id="28" name="Text 24"/>
           <p:cNvSpPr/>
           <p:nvPr/>
         </p:nvSpPr>
@@ -9418,7 +9457,7 @@
       </p:sp>
       <p:sp>
         <p:nvSpPr>
-          <p:cNvPr id="28" name="Shape 24"/>
+          <p:cNvPr id="29" name="Shape 25"/>
           <p:cNvSpPr/>
           <p:nvPr/>
         </p:nvSpPr>
@@ -9438,7 +9477,7 @@
       </p:sp>
       <p:sp>
         <p:nvSpPr>
-          <p:cNvPr id="29" name="Text 25"/>
+          <p:cNvPr id="30" name="Text 26"/>
           <p:cNvSpPr/>
           <p:nvPr/>
         </p:nvSpPr>
@@ -9477,7 +9516,7 @@
       </p:sp>
       <p:sp>
         <p:nvSpPr>
-          <p:cNvPr id="30" name="Shape 26"/>
+          <p:cNvPr id="31" name="Shape 27"/>
           <p:cNvSpPr/>
           <p:nvPr/>
         </p:nvSpPr>
@@ -9497,7 +9536,7 @@
       </p:sp>
       <p:sp>
         <p:nvSpPr>
-          <p:cNvPr id="31" name="Text 27"/>
+          <p:cNvPr id="32" name="Text 28"/>
           <p:cNvSpPr/>
           <p:nvPr/>
         </p:nvSpPr>
@@ -9536,7 +9575,7 @@
       </p:sp>
       <p:sp>
         <p:nvSpPr>
-          <p:cNvPr id="32" name="Shape 28"/>
+          <p:cNvPr id="33" name="Shape 29"/>
           <p:cNvSpPr/>
           <p:nvPr/>
         </p:nvSpPr>
@@ -9556,7 +9595,7 @@
       </p:sp>
       <p:sp>
         <p:nvSpPr>
-          <p:cNvPr id="33" name="Text 29"/>
+          <p:cNvPr id="34" name="Text 30"/>
           <p:cNvSpPr/>
           <p:nvPr/>
         </p:nvSpPr>
@@ -9595,7 +9634,7 @@
       </p:sp>
       <p:sp>
         <p:nvSpPr>
-          <p:cNvPr id="34" name="Shape 30"/>
+          <p:cNvPr id="35" name="Shape 31"/>
           <p:cNvSpPr/>
           <p:nvPr/>
         </p:nvSpPr>
@@ -9615,7 +9654,7 @@
       </p:sp>
       <p:sp>
         <p:nvSpPr>
-          <p:cNvPr id="35" name="Text 31"/>
+          <p:cNvPr id="36" name="Text 32"/>
           <p:cNvSpPr/>
           <p:nvPr/>
         </p:nvSpPr>
@@ -9654,7 +9693,7 @@
       </p:sp>
       <p:sp>
         <p:nvSpPr>
-          <p:cNvPr id="36" name="Shape 32"/>
+          <p:cNvPr id="37" name="Shape 33"/>
           <p:cNvSpPr/>
           <p:nvPr/>
         </p:nvSpPr>
@@ -9688,7 +9727,7 @@
       </p:sp>
       <p:sp>
         <p:nvSpPr>
-          <p:cNvPr id="37" name="Shape 33"/>
+          <p:cNvPr id="38" name="Shape 34"/>
           <p:cNvSpPr/>
           <p:nvPr/>
         </p:nvSpPr>
@@ -9708,7 +9747,7 @@
       </p:sp>
       <p:pic>
         <p:nvPicPr>
-          <p:cNvPr id="38" name="Image 2" descr="preencoded.png">    </p:cNvPr>
+          <p:cNvPr id="39" name="Image 2" descr="preencoded.png">    </p:cNvPr>
           <p:cNvPicPr>
             <a:picLocks noChangeAspect="1"/>
           </p:cNvPicPr>
@@ -9732,7 +9771,7 @@
       </p:pic>
       <p:sp>
         <p:nvSpPr>
-          <p:cNvPr id="39" name="Text 34"/>
+          <p:cNvPr id="40" name="Text 35"/>
           <p:cNvSpPr/>
           <p:nvPr/>
         </p:nvSpPr>
@@ -9771,7 +9810,7 @@
       </p:sp>
       <p:sp>
         <p:nvSpPr>
-          <p:cNvPr id="40" name="Shape 35"/>
+          <p:cNvPr id="41" name="Shape 36"/>
           <p:cNvSpPr/>
           <p:nvPr/>
         </p:nvSpPr>
@@ -9791,7 +9830,7 @@
       </p:sp>
       <p:sp>
         <p:nvSpPr>
-          <p:cNvPr id="41" name="Text 36"/>
+          <p:cNvPr id="42" name="Text 37"/>
           <p:cNvSpPr/>
           <p:nvPr/>
         </p:nvSpPr>
@@ -9830,7 +9869,7 @@
       </p:sp>
       <p:sp>
         <p:nvSpPr>
-          <p:cNvPr id="42" name="Shape 37"/>
+          <p:cNvPr id="43" name="Shape 38"/>
           <p:cNvSpPr/>
           <p:nvPr/>
         </p:nvSpPr>
@@ -9850,7 +9889,7 @@
       </p:sp>
       <p:sp>
         <p:nvSpPr>
-          <p:cNvPr id="43" name="Text 38"/>
+          <p:cNvPr id="44" name="Text 39"/>
           <p:cNvSpPr/>
           <p:nvPr/>
         </p:nvSpPr>
@@ -9889,7 +9928,7 @@
       </p:sp>
       <p:sp>
         <p:nvSpPr>
-          <p:cNvPr id="44" name="Shape 39"/>
+          <p:cNvPr id="45" name="Shape 40"/>
           <p:cNvSpPr/>
           <p:nvPr/>
         </p:nvSpPr>
@@ -9909,7 +9948,7 @@
       </p:sp>
       <p:sp>
         <p:nvSpPr>
-          <p:cNvPr id="45" name="Text 40"/>
+          <p:cNvPr id="46" name="Text 41"/>
           <p:cNvSpPr/>
           <p:nvPr/>
         </p:nvSpPr>
@@ -9948,7 +9987,7 @@
       </p:sp>
       <p:sp>
         <p:nvSpPr>
-          <p:cNvPr id="46" name="Shape 41"/>
+          <p:cNvPr id="47" name="Shape 42"/>
           <p:cNvSpPr/>
           <p:nvPr/>
         </p:nvSpPr>
@@ -9968,7 +10007,7 @@
       </p:sp>
       <p:sp>
         <p:nvSpPr>
-          <p:cNvPr id="47" name="Text 42"/>
+          <p:cNvPr id="48" name="Text 43"/>
           <p:cNvSpPr/>
           <p:nvPr/>
         </p:nvSpPr>
@@ -10007,7 +10046,7 @@
       </p:sp>
       <p:sp>
         <p:nvSpPr>
-          <p:cNvPr id="48" name="Shape 43"/>
+          <p:cNvPr id="49" name="Shape 44"/>
           <p:cNvSpPr/>
           <p:nvPr/>
         </p:nvSpPr>
@@ -10027,7 +10066,7 @@
       </p:sp>
       <p:sp>
         <p:nvSpPr>
-          <p:cNvPr id="49" name="Text 44"/>
+          <p:cNvPr id="50" name="Text 45"/>
           <p:cNvSpPr/>
           <p:nvPr/>
         </p:nvSpPr>
@@ -10066,7 +10105,7 @@
       </p:sp>
       <p:sp>
         <p:nvSpPr>
-          <p:cNvPr id="50" name="Shape 45"/>
+          <p:cNvPr id="51" name="Shape 46"/>
           <p:cNvSpPr/>
           <p:nvPr/>
         </p:nvSpPr>
@@ -10086,7 +10125,7 @@
       </p:sp>
       <p:sp>
         <p:nvSpPr>
-          <p:cNvPr id="51" name="Text 46"/>
+          <p:cNvPr id="52" name="Text 47"/>
           <p:cNvSpPr/>
           <p:nvPr/>
         </p:nvSpPr>
@@ -10125,7 +10164,7 @@
       </p:sp>
       <p:sp>
         <p:nvSpPr>
-          <p:cNvPr id="52" name="Text 47"/>
+          <p:cNvPr id="53" name="Text 48"/>
           <p:cNvSpPr/>
           <p:nvPr/>
         </p:nvSpPr>
@@ -10164,7 +10203,7 @@
       </p:sp>
       <p:sp>
         <p:nvSpPr>
-          <p:cNvPr id="53" name="Text 48"/>
+          <p:cNvPr id="54" name="Text 49"/>
           <p:cNvSpPr/>
           <p:nvPr/>
         </p:nvSpPr>
@@ -10235,7 +10274,46 @@
       </p:grpSpPr>
       <p:sp>
         <p:nvSpPr>
-          <p:cNvPr id="2" name="Shape 0"/>
+          <p:cNvPr id="2" name="Text 0"/>
+          <p:cNvSpPr/>
+          <p:nvPr/>
+        </p:nvSpPr>
+        <p:spPr>
+          <a:xfrm>
+            <a:off x="411480" y="91440"/>
+            <a:ext cx="8321040" cy="182880"/>
+          </a:xfrm>
+          <a:prstGeom prst="rect">
+            <a:avLst/>
+          </a:prstGeom>
+          <a:noFill/>
+          <a:ln/>
+        </p:spPr>
+        <p:txBody>
+          <a:bodyPr wrap="square" lIns="0" tIns="0" rIns="0" bIns="0" rtlCol="0" anchor="ctr"/>
+          <a:lstStyle/>
+          <a:p>
+            <a:pPr algn="l" indent="0" marL="0">
+              <a:buNone/>
+            </a:pPr>
+            <a:r>
+              <a:rPr lang="en-US" sz="850" b="1" spc="300" kern="0" dirty="0">
+                <a:solidFill>
+                  <a:srgbClr val="64748B"/>
+                </a:solidFill>
+                <a:latin typeface="Calibri" pitchFamily="34" charset="0"/>
+                <a:ea typeface="Calibri" pitchFamily="34" charset="-122"/>
+                <a:cs typeface="Calibri" pitchFamily="34" charset="-120"/>
+              </a:rPr>
+              <a:t>РОЗДІЛ 7 · ЗМІСТ ЕКСПЕРИМЕНТУ</a:t>
+            </a:r>
+            <a:endParaRPr lang="en-US" sz="850" dirty="0"/>
+          </a:p>
+        </p:txBody>
+      </p:sp>
+      <p:sp>
+        <p:nvSpPr>
+          <p:cNvPr id="3" name="Shape 1"/>
           <p:cNvSpPr/>
           <p:nvPr/>
         </p:nvSpPr>
@@ -10255,7 +10333,7 @@
       </p:sp>
       <p:sp>
         <p:nvSpPr>
-          <p:cNvPr id="3" name="Text 1"/>
+          <p:cNvPr id="4" name="Text 2"/>
           <p:cNvSpPr/>
           <p:nvPr/>
         </p:nvSpPr>
@@ -10294,7 +10372,7 @@
       </p:sp>
       <p:sp>
         <p:nvSpPr>
-          <p:cNvPr id="4" name="Text 2"/>
+          <p:cNvPr id="5" name="Text 3"/>
           <p:cNvSpPr/>
           <p:nvPr/>
         </p:nvSpPr>
@@ -10361,7 +10439,7 @@
       </p:sp>
       <p:sp>
         <p:nvSpPr>
-          <p:cNvPr id="5" name="Shape 3"/>
+          <p:cNvPr id="6" name="Shape 4"/>
           <p:cNvSpPr/>
           <p:nvPr/>
         </p:nvSpPr>
@@ -10395,7 +10473,7 @@
       </p:sp>
       <p:sp>
         <p:nvSpPr>
-          <p:cNvPr id="6" name="Shape 4"/>
+          <p:cNvPr id="7" name="Shape 5"/>
           <p:cNvSpPr/>
           <p:nvPr/>
         </p:nvSpPr>
@@ -10415,7 +10493,7 @@
       </p:sp>
       <p:sp>
         <p:nvSpPr>
-          <p:cNvPr id="7" name="Shape 5"/>
+          <p:cNvPr id="8" name="Shape 6"/>
           <p:cNvSpPr/>
           <p:nvPr/>
         </p:nvSpPr>
@@ -10440,7 +10518,7 @@
       </p:sp>
       <p:pic>
         <p:nvPicPr>
-          <p:cNvPr id="8" name="Image 0" descr="preencoded.png">    </p:cNvPr>
+          <p:cNvPr id="9" name="Image 0" descr="preencoded.png">    </p:cNvPr>
           <p:cNvPicPr>
             <a:picLocks noChangeAspect="1"/>
           </p:cNvPicPr>
@@ -10464,7 +10542,7 @@
       </p:pic>
       <p:sp>
         <p:nvSpPr>
-          <p:cNvPr id="9" name="Text 6"/>
+          <p:cNvPr id="10" name="Text 7"/>
           <p:cNvSpPr/>
           <p:nvPr/>
         </p:nvSpPr>
@@ -10503,7 +10581,7 @@
       </p:sp>
       <p:sp>
         <p:nvSpPr>
-          <p:cNvPr id="10" name="Text 7"/>
+          <p:cNvPr id="11" name="Text 8"/>
           <p:cNvSpPr/>
           <p:nvPr/>
         </p:nvSpPr>
@@ -10542,7 +10620,7 @@
       </p:sp>
       <p:sp>
         <p:nvSpPr>
-          <p:cNvPr id="11" name="Text 8"/>
+          <p:cNvPr id="12" name="Text 9"/>
           <p:cNvSpPr/>
           <p:nvPr/>
         </p:nvSpPr>
@@ -10581,7 +10659,7 @@
       </p:sp>
       <p:sp>
         <p:nvSpPr>
-          <p:cNvPr id="12" name="Text 9"/>
+          <p:cNvPr id="13" name="Text 10"/>
           <p:cNvSpPr/>
           <p:nvPr/>
         </p:nvSpPr>
@@ -10620,7 +10698,7 @@
       </p:sp>
       <p:sp>
         <p:nvSpPr>
-          <p:cNvPr id="13" name="Text 10"/>
+          <p:cNvPr id="14" name="Text 11"/>
           <p:cNvSpPr/>
           <p:nvPr/>
         </p:nvSpPr>
@@ -10659,7 +10737,7 @@
       </p:sp>
       <p:sp>
         <p:nvSpPr>
-          <p:cNvPr id="14" name="Text 11"/>
+          <p:cNvPr id="15" name="Text 12"/>
           <p:cNvSpPr/>
           <p:nvPr/>
         </p:nvSpPr>
@@ -10698,7 +10776,7 @@
       </p:sp>
       <p:sp>
         <p:nvSpPr>
-          <p:cNvPr id="15" name="Text 12"/>
+          <p:cNvPr id="16" name="Text 13"/>
           <p:cNvSpPr/>
           <p:nvPr/>
         </p:nvSpPr>
@@ -10737,7 +10815,7 @@
       </p:sp>
       <p:sp>
         <p:nvSpPr>
-          <p:cNvPr id="16" name="Text 13"/>
+          <p:cNvPr id="17" name="Text 14"/>
           <p:cNvSpPr/>
           <p:nvPr/>
         </p:nvSpPr>
@@ -10776,7 +10854,7 @@
       </p:sp>
       <p:sp>
         <p:nvSpPr>
-          <p:cNvPr id="17" name="Shape 14"/>
+          <p:cNvPr id="18" name="Shape 15"/>
           <p:cNvSpPr/>
           <p:nvPr/>
         </p:nvSpPr>
@@ -10810,7 +10888,7 @@
       </p:sp>
       <p:sp>
         <p:nvSpPr>
-          <p:cNvPr id="18" name="Shape 15"/>
+          <p:cNvPr id="19" name="Shape 16"/>
           <p:cNvSpPr/>
           <p:nvPr/>
         </p:nvSpPr>
@@ -10830,7 +10908,7 @@
       </p:sp>
       <p:sp>
         <p:nvSpPr>
-          <p:cNvPr id="19" name="Shape 16"/>
+          <p:cNvPr id="20" name="Shape 17"/>
           <p:cNvSpPr/>
           <p:nvPr/>
         </p:nvSpPr>
@@ -10855,7 +10933,7 @@
       </p:sp>
       <p:pic>
         <p:nvPicPr>
-          <p:cNvPr id="20" name="Image 1" descr="preencoded.png">    </p:cNvPr>
+          <p:cNvPr id="21" name="Image 1" descr="preencoded.png">    </p:cNvPr>
           <p:cNvPicPr>
             <a:picLocks noChangeAspect="1"/>
           </p:cNvPicPr>
@@ -10879,7 +10957,7 @@
       </p:pic>
       <p:sp>
         <p:nvSpPr>
-          <p:cNvPr id="21" name="Text 17"/>
+          <p:cNvPr id="22" name="Text 18"/>
           <p:cNvSpPr/>
           <p:nvPr/>
         </p:nvSpPr>
@@ -10918,7 +10996,7 @@
       </p:sp>
       <p:sp>
         <p:nvSpPr>
-          <p:cNvPr id="22" name="Text 18"/>
+          <p:cNvPr id="23" name="Text 19"/>
           <p:cNvSpPr/>
           <p:nvPr/>
         </p:nvSpPr>
@@ -10957,7 +11035,7 @@
       </p:sp>
       <p:sp>
         <p:nvSpPr>
-          <p:cNvPr id="23" name="Text 19"/>
+          <p:cNvPr id="24" name="Text 20"/>
           <p:cNvSpPr/>
           <p:nvPr/>
         </p:nvSpPr>
@@ -10996,7 +11074,7 @@
       </p:sp>
       <p:sp>
         <p:nvSpPr>
-          <p:cNvPr id="24" name="Text 20"/>
+          <p:cNvPr id="25" name="Text 21"/>
           <p:cNvSpPr/>
           <p:nvPr/>
         </p:nvSpPr>
@@ -11035,7 +11113,7 @@
       </p:sp>
       <p:sp>
         <p:nvSpPr>
-          <p:cNvPr id="25" name="Text 21"/>
+          <p:cNvPr id="26" name="Text 22"/>
           <p:cNvSpPr/>
           <p:nvPr/>
         </p:nvSpPr>
@@ -11074,7 +11152,7 @@
       </p:sp>
       <p:sp>
         <p:nvSpPr>
-          <p:cNvPr id="26" name="Text 22"/>
+          <p:cNvPr id="27" name="Text 23"/>
           <p:cNvSpPr/>
           <p:nvPr/>
         </p:nvSpPr>
@@ -11113,7 +11191,7 @@
       </p:sp>
       <p:sp>
         <p:nvSpPr>
-          <p:cNvPr id="27" name="Text 23"/>
+          <p:cNvPr id="28" name="Text 24"/>
           <p:cNvSpPr/>
           <p:nvPr/>
         </p:nvSpPr>
@@ -11152,7 +11230,7 @@
       </p:sp>
       <p:sp>
         <p:nvSpPr>
-          <p:cNvPr id="28" name="Text 24"/>
+          <p:cNvPr id="29" name="Text 25"/>
           <p:cNvSpPr/>
           <p:nvPr/>
         </p:nvSpPr>
@@ -11191,7 +11269,7 @@
       </p:sp>
       <p:sp>
         <p:nvSpPr>
-          <p:cNvPr id="29" name="Shape 25"/>
+          <p:cNvPr id="30" name="Shape 26"/>
           <p:cNvSpPr/>
           <p:nvPr/>
         </p:nvSpPr>
@@ -11225,7 +11303,7 @@
       </p:sp>
       <p:sp>
         <p:nvSpPr>
-          <p:cNvPr id="30" name="Shape 26"/>
+          <p:cNvPr id="31" name="Shape 27"/>
           <p:cNvSpPr/>
           <p:nvPr/>
         </p:nvSpPr>
@@ -11245,7 +11323,7 @@
       </p:sp>
       <p:sp>
         <p:nvSpPr>
-          <p:cNvPr id="31" name="Shape 27"/>
+          <p:cNvPr id="32" name="Shape 28"/>
           <p:cNvSpPr/>
           <p:nvPr/>
         </p:nvSpPr>
@@ -11270,7 +11348,7 @@
       </p:sp>
       <p:pic>
         <p:nvPicPr>
-          <p:cNvPr id="32" name="Image 2" descr="preencoded.png">    </p:cNvPr>
+          <p:cNvPr id="33" name="Image 2" descr="preencoded.png">    </p:cNvPr>
           <p:cNvPicPr>
             <a:picLocks noChangeAspect="1"/>
           </p:cNvPicPr>
@@ -11294,7 +11372,7 @@
       </p:pic>
       <p:sp>
         <p:nvSpPr>
-          <p:cNvPr id="33" name="Text 28"/>
+          <p:cNvPr id="34" name="Text 29"/>
           <p:cNvSpPr/>
           <p:nvPr/>
         </p:nvSpPr>
@@ -11333,7 +11411,7 @@
       </p:sp>
       <p:sp>
         <p:nvSpPr>
-          <p:cNvPr id="34" name="Text 29"/>
+          <p:cNvPr id="35" name="Text 30"/>
           <p:cNvSpPr/>
           <p:nvPr/>
         </p:nvSpPr>
@@ -11372,7 +11450,7 @@
       </p:sp>
       <p:sp>
         <p:nvSpPr>
-          <p:cNvPr id="35" name="Text 30"/>
+          <p:cNvPr id="36" name="Text 31"/>
           <p:cNvSpPr/>
           <p:nvPr/>
         </p:nvSpPr>
@@ -11411,7 +11489,7 @@
       </p:sp>
       <p:sp>
         <p:nvSpPr>
-          <p:cNvPr id="36" name="Text 31"/>
+          <p:cNvPr id="37" name="Text 32"/>
           <p:cNvSpPr/>
           <p:nvPr/>
         </p:nvSpPr>
@@ -11450,7 +11528,7 @@
       </p:sp>
       <p:sp>
         <p:nvSpPr>
-          <p:cNvPr id="37" name="Text 32"/>
+          <p:cNvPr id="38" name="Text 33"/>
           <p:cNvSpPr/>
           <p:nvPr/>
         </p:nvSpPr>
@@ -11489,7 +11567,7 @@
       </p:sp>
       <p:sp>
         <p:nvSpPr>
-          <p:cNvPr id="38" name="Text 33"/>
+          <p:cNvPr id="39" name="Text 34"/>
           <p:cNvSpPr/>
           <p:nvPr/>
         </p:nvSpPr>
@@ -11528,7 +11606,7 @@
       </p:sp>
       <p:sp>
         <p:nvSpPr>
-          <p:cNvPr id="39" name="Text 34"/>
+          <p:cNvPr id="40" name="Text 35"/>
           <p:cNvSpPr/>
           <p:nvPr/>
         </p:nvSpPr>
@@ -11567,7 +11645,7 @@
       </p:sp>
       <p:sp>
         <p:nvSpPr>
-          <p:cNvPr id="40" name="Text 35"/>
+          <p:cNvPr id="41" name="Text 36"/>
           <p:cNvSpPr/>
           <p:nvPr/>
         </p:nvSpPr>
@@ -11606,7 +11684,7 @@
       </p:sp>
       <p:sp>
         <p:nvSpPr>
-          <p:cNvPr id="41" name="Shape 36"/>
+          <p:cNvPr id="42" name="Shape 37"/>
           <p:cNvSpPr/>
           <p:nvPr/>
         </p:nvSpPr>
@@ -11640,7 +11718,7 @@
       </p:sp>
       <p:sp>
         <p:nvSpPr>
-          <p:cNvPr id="42" name="Text 37"/>
+          <p:cNvPr id="43" name="Text 38"/>
           <p:cNvSpPr/>
           <p:nvPr/>
         </p:nvSpPr>
@@ -11679,7 +11757,7 @@
       </p:sp>
       <p:graphicFrame>
         <p:nvGraphicFramePr>
-          <p:cNvPr id="43" name="Chart 0" descr=""/>
+          <p:cNvPr id="44" name="Chart 0" descr=""/>
           <p:cNvGraphicFramePr/>
           <p:nvPr/>
         </p:nvGraphicFramePr>
@@ -11695,7 +11773,7 @@
       </p:graphicFrame>
       <p:sp>
         <p:nvSpPr>
-          <p:cNvPr id="44" name="Text 38"/>
+          <p:cNvPr id="45" name="Text 39"/>
           <p:cNvSpPr/>
           <p:nvPr/>
         </p:nvSpPr>
@@ -11734,7 +11812,7 @@
       </p:sp>
       <p:sp>
         <p:nvSpPr>
-          <p:cNvPr id="45" name="Text 39"/>
+          <p:cNvPr id="46" name="Text 40"/>
           <p:cNvSpPr/>
           <p:nvPr/>
         </p:nvSpPr>
@@ -11773,7 +11851,7 @@
       </p:sp>
       <p:sp>
         <p:nvSpPr>
-          <p:cNvPr id="46" name="Text 40"/>
+          <p:cNvPr id="47" name="Text 41"/>
           <p:cNvSpPr/>
           <p:nvPr/>
         </p:nvSpPr>
@@ -11812,7 +11890,7 @@
       </p:sp>
       <p:sp>
         <p:nvSpPr>
-          <p:cNvPr id="47" name="Text 41"/>
+          <p:cNvPr id="48" name="Text 42"/>
           <p:cNvSpPr/>
           <p:nvPr/>
         </p:nvSpPr>
@@ -11883,7 +11961,46 @@
       </p:grpSpPr>
       <p:sp>
         <p:nvSpPr>
-          <p:cNvPr id="2" name="Shape 0"/>
+          <p:cNvPr id="2" name="Text 0"/>
+          <p:cNvSpPr/>
+          <p:nvPr/>
+        </p:nvSpPr>
+        <p:spPr>
+          <a:xfrm>
+            <a:off x="411480" y="91440"/>
+            <a:ext cx="8321040" cy="182880"/>
+          </a:xfrm>
+          <a:prstGeom prst="rect">
+            <a:avLst/>
+          </a:prstGeom>
+          <a:noFill/>
+          <a:ln/>
+        </p:spPr>
+        <p:txBody>
+          <a:bodyPr wrap="square" lIns="0" tIns="0" rIns="0" bIns="0" rtlCol="0" anchor="ctr"/>
+          <a:lstStyle/>
+          <a:p>
+            <a:pPr algn="l" indent="0" marL="0">
+              <a:buNone/>
+            </a:pPr>
+            <a:r>
+              <a:rPr lang="en-US" sz="850" b="1" spc="300" kern="0" dirty="0">
+                <a:solidFill>
+                  <a:srgbClr val="64748B"/>
+                </a:solidFill>
+                <a:latin typeface="Calibri" pitchFamily="34" charset="0"/>
+                <a:ea typeface="Calibri" pitchFamily="34" charset="-122"/>
+                <a:cs typeface="Calibri" pitchFamily="34" charset="-120"/>
+              </a:rPr>
+              <a:t>РОЗДІЛ 7 · ЗМІСТ ЕКСПЕРИМЕНТУ</a:t>
+            </a:r>
+            <a:endParaRPr lang="en-US" sz="850" dirty="0"/>
+          </a:p>
+        </p:txBody>
+      </p:sp>
+      <p:sp>
+        <p:nvSpPr>
+          <p:cNvPr id="3" name="Shape 1"/>
           <p:cNvSpPr/>
           <p:nvPr/>
         </p:nvSpPr>
@@ -11903,7 +12020,7 @@
       </p:sp>
       <p:sp>
         <p:nvSpPr>
-          <p:cNvPr id="3" name="Text 1"/>
+          <p:cNvPr id="4" name="Text 2"/>
           <p:cNvSpPr/>
           <p:nvPr/>
         </p:nvSpPr>
@@ -11942,7 +12059,7 @@
       </p:sp>
       <p:sp>
         <p:nvSpPr>
-          <p:cNvPr id="4" name="Shape 2"/>
+          <p:cNvPr id="5" name="Shape 3"/>
           <p:cNvSpPr/>
           <p:nvPr/>
         </p:nvSpPr>
@@ -11976,7 +12093,7 @@
       </p:sp>
       <p:sp>
         <p:nvSpPr>
-          <p:cNvPr id="5" name="Shape 3"/>
+          <p:cNvPr id="6" name="Shape 4"/>
           <p:cNvSpPr/>
           <p:nvPr/>
         </p:nvSpPr>
@@ -11996,7 +12113,7 @@
       </p:sp>
       <p:pic>
         <p:nvPicPr>
-          <p:cNvPr id="6" name="Image 0" descr="preencoded.png">    </p:cNvPr>
+          <p:cNvPr id="7" name="Image 0" descr="preencoded.png">    </p:cNvPr>
           <p:cNvPicPr>
             <a:picLocks noChangeAspect="1"/>
           </p:cNvPicPr>
@@ -12020,7 +12137,7 @@
       </p:pic>
       <p:sp>
         <p:nvSpPr>
-          <p:cNvPr id="7" name="Text 4"/>
+          <p:cNvPr id="8" name="Text 5"/>
           <p:cNvSpPr/>
           <p:nvPr/>
         </p:nvSpPr>
@@ -12059,7 +12176,7 @@
       </p:sp>
       <p:sp>
         <p:nvSpPr>
-          <p:cNvPr id="8" name="Text 5"/>
+          <p:cNvPr id="9" name="Text 6"/>
           <p:cNvSpPr/>
           <p:nvPr/>
         </p:nvSpPr>
@@ -12112,7 +12229,7 @@
       </p:sp>
       <p:sp>
         <p:nvSpPr>
-          <p:cNvPr id="9" name="Shape 6"/>
+          <p:cNvPr id="10" name="Shape 7"/>
           <p:cNvSpPr/>
           <p:nvPr/>
         </p:nvSpPr>
@@ -12132,7 +12249,7 @@
       </p:sp>
       <p:sp>
         <p:nvSpPr>
-          <p:cNvPr id="10" name="Text 7"/>
+          <p:cNvPr id="11" name="Text 8"/>
           <p:cNvSpPr/>
           <p:nvPr/>
         </p:nvSpPr>
@@ -12185,7 +12302,7 @@
       </p:sp>
       <p:sp>
         <p:nvSpPr>
-          <p:cNvPr id="11" name="Shape 8"/>
+          <p:cNvPr id="12" name="Shape 9"/>
           <p:cNvSpPr/>
           <p:nvPr/>
         </p:nvSpPr>
@@ -12205,7 +12322,7 @@
       </p:sp>
       <p:sp>
         <p:nvSpPr>
-          <p:cNvPr id="12" name="Text 9"/>
+          <p:cNvPr id="13" name="Text 10"/>
           <p:cNvSpPr/>
           <p:nvPr/>
         </p:nvSpPr>
@@ -12258,7 +12375,7 @@
       </p:sp>
       <p:sp>
         <p:nvSpPr>
-          <p:cNvPr id="13" name="Shape 10"/>
+          <p:cNvPr id="14" name="Shape 11"/>
           <p:cNvSpPr/>
           <p:nvPr/>
         </p:nvSpPr>
@@ -12278,7 +12395,7 @@
       </p:sp>
       <p:sp>
         <p:nvSpPr>
-          <p:cNvPr id="14" name="Text 11"/>
+          <p:cNvPr id="15" name="Text 12"/>
           <p:cNvSpPr/>
           <p:nvPr/>
         </p:nvSpPr>
@@ -12331,7 +12448,7 @@
       </p:sp>
       <p:sp>
         <p:nvSpPr>
-          <p:cNvPr id="15" name="Shape 12"/>
+          <p:cNvPr id="16" name="Shape 13"/>
           <p:cNvSpPr/>
           <p:nvPr/>
         </p:nvSpPr>
@@ -12351,7 +12468,7 @@
       </p:sp>
       <p:sp>
         <p:nvSpPr>
-          <p:cNvPr id="16" name="Text 13"/>
+          <p:cNvPr id="17" name="Text 14"/>
           <p:cNvSpPr/>
           <p:nvPr/>
         </p:nvSpPr>
@@ -12404,7 +12521,7 @@
       </p:sp>
       <p:sp>
         <p:nvSpPr>
-          <p:cNvPr id="17" name="Shape 14"/>
+          <p:cNvPr id="18" name="Shape 15"/>
           <p:cNvSpPr/>
           <p:nvPr/>
         </p:nvSpPr>
@@ -12438,7 +12555,7 @@
       </p:sp>
       <p:sp>
         <p:nvSpPr>
-          <p:cNvPr id="18" name="Shape 15"/>
+          <p:cNvPr id="19" name="Shape 16"/>
           <p:cNvSpPr/>
           <p:nvPr/>
         </p:nvSpPr>
@@ -12458,7 +12575,7 @@
       </p:sp>
       <p:pic>
         <p:nvPicPr>
-          <p:cNvPr id="19" name="Image 1" descr="preencoded.png">    </p:cNvPr>
+          <p:cNvPr id="20" name="Image 1" descr="preencoded.png">    </p:cNvPr>
           <p:cNvPicPr>
             <a:picLocks noChangeAspect="1"/>
           </p:cNvPicPr>
@@ -12482,7 +12599,7 @@
       </p:pic>
       <p:sp>
         <p:nvSpPr>
-          <p:cNvPr id="20" name="Text 16"/>
+          <p:cNvPr id="21" name="Text 17"/>
           <p:cNvSpPr/>
           <p:nvPr/>
         </p:nvSpPr>
@@ -12521,7 +12638,7 @@
       </p:sp>
       <p:sp>
         <p:nvSpPr>
-          <p:cNvPr id="21" name="Text 17"/>
+          <p:cNvPr id="22" name="Text 18"/>
           <p:cNvSpPr/>
           <p:nvPr/>
         </p:nvSpPr>
@@ -12574,7 +12691,7 @@
       </p:sp>
       <p:sp>
         <p:nvSpPr>
-          <p:cNvPr id="22" name="Shape 18"/>
+          <p:cNvPr id="23" name="Shape 19"/>
           <p:cNvSpPr/>
           <p:nvPr/>
         </p:nvSpPr>
@@ -12594,7 +12711,7 @@
       </p:sp>
       <p:sp>
         <p:nvSpPr>
-          <p:cNvPr id="23" name="Text 19"/>
+          <p:cNvPr id="24" name="Text 20"/>
           <p:cNvSpPr/>
           <p:nvPr/>
         </p:nvSpPr>
@@ -12647,7 +12764,7 @@
       </p:sp>
       <p:sp>
         <p:nvSpPr>
-          <p:cNvPr id="24" name="Shape 20"/>
+          <p:cNvPr id="25" name="Shape 21"/>
           <p:cNvSpPr/>
           <p:nvPr/>
         </p:nvSpPr>
@@ -12667,7 +12784,7 @@
       </p:sp>
       <p:sp>
         <p:nvSpPr>
-          <p:cNvPr id="25" name="Text 21"/>
+          <p:cNvPr id="26" name="Text 22"/>
           <p:cNvSpPr/>
           <p:nvPr/>
         </p:nvSpPr>
@@ -12720,7 +12837,7 @@
       </p:sp>
       <p:sp>
         <p:nvSpPr>
-          <p:cNvPr id="26" name="Shape 22"/>
+          <p:cNvPr id="27" name="Shape 23"/>
           <p:cNvSpPr/>
           <p:nvPr/>
         </p:nvSpPr>
@@ -12740,7 +12857,7 @@
       </p:sp>
       <p:sp>
         <p:nvSpPr>
-          <p:cNvPr id="27" name="Text 23"/>
+          <p:cNvPr id="28" name="Text 24"/>
           <p:cNvSpPr/>
           <p:nvPr/>
         </p:nvSpPr>
@@ -12793,7 +12910,7 @@
       </p:sp>
       <p:sp>
         <p:nvSpPr>
-          <p:cNvPr id="28" name="Shape 24"/>
+          <p:cNvPr id="29" name="Shape 25"/>
           <p:cNvSpPr/>
           <p:nvPr/>
         </p:nvSpPr>
@@ -12813,7 +12930,7 @@
       </p:sp>
       <p:sp>
         <p:nvSpPr>
-          <p:cNvPr id="29" name="Text 25"/>
+          <p:cNvPr id="30" name="Text 26"/>
           <p:cNvSpPr/>
           <p:nvPr/>
         </p:nvSpPr>
@@ -12866,7 +12983,7 @@
       </p:sp>
       <p:sp>
         <p:nvSpPr>
-          <p:cNvPr id="30" name="Shape 26"/>
+          <p:cNvPr id="31" name="Shape 27"/>
           <p:cNvSpPr/>
           <p:nvPr/>
         </p:nvSpPr>
@@ -12900,7 +13017,7 @@
       </p:sp>
       <p:sp>
         <p:nvSpPr>
-          <p:cNvPr id="31" name="Shape 27"/>
+          <p:cNvPr id="32" name="Shape 28"/>
           <p:cNvSpPr/>
           <p:nvPr/>
         </p:nvSpPr>
@@ -12920,7 +13037,7 @@
       </p:sp>
       <p:pic>
         <p:nvPicPr>
-          <p:cNvPr id="32" name="Image 2" descr="preencoded.png">    </p:cNvPr>
+          <p:cNvPr id="33" name="Image 2" descr="preencoded.png">    </p:cNvPr>
           <p:cNvPicPr>
             <a:picLocks noChangeAspect="1"/>
           </p:cNvPicPr>
@@ -12944,7 +13061,7 @@
       </p:pic>
       <p:sp>
         <p:nvSpPr>
-          <p:cNvPr id="33" name="Text 28"/>
+          <p:cNvPr id="34" name="Text 29"/>
           <p:cNvSpPr/>
           <p:nvPr/>
         </p:nvSpPr>
@@ -12983,7 +13100,7 @@
       </p:sp>
       <p:sp>
         <p:nvSpPr>
-          <p:cNvPr id="34" name="Text 29"/>
+          <p:cNvPr id="35" name="Text 30"/>
           <p:cNvSpPr/>
           <p:nvPr/>
         </p:nvSpPr>
@@ -13036,7 +13153,7 @@
       </p:sp>
       <p:sp>
         <p:nvSpPr>
-          <p:cNvPr id="35" name="Shape 30"/>
+          <p:cNvPr id="36" name="Shape 31"/>
           <p:cNvSpPr/>
           <p:nvPr/>
         </p:nvSpPr>
@@ -13056,7 +13173,7 @@
       </p:sp>
       <p:sp>
         <p:nvSpPr>
-          <p:cNvPr id="36" name="Text 31"/>
+          <p:cNvPr id="37" name="Text 32"/>
           <p:cNvSpPr/>
           <p:nvPr/>
         </p:nvSpPr>
@@ -13109,7 +13226,7 @@
       </p:sp>
       <p:sp>
         <p:nvSpPr>
-          <p:cNvPr id="37" name="Shape 32"/>
+          <p:cNvPr id="38" name="Shape 33"/>
           <p:cNvSpPr/>
           <p:nvPr/>
         </p:nvSpPr>
@@ -13129,7 +13246,7 @@
       </p:sp>
       <p:sp>
         <p:nvSpPr>
-          <p:cNvPr id="38" name="Text 33"/>
+          <p:cNvPr id="39" name="Text 34"/>
           <p:cNvSpPr/>
           <p:nvPr/>
         </p:nvSpPr>
@@ -13182,7 +13299,7 @@
       </p:sp>
       <p:sp>
         <p:nvSpPr>
-          <p:cNvPr id="39" name="Shape 34"/>
+          <p:cNvPr id="40" name="Shape 35"/>
           <p:cNvSpPr/>
           <p:nvPr/>
         </p:nvSpPr>
@@ -13202,7 +13319,7 @@
       </p:sp>
       <p:sp>
         <p:nvSpPr>
-          <p:cNvPr id="40" name="Text 35"/>
+          <p:cNvPr id="41" name="Text 36"/>
           <p:cNvSpPr/>
           <p:nvPr/>
         </p:nvSpPr>
@@ -13255,7 +13372,7 @@
       </p:sp>
       <p:sp>
         <p:nvSpPr>
-          <p:cNvPr id="41" name="Shape 36"/>
+          <p:cNvPr id="42" name="Shape 37"/>
           <p:cNvSpPr/>
           <p:nvPr/>
         </p:nvSpPr>
@@ -13275,7 +13392,7 @@
       </p:sp>
       <p:sp>
         <p:nvSpPr>
-          <p:cNvPr id="42" name="Text 37"/>
+          <p:cNvPr id="43" name="Text 38"/>
           <p:cNvSpPr/>
           <p:nvPr/>
         </p:nvSpPr>
@@ -13328,7 +13445,7 @@
       </p:sp>
       <p:sp>
         <p:nvSpPr>
-          <p:cNvPr id="43" name="Shape 38"/>
+          <p:cNvPr id="44" name="Shape 39"/>
           <p:cNvSpPr/>
           <p:nvPr/>
         </p:nvSpPr>
@@ -13355,7 +13472,7 @@
       </p:sp>
       <p:sp>
         <p:nvSpPr>
-          <p:cNvPr id="44" name="Text 39"/>
+          <p:cNvPr id="45" name="Text 40"/>
           <p:cNvSpPr/>
           <p:nvPr/>
         </p:nvSpPr>
@@ -13422,7 +13539,7 @@
       </p:sp>
       <p:sp>
         <p:nvSpPr>
-          <p:cNvPr id="45" name="Text 40"/>
+          <p:cNvPr id="46" name="Text 41"/>
           <p:cNvSpPr/>
           <p:nvPr/>
         </p:nvSpPr>
@@ -13461,7 +13578,7 @@
       </p:sp>
       <p:sp>
         <p:nvSpPr>
-          <p:cNvPr id="46" name="Text 41"/>
+          <p:cNvPr id="47" name="Text 42"/>
           <p:cNvSpPr/>
           <p:nvPr/>
         </p:nvSpPr>
@@ -13532,7 +13649,46 @@
       </p:grpSpPr>
       <p:sp>
         <p:nvSpPr>
-          <p:cNvPr id="2" name="Shape 0"/>
+          <p:cNvPr id="2" name="Text 0"/>
+          <p:cNvSpPr/>
+          <p:nvPr/>
+        </p:nvSpPr>
+        <p:spPr>
+          <a:xfrm>
+            <a:off x="411480" y="91440"/>
+            <a:ext cx="8321040" cy="182880"/>
+          </a:xfrm>
+          <a:prstGeom prst="rect">
+            <a:avLst/>
+          </a:prstGeom>
+          <a:noFill/>
+          <a:ln/>
+        </p:spPr>
+        <p:txBody>
+          <a:bodyPr wrap="square" lIns="0" tIns="0" rIns="0" bIns="0" rtlCol="0" anchor="ctr"/>
+          <a:lstStyle/>
+          <a:p>
+            <a:pPr algn="l" indent="0" marL="0">
+              <a:buNone/>
+            </a:pPr>
+            <a:r>
+              <a:rPr lang="en-US" sz="850" b="1" spc="300" kern="0" dirty="0">
+                <a:solidFill>
+                  <a:srgbClr val="64748B"/>
+                </a:solidFill>
+                <a:latin typeface="Calibri" pitchFamily="34" charset="0"/>
+                <a:ea typeface="Calibri" pitchFamily="34" charset="-122"/>
+                <a:cs typeface="Calibri" pitchFamily="34" charset="-120"/>
+              </a:rPr>
+              <a:t>РОЗДІЛ 8 · РЕЗУЛЬТАТИ ЕКСПЕРИМЕНТУ</a:t>
+            </a:r>
+            <a:endParaRPr lang="en-US" sz="850" dirty="0"/>
+          </a:p>
+        </p:txBody>
+      </p:sp>
+      <p:sp>
+        <p:nvSpPr>
+          <p:cNvPr id="3" name="Shape 1"/>
           <p:cNvSpPr/>
           <p:nvPr/>
         </p:nvSpPr>
@@ -13552,7 +13708,7 @@
       </p:sp>
       <p:sp>
         <p:nvSpPr>
-          <p:cNvPr id="3" name="Text 1"/>
+          <p:cNvPr id="4" name="Text 2"/>
           <p:cNvSpPr/>
           <p:nvPr/>
         </p:nvSpPr>
@@ -13591,7 +13747,7 @@
       </p:sp>
       <p:sp>
         <p:nvSpPr>
-          <p:cNvPr id="4" name="Shape 2"/>
+          <p:cNvPr id="5" name="Shape 3"/>
           <p:cNvSpPr/>
           <p:nvPr/>
         </p:nvSpPr>
@@ -13625,7 +13781,7 @@
       </p:sp>
       <p:sp>
         <p:nvSpPr>
-          <p:cNvPr id="5" name="Text 3"/>
+          <p:cNvPr id="6" name="Text 4"/>
           <p:cNvSpPr/>
           <p:nvPr/>
         </p:nvSpPr>
@@ -13664,7 +13820,7 @@
       </p:sp>
       <p:graphicFrame>
         <p:nvGraphicFramePr>
-          <p:cNvPr id="6" name="Chart 0" descr=""/>
+          <p:cNvPr id="7" name="Chart 0" descr=""/>
           <p:cNvGraphicFramePr/>
           <p:nvPr/>
         </p:nvGraphicFramePr>
@@ -13680,7 +13836,7 @@
       </p:graphicFrame>
       <p:sp>
         <p:nvSpPr>
-          <p:cNvPr id="7" name="Shape 4"/>
+          <p:cNvPr id="8" name="Shape 5"/>
           <p:cNvSpPr/>
           <p:nvPr/>
         </p:nvSpPr>
@@ -13714,7 +13870,7 @@
       </p:sp>
       <p:sp>
         <p:nvSpPr>
-          <p:cNvPr id="8" name="Text 5"/>
+          <p:cNvPr id="9" name="Text 6"/>
           <p:cNvSpPr/>
           <p:nvPr/>
         </p:nvSpPr>
@@ -13753,7 +13909,7 @@
       </p:sp>
       <p:sp>
         <p:nvSpPr>
-          <p:cNvPr id="9" name="Shape 6"/>
+          <p:cNvPr id="10" name="Shape 7"/>
           <p:cNvSpPr/>
           <p:nvPr/>
         </p:nvSpPr>
@@ -13773,7 +13929,7 @@
       </p:sp>
       <p:sp>
         <p:nvSpPr>
-          <p:cNvPr id="10" name="Text 7"/>
+          <p:cNvPr id="11" name="Text 8"/>
           <p:cNvSpPr/>
           <p:nvPr/>
         </p:nvSpPr>
@@ -13812,7 +13968,7 @@
       </p:sp>
       <p:sp>
         <p:nvSpPr>
-          <p:cNvPr id="11" name="Shape 8"/>
+          <p:cNvPr id="12" name="Shape 9"/>
           <p:cNvSpPr/>
           <p:nvPr/>
         </p:nvSpPr>
@@ -13832,7 +13988,7 @@
       </p:sp>
       <p:sp>
         <p:nvSpPr>
-          <p:cNvPr id="12" name="Text 9"/>
+          <p:cNvPr id="13" name="Text 10"/>
           <p:cNvSpPr/>
           <p:nvPr/>
         </p:nvSpPr>
@@ -13871,7 +14027,7 @@
       </p:sp>
       <p:sp>
         <p:nvSpPr>
-          <p:cNvPr id="13" name="Text 10"/>
+          <p:cNvPr id="14" name="Text 11"/>
           <p:cNvSpPr/>
           <p:nvPr/>
         </p:nvSpPr>
@@ -13910,7 +14066,7 @@
       </p:sp>
       <p:sp>
         <p:nvSpPr>
-          <p:cNvPr id="14" name="Shape 11"/>
+          <p:cNvPr id="15" name="Shape 12"/>
           <p:cNvSpPr/>
           <p:nvPr/>
         </p:nvSpPr>
@@ -13930,7 +14086,7 @@
       </p:sp>
       <p:sp>
         <p:nvSpPr>
-          <p:cNvPr id="15" name="Text 12"/>
+          <p:cNvPr id="16" name="Text 13"/>
           <p:cNvSpPr/>
           <p:nvPr/>
         </p:nvSpPr>
@@ -13969,7 +14125,7 @@
       </p:sp>
       <p:sp>
         <p:nvSpPr>
-          <p:cNvPr id="16" name="Shape 13"/>
+          <p:cNvPr id="17" name="Shape 14"/>
           <p:cNvSpPr/>
           <p:nvPr/>
         </p:nvSpPr>
@@ -13989,7 +14145,7 @@
       </p:sp>
       <p:sp>
         <p:nvSpPr>
-          <p:cNvPr id="17" name="Text 14"/>
+          <p:cNvPr id="18" name="Text 15"/>
           <p:cNvSpPr/>
           <p:nvPr/>
         </p:nvSpPr>
@@ -14028,7 +14184,7 @@
       </p:sp>
       <p:sp>
         <p:nvSpPr>
-          <p:cNvPr id="18" name="Text 15"/>
+          <p:cNvPr id="19" name="Text 16"/>
           <p:cNvSpPr/>
           <p:nvPr/>
         </p:nvSpPr>
@@ -14067,7 +14223,7 @@
       </p:sp>
       <p:sp>
         <p:nvSpPr>
-          <p:cNvPr id="19" name="Shape 16"/>
+          <p:cNvPr id="20" name="Shape 17"/>
           <p:cNvSpPr/>
           <p:nvPr/>
         </p:nvSpPr>
@@ -14087,7 +14243,7 @@
       </p:sp>
       <p:sp>
         <p:nvSpPr>
-          <p:cNvPr id="20" name="Text 17"/>
+          <p:cNvPr id="21" name="Text 18"/>
           <p:cNvSpPr/>
           <p:nvPr/>
         </p:nvSpPr>
@@ -14126,7 +14282,7 @@
       </p:sp>
       <p:sp>
         <p:nvSpPr>
-          <p:cNvPr id="21" name="Shape 18"/>
+          <p:cNvPr id="22" name="Shape 19"/>
           <p:cNvSpPr/>
           <p:nvPr/>
         </p:nvSpPr>
@@ -14146,7 +14302,7 @@
       </p:sp>
       <p:sp>
         <p:nvSpPr>
-          <p:cNvPr id="22" name="Text 19"/>
+          <p:cNvPr id="23" name="Text 20"/>
           <p:cNvSpPr/>
           <p:nvPr/>
         </p:nvSpPr>
@@ -14185,7 +14341,7 @@
       </p:sp>
       <p:sp>
         <p:nvSpPr>
-          <p:cNvPr id="23" name="Text 20"/>
+          <p:cNvPr id="24" name="Text 21"/>
           <p:cNvSpPr/>
           <p:nvPr/>
         </p:nvSpPr>
@@ -14224,7 +14380,7 @@
       </p:sp>
       <p:sp>
         <p:nvSpPr>
-          <p:cNvPr id="24" name="Shape 21"/>
+          <p:cNvPr id="25" name="Shape 22"/>
           <p:cNvSpPr/>
           <p:nvPr/>
         </p:nvSpPr>
@@ -14244,7 +14400,7 @@
       </p:sp>
       <p:sp>
         <p:nvSpPr>
-          <p:cNvPr id="25" name="Text 22"/>
+          <p:cNvPr id="26" name="Text 23"/>
           <p:cNvSpPr/>
           <p:nvPr/>
         </p:nvSpPr>
@@ -14283,7 +14439,7 @@
       </p:sp>
       <p:sp>
         <p:nvSpPr>
-          <p:cNvPr id="26" name="Shape 23"/>
+          <p:cNvPr id="27" name="Shape 24"/>
           <p:cNvSpPr/>
           <p:nvPr/>
         </p:nvSpPr>
@@ -14303,7 +14459,7 @@
       </p:sp>
       <p:sp>
         <p:nvSpPr>
-          <p:cNvPr id="27" name="Text 24"/>
+          <p:cNvPr id="28" name="Text 25"/>
           <p:cNvSpPr/>
           <p:nvPr/>
         </p:nvSpPr>
@@ -14342,7 +14498,7 @@
       </p:sp>
       <p:sp>
         <p:nvSpPr>
-          <p:cNvPr id="28" name="Text 25"/>
+          <p:cNvPr id="29" name="Text 26"/>
           <p:cNvSpPr/>
           <p:nvPr/>
         </p:nvSpPr>
@@ -14381,7 +14537,7 @@
       </p:sp>
       <p:sp>
         <p:nvSpPr>
-          <p:cNvPr id="29" name="Shape 26"/>
+          <p:cNvPr id="30" name="Shape 27"/>
           <p:cNvSpPr/>
           <p:nvPr/>
         </p:nvSpPr>
@@ -14401,7 +14557,7 @@
       </p:sp>
       <p:sp>
         <p:nvSpPr>
-          <p:cNvPr id="30" name="Text 27"/>
+          <p:cNvPr id="31" name="Text 28"/>
           <p:cNvSpPr/>
           <p:nvPr/>
         </p:nvSpPr>
@@ -14440,7 +14596,7 @@
       </p:sp>
       <p:sp>
         <p:nvSpPr>
-          <p:cNvPr id="31" name="Shape 28"/>
+          <p:cNvPr id="32" name="Shape 29"/>
           <p:cNvSpPr/>
           <p:nvPr/>
         </p:nvSpPr>
@@ -14460,7 +14616,7 @@
       </p:sp>
       <p:sp>
         <p:nvSpPr>
-          <p:cNvPr id="32" name="Text 29"/>
+          <p:cNvPr id="33" name="Text 30"/>
           <p:cNvSpPr/>
           <p:nvPr/>
         </p:nvSpPr>
@@ -14499,7 +14655,7 @@
       </p:sp>
       <p:sp>
         <p:nvSpPr>
-          <p:cNvPr id="33" name="Text 30"/>
+          <p:cNvPr id="34" name="Text 31"/>
           <p:cNvSpPr/>
           <p:nvPr/>
         </p:nvSpPr>
@@ -14538,7 +14694,7 @@
       </p:sp>
       <p:sp>
         <p:nvSpPr>
-          <p:cNvPr id="34" name="Shape 31"/>
+          <p:cNvPr id="35" name="Shape 32"/>
           <p:cNvSpPr/>
           <p:nvPr/>
         </p:nvSpPr>
@@ -14572,7 +14728,7 @@
       </p:sp>
       <p:sp>
         <p:nvSpPr>
-          <p:cNvPr id="35" name="Text 32"/>
+          <p:cNvPr id="36" name="Text 33"/>
           <p:cNvSpPr/>
           <p:nvPr/>
         </p:nvSpPr>
@@ -14611,7 +14767,7 @@
       </p:sp>
       <p:sp>
         <p:nvSpPr>
-          <p:cNvPr id="36" name="Text 33"/>
+          <p:cNvPr id="37" name="Text 34"/>
           <p:cNvSpPr/>
           <p:nvPr/>
         </p:nvSpPr>
@@ -14650,7 +14806,7 @@
       </p:sp>
       <p:sp>
         <p:nvSpPr>
-          <p:cNvPr id="37" name="Text 34"/>
+          <p:cNvPr id="38" name="Text 35"/>
           <p:cNvSpPr/>
           <p:nvPr/>
         </p:nvSpPr>
@@ -14746,7 +14902,7 @@
       </p:sp>
       <p:sp>
         <p:nvSpPr>
-          <p:cNvPr id="38" name="Text 35"/>
+          <p:cNvPr id="39" name="Text 36"/>
           <p:cNvSpPr/>
           <p:nvPr/>
         </p:nvSpPr>
@@ -14785,7 +14941,7 @@
       </p:sp>
       <p:sp>
         <p:nvSpPr>
-          <p:cNvPr id="39" name="Text 36"/>
+          <p:cNvPr id="40" name="Text 37"/>
           <p:cNvSpPr/>
           <p:nvPr/>
         </p:nvSpPr>
@@ -14824,7 +14980,7 @@
       </p:sp>
       <p:sp>
         <p:nvSpPr>
-          <p:cNvPr id="40" name="Text 37"/>
+          <p:cNvPr id="41" name="Text 38"/>
           <p:cNvSpPr/>
           <p:nvPr/>
         </p:nvSpPr>
@@ -14895,7 +15051,46 @@
       </p:grpSpPr>
       <p:sp>
         <p:nvSpPr>
-          <p:cNvPr id="2" name="Shape 0"/>
+          <p:cNvPr id="2" name="Text 0"/>
+          <p:cNvSpPr/>
+          <p:nvPr/>
+        </p:nvSpPr>
+        <p:spPr>
+          <a:xfrm>
+            <a:off x="411480" y="91440"/>
+            <a:ext cx="8321040" cy="182880"/>
+          </a:xfrm>
+          <a:prstGeom prst="rect">
+            <a:avLst/>
+          </a:prstGeom>
+          <a:noFill/>
+          <a:ln/>
+        </p:spPr>
+        <p:txBody>
+          <a:bodyPr wrap="square" lIns="0" tIns="0" rIns="0" bIns="0" rtlCol="0" anchor="ctr"/>
+          <a:lstStyle/>
+          <a:p>
+            <a:pPr algn="l" indent="0" marL="0">
+              <a:buNone/>
+            </a:pPr>
+            <a:r>
+              <a:rPr lang="en-US" sz="850" b="1" spc="300" kern="0" dirty="0">
+                <a:solidFill>
+                  <a:srgbClr val="64748B"/>
+                </a:solidFill>
+                <a:latin typeface="Calibri" pitchFamily="34" charset="0"/>
+                <a:ea typeface="Calibri" pitchFamily="34" charset="-122"/>
+                <a:cs typeface="Calibri" pitchFamily="34" charset="-120"/>
+              </a:rPr>
+              <a:t>РОЗДІЛ 8 · РЕЗУЛЬТАТИ ЕКСПЕРИМЕНТУ</a:t>
+            </a:r>
+            <a:endParaRPr lang="en-US" sz="850" dirty="0"/>
+          </a:p>
+        </p:txBody>
+      </p:sp>
+      <p:sp>
+        <p:nvSpPr>
+          <p:cNvPr id="3" name="Shape 1"/>
           <p:cNvSpPr/>
           <p:nvPr/>
         </p:nvSpPr>
@@ -14915,7 +15110,7 @@
       </p:sp>
       <p:sp>
         <p:nvSpPr>
-          <p:cNvPr id="3" name="Text 1"/>
+          <p:cNvPr id="4" name="Text 2"/>
           <p:cNvSpPr/>
           <p:nvPr/>
         </p:nvSpPr>
@@ -14954,7 +15149,7 @@
       </p:sp>
       <p:sp>
         <p:nvSpPr>
-          <p:cNvPr id="4" name="Shape 2"/>
+          <p:cNvPr id="5" name="Shape 3"/>
           <p:cNvSpPr/>
           <p:nvPr/>
         </p:nvSpPr>
@@ -14988,7 +15183,7 @@
       </p:sp>
       <p:sp>
         <p:nvSpPr>
-          <p:cNvPr id="5" name="Text 3"/>
+          <p:cNvPr id="6" name="Text 4"/>
           <p:cNvSpPr/>
           <p:nvPr/>
         </p:nvSpPr>
@@ -15027,7 +15222,7 @@
       </p:sp>
       <p:graphicFrame>
         <p:nvGraphicFramePr>
-          <p:cNvPr id="6" name="Chart 0" descr=""/>
+          <p:cNvPr id="7" name="Chart 0" descr=""/>
           <p:cNvGraphicFramePr/>
           <p:nvPr/>
         </p:nvGraphicFramePr>
@@ -15043,7 +15238,7 @@
       </p:graphicFrame>
       <p:sp>
         <p:nvSpPr>
-          <p:cNvPr id="7" name="Shape 4"/>
+          <p:cNvPr id="8" name="Shape 5"/>
           <p:cNvSpPr/>
           <p:nvPr/>
         </p:nvSpPr>
@@ -15077,7 +15272,7 @@
       </p:sp>
       <p:sp>
         <p:nvSpPr>
-          <p:cNvPr id="8" name="Text 5"/>
+          <p:cNvPr id="9" name="Text 6"/>
           <p:cNvSpPr/>
           <p:nvPr/>
         </p:nvSpPr>
@@ -15116,7 +15311,7 @@
       </p:sp>
       <p:graphicFrame>
         <p:nvGraphicFramePr>
-          <p:cNvPr id="9" name="Chart 1" descr=""/>
+          <p:cNvPr id="10" name="Chart 1" descr=""/>
           <p:cNvGraphicFramePr/>
           <p:nvPr/>
         </p:nvGraphicFramePr>
@@ -15132,7 +15327,7 @@
       </p:graphicFrame>
       <p:sp>
         <p:nvSpPr>
-          <p:cNvPr id="10" name="Shape 6"/>
+          <p:cNvPr id="11" name="Shape 7"/>
           <p:cNvSpPr/>
           <p:nvPr/>
         </p:nvSpPr>
@@ -15166,7 +15361,7 @@
       </p:sp>
       <p:sp>
         <p:nvSpPr>
-          <p:cNvPr id="11" name="Text 7"/>
+          <p:cNvPr id="12" name="Text 8"/>
           <p:cNvSpPr/>
           <p:nvPr/>
         </p:nvSpPr>
@@ -15205,7 +15400,7 @@
       </p:sp>
       <p:graphicFrame>
         <p:nvGraphicFramePr>
-          <p:cNvPr id="12" name="Chart 2" descr=""/>
+          <p:cNvPr id="13" name="Chart 2" descr=""/>
           <p:cNvGraphicFramePr/>
           <p:nvPr/>
         </p:nvGraphicFramePr>
@@ -15221,7 +15416,7 @@
       </p:graphicFrame>
       <p:sp>
         <p:nvSpPr>
-          <p:cNvPr id="13" name="Shape 8"/>
+          <p:cNvPr id="14" name="Shape 9"/>
           <p:cNvSpPr/>
           <p:nvPr/>
         </p:nvSpPr>
@@ -15255,7 +15450,7 @@
       </p:sp>
       <p:sp>
         <p:nvSpPr>
-          <p:cNvPr id="14" name="Text 9"/>
+          <p:cNvPr id="15" name="Text 10"/>
           <p:cNvSpPr/>
           <p:nvPr/>
         </p:nvSpPr>
@@ -15294,7 +15489,7 @@
       </p:sp>
       <p:graphicFrame>
         <p:nvGraphicFramePr>
-          <p:cNvPr id="15" name="Chart 3" descr=""/>
+          <p:cNvPr id="16" name="Chart 3" descr=""/>
           <p:cNvGraphicFramePr/>
           <p:nvPr/>
         </p:nvGraphicFramePr>
@@ -15310,7 +15505,7 @@
       </p:graphicFrame>
       <p:sp>
         <p:nvSpPr>
-          <p:cNvPr id="16" name="Text 10"/>
+          <p:cNvPr id="17" name="Text 11"/>
           <p:cNvSpPr/>
           <p:nvPr/>
         </p:nvSpPr>
@@ -15349,7 +15544,7 @@
       </p:sp>
       <p:sp>
         <p:nvSpPr>
-          <p:cNvPr id="17" name="Text 11"/>
+          <p:cNvPr id="18" name="Text 12"/>
           <p:cNvSpPr/>
           <p:nvPr/>
         </p:nvSpPr>
@@ -15420,7 +15615,46 @@
       </p:grpSpPr>
       <p:sp>
         <p:nvSpPr>
-          <p:cNvPr id="2" name="Shape 0"/>
+          <p:cNvPr id="2" name="Text 0"/>
+          <p:cNvSpPr/>
+          <p:nvPr/>
+        </p:nvSpPr>
+        <p:spPr>
+          <a:xfrm>
+            <a:off x="411480" y="91440"/>
+            <a:ext cx="8321040" cy="182880"/>
+          </a:xfrm>
+          <a:prstGeom prst="rect">
+            <a:avLst/>
+          </a:prstGeom>
+          <a:noFill/>
+          <a:ln/>
+        </p:spPr>
+        <p:txBody>
+          <a:bodyPr wrap="square" lIns="0" tIns="0" rIns="0" bIns="0" rtlCol="0" anchor="ctr"/>
+          <a:lstStyle/>
+          <a:p>
+            <a:pPr algn="l" indent="0" marL="0">
+              <a:buNone/>
+            </a:pPr>
+            <a:r>
+              <a:rPr lang="en-US" sz="850" b="1" spc="300" kern="0" dirty="0">
+                <a:solidFill>
+                  <a:srgbClr val="64748B"/>
+                </a:solidFill>
+                <a:latin typeface="Calibri" pitchFamily="34" charset="0"/>
+                <a:ea typeface="Calibri" pitchFamily="34" charset="-122"/>
+                <a:cs typeface="Calibri" pitchFamily="34" charset="-120"/>
+              </a:rPr>
+              <a:t>РОЗДІЛ 9 · АНАЛІЗ РЕЗУЛЬТАТІВ</a:t>
+            </a:r>
+            <a:endParaRPr lang="en-US" sz="850" dirty="0"/>
+          </a:p>
+        </p:txBody>
+      </p:sp>
+      <p:sp>
+        <p:nvSpPr>
+          <p:cNvPr id="3" name="Shape 1"/>
           <p:cNvSpPr/>
           <p:nvPr/>
         </p:nvSpPr>
@@ -15440,7 +15674,7 @@
       </p:sp>
       <p:sp>
         <p:nvSpPr>
-          <p:cNvPr id="3" name="Text 1"/>
+          <p:cNvPr id="4" name="Text 2"/>
           <p:cNvSpPr/>
           <p:nvPr/>
         </p:nvSpPr>
@@ -15479,7 +15713,7 @@
       </p:sp>
       <p:sp>
         <p:nvSpPr>
-          <p:cNvPr id="4" name="Shape 2"/>
+          <p:cNvPr id="5" name="Shape 3"/>
           <p:cNvSpPr/>
           <p:nvPr/>
         </p:nvSpPr>
@@ -15513,7 +15747,7 @@
       </p:sp>
       <p:sp>
         <p:nvSpPr>
-          <p:cNvPr id="5" name="Text 3"/>
+          <p:cNvPr id="6" name="Text 4"/>
           <p:cNvSpPr/>
           <p:nvPr/>
         </p:nvSpPr>
@@ -15552,7 +15786,7 @@
       </p:sp>
       <p:sp>
         <p:nvSpPr>
-          <p:cNvPr id="6" name="Text 4"/>
+          <p:cNvPr id="7" name="Text 5"/>
           <p:cNvSpPr/>
           <p:nvPr/>
         </p:nvSpPr>
@@ -15591,7 +15825,7 @@
       </p:sp>
       <p:sp>
         <p:nvSpPr>
-          <p:cNvPr id="7" name="Text 5"/>
+          <p:cNvPr id="8" name="Text 6"/>
           <p:cNvSpPr/>
           <p:nvPr/>
         </p:nvSpPr>
@@ -15630,7 +15864,7 @@
       </p:sp>
       <p:sp>
         <p:nvSpPr>
-          <p:cNvPr id="8" name="Shape 6"/>
+          <p:cNvPr id="9" name="Shape 7"/>
           <p:cNvSpPr/>
           <p:nvPr/>
         </p:nvSpPr>
@@ -15664,7 +15898,7 @@
       </p:sp>
       <p:sp>
         <p:nvSpPr>
-          <p:cNvPr id="9" name="Shape 7"/>
+          <p:cNvPr id="10" name="Shape 8"/>
           <p:cNvSpPr/>
           <p:nvPr/>
         </p:nvSpPr>
@@ -15684,7 +15918,7 @@
       </p:sp>
       <p:sp>
         <p:nvSpPr>
-          <p:cNvPr id="10" name="Text 8"/>
+          <p:cNvPr id="11" name="Text 9"/>
           <p:cNvSpPr/>
           <p:nvPr/>
         </p:nvSpPr>
@@ -15723,7 +15957,7 @@
       </p:sp>
       <p:sp>
         <p:nvSpPr>
-          <p:cNvPr id="11" name="Text 9"/>
+          <p:cNvPr id="12" name="Text 10"/>
           <p:cNvSpPr/>
           <p:nvPr/>
         </p:nvSpPr>
@@ -15762,7 +15996,7 @@
       </p:sp>
       <p:sp>
         <p:nvSpPr>
-          <p:cNvPr id="12" name="Shape 10"/>
+          <p:cNvPr id="13" name="Shape 11"/>
           <p:cNvSpPr/>
           <p:nvPr/>
         </p:nvSpPr>
@@ -15796,7 +16030,7 @@
       </p:sp>
       <p:sp>
         <p:nvSpPr>
-          <p:cNvPr id="13" name="Shape 11"/>
+          <p:cNvPr id="14" name="Shape 12"/>
           <p:cNvSpPr/>
           <p:nvPr/>
         </p:nvSpPr>
@@ -15816,7 +16050,7 @@
       </p:sp>
       <p:sp>
         <p:nvSpPr>
-          <p:cNvPr id="14" name="Text 12"/>
+          <p:cNvPr id="15" name="Text 13"/>
           <p:cNvSpPr/>
           <p:nvPr/>
         </p:nvSpPr>
@@ -15855,7 +16089,7 @@
       </p:sp>
       <p:sp>
         <p:nvSpPr>
-          <p:cNvPr id="15" name="Text 13"/>
+          <p:cNvPr id="16" name="Text 14"/>
           <p:cNvSpPr/>
           <p:nvPr/>
         </p:nvSpPr>
@@ -15894,7 +16128,7 @@
       </p:sp>
       <p:sp>
         <p:nvSpPr>
-          <p:cNvPr id="16" name="Shape 14"/>
+          <p:cNvPr id="17" name="Shape 15"/>
           <p:cNvSpPr/>
           <p:nvPr/>
         </p:nvSpPr>
@@ -15928,7 +16162,7 @@
       </p:sp>
       <p:sp>
         <p:nvSpPr>
-          <p:cNvPr id="17" name="Shape 15"/>
+          <p:cNvPr id="18" name="Shape 16"/>
           <p:cNvSpPr/>
           <p:nvPr/>
         </p:nvSpPr>
@@ -15948,7 +16182,7 @@
       </p:sp>
       <p:sp>
         <p:nvSpPr>
-          <p:cNvPr id="18" name="Text 16"/>
+          <p:cNvPr id="19" name="Text 17"/>
           <p:cNvSpPr/>
           <p:nvPr/>
         </p:nvSpPr>
@@ -15987,7 +16221,7 @@
       </p:sp>
       <p:sp>
         <p:nvSpPr>
-          <p:cNvPr id="19" name="Text 17"/>
+          <p:cNvPr id="20" name="Text 18"/>
           <p:cNvSpPr/>
           <p:nvPr/>
         </p:nvSpPr>
@@ -16026,7 +16260,7 @@
       </p:sp>
       <p:sp>
         <p:nvSpPr>
-          <p:cNvPr id="20" name="Shape 18"/>
+          <p:cNvPr id="21" name="Shape 19"/>
           <p:cNvSpPr/>
           <p:nvPr/>
         </p:nvSpPr>
@@ -16060,7 +16294,7 @@
       </p:sp>
       <p:sp>
         <p:nvSpPr>
-          <p:cNvPr id="21" name="Shape 19"/>
+          <p:cNvPr id="22" name="Shape 20"/>
           <p:cNvSpPr/>
           <p:nvPr/>
         </p:nvSpPr>
@@ -16080,7 +16314,7 @@
       </p:sp>
       <p:sp>
         <p:nvSpPr>
-          <p:cNvPr id="22" name="Text 20"/>
+          <p:cNvPr id="23" name="Text 21"/>
           <p:cNvSpPr/>
           <p:nvPr/>
         </p:nvSpPr>
@@ -16119,7 +16353,7 @@
       </p:sp>
       <p:sp>
         <p:nvSpPr>
-          <p:cNvPr id="23" name="Text 21"/>
+          <p:cNvPr id="24" name="Text 22"/>
           <p:cNvSpPr/>
           <p:nvPr/>
         </p:nvSpPr>
@@ -16158,7 +16392,7 @@
       </p:sp>
       <p:sp>
         <p:nvSpPr>
-          <p:cNvPr id="24" name="Shape 22"/>
+          <p:cNvPr id="25" name="Shape 23"/>
           <p:cNvSpPr/>
           <p:nvPr/>
         </p:nvSpPr>
@@ -16192,7 +16426,7 @@
       </p:sp>
       <p:sp>
         <p:nvSpPr>
-          <p:cNvPr id="25" name="Text 23"/>
+          <p:cNvPr id="26" name="Text 24"/>
           <p:cNvSpPr/>
           <p:nvPr/>
         </p:nvSpPr>
@@ -16231,7 +16465,7 @@
       </p:sp>
       <p:graphicFrame>
         <p:nvGraphicFramePr>
-          <p:cNvPr id="26" name="Chart 0" descr=""/>
+          <p:cNvPr id="27" name="Chart 0" descr=""/>
           <p:cNvGraphicFramePr/>
           <p:nvPr/>
         </p:nvGraphicFramePr>
@@ -16247,7 +16481,7 @@
       </p:graphicFrame>
       <p:sp>
         <p:nvSpPr>
-          <p:cNvPr id="27" name="Text 24"/>
+          <p:cNvPr id="28" name="Text 25"/>
           <p:cNvSpPr/>
           <p:nvPr/>
         </p:nvSpPr>
@@ -16286,7 +16520,7 @@
       </p:sp>
       <p:sp>
         <p:nvSpPr>
-          <p:cNvPr id="28" name="Text 25"/>
+          <p:cNvPr id="29" name="Text 26"/>
           <p:cNvSpPr/>
           <p:nvPr/>
         </p:nvSpPr>
@@ -16357,7 +16591,46 @@
       </p:grpSpPr>
       <p:sp>
         <p:nvSpPr>
-          <p:cNvPr id="2" name="Shape 0"/>
+          <p:cNvPr id="2" name="Text 0"/>
+          <p:cNvSpPr/>
+          <p:nvPr/>
+        </p:nvSpPr>
+        <p:spPr>
+          <a:xfrm>
+            <a:off x="411480" y="91440"/>
+            <a:ext cx="8321040" cy="182880"/>
+          </a:xfrm>
+          <a:prstGeom prst="rect">
+            <a:avLst/>
+          </a:prstGeom>
+          <a:noFill/>
+          <a:ln/>
+        </p:spPr>
+        <p:txBody>
+          <a:bodyPr wrap="square" lIns="0" tIns="0" rIns="0" bIns="0" rtlCol="0" anchor="ctr"/>
+          <a:lstStyle/>
+          <a:p>
+            <a:pPr algn="l" indent="0" marL="0">
+              <a:buNone/>
+            </a:pPr>
+            <a:r>
+              <a:rPr lang="en-US" sz="850" b="1" spc="300" kern="0" dirty="0">
+                <a:solidFill>
+                  <a:srgbClr val="64748B"/>
+                </a:solidFill>
+                <a:latin typeface="Calibri" pitchFamily="34" charset="0"/>
+                <a:ea typeface="Calibri" pitchFamily="34" charset="-122"/>
+                <a:cs typeface="Calibri" pitchFamily="34" charset="-120"/>
+              </a:rPr>
+              <a:t>РОЗДІЛ 9 · АНАЛІЗ РЕЗУЛЬТАТІВ</a:t>
+            </a:r>
+            <a:endParaRPr lang="en-US" sz="850" dirty="0"/>
+          </a:p>
+        </p:txBody>
+      </p:sp>
+      <p:sp>
+        <p:nvSpPr>
+          <p:cNvPr id="3" name="Shape 1"/>
           <p:cNvSpPr/>
           <p:nvPr/>
         </p:nvSpPr>
@@ -16377,7 +16650,7 @@
       </p:sp>
       <p:sp>
         <p:nvSpPr>
-          <p:cNvPr id="3" name="Text 1"/>
+          <p:cNvPr id="4" name="Text 2"/>
           <p:cNvSpPr/>
           <p:nvPr/>
         </p:nvSpPr>
@@ -16416,7 +16689,7 @@
       </p:sp>
       <p:sp>
         <p:nvSpPr>
-          <p:cNvPr id="4" name="Shape 2"/>
+          <p:cNvPr id="5" name="Shape 3"/>
           <p:cNvSpPr/>
           <p:nvPr/>
         </p:nvSpPr>
@@ -16450,7 +16723,7 @@
       </p:sp>
       <p:sp>
         <p:nvSpPr>
-          <p:cNvPr id="5" name="Text 3"/>
+          <p:cNvPr id="6" name="Text 4"/>
           <p:cNvSpPr/>
           <p:nvPr/>
         </p:nvSpPr>
@@ -16489,7 +16762,7 @@
       </p:sp>
       <p:graphicFrame>
         <p:nvGraphicFramePr>
-          <p:cNvPr id="6" name="Chart 0" descr=""/>
+          <p:cNvPr id="7" name="Chart 0" descr=""/>
           <p:cNvGraphicFramePr/>
           <p:nvPr/>
         </p:nvGraphicFramePr>
@@ -16505,7 +16778,7 @@
       </p:graphicFrame>
       <p:sp>
         <p:nvSpPr>
-          <p:cNvPr id="7" name="Text 4"/>
+          <p:cNvPr id="8" name="Text 5"/>
           <p:cNvSpPr/>
           <p:nvPr/>
         </p:nvSpPr>
@@ -16544,7 +16817,7 @@
       </p:sp>
       <p:sp>
         <p:nvSpPr>
-          <p:cNvPr id="8" name="Text 5"/>
+          <p:cNvPr id="9" name="Text 6"/>
           <p:cNvSpPr/>
           <p:nvPr/>
         </p:nvSpPr>
@@ -16583,7 +16856,7 @@
       </p:sp>
       <p:sp>
         <p:nvSpPr>
-          <p:cNvPr id="9" name="Text 6"/>
+          <p:cNvPr id="10" name="Text 7"/>
           <p:cNvSpPr/>
           <p:nvPr/>
         </p:nvSpPr>
@@ -16622,7 +16895,7 @@
       </p:sp>
       <p:sp>
         <p:nvSpPr>
-          <p:cNvPr id="10" name="Text 7"/>
+          <p:cNvPr id="11" name="Text 8"/>
           <p:cNvSpPr/>
           <p:nvPr/>
         </p:nvSpPr>
@@ -16661,7 +16934,7 @@
       </p:sp>
       <p:sp>
         <p:nvSpPr>
-          <p:cNvPr id="11" name="Text 8"/>
+          <p:cNvPr id="12" name="Text 9"/>
           <p:cNvSpPr/>
           <p:nvPr/>
         </p:nvSpPr>
@@ -16700,7 +16973,7 @@
       </p:sp>
       <p:sp>
         <p:nvSpPr>
-          <p:cNvPr id="12" name="Text 9"/>
+          <p:cNvPr id="13" name="Text 10"/>
           <p:cNvSpPr/>
           <p:nvPr/>
         </p:nvSpPr>
@@ -16739,7 +17012,7 @@
       </p:sp>
       <p:sp>
         <p:nvSpPr>
-          <p:cNvPr id="13" name="Text 10"/>
+          <p:cNvPr id="14" name="Text 11"/>
           <p:cNvSpPr/>
           <p:nvPr/>
         </p:nvSpPr>
@@ -16778,7 +17051,7 @@
       </p:sp>
       <p:sp>
         <p:nvSpPr>
-          <p:cNvPr id="14" name="Shape 11"/>
+          <p:cNvPr id="15" name="Shape 12"/>
           <p:cNvSpPr/>
           <p:nvPr/>
         </p:nvSpPr>
@@ -16812,7 +17085,7 @@
       </p:sp>
       <p:sp>
         <p:nvSpPr>
-          <p:cNvPr id="15" name="Shape 12"/>
+          <p:cNvPr id="16" name="Shape 13"/>
           <p:cNvSpPr/>
           <p:nvPr/>
         </p:nvSpPr>
@@ -16832,7 +17105,7 @@
       </p:sp>
       <p:sp>
         <p:nvSpPr>
-          <p:cNvPr id="16" name="Text 13"/>
+          <p:cNvPr id="17" name="Text 14"/>
           <p:cNvSpPr/>
           <p:nvPr/>
         </p:nvSpPr>
@@ -16871,7 +17144,7 @@
       </p:sp>
       <p:sp>
         <p:nvSpPr>
-          <p:cNvPr id="17" name="Text 14"/>
+          <p:cNvPr id="18" name="Text 15"/>
           <p:cNvSpPr/>
           <p:nvPr/>
         </p:nvSpPr>
@@ -16910,7 +17183,7 @@
       </p:sp>
       <p:sp>
         <p:nvSpPr>
-          <p:cNvPr id="18" name="Text 15"/>
+          <p:cNvPr id="19" name="Text 16"/>
           <p:cNvSpPr/>
           <p:nvPr/>
         </p:nvSpPr>
@@ -16949,7 +17222,7 @@
       </p:sp>
       <p:sp>
         <p:nvSpPr>
-          <p:cNvPr id="19" name="Shape 16"/>
+          <p:cNvPr id="20" name="Shape 17"/>
           <p:cNvSpPr/>
           <p:nvPr/>
         </p:nvSpPr>
@@ -16983,7 +17256,7 @@
       </p:sp>
       <p:sp>
         <p:nvSpPr>
-          <p:cNvPr id="20" name="Shape 17"/>
+          <p:cNvPr id="21" name="Shape 18"/>
           <p:cNvSpPr/>
           <p:nvPr/>
         </p:nvSpPr>
@@ -17003,7 +17276,7 @@
       </p:sp>
       <p:sp>
         <p:nvSpPr>
-          <p:cNvPr id="21" name="Text 18"/>
+          <p:cNvPr id="22" name="Text 19"/>
           <p:cNvSpPr/>
           <p:nvPr/>
         </p:nvSpPr>
@@ -17042,7 +17315,7 @@
       </p:sp>
       <p:sp>
         <p:nvSpPr>
-          <p:cNvPr id="22" name="Text 19"/>
+          <p:cNvPr id="23" name="Text 20"/>
           <p:cNvSpPr/>
           <p:nvPr/>
         </p:nvSpPr>
@@ -17081,7 +17354,7 @@
       </p:sp>
       <p:sp>
         <p:nvSpPr>
-          <p:cNvPr id="23" name="Text 20"/>
+          <p:cNvPr id="24" name="Text 21"/>
           <p:cNvSpPr/>
           <p:nvPr/>
         </p:nvSpPr>
@@ -17120,7 +17393,7 @@
       </p:sp>
       <p:sp>
         <p:nvSpPr>
-          <p:cNvPr id="24" name="Shape 21"/>
+          <p:cNvPr id="25" name="Shape 22"/>
           <p:cNvSpPr/>
           <p:nvPr/>
         </p:nvSpPr>
@@ -17154,7 +17427,7 @@
       </p:sp>
       <p:sp>
         <p:nvSpPr>
-          <p:cNvPr id="25" name="Shape 22"/>
+          <p:cNvPr id="26" name="Shape 23"/>
           <p:cNvSpPr/>
           <p:nvPr/>
         </p:nvSpPr>
@@ -17174,7 +17447,7 @@
       </p:sp>
       <p:sp>
         <p:nvSpPr>
-          <p:cNvPr id="26" name="Text 23"/>
+          <p:cNvPr id="27" name="Text 24"/>
           <p:cNvSpPr/>
           <p:nvPr/>
         </p:nvSpPr>
@@ -17213,7 +17486,7 @@
       </p:sp>
       <p:sp>
         <p:nvSpPr>
-          <p:cNvPr id="27" name="Text 24"/>
+          <p:cNvPr id="28" name="Text 25"/>
           <p:cNvSpPr/>
           <p:nvPr/>
         </p:nvSpPr>
@@ -17252,7 +17525,7 @@
       </p:sp>
       <p:sp>
         <p:nvSpPr>
-          <p:cNvPr id="28" name="Text 25"/>
+          <p:cNvPr id="29" name="Text 26"/>
           <p:cNvSpPr/>
           <p:nvPr/>
         </p:nvSpPr>
@@ -17291,7 +17564,7 @@
       </p:sp>
       <p:sp>
         <p:nvSpPr>
-          <p:cNvPr id="29" name="Shape 26"/>
+          <p:cNvPr id="30" name="Shape 27"/>
           <p:cNvSpPr/>
           <p:nvPr/>
         </p:nvSpPr>
@@ -17325,7 +17598,7 @@
       </p:sp>
       <p:sp>
         <p:nvSpPr>
-          <p:cNvPr id="30" name="Shape 27"/>
+          <p:cNvPr id="31" name="Shape 28"/>
           <p:cNvSpPr/>
           <p:nvPr/>
         </p:nvSpPr>
@@ -17345,7 +17618,7 @@
       </p:sp>
       <p:sp>
         <p:nvSpPr>
-          <p:cNvPr id="31" name="Text 28"/>
+          <p:cNvPr id="32" name="Text 29"/>
           <p:cNvSpPr/>
           <p:nvPr/>
         </p:nvSpPr>
@@ -17384,7 +17657,7 @@
       </p:sp>
       <p:sp>
         <p:nvSpPr>
-          <p:cNvPr id="32" name="Text 29"/>
+          <p:cNvPr id="33" name="Text 30"/>
           <p:cNvSpPr/>
           <p:nvPr/>
         </p:nvSpPr>
@@ -17423,7 +17696,7 @@
       </p:sp>
       <p:sp>
         <p:nvSpPr>
-          <p:cNvPr id="33" name="Text 30"/>
+          <p:cNvPr id="34" name="Text 31"/>
           <p:cNvSpPr/>
           <p:nvPr/>
         </p:nvSpPr>
@@ -17462,7 +17735,7 @@
       </p:sp>
       <p:sp>
         <p:nvSpPr>
-          <p:cNvPr id="34" name="Shape 31"/>
+          <p:cNvPr id="35" name="Shape 32"/>
           <p:cNvSpPr/>
           <p:nvPr/>
         </p:nvSpPr>
@@ -17496,7 +17769,7 @@
       </p:sp>
       <p:sp>
         <p:nvSpPr>
-          <p:cNvPr id="35" name="Shape 32"/>
+          <p:cNvPr id="36" name="Shape 33"/>
           <p:cNvSpPr/>
           <p:nvPr/>
         </p:nvSpPr>
@@ -17516,7 +17789,7 @@
       </p:sp>
       <p:sp>
         <p:nvSpPr>
-          <p:cNvPr id="36" name="Text 33"/>
+          <p:cNvPr id="37" name="Text 34"/>
           <p:cNvSpPr/>
           <p:nvPr/>
         </p:nvSpPr>
@@ -17555,7 +17828,7 @@
       </p:sp>
       <p:sp>
         <p:nvSpPr>
-          <p:cNvPr id="37" name="Text 34"/>
+          <p:cNvPr id="38" name="Text 35"/>
           <p:cNvSpPr/>
           <p:nvPr/>
         </p:nvSpPr>
@@ -17594,7 +17867,7 @@
       </p:sp>
       <p:sp>
         <p:nvSpPr>
-          <p:cNvPr id="38" name="Text 35"/>
+          <p:cNvPr id="39" name="Text 36"/>
           <p:cNvSpPr/>
           <p:nvPr/>
         </p:nvSpPr>
@@ -17633,7 +17906,7 @@
       </p:sp>
       <p:sp>
         <p:nvSpPr>
-          <p:cNvPr id="39" name="Text 36"/>
+          <p:cNvPr id="40" name="Text 37"/>
           <p:cNvSpPr/>
           <p:nvPr/>
         </p:nvSpPr>
@@ -17672,7 +17945,7 @@
       </p:sp>
       <p:sp>
         <p:nvSpPr>
-          <p:cNvPr id="40" name="Text 37"/>
+          <p:cNvPr id="41" name="Text 38"/>
           <p:cNvSpPr/>
           <p:nvPr/>
         </p:nvSpPr>
@@ -17743,7 +18016,46 @@
       </p:grpSpPr>
       <p:sp>
         <p:nvSpPr>
-          <p:cNvPr id="2" name="Shape 0"/>
+          <p:cNvPr id="2" name="Text 0"/>
+          <p:cNvSpPr/>
+          <p:nvPr/>
+        </p:nvSpPr>
+        <p:spPr>
+          <a:xfrm>
+            <a:off x="411480" y="91440"/>
+            <a:ext cx="8321040" cy="182880"/>
+          </a:xfrm>
+          <a:prstGeom prst="rect">
+            <a:avLst/>
+          </a:prstGeom>
+          <a:noFill/>
+          <a:ln/>
+        </p:spPr>
+        <p:txBody>
+          <a:bodyPr wrap="square" lIns="0" tIns="0" rIns="0" bIns="0" rtlCol="0" anchor="ctr"/>
+          <a:lstStyle/>
+          <a:p>
+            <a:pPr algn="l" indent="0" marL="0">
+              <a:buNone/>
+            </a:pPr>
+            <a:r>
+              <a:rPr lang="en-US" sz="850" b="1" spc="300" kern="0" dirty="0">
+                <a:solidFill>
+                  <a:srgbClr val="64748B"/>
+                </a:solidFill>
+                <a:latin typeface="Calibri" pitchFamily="34" charset="0"/>
+                <a:ea typeface="Calibri" pitchFamily="34" charset="-122"/>
+                <a:cs typeface="Calibri" pitchFamily="34" charset="-120"/>
+              </a:rPr>
+              <a:t>РОЗДІЛ 10 · ПУБЛІКАЦІЯ РЕЗУЛЬТАТІВ</a:t>
+            </a:r>
+            <a:endParaRPr lang="en-US" sz="850" dirty="0"/>
+          </a:p>
+        </p:txBody>
+      </p:sp>
+      <p:sp>
+        <p:nvSpPr>
+          <p:cNvPr id="3" name="Shape 1"/>
           <p:cNvSpPr/>
           <p:nvPr/>
         </p:nvSpPr>
@@ -17763,7 +18075,7 @@
       </p:sp>
       <p:sp>
         <p:nvSpPr>
-          <p:cNvPr id="3" name="Text 1"/>
+          <p:cNvPr id="4" name="Text 2"/>
           <p:cNvSpPr/>
           <p:nvPr/>
         </p:nvSpPr>
@@ -17802,7 +18114,7 @@
       </p:sp>
       <p:sp>
         <p:nvSpPr>
-          <p:cNvPr id="4" name="Shape 2"/>
+          <p:cNvPr id="5" name="Shape 3"/>
           <p:cNvSpPr/>
           <p:nvPr/>
         </p:nvSpPr>
@@ -17836,7 +18148,7 @@
       </p:sp>
       <p:sp>
         <p:nvSpPr>
-          <p:cNvPr id="5" name="Shape 3"/>
+          <p:cNvPr id="6" name="Shape 4"/>
           <p:cNvSpPr/>
           <p:nvPr/>
         </p:nvSpPr>
@@ -17856,7 +18168,7 @@
       </p:sp>
       <p:sp>
         <p:nvSpPr>
-          <p:cNvPr id="6" name="Text 4"/>
+          <p:cNvPr id="7" name="Text 5"/>
           <p:cNvSpPr/>
           <p:nvPr/>
         </p:nvSpPr>
@@ -17895,7 +18207,7 @@
       </p:sp>
       <p:sp>
         <p:nvSpPr>
-          <p:cNvPr id="7" name="Text 5"/>
+          <p:cNvPr id="8" name="Text 6"/>
           <p:cNvSpPr/>
           <p:nvPr/>
         </p:nvSpPr>
@@ -17934,7 +18246,7 @@
       </p:sp>
       <p:sp>
         <p:nvSpPr>
-          <p:cNvPr id="8" name="Text 6"/>
+          <p:cNvPr id="9" name="Text 7"/>
           <p:cNvSpPr/>
           <p:nvPr/>
         </p:nvSpPr>
@@ -17973,7 +18285,7 @@
       </p:sp>
       <p:sp>
         <p:nvSpPr>
-          <p:cNvPr id="9" name="Text 7"/>
+          <p:cNvPr id="10" name="Text 8"/>
           <p:cNvSpPr/>
           <p:nvPr/>
         </p:nvSpPr>
@@ -18012,7 +18324,7 @@
       </p:sp>
       <p:sp>
         <p:nvSpPr>
-          <p:cNvPr id="10" name="Text 8"/>
+          <p:cNvPr id="11" name="Text 9"/>
           <p:cNvSpPr/>
           <p:nvPr/>
         </p:nvSpPr>
@@ -18051,7 +18363,7 @@
       </p:sp>
       <p:sp>
         <p:nvSpPr>
-          <p:cNvPr id="11" name="Text 9"/>
+          <p:cNvPr id="12" name="Text 10"/>
           <p:cNvSpPr/>
           <p:nvPr/>
         </p:nvSpPr>
@@ -18104,7 +18416,7 @@
       </p:sp>
       <p:sp>
         <p:nvSpPr>
-          <p:cNvPr id="12" name="Text 10"/>
+          <p:cNvPr id="13" name="Text 11"/>
           <p:cNvSpPr/>
           <p:nvPr/>
         </p:nvSpPr>
@@ -18157,7 +18469,7 @@
       </p:sp>
       <p:sp>
         <p:nvSpPr>
-          <p:cNvPr id="13" name="Shape 11"/>
+          <p:cNvPr id="14" name="Shape 12"/>
           <p:cNvSpPr/>
           <p:nvPr/>
         </p:nvSpPr>
@@ -18191,7 +18503,7 @@
       </p:sp>
       <p:sp>
         <p:nvSpPr>
-          <p:cNvPr id="14" name="Shape 12"/>
+          <p:cNvPr id="15" name="Shape 13"/>
           <p:cNvSpPr/>
           <p:nvPr/>
         </p:nvSpPr>
@@ -18211,7 +18523,7 @@
       </p:sp>
       <p:sp>
         <p:nvSpPr>
-          <p:cNvPr id="15" name="Text 13"/>
+          <p:cNvPr id="16" name="Text 14"/>
           <p:cNvSpPr/>
           <p:nvPr/>
         </p:nvSpPr>
@@ -18250,7 +18562,7 @@
       </p:sp>
       <p:sp>
         <p:nvSpPr>
-          <p:cNvPr id="16" name="Text 14"/>
+          <p:cNvPr id="17" name="Text 15"/>
           <p:cNvSpPr/>
           <p:nvPr/>
         </p:nvSpPr>
@@ -18289,7 +18601,7 @@
       </p:sp>
       <p:sp>
         <p:nvSpPr>
-          <p:cNvPr id="17" name="Text 15"/>
+          <p:cNvPr id="18" name="Text 16"/>
           <p:cNvSpPr/>
           <p:nvPr/>
         </p:nvSpPr>
@@ -18328,7 +18640,7 @@
       </p:sp>
       <p:sp>
         <p:nvSpPr>
-          <p:cNvPr id="18" name="Text 16"/>
+          <p:cNvPr id="19" name="Text 17"/>
           <p:cNvSpPr/>
           <p:nvPr/>
         </p:nvSpPr>
@@ -18367,7 +18679,7 @@
       </p:sp>
       <p:sp>
         <p:nvSpPr>
-          <p:cNvPr id="19" name="Text 17"/>
+          <p:cNvPr id="20" name="Text 18"/>
           <p:cNvSpPr/>
           <p:nvPr/>
         </p:nvSpPr>
@@ -18406,7 +18718,7 @@
       </p:sp>
       <p:sp>
         <p:nvSpPr>
-          <p:cNvPr id="20" name="Text 18"/>
+          <p:cNvPr id="21" name="Text 19"/>
           <p:cNvSpPr/>
           <p:nvPr/>
         </p:nvSpPr>
@@ -18459,7 +18771,7 @@
       </p:sp>
       <p:sp>
         <p:nvSpPr>
-          <p:cNvPr id="21" name="Text 19"/>
+          <p:cNvPr id="22" name="Text 20"/>
           <p:cNvSpPr/>
           <p:nvPr/>
         </p:nvSpPr>
@@ -18512,7 +18824,7 @@
       </p:sp>
       <p:sp>
         <p:nvSpPr>
-          <p:cNvPr id="22" name="Shape 20"/>
+          <p:cNvPr id="23" name="Shape 21"/>
           <p:cNvSpPr/>
           <p:nvPr/>
         </p:nvSpPr>
@@ -18546,7 +18858,7 @@
       </p:sp>
       <p:sp>
         <p:nvSpPr>
-          <p:cNvPr id="23" name="Text 21"/>
+          <p:cNvPr id="24" name="Text 22"/>
           <p:cNvSpPr/>
           <p:nvPr/>
         </p:nvSpPr>
@@ -18599,7 +18911,7 @@
       </p:sp>
       <p:sp>
         <p:nvSpPr>
-          <p:cNvPr id="24" name="Text 22"/>
+          <p:cNvPr id="25" name="Text 23"/>
           <p:cNvSpPr/>
           <p:nvPr/>
         </p:nvSpPr>
@@ -18638,7 +18950,7 @@
       </p:sp>
       <p:sp>
         <p:nvSpPr>
-          <p:cNvPr id="25" name="Text 23"/>
+          <p:cNvPr id="26" name="Text 24"/>
           <p:cNvSpPr/>
           <p:nvPr/>
         </p:nvSpPr>
@@ -18753,7 +19065,46 @@
       </p:sp>
       <p:sp>
         <p:nvSpPr>
-          <p:cNvPr id="4" name="Shape 2"/>
+          <p:cNvPr id="4" name="Text 2"/>
+          <p:cNvSpPr/>
+          <p:nvPr/>
+        </p:nvSpPr>
+        <p:spPr>
+          <a:xfrm>
+            <a:off x="411480" y="91440"/>
+            <a:ext cx="8321040" cy="182880"/>
+          </a:xfrm>
+          <a:prstGeom prst="rect">
+            <a:avLst/>
+          </a:prstGeom>
+          <a:noFill/>
+          <a:ln/>
+        </p:spPr>
+        <p:txBody>
+          <a:bodyPr wrap="square" lIns="0" tIns="0" rIns="0" bIns="0" rtlCol="0" anchor="ctr"/>
+          <a:lstStyle/>
+          <a:p>
+            <a:pPr algn="l" indent="0" marL="0">
+              <a:buNone/>
+            </a:pPr>
+            <a:r>
+              <a:rPr lang="en-US" sz="850" b="1" spc="300" kern="0" dirty="0">
+                <a:solidFill>
+                  <a:srgbClr val="94A3B8"/>
+                </a:solidFill>
+                <a:latin typeface="Calibri" pitchFamily="34" charset="0"/>
+                <a:ea typeface="Calibri" pitchFamily="34" charset="-122"/>
+                <a:cs typeface="Calibri" pitchFamily="34" charset="-120"/>
+              </a:rPr>
+              <a:t>РОЗДІЛ 11 · ПІДСУМКИ</a:t>
+            </a:r>
+            <a:endParaRPr lang="en-US" sz="850" dirty="0"/>
+          </a:p>
+        </p:txBody>
+      </p:sp>
+      <p:sp>
+        <p:nvSpPr>
+          <p:cNvPr id="5" name="Shape 3"/>
           <p:cNvSpPr/>
           <p:nvPr/>
         </p:nvSpPr>
@@ -18773,7 +19124,7 @@
       </p:sp>
       <p:sp>
         <p:nvSpPr>
-          <p:cNvPr id="5" name="Text 3"/>
+          <p:cNvPr id="6" name="Text 4"/>
           <p:cNvSpPr/>
           <p:nvPr/>
         </p:nvSpPr>
@@ -18812,7 +19163,7 @@
       </p:sp>
       <p:sp>
         <p:nvSpPr>
-          <p:cNvPr id="6" name="Shape 4"/>
+          <p:cNvPr id="7" name="Shape 5"/>
           <p:cNvSpPr/>
           <p:nvPr/>
         </p:nvSpPr>
@@ -18846,7 +19197,7 @@
       </p:sp>
       <p:pic>
         <p:nvPicPr>
-          <p:cNvPr id="7" name="Image 0" descr="preencoded.png">    </p:cNvPr>
+          <p:cNvPr id="8" name="Image 0" descr="preencoded.png">    </p:cNvPr>
           <p:cNvPicPr>
             <a:picLocks noChangeAspect="1"/>
           </p:cNvPicPr>
@@ -18870,7 +19221,7 @@
       </p:pic>
       <p:sp>
         <p:nvSpPr>
-          <p:cNvPr id="8" name="Text 5"/>
+          <p:cNvPr id="9" name="Text 6"/>
           <p:cNvSpPr/>
           <p:nvPr/>
         </p:nvSpPr>
@@ -18909,7 +19260,7 @@
       </p:sp>
       <p:sp>
         <p:nvSpPr>
-          <p:cNvPr id="9" name="Shape 6"/>
+          <p:cNvPr id="10" name="Shape 7"/>
           <p:cNvSpPr/>
           <p:nvPr/>
         </p:nvSpPr>
@@ -18936,7 +19287,7 @@
       </p:sp>
       <p:sp>
         <p:nvSpPr>
-          <p:cNvPr id="10" name="Shape 7"/>
+          <p:cNvPr id="11" name="Shape 8"/>
           <p:cNvSpPr/>
           <p:nvPr/>
         </p:nvSpPr>
@@ -18956,7 +19307,7 @@
       </p:sp>
       <p:pic>
         <p:nvPicPr>
-          <p:cNvPr id="11" name="Image 1" descr="preencoded.png">    </p:cNvPr>
+          <p:cNvPr id="12" name="Image 1" descr="preencoded.png">    </p:cNvPr>
           <p:cNvPicPr>
             <a:picLocks noChangeAspect="1"/>
           </p:cNvPicPr>
@@ -18980,7 +19331,7 @@
       </p:pic>
       <p:sp>
         <p:nvSpPr>
-          <p:cNvPr id="12" name="Text 8"/>
+          <p:cNvPr id="13" name="Text 9"/>
           <p:cNvSpPr/>
           <p:nvPr/>
         </p:nvSpPr>
@@ -19019,7 +19370,7 @@
       </p:sp>
       <p:sp>
         <p:nvSpPr>
-          <p:cNvPr id="13" name="Text 9"/>
+          <p:cNvPr id="14" name="Text 10"/>
           <p:cNvSpPr/>
           <p:nvPr/>
         </p:nvSpPr>
@@ -19058,7 +19409,7 @@
       </p:sp>
       <p:sp>
         <p:nvSpPr>
-          <p:cNvPr id="14" name="Text 10"/>
+          <p:cNvPr id="15" name="Text 11"/>
           <p:cNvSpPr/>
           <p:nvPr/>
         </p:nvSpPr>
@@ -19097,7 +19448,7 @@
       </p:sp>
       <p:sp>
         <p:nvSpPr>
-          <p:cNvPr id="15" name="Shape 11"/>
+          <p:cNvPr id="16" name="Shape 12"/>
           <p:cNvSpPr/>
           <p:nvPr/>
         </p:nvSpPr>
@@ -19124,7 +19475,7 @@
       </p:sp>
       <p:sp>
         <p:nvSpPr>
-          <p:cNvPr id="16" name="Shape 12"/>
+          <p:cNvPr id="17" name="Shape 13"/>
           <p:cNvSpPr/>
           <p:nvPr/>
         </p:nvSpPr>
@@ -19144,7 +19495,7 @@
       </p:sp>
       <p:pic>
         <p:nvPicPr>
-          <p:cNvPr id="17" name="Image 2" descr="preencoded.png">    </p:cNvPr>
+          <p:cNvPr id="18" name="Image 2" descr="preencoded.png">    </p:cNvPr>
           <p:cNvPicPr>
             <a:picLocks noChangeAspect="1"/>
           </p:cNvPicPr>
@@ -19168,7 +19519,7 @@
       </p:pic>
       <p:sp>
         <p:nvSpPr>
-          <p:cNvPr id="18" name="Text 13"/>
+          <p:cNvPr id="19" name="Text 14"/>
           <p:cNvSpPr/>
           <p:nvPr/>
         </p:nvSpPr>
@@ -19207,7 +19558,7 @@
       </p:sp>
       <p:sp>
         <p:nvSpPr>
-          <p:cNvPr id="19" name="Text 14"/>
+          <p:cNvPr id="20" name="Text 15"/>
           <p:cNvSpPr/>
           <p:nvPr/>
         </p:nvSpPr>
@@ -19246,7 +19597,7 @@
       </p:sp>
       <p:sp>
         <p:nvSpPr>
-          <p:cNvPr id="20" name="Text 15"/>
+          <p:cNvPr id="21" name="Text 16"/>
           <p:cNvSpPr/>
           <p:nvPr/>
         </p:nvSpPr>
@@ -19285,7 +19636,7 @@
       </p:sp>
       <p:sp>
         <p:nvSpPr>
-          <p:cNvPr id="21" name="Shape 16"/>
+          <p:cNvPr id="22" name="Shape 17"/>
           <p:cNvSpPr/>
           <p:nvPr/>
         </p:nvSpPr>
@@ -19312,7 +19663,7 @@
       </p:sp>
       <p:sp>
         <p:nvSpPr>
-          <p:cNvPr id="22" name="Shape 17"/>
+          <p:cNvPr id="23" name="Shape 18"/>
           <p:cNvSpPr/>
           <p:nvPr/>
         </p:nvSpPr>
@@ -19332,7 +19683,7 @@
       </p:sp>
       <p:pic>
         <p:nvPicPr>
-          <p:cNvPr id="23" name="Image 3" descr="preencoded.png">    </p:cNvPr>
+          <p:cNvPr id="24" name="Image 3" descr="preencoded.png">    </p:cNvPr>
           <p:cNvPicPr>
             <a:picLocks noChangeAspect="1"/>
           </p:cNvPicPr>
@@ -19356,7 +19707,7 @@
       </p:pic>
       <p:sp>
         <p:nvSpPr>
-          <p:cNvPr id="24" name="Text 18"/>
+          <p:cNvPr id="25" name="Text 19"/>
           <p:cNvSpPr/>
           <p:nvPr/>
         </p:nvSpPr>
@@ -19395,7 +19746,7 @@
       </p:sp>
       <p:sp>
         <p:nvSpPr>
-          <p:cNvPr id="25" name="Text 19"/>
+          <p:cNvPr id="26" name="Text 20"/>
           <p:cNvSpPr/>
           <p:nvPr/>
         </p:nvSpPr>
@@ -19434,7 +19785,7 @@
       </p:sp>
       <p:sp>
         <p:nvSpPr>
-          <p:cNvPr id="26" name="Text 20"/>
+          <p:cNvPr id="27" name="Text 21"/>
           <p:cNvSpPr/>
           <p:nvPr/>
         </p:nvSpPr>
@@ -19473,7 +19824,7 @@
       </p:sp>
       <p:sp>
         <p:nvSpPr>
-          <p:cNvPr id="27" name="Shape 21"/>
+          <p:cNvPr id="28" name="Shape 22"/>
           <p:cNvSpPr/>
           <p:nvPr/>
         </p:nvSpPr>
@@ -19500,7 +19851,7 @@
       </p:sp>
       <p:sp>
         <p:nvSpPr>
-          <p:cNvPr id="28" name="Shape 22"/>
+          <p:cNvPr id="29" name="Shape 23"/>
           <p:cNvSpPr/>
           <p:nvPr/>
         </p:nvSpPr>
@@ -19520,7 +19871,7 @@
       </p:sp>
       <p:pic>
         <p:nvPicPr>
-          <p:cNvPr id="29" name="Image 4" descr="preencoded.png">    </p:cNvPr>
+          <p:cNvPr id="30" name="Image 4" descr="preencoded.png">    </p:cNvPr>
           <p:cNvPicPr>
             <a:picLocks noChangeAspect="1"/>
           </p:cNvPicPr>
@@ -19544,7 +19895,7 @@
       </p:pic>
       <p:sp>
         <p:nvSpPr>
-          <p:cNvPr id="30" name="Text 23"/>
+          <p:cNvPr id="31" name="Text 24"/>
           <p:cNvSpPr/>
           <p:nvPr/>
         </p:nvSpPr>
@@ -19583,7 +19934,7 @@
       </p:sp>
       <p:sp>
         <p:nvSpPr>
-          <p:cNvPr id="31" name="Text 24"/>
+          <p:cNvPr id="32" name="Text 25"/>
           <p:cNvSpPr/>
           <p:nvPr/>
         </p:nvSpPr>
@@ -19622,7 +19973,7 @@
       </p:sp>
       <p:sp>
         <p:nvSpPr>
-          <p:cNvPr id="32" name="Text 25"/>
+          <p:cNvPr id="33" name="Text 26"/>
           <p:cNvSpPr/>
           <p:nvPr/>
         </p:nvSpPr>
@@ -19661,7 +20012,7 @@
       </p:sp>
       <p:sp>
         <p:nvSpPr>
-          <p:cNvPr id="33" name="Text 26"/>
+          <p:cNvPr id="34" name="Text 27"/>
           <p:cNvSpPr/>
           <p:nvPr/>
         </p:nvSpPr>
@@ -19700,7 +20051,7 @@
       </p:sp>
       <p:sp>
         <p:nvSpPr>
-          <p:cNvPr id="34" name="Text 27"/>
+          <p:cNvPr id="35" name="Text 28"/>
           <p:cNvSpPr/>
           <p:nvPr/>
         </p:nvSpPr>
@@ -19771,7 +20122,46 @@
       </p:grpSpPr>
       <p:sp>
         <p:nvSpPr>
-          <p:cNvPr id="2" name="Shape 0"/>
+          <p:cNvPr id="2" name="Text 0"/>
+          <p:cNvSpPr/>
+          <p:nvPr/>
+        </p:nvSpPr>
+        <p:spPr>
+          <a:xfrm>
+            <a:off x="411480" y="91440"/>
+            <a:ext cx="8321040" cy="182880"/>
+          </a:xfrm>
+          <a:prstGeom prst="rect">
+            <a:avLst/>
+          </a:prstGeom>
+          <a:noFill/>
+          <a:ln/>
+        </p:spPr>
+        <p:txBody>
+          <a:bodyPr wrap="square" lIns="0" tIns="0" rIns="0" bIns="0" rtlCol="0" anchor="ctr"/>
+          <a:lstStyle/>
+          <a:p>
+            <a:pPr algn="l" indent="0" marL="0">
+              <a:buNone/>
+            </a:pPr>
+            <a:r>
+              <a:rPr lang="en-US" sz="850" b="1" spc="300" kern="0" dirty="0">
+                <a:solidFill>
+                  <a:srgbClr val="64748B"/>
+                </a:solidFill>
+                <a:latin typeface="Calibri" pitchFamily="34" charset="0"/>
+                <a:ea typeface="Calibri" pitchFamily="34" charset="-122"/>
+                <a:cs typeface="Calibri" pitchFamily="34" charset="-120"/>
+              </a:rPr>
+              <a:t>РОЗДІЛ 1 · ДОСЛІДЖЕННЯ</a:t>
+            </a:r>
+            <a:endParaRPr lang="en-US" sz="850" dirty="0"/>
+          </a:p>
+        </p:txBody>
+      </p:sp>
+      <p:sp>
+        <p:nvSpPr>
+          <p:cNvPr id="3" name="Shape 1"/>
           <p:cNvSpPr/>
           <p:nvPr/>
         </p:nvSpPr>
@@ -19791,7 +20181,7 @@
       </p:sp>
       <p:sp>
         <p:nvSpPr>
-          <p:cNvPr id="3" name="Text 1"/>
+          <p:cNvPr id="4" name="Text 2"/>
           <p:cNvSpPr/>
           <p:nvPr/>
         </p:nvSpPr>
@@ -19830,7 +20220,7 @@
       </p:sp>
       <p:sp>
         <p:nvSpPr>
-          <p:cNvPr id="4" name="Shape 2"/>
+          <p:cNvPr id="5" name="Shape 3"/>
           <p:cNvSpPr/>
           <p:nvPr/>
         </p:nvSpPr>
@@ -19864,7 +20254,7 @@
       </p:sp>
       <p:pic>
         <p:nvPicPr>
-          <p:cNvPr id="5" name="Image 0" descr="preencoded.png">    </p:cNvPr>
+          <p:cNvPr id="6" name="Image 0" descr="preencoded.png">    </p:cNvPr>
           <p:cNvPicPr>
             <a:picLocks noChangeAspect="1"/>
           </p:cNvPicPr>
@@ -19888,7 +20278,7 @@
       </p:pic>
       <p:sp>
         <p:nvSpPr>
-          <p:cNvPr id="6" name="Text 3"/>
+          <p:cNvPr id="7" name="Text 4"/>
           <p:cNvSpPr/>
           <p:nvPr/>
         </p:nvSpPr>
@@ -19941,7 +20331,7 @@
       </p:sp>
       <p:sp>
         <p:nvSpPr>
-          <p:cNvPr id="7" name="Shape 4"/>
+          <p:cNvPr id="8" name="Shape 5"/>
           <p:cNvSpPr/>
           <p:nvPr/>
         </p:nvSpPr>
@@ -19975,7 +20365,7 @@
       </p:sp>
       <p:sp>
         <p:nvSpPr>
-          <p:cNvPr id="8" name="Text 5"/>
+          <p:cNvPr id="9" name="Text 6"/>
           <p:cNvSpPr/>
           <p:nvPr/>
         </p:nvSpPr>
@@ -20014,7 +20404,7 @@
       </p:sp>
       <p:sp>
         <p:nvSpPr>
-          <p:cNvPr id="9" name="Text 6"/>
+          <p:cNvPr id="10" name="Text 7"/>
           <p:cNvSpPr/>
           <p:nvPr/>
         </p:nvSpPr>
@@ -20053,7 +20443,7 @@
       </p:sp>
       <p:sp>
         <p:nvSpPr>
-          <p:cNvPr id="10" name="Shape 7"/>
+          <p:cNvPr id="11" name="Shape 8"/>
           <p:cNvSpPr/>
           <p:nvPr/>
         </p:nvSpPr>
@@ -20087,7 +20477,7 @@
       </p:sp>
       <p:sp>
         <p:nvSpPr>
-          <p:cNvPr id="11" name="Text 8"/>
+          <p:cNvPr id="12" name="Text 9"/>
           <p:cNvSpPr/>
           <p:nvPr/>
         </p:nvSpPr>
@@ -20126,7 +20516,7 @@
       </p:sp>
       <p:sp>
         <p:nvSpPr>
-          <p:cNvPr id="12" name="Text 9"/>
+          <p:cNvPr id="13" name="Text 10"/>
           <p:cNvSpPr/>
           <p:nvPr/>
         </p:nvSpPr>
@@ -20165,7 +20555,7 @@
       </p:sp>
       <p:sp>
         <p:nvSpPr>
-          <p:cNvPr id="13" name="Text 10"/>
+          <p:cNvPr id="14" name="Text 11"/>
           <p:cNvSpPr/>
           <p:nvPr/>
         </p:nvSpPr>
@@ -20204,7 +20594,7 @@
       </p:sp>
       <p:sp>
         <p:nvSpPr>
-          <p:cNvPr id="14" name="Shape 11"/>
+          <p:cNvPr id="15" name="Shape 12"/>
           <p:cNvSpPr/>
           <p:nvPr/>
         </p:nvSpPr>
@@ -20238,7 +20628,7 @@
       </p:sp>
       <p:sp>
         <p:nvSpPr>
-          <p:cNvPr id="15" name="Shape 12"/>
+          <p:cNvPr id="16" name="Shape 13"/>
           <p:cNvSpPr/>
           <p:nvPr/>
         </p:nvSpPr>
@@ -20258,7 +20648,7 @@
       </p:sp>
       <p:sp>
         <p:nvSpPr>
-          <p:cNvPr id="16" name="Text 13"/>
+          <p:cNvPr id="17" name="Text 14"/>
           <p:cNvSpPr/>
           <p:nvPr/>
         </p:nvSpPr>
@@ -20297,7 +20687,7 @@
       </p:sp>
       <p:sp>
         <p:nvSpPr>
-          <p:cNvPr id="17" name="Text 14"/>
+          <p:cNvPr id="18" name="Text 15"/>
           <p:cNvSpPr/>
           <p:nvPr/>
         </p:nvSpPr>
@@ -20336,7 +20726,7 @@
       </p:sp>
       <p:sp>
         <p:nvSpPr>
-          <p:cNvPr id="18" name="Shape 15"/>
+          <p:cNvPr id="19" name="Shape 16"/>
           <p:cNvSpPr/>
           <p:nvPr/>
         </p:nvSpPr>
@@ -20370,7 +20760,7 @@
       </p:sp>
       <p:sp>
         <p:nvSpPr>
-          <p:cNvPr id="19" name="Shape 16"/>
+          <p:cNvPr id="20" name="Shape 17"/>
           <p:cNvSpPr/>
           <p:nvPr/>
         </p:nvSpPr>
@@ -20390,7 +20780,7 @@
       </p:sp>
       <p:sp>
         <p:nvSpPr>
-          <p:cNvPr id="20" name="Text 17"/>
+          <p:cNvPr id="21" name="Text 18"/>
           <p:cNvSpPr/>
           <p:nvPr/>
         </p:nvSpPr>
@@ -20429,7 +20819,7 @@
       </p:sp>
       <p:sp>
         <p:nvSpPr>
-          <p:cNvPr id="21" name="Text 18"/>
+          <p:cNvPr id="22" name="Text 19"/>
           <p:cNvSpPr/>
           <p:nvPr/>
         </p:nvSpPr>
@@ -20468,7 +20858,7 @@
       </p:sp>
       <p:sp>
         <p:nvSpPr>
-          <p:cNvPr id="22" name="Shape 19"/>
+          <p:cNvPr id="23" name="Shape 20"/>
           <p:cNvSpPr/>
           <p:nvPr/>
         </p:nvSpPr>
@@ -20502,7 +20892,7 @@
       </p:sp>
       <p:sp>
         <p:nvSpPr>
-          <p:cNvPr id="23" name="Shape 20"/>
+          <p:cNvPr id="24" name="Shape 21"/>
           <p:cNvSpPr/>
           <p:nvPr/>
         </p:nvSpPr>
@@ -20522,7 +20912,7 @@
       </p:sp>
       <p:sp>
         <p:nvSpPr>
-          <p:cNvPr id="24" name="Text 21"/>
+          <p:cNvPr id="25" name="Text 22"/>
           <p:cNvSpPr/>
           <p:nvPr/>
         </p:nvSpPr>
@@ -20561,7 +20951,7 @@
       </p:sp>
       <p:sp>
         <p:nvSpPr>
-          <p:cNvPr id="25" name="Text 22"/>
+          <p:cNvPr id="26" name="Text 23"/>
           <p:cNvSpPr/>
           <p:nvPr/>
         </p:nvSpPr>
@@ -20600,7 +20990,7 @@
       </p:sp>
       <p:sp>
         <p:nvSpPr>
-          <p:cNvPr id="26" name="Shape 23"/>
+          <p:cNvPr id="27" name="Shape 24"/>
           <p:cNvSpPr/>
           <p:nvPr/>
         </p:nvSpPr>
@@ -20634,7 +21024,7 @@
       </p:sp>
       <p:sp>
         <p:nvSpPr>
-          <p:cNvPr id="27" name="Shape 24"/>
+          <p:cNvPr id="28" name="Shape 25"/>
           <p:cNvSpPr/>
           <p:nvPr/>
         </p:nvSpPr>
@@ -20654,7 +21044,7 @@
       </p:sp>
       <p:sp>
         <p:nvSpPr>
-          <p:cNvPr id="28" name="Text 25"/>
+          <p:cNvPr id="29" name="Text 26"/>
           <p:cNvSpPr/>
           <p:nvPr/>
         </p:nvSpPr>
@@ -20693,7 +21083,7 @@
       </p:sp>
       <p:sp>
         <p:nvSpPr>
-          <p:cNvPr id="29" name="Text 26"/>
+          <p:cNvPr id="30" name="Text 27"/>
           <p:cNvSpPr/>
           <p:nvPr/>
         </p:nvSpPr>
@@ -20732,7 +21122,7 @@
       </p:sp>
       <p:sp>
         <p:nvSpPr>
-          <p:cNvPr id="30" name="Shape 27"/>
+          <p:cNvPr id="31" name="Shape 28"/>
           <p:cNvSpPr/>
           <p:nvPr/>
         </p:nvSpPr>
@@ -20766,7 +21156,7 @@
       </p:sp>
       <p:sp>
         <p:nvSpPr>
-          <p:cNvPr id="31" name="Shape 28"/>
+          <p:cNvPr id="32" name="Shape 29"/>
           <p:cNvSpPr/>
           <p:nvPr/>
         </p:nvSpPr>
@@ -20786,7 +21176,7 @@
       </p:sp>
       <p:sp>
         <p:nvSpPr>
-          <p:cNvPr id="32" name="Text 29"/>
+          <p:cNvPr id="33" name="Text 30"/>
           <p:cNvSpPr/>
           <p:nvPr/>
         </p:nvSpPr>
@@ -20825,7 +21215,7 @@
       </p:sp>
       <p:sp>
         <p:nvSpPr>
-          <p:cNvPr id="33" name="Text 30"/>
+          <p:cNvPr id="34" name="Text 31"/>
           <p:cNvSpPr/>
           <p:nvPr/>
         </p:nvSpPr>
@@ -20864,7 +21254,7 @@
       </p:sp>
       <p:sp>
         <p:nvSpPr>
-          <p:cNvPr id="34" name="Shape 31"/>
+          <p:cNvPr id="35" name="Shape 32"/>
           <p:cNvSpPr/>
           <p:nvPr/>
         </p:nvSpPr>
@@ -20898,7 +21288,7 @@
       </p:sp>
       <p:sp>
         <p:nvSpPr>
-          <p:cNvPr id="35" name="Shape 32"/>
+          <p:cNvPr id="36" name="Shape 33"/>
           <p:cNvSpPr/>
           <p:nvPr/>
         </p:nvSpPr>
@@ -20918,7 +21308,7 @@
       </p:sp>
       <p:sp>
         <p:nvSpPr>
-          <p:cNvPr id="36" name="Text 33"/>
+          <p:cNvPr id="37" name="Text 34"/>
           <p:cNvSpPr/>
           <p:nvPr/>
         </p:nvSpPr>
@@ -20957,7 +21347,7 @@
       </p:sp>
       <p:sp>
         <p:nvSpPr>
-          <p:cNvPr id="37" name="Text 34"/>
+          <p:cNvPr id="38" name="Text 35"/>
           <p:cNvSpPr/>
           <p:nvPr/>
         </p:nvSpPr>
@@ -20996,7 +21386,7 @@
       </p:sp>
       <p:sp>
         <p:nvSpPr>
-          <p:cNvPr id="38" name="Text 35"/>
+          <p:cNvPr id="39" name="Text 36"/>
           <p:cNvSpPr/>
           <p:nvPr/>
         </p:nvSpPr>
@@ -21035,7 +21425,7 @@
       </p:sp>
       <p:sp>
         <p:nvSpPr>
-          <p:cNvPr id="39" name="Text 36"/>
+          <p:cNvPr id="40" name="Text 37"/>
           <p:cNvSpPr/>
           <p:nvPr/>
         </p:nvSpPr>
@@ -21106,7 +21496,46 @@
       </p:grpSpPr>
       <p:sp>
         <p:nvSpPr>
-          <p:cNvPr id="2" name="Shape 0"/>
+          <p:cNvPr id="2" name="Text 0"/>
+          <p:cNvSpPr/>
+          <p:nvPr/>
+        </p:nvSpPr>
+        <p:spPr>
+          <a:xfrm>
+            <a:off x="411480" y="91440"/>
+            <a:ext cx="8321040" cy="182880"/>
+          </a:xfrm>
+          <a:prstGeom prst="rect">
+            <a:avLst/>
+          </a:prstGeom>
+          <a:noFill/>
+          <a:ln/>
+        </p:spPr>
+        <p:txBody>
+          <a:bodyPr wrap="square" lIns="0" tIns="0" rIns="0" bIns="0" rtlCol="0" anchor="ctr"/>
+          <a:lstStyle/>
+          <a:p>
+            <a:pPr algn="l" indent="0" marL="0">
+              <a:buNone/>
+            </a:pPr>
+            <a:r>
+              <a:rPr lang="en-US" sz="850" b="1" spc="300" kern="0" dirty="0">
+                <a:solidFill>
+                  <a:srgbClr val="64748B"/>
+                </a:solidFill>
+                <a:latin typeface="Calibri" pitchFamily="34" charset="0"/>
+                <a:ea typeface="Calibri" pitchFamily="34" charset="-122"/>
+                <a:cs typeface="Calibri" pitchFamily="34" charset="-120"/>
+              </a:rPr>
+              <a:t>РОЗДІЛ 2 · ОГЛЯД ЛІТЕРАТУРИ (АНАЛОГІВ)</a:t>
+            </a:r>
+            <a:endParaRPr lang="en-US" sz="850" dirty="0"/>
+          </a:p>
+        </p:txBody>
+      </p:sp>
+      <p:sp>
+        <p:nvSpPr>
+          <p:cNvPr id="3" name="Shape 1"/>
           <p:cNvSpPr/>
           <p:nvPr/>
         </p:nvSpPr>
@@ -21126,7 +21555,7 @@
       </p:sp>
       <p:sp>
         <p:nvSpPr>
-          <p:cNvPr id="3" name="Text 1"/>
+          <p:cNvPr id="4" name="Text 2"/>
           <p:cNvSpPr/>
           <p:nvPr/>
         </p:nvSpPr>
@@ -21165,7 +21594,7 @@
       </p:sp>
       <p:sp>
         <p:nvSpPr>
-          <p:cNvPr id="4" name="Shape 2"/>
+          <p:cNvPr id="5" name="Shape 3"/>
           <p:cNvSpPr/>
           <p:nvPr/>
         </p:nvSpPr>
@@ -21185,7 +21614,7 @@
       </p:sp>
       <p:sp>
         <p:nvSpPr>
-          <p:cNvPr id="5" name="Text 3"/>
+          <p:cNvPr id="6" name="Text 4"/>
           <p:cNvSpPr/>
           <p:nvPr/>
         </p:nvSpPr>
@@ -21224,7 +21653,7 @@
       </p:sp>
       <p:sp>
         <p:nvSpPr>
-          <p:cNvPr id="6" name="Shape 4"/>
+          <p:cNvPr id="7" name="Shape 5"/>
           <p:cNvSpPr/>
           <p:nvPr/>
         </p:nvSpPr>
@@ -21249,7 +21678,7 @@
       </p:sp>
       <p:sp>
         <p:nvSpPr>
-          <p:cNvPr id="7" name="Text 5"/>
+          <p:cNvPr id="8" name="Text 6"/>
           <p:cNvSpPr/>
           <p:nvPr/>
         </p:nvSpPr>
@@ -21288,7 +21717,7 @@
       </p:sp>
       <p:sp>
         <p:nvSpPr>
-          <p:cNvPr id="8" name="Text 6"/>
+          <p:cNvPr id="9" name="Text 7"/>
           <p:cNvSpPr/>
           <p:nvPr/>
         </p:nvSpPr>
@@ -21327,7 +21756,7 @@
       </p:sp>
       <p:sp>
         <p:nvSpPr>
-          <p:cNvPr id="9" name="Text 7"/>
+          <p:cNvPr id="10" name="Text 8"/>
           <p:cNvSpPr/>
           <p:nvPr/>
         </p:nvSpPr>
@@ -21383,7 +21812,7 @@
       </p:sp>
       <p:sp>
         <p:nvSpPr>
-          <p:cNvPr id="10" name="Text 8"/>
+          <p:cNvPr id="11" name="Text 9"/>
           <p:cNvSpPr/>
           <p:nvPr/>
         </p:nvSpPr>
@@ -21422,7 +21851,7 @@
       </p:sp>
       <p:sp>
         <p:nvSpPr>
-          <p:cNvPr id="11" name="Shape 9"/>
+          <p:cNvPr id="12" name="Shape 10"/>
           <p:cNvSpPr/>
           <p:nvPr/>
         </p:nvSpPr>
@@ -21447,7 +21876,7 @@
       </p:sp>
       <p:sp>
         <p:nvSpPr>
-          <p:cNvPr id="12" name="Text 10"/>
+          <p:cNvPr id="13" name="Text 11"/>
           <p:cNvSpPr/>
           <p:nvPr/>
         </p:nvSpPr>
@@ -21486,7 +21915,7 @@
       </p:sp>
       <p:sp>
         <p:nvSpPr>
-          <p:cNvPr id="13" name="Text 11"/>
+          <p:cNvPr id="14" name="Text 12"/>
           <p:cNvSpPr/>
           <p:nvPr/>
         </p:nvSpPr>
@@ -21525,7 +21954,7 @@
       </p:sp>
       <p:sp>
         <p:nvSpPr>
-          <p:cNvPr id="14" name="Text 12"/>
+          <p:cNvPr id="15" name="Text 13"/>
           <p:cNvSpPr/>
           <p:nvPr/>
         </p:nvSpPr>
@@ -21581,7 +22010,7 @@
       </p:sp>
       <p:sp>
         <p:nvSpPr>
-          <p:cNvPr id="15" name="Text 13"/>
+          <p:cNvPr id="16" name="Text 14"/>
           <p:cNvSpPr/>
           <p:nvPr/>
         </p:nvSpPr>
@@ -21620,7 +22049,7 @@
       </p:sp>
       <p:sp>
         <p:nvSpPr>
-          <p:cNvPr id="16" name="Shape 14"/>
+          <p:cNvPr id="17" name="Shape 15"/>
           <p:cNvSpPr/>
           <p:nvPr/>
         </p:nvSpPr>
@@ -21645,7 +22074,7 @@
       </p:sp>
       <p:sp>
         <p:nvSpPr>
-          <p:cNvPr id="17" name="Text 15"/>
+          <p:cNvPr id="18" name="Text 16"/>
           <p:cNvSpPr/>
           <p:nvPr/>
         </p:nvSpPr>
@@ -21684,7 +22113,7 @@
       </p:sp>
       <p:sp>
         <p:nvSpPr>
-          <p:cNvPr id="18" name="Text 16"/>
+          <p:cNvPr id="19" name="Text 17"/>
           <p:cNvSpPr/>
           <p:nvPr/>
         </p:nvSpPr>
@@ -21723,7 +22152,7 @@
       </p:sp>
       <p:sp>
         <p:nvSpPr>
-          <p:cNvPr id="19" name="Text 17"/>
+          <p:cNvPr id="20" name="Text 18"/>
           <p:cNvSpPr/>
           <p:nvPr/>
         </p:nvSpPr>
@@ -21779,7 +22208,7 @@
       </p:sp>
       <p:sp>
         <p:nvSpPr>
-          <p:cNvPr id="20" name="Text 18"/>
+          <p:cNvPr id="21" name="Text 19"/>
           <p:cNvSpPr/>
           <p:nvPr/>
         </p:nvSpPr>
@@ -21818,7 +22247,7 @@
       </p:sp>
       <p:sp>
         <p:nvSpPr>
-          <p:cNvPr id="21" name="Shape 19"/>
+          <p:cNvPr id="22" name="Shape 20"/>
           <p:cNvSpPr/>
           <p:nvPr/>
         </p:nvSpPr>
@@ -21843,7 +22272,7 @@
       </p:sp>
       <p:sp>
         <p:nvSpPr>
-          <p:cNvPr id="22" name="Text 20"/>
+          <p:cNvPr id="23" name="Text 21"/>
           <p:cNvSpPr/>
           <p:nvPr/>
         </p:nvSpPr>
@@ -21882,7 +22311,7 @@
       </p:sp>
       <p:sp>
         <p:nvSpPr>
-          <p:cNvPr id="23" name="Text 21"/>
+          <p:cNvPr id="24" name="Text 22"/>
           <p:cNvSpPr/>
           <p:nvPr/>
         </p:nvSpPr>
@@ -21921,7 +22350,7 @@
       </p:sp>
       <p:sp>
         <p:nvSpPr>
-          <p:cNvPr id="24" name="Text 22"/>
+          <p:cNvPr id="25" name="Text 23"/>
           <p:cNvSpPr/>
           <p:nvPr/>
         </p:nvSpPr>
@@ -21977,7 +22406,7 @@
       </p:sp>
       <p:sp>
         <p:nvSpPr>
-          <p:cNvPr id="25" name="Text 23"/>
+          <p:cNvPr id="26" name="Text 24"/>
           <p:cNvSpPr/>
           <p:nvPr/>
         </p:nvSpPr>
@@ -22016,7 +22445,7 @@
       </p:sp>
       <p:sp>
         <p:nvSpPr>
-          <p:cNvPr id="26" name="Shape 24"/>
+          <p:cNvPr id="27" name="Shape 25"/>
           <p:cNvSpPr/>
           <p:nvPr/>
         </p:nvSpPr>
@@ -22041,7 +22470,7 @@
       </p:sp>
       <p:sp>
         <p:nvSpPr>
-          <p:cNvPr id="27" name="Text 25"/>
+          <p:cNvPr id="28" name="Text 26"/>
           <p:cNvSpPr/>
           <p:nvPr/>
         </p:nvSpPr>
@@ -22080,7 +22509,7 @@
       </p:sp>
       <p:sp>
         <p:nvSpPr>
-          <p:cNvPr id="28" name="Text 26"/>
+          <p:cNvPr id="29" name="Text 27"/>
           <p:cNvSpPr/>
           <p:nvPr/>
         </p:nvSpPr>
@@ -22119,7 +22548,7 @@
       </p:sp>
       <p:sp>
         <p:nvSpPr>
-          <p:cNvPr id="29" name="Text 27"/>
+          <p:cNvPr id="30" name="Text 28"/>
           <p:cNvSpPr/>
           <p:nvPr/>
         </p:nvSpPr>
@@ -22175,7 +22604,7 @@
       </p:sp>
       <p:sp>
         <p:nvSpPr>
-          <p:cNvPr id="30" name="Text 28"/>
+          <p:cNvPr id="31" name="Text 29"/>
           <p:cNvSpPr/>
           <p:nvPr/>
         </p:nvSpPr>
@@ -22214,7 +22643,7 @@
       </p:sp>
       <p:sp>
         <p:nvSpPr>
-          <p:cNvPr id="31" name="Shape 29"/>
+          <p:cNvPr id="32" name="Shape 30"/>
           <p:cNvSpPr/>
           <p:nvPr/>
         </p:nvSpPr>
@@ -22239,7 +22668,7 @@
       </p:sp>
       <p:sp>
         <p:nvSpPr>
-          <p:cNvPr id="32" name="Text 30"/>
+          <p:cNvPr id="33" name="Text 31"/>
           <p:cNvSpPr/>
           <p:nvPr/>
         </p:nvSpPr>
@@ -22278,7 +22707,7 @@
       </p:sp>
       <p:sp>
         <p:nvSpPr>
-          <p:cNvPr id="33" name="Text 31"/>
+          <p:cNvPr id="34" name="Text 32"/>
           <p:cNvSpPr/>
           <p:nvPr/>
         </p:nvSpPr>
@@ -22317,7 +22746,7 @@
       </p:sp>
       <p:sp>
         <p:nvSpPr>
-          <p:cNvPr id="34" name="Text 32"/>
+          <p:cNvPr id="35" name="Text 33"/>
           <p:cNvSpPr/>
           <p:nvPr/>
         </p:nvSpPr>
@@ -22373,7 +22802,7 @@
       </p:sp>
       <p:sp>
         <p:nvSpPr>
-          <p:cNvPr id="35" name="Shape 33"/>
+          <p:cNvPr id="36" name="Shape 34"/>
           <p:cNvSpPr/>
           <p:nvPr/>
         </p:nvSpPr>
@@ -22407,7 +22836,7 @@
       </p:sp>
       <p:pic>
         <p:nvPicPr>
-          <p:cNvPr id="36" name="Image 0" descr="preencoded.png">    </p:cNvPr>
+          <p:cNvPr id="37" name="Image 0" descr="preencoded.png">    </p:cNvPr>
           <p:cNvPicPr>
             <a:picLocks noChangeAspect="1"/>
           </p:cNvPicPr>
@@ -22431,7 +22860,7 @@
       </p:pic>
       <p:sp>
         <p:nvSpPr>
-          <p:cNvPr id="37" name="Text 34"/>
+          <p:cNvPr id="38" name="Text 35"/>
           <p:cNvSpPr/>
           <p:nvPr/>
         </p:nvSpPr>
@@ -22512,7 +22941,7 @@
       </p:sp>
       <p:sp>
         <p:nvSpPr>
-          <p:cNvPr id="38" name="Shape 35"/>
+          <p:cNvPr id="39" name="Shape 36"/>
           <p:cNvSpPr/>
           <p:nvPr/>
         </p:nvSpPr>
@@ -22539,7 +22968,7 @@
       </p:sp>
       <p:sp>
         <p:nvSpPr>
-          <p:cNvPr id="39" name="Text 36"/>
+          <p:cNvPr id="40" name="Text 37"/>
           <p:cNvSpPr/>
           <p:nvPr/>
         </p:nvSpPr>
@@ -22620,7 +23049,7 @@
       </p:sp>
       <p:sp>
         <p:nvSpPr>
-          <p:cNvPr id="40" name="Text 37"/>
+          <p:cNvPr id="41" name="Text 38"/>
           <p:cNvSpPr/>
           <p:nvPr/>
         </p:nvSpPr>
@@ -22659,7 +23088,7 @@
       </p:sp>
       <p:sp>
         <p:nvSpPr>
-          <p:cNvPr id="41" name="Text 38"/>
+          <p:cNvPr id="42" name="Text 39"/>
           <p:cNvSpPr/>
           <p:nvPr/>
         </p:nvSpPr>
@@ -22730,7 +23159,46 @@
       </p:grpSpPr>
       <p:sp>
         <p:nvSpPr>
-          <p:cNvPr id="2" name="Shape 0"/>
+          <p:cNvPr id="2" name="Text 0"/>
+          <p:cNvSpPr/>
+          <p:nvPr/>
+        </p:nvSpPr>
+        <p:spPr>
+          <a:xfrm>
+            <a:off x="411480" y="91440"/>
+            <a:ext cx="8321040" cy="182880"/>
+          </a:xfrm>
+          <a:prstGeom prst="rect">
+            <a:avLst/>
+          </a:prstGeom>
+          <a:noFill/>
+          <a:ln/>
+        </p:spPr>
+        <p:txBody>
+          <a:bodyPr wrap="square" lIns="0" tIns="0" rIns="0" bIns="0" rtlCol="0" anchor="ctr"/>
+          <a:lstStyle/>
+          <a:p>
+            <a:pPr algn="l" indent="0" marL="0">
+              <a:buNone/>
+            </a:pPr>
+            <a:r>
+              <a:rPr lang="en-US" sz="850" b="1" spc="300" kern="0" dirty="0">
+                <a:solidFill>
+                  <a:srgbClr val="64748B"/>
+                </a:solidFill>
+                <a:latin typeface="Calibri" pitchFamily="34" charset="0"/>
+                <a:ea typeface="Calibri" pitchFamily="34" charset="-122"/>
+                <a:cs typeface="Calibri" pitchFamily="34" charset="-120"/>
+              </a:rPr>
+              <a:t>РОЗДІЛ 3 · ПОСТАНОВКА ЗАДАЧІ</a:t>
+            </a:r>
+            <a:endParaRPr lang="en-US" sz="850" dirty="0"/>
+          </a:p>
+        </p:txBody>
+      </p:sp>
+      <p:sp>
+        <p:nvSpPr>
+          <p:cNvPr id="3" name="Shape 1"/>
           <p:cNvSpPr/>
           <p:nvPr/>
         </p:nvSpPr>
@@ -22750,7 +23218,7 @@
       </p:sp>
       <p:sp>
         <p:nvSpPr>
-          <p:cNvPr id="3" name="Text 1"/>
+          <p:cNvPr id="4" name="Text 2"/>
           <p:cNvSpPr/>
           <p:nvPr/>
         </p:nvSpPr>
@@ -22789,7 +23257,7 @@
       </p:sp>
       <p:sp>
         <p:nvSpPr>
-          <p:cNvPr id="4" name="Shape 2"/>
+          <p:cNvPr id="5" name="Shape 3"/>
           <p:cNvSpPr/>
           <p:nvPr/>
         </p:nvSpPr>
@@ -22811,7 +23279,7 @@
       </p:sp>
       <p:sp>
         <p:nvSpPr>
-          <p:cNvPr id="5" name="Text 3"/>
+          <p:cNvPr id="6" name="Text 4"/>
           <p:cNvSpPr/>
           <p:nvPr/>
         </p:nvSpPr>
@@ -22850,7 +23318,7 @@
       </p:sp>
       <p:sp>
         <p:nvSpPr>
-          <p:cNvPr id="6" name="Text 4"/>
+          <p:cNvPr id="7" name="Text 5"/>
           <p:cNvSpPr/>
           <p:nvPr/>
         </p:nvSpPr>
@@ -22892,7 +23360,7 @@
       </p:sp>
       <p:sp>
         <p:nvSpPr>
-          <p:cNvPr id="7" name="Shape 5"/>
+          <p:cNvPr id="8" name="Shape 6"/>
           <p:cNvSpPr/>
           <p:nvPr/>
         </p:nvSpPr>
@@ -22912,7 +23380,7 @@
       </p:sp>
       <p:sp>
         <p:nvSpPr>
-          <p:cNvPr id="8" name="Text 6"/>
+          <p:cNvPr id="9" name="Text 7"/>
           <p:cNvSpPr/>
           <p:nvPr/>
         </p:nvSpPr>
@@ -22951,7 +23419,7 @@
       </p:sp>
       <p:sp>
         <p:nvSpPr>
-          <p:cNvPr id="9" name="Shape 7"/>
+          <p:cNvPr id="10" name="Shape 8"/>
           <p:cNvSpPr/>
           <p:nvPr/>
         </p:nvSpPr>
@@ -22971,7 +23439,7 @@
       </p:sp>
       <p:sp>
         <p:nvSpPr>
-          <p:cNvPr id="10" name="Text 8"/>
+          <p:cNvPr id="11" name="Text 9"/>
           <p:cNvSpPr/>
           <p:nvPr/>
         </p:nvSpPr>
@@ -23010,7 +23478,7 @@
       </p:sp>
       <p:sp>
         <p:nvSpPr>
-          <p:cNvPr id="11" name="Shape 9"/>
+          <p:cNvPr id="12" name="Shape 10"/>
           <p:cNvSpPr/>
           <p:nvPr/>
         </p:nvSpPr>
@@ -23030,7 +23498,7 @@
       </p:sp>
       <p:sp>
         <p:nvSpPr>
-          <p:cNvPr id="12" name="Text 10"/>
+          <p:cNvPr id="13" name="Text 11"/>
           <p:cNvSpPr/>
           <p:nvPr/>
         </p:nvSpPr>
@@ -23069,7 +23537,7 @@
       </p:sp>
       <p:sp>
         <p:nvSpPr>
-          <p:cNvPr id="13" name="Shape 11"/>
+          <p:cNvPr id="14" name="Shape 12"/>
           <p:cNvSpPr/>
           <p:nvPr/>
         </p:nvSpPr>
@@ -23089,7 +23557,7 @@
       </p:sp>
       <p:sp>
         <p:nvSpPr>
-          <p:cNvPr id="14" name="Text 12"/>
+          <p:cNvPr id="15" name="Text 13"/>
           <p:cNvSpPr/>
           <p:nvPr/>
         </p:nvSpPr>
@@ -23128,7 +23596,7 @@
       </p:sp>
       <p:sp>
         <p:nvSpPr>
-          <p:cNvPr id="15" name="Shape 13"/>
+          <p:cNvPr id="16" name="Shape 14"/>
           <p:cNvSpPr/>
           <p:nvPr/>
         </p:nvSpPr>
@@ -23148,7 +23616,7 @@
       </p:sp>
       <p:sp>
         <p:nvSpPr>
-          <p:cNvPr id="16" name="Text 14"/>
+          <p:cNvPr id="17" name="Text 15"/>
           <p:cNvSpPr/>
           <p:nvPr/>
         </p:nvSpPr>
@@ -23187,7 +23655,7 @@
       </p:sp>
       <p:sp>
         <p:nvSpPr>
-          <p:cNvPr id="17" name="Text 15"/>
+          <p:cNvPr id="18" name="Text 16"/>
           <p:cNvSpPr/>
           <p:nvPr/>
         </p:nvSpPr>
@@ -23226,7 +23694,7 @@
       </p:sp>
       <p:sp>
         <p:nvSpPr>
-          <p:cNvPr id="18" name="Shape 16"/>
+          <p:cNvPr id="19" name="Shape 17"/>
           <p:cNvSpPr/>
           <p:nvPr/>
         </p:nvSpPr>
@@ -23260,7 +23728,7 @@
       </p:sp>
       <p:sp>
         <p:nvSpPr>
-          <p:cNvPr id="19" name="Shape 17"/>
+          <p:cNvPr id="20" name="Shape 18"/>
           <p:cNvSpPr/>
           <p:nvPr/>
         </p:nvSpPr>
@@ -23280,7 +23748,7 @@
       </p:sp>
       <p:sp>
         <p:nvSpPr>
-          <p:cNvPr id="20" name="Text 18"/>
+          <p:cNvPr id="21" name="Text 19"/>
           <p:cNvSpPr/>
           <p:nvPr/>
         </p:nvSpPr>
@@ -23319,7 +23787,7 @@
       </p:sp>
       <p:sp>
         <p:nvSpPr>
-          <p:cNvPr id="21" name="Text 19"/>
+          <p:cNvPr id="22" name="Text 20"/>
           <p:cNvSpPr/>
           <p:nvPr/>
         </p:nvSpPr>
@@ -23358,7 +23826,7 @@
       </p:sp>
       <p:sp>
         <p:nvSpPr>
-          <p:cNvPr id="22" name="Shape 20"/>
+          <p:cNvPr id="23" name="Shape 21"/>
           <p:cNvSpPr/>
           <p:nvPr/>
         </p:nvSpPr>
@@ -23392,7 +23860,7 @@
       </p:sp>
       <p:sp>
         <p:nvSpPr>
-          <p:cNvPr id="23" name="Shape 21"/>
+          <p:cNvPr id="24" name="Shape 22"/>
           <p:cNvSpPr/>
           <p:nvPr/>
         </p:nvSpPr>
@@ -23412,7 +23880,7 @@
       </p:sp>
       <p:sp>
         <p:nvSpPr>
-          <p:cNvPr id="24" name="Text 22"/>
+          <p:cNvPr id="25" name="Text 23"/>
           <p:cNvSpPr/>
           <p:nvPr/>
         </p:nvSpPr>
@@ -23451,7 +23919,7 @@
       </p:sp>
       <p:sp>
         <p:nvSpPr>
-          <p:cNvPr id="25" name="Text 23"/>
+          <p:cNvPr id="26" name="Text 24"/>
           <p:cNvSpPr/>
           <p:nvPr/>
         </p:nvSpPr>
@@ -23490,7 +23958,7 @@
       </p:sp>
       <p:sp>
         <p:nvSpPr>
-          <p:cNvPr id="26" name="Shape 24"/>
+          <p:cNvPr id="27" name="Shape 25"/>
           <p:cNvSpPr/>
           <p:nvPr/>
         </p:nvSpPr>
@@ -23524,7 +23992,7 @@
       </p:sp>
       <p:sp>
         <p:nvSpPr>
-          <p:cNvPr id="27" name="Shape 25"/>
+          <p:cNvPr id="28" name="Shape 26"/>
           <p:cNvSpPr/>
           <p:nvPr/>
         </p:nvSpPr>
@@ -23544,7 +24012,7 @@
       </p:sp>
       <p:sp>
         <p:nvSpPr>
-          <p:cNvPr id="28" name="Text 26"/>
+          <p:cNvPr id="29" name="Text 27"/>
           <p:cNvSpPr/>
           <p:nvPr/>
         </p:nvSpPr>
@@ -23583,7 +24051,7 @@
       </p:sp>
       <p:sp>
         <p:nvSpPr>
-          <p:cNvPr id="29" name="Text 27"/>
+          <p:cNvPr id="30" name="Text 28"/>
           <p:cNvSpPr/>
           <p:nvPr/>
         </p:nvSpPr>
@@ -23622,7 +24090,7 @@
       </p:sp>
       <p:sp>
         <p:nvSpPr>
-          <p:cNvPr id="30" name="Shape 28"/>
+          <p:cNvPr id="31" name="Shape 29"/>
           <p:cNvSpPr/>
           <p:nvPr/>
         </p:nvSpPr>
@@ -23656,7 +24124,7 @@
       </p:sp>
       <p:sp>
         <p:nvSpPr>
-          <p:cNvPr id="31" name="Shape 29"/>
+          <p:cNvPr id="32" name="Shape 30"/>
           <p:cNvSpPr/>
           <p:nvPr/>
         </p:nvSpPr>
@@ -23676,7 +24144,7 @@
       </p:sp>
       <p:sp>
         <p:nvSpPr>
-          <p:cNvPr id="32" name="Text 30"/>
+          <p:cNvPr id="33" name="Text 31"/>
           <p:cNvSpPr/>
           <p:nvPr/>
         </p:nvSpPr>
@@ -23715,7 +24183,7 @@
       </p:sp>
       <p:sp>
         <p:nvSpPr>
-          <p:cNvPr id="33" name="Text 31"/>
+          <p:cNvPr id="34" name="Text 32"/>
           <p:cNvSpPr/>
           <p:nvPr/>
         </p:nvSpPr>
@@ -23754,7 +24222,7 @@
       </p:sp>
       <p:sp>
         <p:nvSpPr>
-          <p:cNvPr id="34" name="Shape 32"/>
+          <p:cNvPr id="35" name="Shape 33"/>
           <p:cNvSpPr/>
           <p:nvPr/>
         </p:nvSpPr>
@@ -23788,7 +24256,7 @@
       </p:sp>
       <p:sp>
         <p:nvSpPr>
-          <p:cNvPr id="35" name="Shape 33"/>
+          <p:cNvPr id="36" name="Shape 34"/>
           <p:cNvSpPr/>
           <p:nvPr/>
         </p:nvSpPr>
@@ -23808,7 +24276,7 @@
       </p:sp>
       <p:sp>
         <p:nvSpPr>
-          <p:cNvPr id="36" name="Text 34"/>
+          <p:cNvPr id="37" name="Text 35"/>
           <p:cNvSpPr/>
           <p:nvPr/>
         </p:nvSpPr>
@@ -23847,7 +24315,7 @@
       </p:sp>
       <p:sp>
         <p:nvSpPr>
-          <p:cNvPr id="37" name="Text 35"/>
+          <p:cNvPr id="38" name="Text 36"/>
           <p:cNvSpPr/>
           <p:nvPr/>
         </p:nvSpPr>
@@ -23886,7 +24354,7 @@
       </p:sp>
       <p:sp>
         <p:nvSpPr>
-          <p:cNvPr id="38" name="Text 36"/>
+          <p:cNvPr id="39" name="Text 37"/>
           <p:cNvSpPr/>
           <p:nvPr/>
         </p:nvSpPr>
@@ -23925,7 +24393,7 @@
       </p:sp>
       <p:sp>
         <p:nvSpPr>
-          <p:cNvPr id="39" name="Text 37"/>
+          <p:cNvPr id="40" name="Text 38"/>
           <p:cNvSpPr/>
           <p:nvPr/>
         </p:nvSpPr>
@@ -23996,7 +24464,46 @@
       </p:grpSpPr>
       <p:sp>
         <p:nvSpPr>
-          <p:cNvPr id="2" name="Shape 0"/>
+          <p:cNvPr id="2" name="Text 0"/>
+          <p:cNvSpPr/>
+          <p:nvPr/>
+        </p:nvSpPr>
+        <p:spPr>
+          <a:xfrm>
+            <a:off x="411480" y="91440"/>
+            <a:ext cx="8321040" cy="182880"/>
+          </a:xfrm>
+          <a:prstGeom prst="rect">
+            <a:avLst/>
+          </a:prstGeom>
+          <a:noFill/>
+          <a:ln/>
+        </p:spPr>
+        <p:txBody>
+          <a:bodyPr wrap="square" lIns="0" tIns="0" rIns="0" bIns="0" rtlCol="0" anchor="ctr"/>
+          <a:lstStyle/>
+          <a:p>
+            <a:pPr algn="l" indent="0" marL="0">
+              <a:buNone/>
+            </a:pPr>
+            <a:r>
+              <a:rPr lang="en-US" sz="850" b="1" spc="300" kern="0" dirty="0">
+                <a:solidFill>
+                  <a:srgbClr val="64748B"/>
+                </a:solidFill>
+                <a:latin typeface="Calibri" pitchFamily="34" charset="0"/>
+                <a:ea typeface="Calibri" pitchFamily="34" charset="-122"/>
+                <a:cs typeface="Calibri" pitchFamily="34" charset="-120"/>
+              </a:rPr>
+              <a:t>РОЗДІЛ 4 · МЕТОДОЛОГІЯ</a:t>
+            </a:r>
+            <a:endParaRPr lang="en-US" sz="850" dirty="0"/>
+          </a:p>
+        </p:txBody>
+      </p:sp>
+      <p:sp>
+        <p:nvSpPr>
+          <p:cNvPr id="3" name="Shape 1"/>
           <p:cNvSpPr/>
           <p:nvPr/>
         </p:nvSpPr>
@@ -24016,7 +24523,7 @@
       </p:sp>
       <p:sp>
         <p:nvSpPr>
-          <p:cNvPr id="3" name="Text 1"/>
+          <p:cNvPr id="4" name="Text 2"/>
           <p:cNvSpPr/>
           <p:nvPr/>
         </p:nvSpPr>
@@ -24055,7 +24562,7 @@
       </p:sp>
       <p:sp>
         <p:nvSpPr>
-          <p:cNvPr id="4" name="Shape 2"/>
+          <p:cNvPr id="5" name="Shape 3"/>
           <p:cNvSpPr/>
           <p:nvPr/>
         </p:nvSpPr>
@@ -24089,7 +24596,7 @@
       </p:sp>
       <p:sp>
         <p:nvSpPr>
-          <p:cNvPr id="5" name="Shape 3"/>
+          <p:cNvPr id="6" name="Shape 4"/>
           <p:cNvSpPr/>
           <p:nvPr/>
         </p:nvSpPr>
@@ -24109,7 +24616,7 @@
       </p:sp>
       <p:sp>
         <p:nvSpPr>
-          <p:cNvPr id="6" name="Text 4"/>
+          <p:cNvPr id="7" name="Text 5"/>
           <p:cNvSpPr/>
           <p:nvPr/>
         </p:nvSpPr>
@@ -24148,7 +24655,7 @@
       </p:sp>
       <p:sp>
         <p:nvSpPr>
-          <p:cNvPr id="7" name="Text 5"/>
+          <p:cNvPr id="8" name="Text 6"/>
           <p:cNvSpPr/>
           <p:nvPr/>
         </p:nvSpPr>
@@ -24187,7 +24694,7 @@
       </p:sp>
       <p:sp>
         <p:nvSpPr>
-          <p:cNvPr id="8" name="Text 6"/>
+          <p:cNvPr id="9" name="Text 7"/>
           <p:cNvSpPr/>
           <p:nvPr/>
         </p:nvSpPr>
@@ -24226,7 +24733,7 @@
       </p:sp>
       <p:sp>
         <p:nvSpPr>
-          <p:cNvPr id="9" name="Text 7"/>
+          <p:cNvPr id="10" name="Text 8"/>
           <p:cNvSpPr/>
           <p:nvPr/>
         </p:nvSpPr>
@@ -24265,7 +24772,7 @@
       </p:sp>
       <p:sp>
         <p:nvSpPr>
-          <p:cNvPr id="10" name="Text 8"/>
+          <p:cNvPr id="11" name="Text 9"/>
           <p:cNvSpPr/>
           <p:nvPr/>
         </p:nvSpPr>
@@ -24304,7 +24811,7 @@
       </p:sp>
       <p:sp>
         <p:nvSpPr>
-          <p:cNvPr id="11" name="Text 9"/>
+          <p:cNvPr id="12" name="Text 10"/>
           <p:cNvSpPr/>
           <p:nvPr/>
         </p:nvSpPr>
@@ -24343,7 +24850,7 @@
       </p:sp>
       <p:sp>
         <p:nvSpPr>
-          <p:cNvPr id="12" name="Text 10"/>
+          <p:cNvPr id="13" name="Text 11"/>
           <p:cNvSpPr/>
           <p:nvPr/>
         </p:nvSpPr>
@@ -24382,7 +24889,7 @@
       </p:sp>
       <p:sp>
         <p:nvSpPr>
-          <p:cNvPr id="13" name="Text 11"/>
+          <p:cNvPr id="14" name="Text 12"/>
           <p:cNvSpPr/>
           <p:nvPr/>
         </p:nvSpPr>
@@ -24421,7 +24928,7 @@
       </p:sp>
       <p:sp>
         <p:nvSpPr>
-          <p:cNvPr id="14" name="Text 12"/>
+          <p:cNvPr id="15" name="Text 13"/>
           <p:cNvSpPr/>
           <p:nvPr/>
         </p:nvSpPr>
@@ -24460,7 +24967,7 @@
       </p:sp>
       <p:sp>
         <p:nvSpPr>
-          <p:cNvPr id="15" name="Shape 13"/>
+          <p:cNvPr id="16" name="Shape 14"/>
           <p:cNvSpPr/>
           <p:nvPr/>
         </p:nvSpPr>
@@ -24494,7 +25001,7 @@
       </p:sp>
       <p:sp>
         <p:nvSpPr>
-          <p:cNvPr id="16" name="Shape 14"/>
+          <p:cNvPr id="17" name="Shape 15"/>
           <p:cNvSpPr/>
           <p:nvPr/>
         </p:nvSpPr>
@@ -24514,7 +25021,7 @@
       </p:sp>
       <p:sp>
         <p:nvSpPr>
-          <p:cNvPr id="17" name="Text 15"/>
+          <p:cNvPr id="18" name="Text 16"/>
           <p:cNvSpPr/>
           <p:nvPr/>
         </p:nvSpPr>
@@ -24553,7 +25060,7 @@
       </p:sp>
       <p:sp>
         <p:nvSpPr>
-          <p:cNvPr id="18" name="Text 16"/>
+          <p:cNvPr id="19" name="Text 17"/>
           <p:cNvSpPr/>
           <p:nvPr/>
         </p:nvSpPr>
@@ -24592,7 +25099,7 @@
       </p:sp>
       <p:sp>
         <p:nvSpPr>
-          <p:cNvPr id="19" name="Text 17"/>
+          <p:cNvPr id="20" name="Text 18"/>
           <p:cNvSpPr/>
           <p:nvPr/>
         </p:nvSpPr>
@@ -24631,7 +25138,7 @@
       </p:sp>
       <p:sp>
         <p:nvSpPr>
-          <p:cNvPr id="20" name="Text 18"/>
+          <p:cNvPr id="21" name="Text 19"/>
           <p:cNvSpPr/>
           <p:nvPr/>
         </p:nvSpPr>
@@ -24670,7 +25177,7 @@
       </p:sp>
       <p:sp>
         <p:nvSpPr>
-          <p:cNvPr id="21" name="Text 19"/>
+          <p:cNvPr id="22" name="Text 20"/>
           <p:cNvSpPr/>
           <p:nvPr/>
         </p:nvSpPr>
@@ -24709,7 +25216,7 @@
       </p:sp>
       <p:sp>
         <p:nvSpPr>
-          <p:cNvPr id="22" name="Text 20"/>
+          <p:cNvPr id="23" name="Text 21"/>
           <p:cNvSpPr/>
           <p:nvPr/>
         </p:nvSpPr>
@@ -24748,7 +25255,7 @@
       </p:sp>
       <p:sp>
         <p:nvSpPr>
-          <p:cNvPr id="23" name="Text 21"/>
+          <p:cNvPr id="24" name="Text 22"/>
           <p:cNvSpPr/>
           <p:nvPr/>
         </p:nvSpPr>
@@ -24787,7 +25294,7 @@
       </p:sp>
       <p:sp>
         <p:nvSpPr>
-          <p:cNvPr id="24" name="Text 22"/>
+          <p:cNvPr id="25" name="Text 23"/>
           <p:cNvSpPr/>
           <p:nvPr/>
         </p:nvSpPr>
@@ -24826,7 +25333,7 @@
       </p:sp>
       <p:sp>
         <p:nvSpPr>
-          <p:cNvPr id="25" name="Text 23"/>
+          <p:cNvPr id="26" name="Text 24"/>
           <p:cNvSpPr/>
           <p:nvPr/>
         </p:nvSpPr>
@@ -24865,7 +25372,7 @@
       </p:sp>
       <p:sp>
         <p:nvSpPr>
-          <p:cNvPr id="26" name="Shape 24"/>
+          <p:cNvPr id="27" name="Shape 25"/>
           <p:cNvSpPr/>
           <p:nvPr/>
         </p:nvSpPr>
@@ -24899,7 +25406,7 @@
       </p:sp>
       <p:sp>
         <p:nvSpPr>
-          <p:cNvPr id="27" name="Shape 25"/>
+          <p:cNvPr id="28" name="Shape 26"/>
           <p:cNvSpPr/>
           <p:nvPr/>
         </p:nvSpPr>
@@ -24919,7 +25426,7 @@
       </p:sp>
       <p:sp>
         <p:nvSpPr>
-          <p:cNvPr id="28" name="Text 26"/>
+          <p:cNvPr id="29" name="Text 27"/>
           <p:cNvSpPr/>
           <p:nvPr/>
         </p:nvSpPr>
@@ -24958,7 +25465,7 @@
       </p:sp>
       <p:sp>
         <p:nvSpPr>
-          <p:cNvPr id="29" name="Text 27"/>
+          <p:cNvPr id="30" name="Text 28"/>
           <p:cNvSpPr/>
           <p:nvPr/>
         </p:nvSpPr>
@@ -24997,7 +25504,7 @@
       </p:sp>
       <p:sp>
         <p:nvSpPr>
-          <p:cNvPr id="30" name="Text 28"/>
+          <p:cNvPr id="31" name="Text 29"/>
           <p:cNvSpPr/>
           <p:nvPr/>
         </p:nvSpPr>
@@ -25036,7 +25543,7 @@
       </p:sp>
       <p:sp>
         <p:nvSpPr>
-          <p:cNvPr id="31" name="Text 29"/>
+          <p:cNvPr id="32" name="Text 30"/>
           <p:cNvSpPr/>
           <p:nvPr/>
         </p:nvSpPr>
@@ -25075,7 +25582,7 @@
       </p:sp>
       <p:sp>
         <p:nvSpPr>
-          <p:cNvPr id="32" name="Text 30"/>
+          <p:cNvPr id="33" name="Text 31"/>
           <p:cNvSpPr/>
           <p:nvPr/>
         </p:nvSpPr>
@@ -25114,7 +25621,7 @@
       </p:sp>
       <p:sp>
         <p:nvSpPr>
-          <p:cNvPr id="33" name="Text 31"/>
+          <p:cNvPr id="34" name="Text 32"/>
           <p:cNvSpPr/>
           <p:nvPr/>
         </p:nvSpPr>
@@ -25153,7 +25660,7 @@
       </p:sp>
       <p:sp>
         <p:nvSpPr>
-          <p:cNvPr id="34" name="Text 32"/>
+          <p:cNvPr id="35" name="Text 33"/>
           <p:cNvSpPr/>
           <p:nvPr/>
         </p:nvSpPr>
@@ -25192,7 +25699,7 @@
       </p:sp>
       <p:sp>
         <p:nvSpPr>
-          <p:cNvPr id="35" name="Text 33"/>
+          <p:cNvPr id="36" name="Text 34"/>
           <p:cNvSpPr/>
           <p:nvPr/>
         </p:nvSpPr>
@@ -25231,7 +25738,7 @@
       </p:sp>
       <p:sp>
         <p:nvSpPr>
-          <p:cNvPr id="36" name="Text 34"/>
+          <p:cNvPr id="37" name="Text 35"/>
           <p:cNvSpPr/>
           <p:nvPr/>
         </p:nvSpPr>
@@ -25270,7 +25777,7 @@
       </p:sp>
       <p:sp>
         <p:nvSpPr>
-          <p:cNvPr id="37" name="Shape 35"/>
+          <p:cNvPr id="38" name="Shape 36"/>
           <p:cNvSpPr/>
           <p:nvPr/>
         </p:nvSpPr>
@@ -25304,7 +25811,7 @@
       </p:sp>
       <p:sp>
         <p:nvSpPr>
-          <p:cNvPr id="38" name="Shape 36"/>
+          <p:cNvPr id="39" name="Shape 37"/>
           <p:cNvSpPr/>
           <p:nvPr/>
         </p:nvSpPr>
@@ -25324,7 +25831,7 @@
       </p:sp>
       <p:sp>
         <p:nvSpPr>
-          <p:cNvPr id="39" name="Text 37"/>
+          <p:cNvPr id="40" name="Text 38"/>
           <p:cNvSpPr/>
           <p:nvPr/>
         </p:nvSpPr>
@@ -25363,7 +25870,7 @@
       </p:sp>
       <p:sp>
         <p:nvSpPr>
-          <p:cNvPr id="40" name="Text 38"/>
+          <p:cNvPr id="41" name="Text 39"/>
           <p:cNvSpPr/>
           <p:nvPr/>
         </p:nvSpPr>
@@ -25402,7 +25909,7 @@
       </p:sp>
       <p:sp>
         <p:nvSpPr>
-          <p:cNvPr id="41" name="Text 39"/>
+          <p:cNvPr id="42" name="Text 40"/>
           <p:cNvSpPr/>
           <p:nvPr/>
         </p:nvSpPr>
@@ -25441,7 +25948,7 @@
       </p:sp>
       <p:sp>
         <p:nvSpPr>
-          <p:cNvPr id="42" name="Text 40"/>
+          <p:cNvPr id="43" name="Text 41"/>
           <p:cNvSpPr/>
           <p:nvPr/>
         </p:nvSpPr>
@@ -25480,7 +25987,7 @@
       </p:sp>
       <p:sp>
         <p:nvSpPr>
-          <p:cNvPr id="43" name="Text 41"/>
+          <p:cNvPr id="44" name="Text 42"/>
           <p:cNvSpPr/>
           <p:nvPr/>
         </p:nvSpPr>
@@ -25519,7 +26026,7 @@
       </p:sp>
       <p:sp>
         <p:nvSpPr>
-          <p:cNvPr id="44" name="Text 42"/>
+          <p:cNvPr id="45" name="Text 43"/>
           <p:cNvSpPr/>
           <p:nvPr/>
         </p:nvSpPr>
@@ -25558,7 +26065,7 @@
       </p:sp>
       <p:sp>
         <p:nvSpPr>
-          <p:cNvPr id="45" name="Text 43"/>
+          <p:cNvPr id="46" name="Text 44"/>
           <p:cNvSpPr/>
           <p:nvPr/>
         </p:nvSpPr>
@@ -25597,7 +26104,7 @@
       </p:sp>
       <p:sp>
         <p:nvSpPr>
-          <p:cNvPr id="46" name="Text 44"/>
+          <p:cNvPr id="47" name="Text 45"/>
           <p:cNvSpPr/>
           <p:nvPr/>
         </p:nvSpPr>
@@ -25636,7 +26143,7 @@
       </p:sp>
       <p:sp>
         <p:nvSpPr>
-          <p:cNvPr id="47" name="Text 45"/>
+          <p:cNvPr id="48" name="Text 46"/>
           <p:cNvSpPr/>
           <p:nvPr/>
         </p:nvSpPr>
@@ -25675,7 +26182,7 @@
       </p:sp>
       <p:sp>
         <p:nvSpPr>
-          <p:cNvPr id="48" name="Shape 46"/>
+          <p:cNvPr id="49" name="Shape 47"/>
           <p:cNvSpPr/>
           <p:nvPr/>
         </p:nvSpPr>
@@ -25709,7 +26216,7 @@
       </p:sp>
       <p:sp>
         <p:nvSpPr>
-          <p:cNvPr id="49" name="Text 47"/>
+          <p:cNvPr id="50" name="Text 48"/>
           <p:cNvSpPr/>
           <p:nvPr/>
         </p:nvSpPr>
@@ -25748,7 +26255,7 @@
       </p:sp>
       <p:graphicFrame>
         <p:nvGraphicFramePr>
-          <p:cNvPr id="50" name="Chart 0" descr=""/>
+          <p:cNvPr id="51" name="Chart 0" descr=""/>
           <p:cNvGraphicFramePr/>
           <p:nvPr/>
         </p:nvGraphicFramePr>
@@ -25764,7 +26271,7 @@
       </p:graphicFrame>
       <p:sp>
         <p:nvSpPr>
-          <p:cNvPr id="51" name="Text 48"/>
+          <p:cNvPr id="52" name="Text 49"/>
           <p:cNvSpPr/>
           <p:nvPr/>
         </p:nvSpPr>
@@ -25803,7 +26310,7 @@
       </p:sp>
       <p:graphicFrame>
         <p:nvGraphicFramePr>
-          <p:cNvPr id="52" name="Chart 1" descr=""/>
+          <p:cNvPr id="53" name="Chart 1" descr=""/>
           <p:cNvGraphicFramePr/>
           <p:nvPr/>
         </p:nvGraphicFramePr>
@@ -25819,7 +26326,7 @@
       </p:graphicFrame>
       <p:sp>
         <p:nvSpPr>
-          <p:cNvPr id="53" name="Text 49"/>
+          <p:cNvPr id="54" name="Text 50"/>
           <p:cNvSpPr/>
           <p:nvPr/>
         </p:nvSpPr>
@@ -25858,7 +26365,7 @@
       </p:sp>
       <p:sp>
         <p:nvSpPr>
-          <p:cNvPr id="54" name="Text 50"/>
+          <p:cNvPr id="55" name="Text 51"/>
           <p:cNvSpPr/>
           <p:nvPr/>
         </p:nvSpPr>
@@ -25929,7 +26436,46 @@
       </p:grpSpPr>
       <p:sp>
         <p:nvSpPr>
-          <p:cNvPr id="2" name="Shape 0"/>
+          <p:cNvPr id="2" name="Text 0"/>
+          <p:cNvSpPr/>
+          <p:nvPr/>
+        </p:nvSpPr>
+        <p:spPr>
+          <a:xfrm>
+            <a:off x="411480" y="91440"/>
+            <a:ext cx="8321040" cy="182880"/>
+          </a:xfrm>
+          <a:prstGeom prst="rect">
+            <a:avLst/>
+          </a:prstGeom>
+          <a:noFill/>
+          <a:ln/>
+        </p:spPr>
+        <p:txBody>
+          <a:bodyPr wrap="square" lIns="0" tIns="0" rIns="0" bIns="0" rtlCol="0" anchor="ctr"/>
+          <a:lstStyle/>
+          <a:p>
+            <a:pPr algn="l" indent="0" marL="0">
+              <a:buNone/>
+            </a:pPr>
+            <a:r>
+              <a:rPr lang="en-US" sz="850" b="1" spc="300" kern="0" dirty="0">
+                <a:solidFill>
+                  <a:srgbClr val="64748B"/>
+                </a:solidFill>
+                <a:latin typeface="Calibri" pitchFamily="34" charset="0"/>
+                <a:ea typeface="Calibri" pitchFamily="34" charset="-122"/>
+                <a:cs typeface="Calibri" pitchFamily="34" charset="-120"/>
+              </a:rPr>
+              <a:t>РОЗДІЛ 4 · МЕТОДОЛОГІЯ</a:t>
+            </a:r>
+            <a:endParaRPr lang="en-US" sz="850" dirty="0"/>
+          </a:p>
+        </p:txBody>
+      </p:sp>
+      <p:sp>
+        <p:nvSpPr>
+          <p:cNvPr id="3" name="Shape 1"/>
           <p:cNvSpPr/>
           <p:nvPr/>
         </p:nvSpPr>
@@ -25949,7 +26495,7 @@
       </p:sp>
       <p:sp>
         <p:nvSpPr>
-          <p:cNvPr id="3" name="Text 1"/>
+          <p:cNvPr id="4" name="Text 2"/>
           <p:cNvSpPr/>
           <p:nvPr/>
         </p:nvSpPr>
@@ -25988,7 +26534,7 @@
       </p:sp>
       <p:sp>
         <p:nvSpPr>
-          <p:cNvPr id="4" name="Text 2"/>
+          <p:cNvPr id="5" name="Text 3"/>
           <p:cNvSpPr/>
           <p:nvPr/>
         </p:nvSpPr>
@@ -26027,7 +26573,7 @@
       </p:sp>
       <p:sp>
         <p:nvSpPr>
-          <p:cNvPr id="5" name="Shape 3"/>
+          <p:cNvPr id="6" name="Shape 4"/>
           <p:cNvSpPr/>
           <p:nvPr/>
         </p:nvSpPr>
@@ -26061,7 +26607,7 @@
       </p:sp>
       <p:sp>
         <p:nvSpPr>
-          <p:cNvPr id="6" name="Shape 4"/>
+          <p:cNvPr id="7" name="Shape 5"/>
           <p:cNvSpPr/>
           <p:nvPr/>
         </p:nvSpPr>
@@ -26081,7 +26627,7 @@
       </p:sp>
       <p:sp>
         <p:nvSpPr>
-          <p:cNvPr id="7" name="Text 5"/>
+          <p:cNvPr id="8" name="Text 6"/>
           <p:cNvSpPr/>
           <p:nvPr/>
         </p:nvSpPr>
@@ -26134,7 +26680,7 @@
       </p:sp>
       <p:sp>
         <p:nvSpPr>
-          <p:cNvPr id="8" name="Text 6"/>
+          <p:cNvPr id="9" name="Text 7"/>
           <p:cNvSpPr/>
           <p:nvPr/>
         </p:nvSpPr>
@@ -26190,7 +26736,7 @@
       </p:sp>
       <p:sp>
         <p:nvSpPr>
-          <p:cNvPr id="9" name="Shape 7"/>
+          <p:cNvPr id="10" name="Shape 8"/>
           <p:cNvSpPr/>
           <p:nvPr/>
         </p:nvSpPr>
@@ -26224,7 +26770,7 @@
       </p:sp>
       <p:sp>
         <p:nvSpPr>
-          <p:cNvPr id="10" name="Shape 8"/>
+          <p:cNvPr id="11" name="Shape 9"/>
           <p:cNvSpPr/>
           <p:nvPr/>
         </p:nvSpPr>
@@ -26244,7 +26790,7 @@
       </p:sp>
       <p:sp>
         <p:nvSpPr>
-          <p:cNvPr id="11" name="Text 9"/>
+          <p:cNvPr id="12" name="Text 10"/>
           <p:cNvSpPr/>
           <p:nvPr/>
         </p:nvSpPr>
@@ -26297,7 +26843,7 @@
       </p:sp>
       <p:sp>
         <p:nvSpPr>
-          <p:cNvPr id="12" name="Text 10"/>
+          <p:cNvPr id="13" name="Text 11"/>
           <p:cNvSpPr/>
           <p:nvPr/>
         </p:nvSpPr>
@@ -26353,7 +26899,7 @@
       </p:sp>
       <p:sp>
         <p:nvSpPr>
-          <p:cNvPr id="13" name="Shape 11"/>
+          <p:cNvPr id="14" name="Shape 12"/>
           <p:cNvSpPr/>
           <p:nvPr/>
         </p:nvSpPr>
@@ -26387,7 +26933,7 @@
       </p:sp>
       <p:sp>
         <p:nvSpPr>
-          <p:cNvPr id="14" name="Shape 12"/>
+          <p:cNvPr id="15" name="Shape 13"/>
           <p:cNvSpPr/>
           <p:nvPr/>
         </p:nvSpPr>
@@ -26407,7 +26953,7 @@
       </p:sp>
       <p:sp>
         <p:nvSpPr>
-          <p:cNvPr id="15" name="Text 13"/>
+          <p:cNvPr id="16" name="Text 14"/>
           <p:cNvSpPr/>
           <p:nvPr/>
         </p:nvSpPr>
@@ -26460,7 +27006,7 @@
       </p:sp>
       <p:sp>
         <p:nvSpPr>
-          <p:cNvPr id="16" name="Text 14"/>
+          <p:cNvPr id="17" name="Text 15"/>
           <p:cNvSpPr/>
           <p:nvPr/>
         </p:nvSpPr>
@@ -26516,7 +27062,7 @@
       </p:sp>
       <p:sp>
         <p:nvSpPr>
-          <p:cNvPr id="17" name="Shape 15"/>
+          <p:cNvPr id="18" name="Shape 16"/>
           <p:cNvSpPr/>
           <p:nvPr/>
         </p:nvSpPr>
@@ -26550,7 +27096,7 @@
       </p:sp>
       <p:sp>
         <p:nvSpPr>
-          <p:cNvPr id="18" name="Shape 16"/>
+          <p:cNvPr id="19" name="Shape 17"/>
           <p:cNvSpPr/>
           <p:nvPr/>
         </p:nvSpPr>
@@ -26570,7 +27116,7 @@
       </p:sp>
       <p:sp>
         <p:nvSpPr>
-          <p:cNvPr id="19" name="Text 17"/>
+          <p:cNvPr id="20" name="Text 18"/>
           <p:cNvSpPr/>
           <p:nvPr/>
         </p:nvSpPr>
@@ -26623,7 +27169,7 @@
       </p:sp>
       <p:sp>
         <p:nvSpPr>
-          <p:cNvPr id="20" name="Text 18"/>
+          <p:cNvPr id="21" name="Text 19"/>
           <p:cNvSpPr/>
           <p:nvPr/>
         </p:nvSpPr>
@@ -26679,7 +27225,7 @@
       </p:sp>
       <p:sp>
         <p:nvSpPr>
-          <p:cNvPr id="21" name="Shape 19"/>
+          <p:cNvPr id="22" name="Shape 20"/>
           <p:cNvSpPr/>
           <p:nvPr/>
         </p:nvSpPr>
@@ -26713,7 +27259,7 @@
       </p:sp>
       <p:sp>
         <p:nvSpPr>
-          <p:cNvPr id="22" name="Shape 20"/>
+          <p:cNvPr id="23" name="Shape 21"/>
           <p:cNvSpPr/>
           <p:nvPr/>
         </p:nvSpPr>
@@ -26733,7 +27279,7 @@
       </p:sp>
       <p:sp>
         <p:nvSpPr>
-          <p:cNvPr id="23" name="Text 21"/>
+          <p:cNvPr id="24" name="Text 22"/>
           <p:cNvSpPr/>
           <p:nvPr/>
         </p:nvSpPr>
@@ -26786,7 +27332,7 @@
       </p:sp>
       <p:sp>
         <p:nvSpPr>
-          <p:cNvPr id="24" name="Text 22"/>
+          <p:cNvPr id="25" name="Text 23"/>
           <p:cNvSpPr/>
           <p:nvPr/>
         </p:nvSpPr>
@@ -26842,7 +27388,7 @@
       </p:sp>
       <p:sp>
         <p:nvSpPr>
-          <p:cNvPr id="25" name="Text 23"/>
+          <p:cNvPr id="26" name="Text 24"/>
           <p:cNvSpPr/>
           <p:nvPr/>
         </p:nvSpPr>
@@ -26881,7 +27427,7 @@
       </p:sp>
       <p:sp>
         <p:nvSpPr>
-          <p:cNvPr id="26" name="Shape 24"/>
+          <p:cNvPr id="27" name="Shape 25"/>
           <p:cNvSpPr/>
           <p:nvPr/>
         </p:nvSpPr>
@@ -26915,7 +27461,7 @@
       </p:sp>
       <p:sp>
         <p:nvSpPr>
-          <p:cNvPr id="27" name="Shape 25"/>
+          <p:cNvPr id="28" name="Shape 26"/>
           <p:cNvSpPr/>
           <p:nvPr/>
         </p:nvSpPr>
@@ -26940,7 +27486,7 @@
       </p:sp>
       <p:pic>
         <p:nvPicPr>
-          <p:cNvPr id="28" name="Image 0" descr="preencoded.png">    </p:cNvPr>
+          <p:cNvPr id="29" name="Image 0" descr="preencoded.png">    </p:cNvPr>
           <p:cNvPicPr>
             <a:picLocks noChangeAspect="1"/>
           </p:cNvPicPr>
@@ -26964,7 +27510,7 @@
       </p:pic>
       <p:sp>
         <p:nvSpPr>
-          <p:cNvPr id="29" name="Text 26"/>
+          <p:cNvPr id="30" name="Text 27"/>
           <p:cNvSpPr/>
           <p:nvPr/>
         </p:nvSpPr>
@@ -27003,7 +27549,7 @@
       </p:sp>
       <p:sp>
         <p:nvSpPr>
-          <p:cNvPr id="30" name="Text 27"/>
+          <p:cNvPr id="31" name="Text 28"/>
           <p:cNvSpPr/>
           <p:nvPr/>
         </p:nvSpPr>
@@ -27042,7 +27588,7 @@
       </p:sp>
       <p:sp>
         <p:nvSpPr>
-          <p:cNvPr id="31" name="Text 28"/>
+          <p:cNvPr id="32" name="Text 29"/>
           <p:cNvSpPr/>
           <p:nvPr/>
         </p:nvSpPr>
@@ -27081,7 +27627,7 @@
       </p:sp>
       <p:sp>
         <p:nvSpPr>
-          <p:cNvPr id="32" name="Shape 29"/>
+          <p:cNvPr id="33" name="Shape 30"/>
           <p:cNvSpPr/>
           <p:nvPr/>
         </p:nvSpPr>
@@ -27115,7 +27661,7 @@
       </p:sp>
       <p:sp>
         <p:nvSpPr>
-          <p:cNvPr id="33" name="Shape 30"/>
+          <p:cNvPr id="34" name="Shape 31"/>
           <p:cNvSpPr/>
           <p:nvPr/>
         </p:nvSpPr>
@@ -27140,7 +27686,7 @@
       </p:sp>
       <p:pic>
         <p:nvPicPr>
-          <p:cNvPr id="34" name="Image 1" descr="preencoded.png">    </p:cNvPr>
+          <p:cNvPr id="35" name="Image 1" descr="preencoded.png">    </p:cNvPr>
           <p:cNvPicPr>
             <a:picLocks noChangeAspect="1"/>
           </p:cNvPicPr>
@@ -27164,7 +27710,7 @@
       </p:pic>
       <p:sp>
         <p:nvSpPr>
-          <p:cNvPr id="35" name="Text 31"/>
+          <p:cNvPr id="36" name="Text 32"/>
           <p:cNvSpPr/>
           <p:nvPr/>
         </p:nvSpPr>
@@ -27203,7 +27749,7 @@
       </p:sp>
       <p:sp>
         <p:nvSpPr>
-          <p:cNvPr id="36" name="Text 32"/>
+          <p:cNvPr id="37" name="Text 33"/>
           <p:cNvSpPr/>
           <p:nvPr/>
         </p:nvSpPr>
@@ -27242,7 +27788,7 @@
       </p:sp>
       <p:sp>
         <p:nvSpPr>
-          <p:cNvPr id="37" name="Text 33"/>
+          <p:cNvPr id="38" name="Text 34"/>
           <p:cNvSpPr/>
           <p:nvPr/>
         </p:nvSpPr>
@@ -27281,7 +27827,7 @@
       </p:sp>
       <p:sp>
         <p:nvSpPr>
-          <p:cNvPr id="38" name="Shape 34"/>
+          <p:cNvPr id="39" name="Shape 35"/>
           <p:cNvSpPr/>
           <p:nvPr/>
         </p:nvSpPr>
@@ -27315,7 +27861,7 @@
       </p:sp>
       <p:sp>
         <p:nvSpPr>
-          <p:cNvPr id="39" name="Shape 35"/>
+          <p:cNvPr id="40" name="Shape 36"/>
           <p:cNvSpPr/>
           <p:nvPr/>
         </p:nvSpPr>
@@ -27340,7 +27886,7 @@
       </p:sp>
       <p:pic>
         <p:nvPicPr>
-          <p:cNvPr id="40" name="Image 2" descr="preencoded.png">    </p:cNvPr>
+          <p:cNvPr id="41" name="Image 2" descr="preencoded.png">    </p:cNvPr>
           <p:cNvPicPr>
             <a:picLocks noChangeAspect="1"/>
           </p:cNvPicPr>
@@ -27364,7 +27910,7 @@
       </p:pic>
       <p:sp>
         <p:nvSpPr>
-          <p:cNvPr id="41" name="Text 36"/>
+          <p:cNvPr id="42" name="Text 37"/>
           <p:cNvSpPr/>
           <p:nvPr/>
         </p:nvSpPr>
@@ -27403,7 +27949,7 @@
       </p:sp>
       <p:sp>
         <p:nvSpPr>
-          <p:cNvPr id="42" name="Text 37"/>
+          <p:cNvPr id="43" name="Text 38"/>
           <p:cNvSpPr/>
           <p:nvPr/>
         </p:nvSpPr>
@@ -27442,7 +27988,7 @@
       </p:sp>
       <p:sp>
         <p:nvSpPr>
-          <p:cNvPr id="43" name="Text 38"/>
+          <p:cNvPr id="44" name="Text 39"/>
           <p:cNvSpPr/>
           <p:nvPr/>
         </p:nvSpPr>
@@ -27481,7 +28027,7 @@
       </p:sp>
       <p:sp>
         <p:nvSpPr>
-          <p:cNvPr id="44" name="Text 39"/>
+          <p:cNvPr id="45" name="Text 40"/>
           <p:cNvSpPr/>
           <p:nvPr/>
         </p:nvSpPr>
@@ -27520,7 +28066,7 @@
       </p:sp>
       <p:sp>
         <p:nvSpPr>
-          <p:cNvPr id="45" name="Text 40"/>
+          <p:cNvPr id="46" name="Text 41"/>
           <p:cNvSpPr/>
           <p:nvPr/>
         </p:nvSpPr>
@@ -27591,7 +28137,46 @@
       </p:grpSpPr>
       <p:sp>
         <p:nvSpPr>
-          <p:cNvPr id="2" name="Shape 0"/>
+          <p:cNvPr id="2" name="Text 0"/>
+          <p:cNvSpPr/>
+          <p:nvPr/>
+        </p:nvSpPr>
+        <p:spPr>
+          <a:xfrm>
+            <a:off x="411480" y="91440"/>
+            <a:ext cx="8321040" cy="182880"/>
+          </a:xfrm>
+          <a:prstGeom prst="rect">
+            <a:avLst/>
+          </a:prstGeom>
+          <a:noFill/>
+          <a:ln/>
+        </p:spPr>
+        <p:txBody>
+          <a:bodyPr wrap="square" lIns="0" tIns="0" rIns="0" bIns="0" rtlCol="0" anchor="ctr"/>
+          <a:lstStyle/>
+          <a:p>
+            <a:pPr algn="l" indent="0" marL="0">
+              <a:buNone/>
+            </a:pPr>
+            <a:r>
+              <a:rPr lang="en-US" sz="850" b="1" spc="300" kern="0" dirty="0">
+                <a:solidFill>
+                  <a:srgbClr val="64748B"/>
+                </a:solidFill>
+                <a:latin typeface="Calibri" pitchFamily="34" charset="0"/>
+                <a:ea typeface="Calibri" pitchFamily="34" charset="-122"/>
+                <a:cs typeface="Calibri" pitchFamily="34" charset="-120"/>
+              </a:rPr>
+              <a:t>РОЗДІЛ 4 · МЕТОДОЛОГІЯ</a:t>
+            </a:r>
+            <a:endParaRPr lang="en-US" sz="850" dirty="0"/>
+          </a:p>
+        </p:txBody>
+      </p:sp>
+      <p:sp>
+        <p:nvSpPr>
+          <p:cNvPr id="3" name="Shape 1"/>
           <p:cNvSpPr/>
           <p:nvPr/>
         </p:nvSpPr>
@@ -27611,7 +28196,7 @@
       </p:sp>
       <p:sp>
         <p:nvSpPr>
-          <p:cNvPr id="3" name="Text 1"/>
+          <p:cNvPr id="4" name="Text 2"/>
           <p:cNvSpPr/>
           <p:nvPr/>
         </p:nvSpPr>
@@ -27650,7 +28235,7 @@
       </p:sp>
       <p:sp>
         <p:nvSpPr>
-          <p:cNvPr id="4" name="Shape 2"/>
+          <p:cNvPr id="5" name="Shape 3"/>
           <p:cNvSpPr/>
           <p:nvPr/>
         </p:nvSpPr>
@@ -27684,7 +28269,7 @@
       </p:sp>
       <p:sp>
         <p:nvSpPr>
-          <p:cNvPr id="5" name="Shape 3"/>
+          <p:cNvPr id="6" name="Shape 4"/>
           <p:cNvSpPr/>
           <p:nvPr/>
         </p:nvSpPr>
@@ -27706,7 +28291,7 @@
       </p:sp>
       <p:sp>
         <p:nvSpPr>
-          <p:cNvPr id="6" name="Text 4"/>
+          <p:cNvPr id="7" name="Text 5"/>
           <p:cNvSpPr/>
           <p:nvPr/>
         </p:nvSpPr>
@@ -27745,7 +28330,7 @@
       </p:sp>
       <p:sp>
         <p:nvSpPr>
-          <p:cNvPr id="7" name="Text 5"/>
+          <p:cNvPr id="8" name="Text 6"/>
           <p:cNvSpPr/>
           <p:nvPr/>
         </p:nvSpPr>
@@ -27784,7 +28369,7 @@
       </p:sp>
       <p:sp>
         <p:nvSpPr>
-          <p:cNvPr id="8" name="Text 6"/>
+          <p:cNvPr id="9" name="Text 7"/>
           <p:cNvSpPr/>
           <p:nvPr/>
         </p:nvSpPr>
@@ -27823,7 +28408,7 @@
       </p:sp>
       <p:sp>
         <p:nvSpPr>
-          <p:cNvPr id="9" name="Shape 7"/>
+          <p:cNvPr id="10" name="Shape 8"/>
           <p:cNvSpPr/>
           <p:nvPr/>
         </p:nvSpPr>
@@ -27843,7 +28428,7 @@
       </p:sp>
       <p:sp>
         <p:nvSpPr>
-          <p:cNvPr id="10" name="Text 8"/>
+          <p:cNvPr id="11" name="Text 9"/>
           <p:cNvSpPr/>
           <p:nvPr/>
         </p:nvSpPr>
@@ -27882,7 +28467,7 @@
       </p:sp>
       <p:sp>
         <p:nvSpPr>
-          <p:cNvPr id="11" name="Text 9"/>
+          <p:cNvPr id="12" name="Text 10"/>
           <p:cNvSpPr/>
           <p:nvPr/>
         </p:nvSpPr>
@@ -27938,7 +28523,7 @@
       </p:sp>
       <p:sp>
         <p:nvSpPr>
-          <p:cNvPr id="12" name="Shape 10"/>
+          <p:cNvPr id="13" name="Shape 11"/>
           <p:cNvSpPr/>
           <p:nvPr/>
         </p:nvSpPr>
@@ -27972,7 +28557,7 @@
       </p:sp>
       <p:sp>
         <p:nvSpPr>
-          <p:cNvPr id="13" name="Shape 11"/>
+          <p:cNvPr id="14" name="Shape 12"/>
           <p:cNvSpPr/>
           <p:nvPr/>
         </p:nvSpPr>
@@ -27994,7 +28579,7 @@
       </p:sp>
       <p:sp>
         <p:nvSpPr>
-          <p:cNvPr id="14" name="Text 12"/>
+          <p:cNvPr id="15" name="Text 13"/>
           <p:cNvSpPr/>
           <p:nvPr/>
         </p:nvSpPr>
@@ -28033,7 +28618,7 @@
       </p:sp>
       <p:sp>
         <p:nvSpPr>
-          <p:cNvPr id="15" name="Text 13"/>
+          <p:cNvPr id="16" name="Text 14"/>
           <p:cNvSpPr/>
           <p:nvPr/>
         </p:nvSpPr>
@@ -28072,7 +28657,7 @@
       </p:sp>
       <p:sp>
         <p:nvSpPr>
-          <p:cNvPr id="16" name="Text 14"/>
+          <p:cNvPr id="17" name="Text 15"/>
           <p:cNvSpPr/>
           <p:nvPr/>
         </p:nvSpPr>
@@ -28111,7 +28696,7 @@
       </p:sp>
       <p:sp>
         <p:nvSpPr>
-          <p:cNvPr id="17" name="Shape 15"/>
+          <p:cNvPr id="18" name="Shape 16"/>
           <p:cNvSpPr/>
           <p:nvPr/>
         </p:nvSpPr>
@@ -28131,7 +28716,7 @@
       </p:sp>
       <p:sp>
         <p:nvSpPr>
-          <p:cNvPr id="18" name="Text 16"/>
+          <p:cNvPr id="19" name="Text 17"/>
           <p:cNvSpPr/>
           <p:nvPr/>
         </p:nvSpPr>
@@ -28170,7 +28755,7 @@
       </p:sp>
       <p:sp>
         <p:nvSpPr>
-          <p:cNvPr id="19" name="Text 17"/>
+          <p:cNvPr id="20" name="Text 18"/>
           <p:cNvSpPr/>
           <p:nvPr/>
         </p:nvSpPr>
@@ -28226,7 +28811,7 @@
       </p:sp>
       <p:sp>
         <p:nvSpPr>
-          <p:cNvPr id="20" name="Shape 18"/>
+          <p:cNvPr id="21" name="Shape 19"/>
           <p:cNvSpPr/>
           <p:nvPr/>
         </p:nvSpPr>
@@ -28260,7 +28845,7 @@
       </p:sp>
       <p:sp>
         <p:nvSpPr>
-          <p:cNvPr id="21" name="Shape 19"/>
+          <p:cNvPr id="22" name="Shape 20"/>
           <p:cNvSpPr/>
           <p:nvPr/>
         </p:nvSpPr>
@@ -28282,7 +28867,7 @@
       </p:sp>
       <p:sp>
         <p:nvSpPr>
-          <p:cNvPr id="22" name="Text 20"/>
+          <p:cNvPr id="23" name="Text 21"/>
           <p:cNvSpPr/>
           <p:nvPr/>
         </p:nvSpPr>
@@ -28321,7 +28906,7 @@
       </p:sp>
       <p:sp>
         <p:nvSpPr>
-          <p:cNvPr id="23" name="Text 21"/>
+          <p:cNvPr id="24" name="Text 22"/>
           <p:cNvSpPr/>
           <p:nvPr/>
         </p:nvSpPr>
@@ -28360,7 +28945,7 @@
       </p:sp>
       <p:sp>
         <p:nvSpPr>
-          <p:cNvPr id="24" name="Text 22"/>
+          <p:cNvPr id="25" name="Text 23"/>
           <p:cNvSpPr/>
           <p:nvPr/>
         </p:nvSpPr>
@@ -28399,7 +28984,7 @@
       </p:sp>
       <p:sp>
         <p:nvSpPr>
-          <p:cNvPr id="25" name="Shape 23"/>
+          <p:cNvPr id="26" name="Shape 24"/>
           <p:cNvSpPr/>
           <p:nvPr/>
         </p:nvSpPr>
@@ -28419,7 +29004,7 @@
       </p:sp>
       <p:sp>
         <p:nvSpPr>
-          <p:cNvPr id="26" name="Text 24"/>
+          <p:cNvPr id="27" name="Text 25"/>
           <p:cNvSpPr/>
           <p:nvPr/>
         </p:nvSpPr>
@@ -28458,7 +29043,7 @@
       </p:sp>
       <p:sp>
         <p:nvSpPr>
-          <p:cNvPr id="27" name="Text 25"/>
+          <p:cNvPr id="28" name="Text 26"/>
           <p:cNvSpPr/>
           <p:nvPr/>
         </p:nvSpPr>
@@ -28514,7 +29099,7 @@
       </p:sp>
       <p:sp>
         <p:nvSpPr>
-          <p:cNvPr id="28" name="Shape 26"/>
+          <p:cNvPr id="29" name="Shape 27"/>
           <p:cNvSpPr/>
           <p:nvPr/>
         </p:nvSpPr>
@@ -28548,7 +29133,7 @@
       </p:sp>
       <p:sp>
         <p:nvSpPr>
-          <p:cNvPr id="29" name="Shape 27"/>
+          <p:cNvPr id="30" name="Shape 28"/>
           <p:cNvSpPr/>
           <p:nvPr/>
         </p:nvSpPr>
@@ -28570,7 +29155,7 @@
       </p:sp>
       <p:sp>
         <p:nvSpPr>
-          <p:cNvPr id="30" name="Text 28"/>
+          <p:cNvPr id="31" name="Text 29"/>
           <p:cNvSpPr/>
           <p:nvPr/>
         </p:nvSpPr>
@@ -28609,7 +29194,7 @@
       </p:sp>
       <p:sp>
         <p:nvSpPr>
-          <p:cNvPr id="31" name="Text 29"/>
+          <p:cNvPr id="32" name="Text 30"/>
           <p:cNvSpPr/>
           <p:nvPr/>
         </p:nvSpPr>
@@ -28648,7 +29233,7 @@
       </p:sp>
       <p:sp>
         <p:nvSpPr>
-          <p:cNvPr id="32" name="Text 30"/>
+          <p:cNvPr id="33" name="Text 31"/>
           <p:cNvSpPr/>
           <p:nvPr/>
         </p:nvSpPr>
@@ -28687,7 +29272,7 @@
       </p:sp>
       <p:sp>
         <p:nvSpPr>
-          <p:cNvPr id="33" name="Shape 31"/>
+          <p:cNvPr id="34" name="Shape 32"/>
           <p:cNvSpPr/>
           <p:nvPr/>
         </p:nvSpPr>
@@ -28707,7 +29292,7 @@
       </p:sp>
       <p:sp>
         <p:nvSpPr>
-          <p:cNvPr id="34" name="Text 32"/>
+          <p:cNvPr id="35" name="Text 33"/>
           <p:cNvSpPr/>
           <p:nvPr/>
         </p:nvSpPr>
@@ -28746,7 +29331,7 @@
       </p:sp>
       <p:sp>
         <p:nvSpPr>
-          <p:cNvPr id="35" name="Text 33"/>
+          <p:cNvPr id="36" name="Text 34"/>
           <p:cNvSpPr/>
           <p:nvPr/>
         </p:nvSpPr>
@@ -28802,7 +29387,7 @@
       </p:sp>
       <p:sp>
         <p:nvSpPr>
-          <p:cNvPr id="36" name="Text 34"/>
+          <p:cNvPr id="37" name="Text 35"/>
           <p:cNvSpPr/>
           <p:nvPr/>
         </p:nvSpPr>
@@ -28841,7 +29426,7 @@
       </p:sp>
       <p:sp>
         <p:nvSpPr>
-          <p:cNvPr id="37" name="Text 35"/>
+          <p:cNvPr id="38" name="Text 36"/>
           <p:cNvSpPr/>
           <p:nvPr/>
         </p:nvSpPr>
@@ -28912,7 +29497,46 @@
       </p:grpSpPr>
       <p:sp>
         <p:nvSpPr>
-          <p:cNvPr id="2" name="Shape 0"/>
+          <p:cNvPr id="2" name="Text 0"/>
+          <p:cNvSpPr/>
+          <p:nvPr/>
+        </p:nvSpPr>
+        <p:spPr>
+          <a:xfrm>
+            <a:off x="411480" y="91440"/>
+            <a:ext cx="8321040" cy="182880"/>
+          </a:xfrm>
+          <a:prstGeom prst="rect">
+            <a:avLst/>
+          </a:prstGeom>
+          <a:noFill/>
+          <a:ln/>
+        </p:spPr>
+        <p:txBody>
+          <a:bodyPr wrap="square" lIns="0" tIns="0" rIns="0" bIns="0" rtlCol="0" anchor="ctr"/>
+          <a:lstStyle/>
+          <a:p>
+            <a:pPr algn="l" indent="0" marL="0">
+              <a:buNone/>
+            </a:pPr>
+            <a:r>
+              <a:rPr lang="en-US" sz="850" b="1" spc="300" kern="0" dirty="0">
+                <a:solidFill>
+                  <a:srgbClr val="64748B"/>
+                </a:solidFill>
+                <a:latin typeface="Calibri" pitchFamily="34" charset="0"/>
+                <a:ea typeface="Calibri" pitchFamily="34" charset="-122"/>
+                <a:cs typeface="Calibri" pitchFamily="34" charset="-120"/>
+              </a:rPr>
+              <a:t>РОЗДІЛ 4 · МЕТОДОЛОГІЯ</a:t>
+            </a:r>
+            <a:endParaRPr lang="en-US" sz="850" dirty="0"/>
+          </a:p>
+        </p:txBody>
+      </p:sp>
+      <p:sp>
+        <p:nvSpPr>
+          <p:cNvPr id="3" name="Shape 1"/>
           <p:cNvSpPr/>
           <p:nvPr/>
         </p:nvSpPr>
@@ -28932,7 +29556,7 @@
       </p:sp>
       <p:sp>
         <p:nvSpPr>
-          <p:cNvPr id="3" name="Text 1"/>
+          <p:cNvPr id="4" name="Text 2"/>
           <p:cNvSpPr/>
           <p:nvPr/>
         </p:nvSpPr>
@@ -28971,7 +29595,7 @@
       </p:sp>
       <p:sp>
         <p:nvSpPr>
-          <p:cNvPr id="4" name="Shape 2"/>
+          <p:cNvPr id="5" name="Shape 3"/>
           <p:cNvSpPr/>
           <p:nvPr/>
         </p:nvSpPr>
@@ -29005,7 +29629,7 @@
       </p:sp>
       <p:sp>
         <p:nvSpPr>
-          <p:cNvPr id="5" name="Shape 3"/>
+          <p:cNvPr id="6" name="Shape 4"/>
           <p:cNvSpPr/>
           <p:nvPr/>
         </p:nvSpPr>
@@ -29025,7 +29649,7 @@
       </p:sp>
       <p:sp>
         <p:nvSpPr>
-          <p:cNvPr id="6" name="Text 4"/>
+          <p:cNvPr id="7" name="Text 5"/>
           <p:cNvSpPr/>
           <p:nvPr/>
         </p:nvSpPr>
@@ -29064,7 +29688,7 @@
       </p:sp>
       <p:sp>
         <p:nvSpPr>
-          <p:cNvPr id="7" name="Text 5"/>
+          <p:cNvPr id="8" name="Text 6"/>
           <p:cNvSpPr/>
           <p:nvPr/>
         </p:nvSpPr>
@@ -29103,7 +29727,7 @@
       </p:sp>
       <p:sp>
         <p:nvSpPr>
-          <p:cNvPr id="8" name="Shape 6"/>
+          <p:cNvPr id="9" name="Shape 7"/>
           <p:cNvSpPr/>
           <p:nvPr/>
         </p:nvSpPr>
@@ -29123,7 +29747,7 @@
       </p:sp>
       <p:sp>
         <p:nvSpPr>
-          <p:cNvPr id="9" name="Text 7"/>
+          <p:cNvPr id="10" name="Text 8"/>
           <p:cNvSpPr/>
           <p:nvPr/>
         </p:nvSpPr>
@@ -29162,7 +29786,7 @@
       </p:sp>
       <p:sp>
         <p:nvSpPr>
-          <p:cNvPr id="10" name="Text 8"/>
+          <p:cNvPr id="11" name="Text 9"/>
           <p:cNvSpPr/>
           <p:nvPr/>
         </p:nvSpPr>
@@ -29201,7 +29825,7 @@
       </p:sp>
       <p:sp>
         <p:nvSpPr>
-          <p:cNvPr id="11" name="Shape 9"/>
+          <p:cNvPr id="12" name="Shape 10"/>
           <p:cNvSpPr/>
           <p:nvPr/>
         </p:nvSpPr>
@@ -29235,7 +29859,7 @@
       </p:sp>
       <p:sp>
         <p:nvSpPr>
-          <p:cNvPr id="12" name="Shape 10"/>
+          <p:cNvPr id="13" name="Shape 11"/>
           <p:cNvSpPr/>
           <p:nvPr/>
         </p:nvSpPr>
@@ -29255,7 +29879,7 @@
       </p:sp>
       <p:sp>
         <p:nvSpPr>
-          <p:cNvPr id="13" name="Text 11"/>
+          <p:cNvPr id="14" name="Text 12"/>
           <p:cNvSpPr/>
           <p:nvPr/>
         </p:nvSpPr>
@@ -29294,7 +29918,7 @@
       </p:sp>
       <p:sp>
         <p:nvSpPr>
-          <p:cNvPr id="14" name="Text 12"/>
+          <p:cNvPr id="15" name="Text 13"/>
           <p:cNvSpPr/>
           <p:nvPr/>
         </p:nvSpPr>
@@ -29333,7 +29957,7 @@
       </p:sp>
       <p:sp>
         <p:nvSpPr>
-          <p:cNvPr id="15" name="Shape 13"/>
+          <p:cNvPr id="16" name="Shape 14"/>
           <p:cNvSpPr/>
           <p:nvPr/>
         </p:nvSpPr>
@@ -29353,7 +29977,7 @@
       </p:sp>
       <p:sp>
         <p:nvSpPr>
-          <p:cNvPr id="16" name="Text 14"/>
+          <p:cNvPr id="17" name="Text 15"/>
           <p:cNvSpPr/>
           <p:nvPr/>
         </p:nvSpPr>
@@ -29392,7 +30016,7 @@
       </p:sp>
       <p:sp>
         <p:nvSpPr>
-          <p:cNvPr id="17" name="Text 15"/>
+          <p:cNvPr id="18" name="Text 16"/>
           <p:cNvSpPr/>
           <p:nvPr/>
         </p:nvSpPr>
@@ -29431,7 +30055,7 @@
       </p:sp>
       <p:sp>
         <p:nvSpPr>
-          <p:cNvPr id="18" name="Shape 16"/>
+          <p:cNvPr id="19" name="Shape 17"/>
           <p:cNvSpPr/>
           <p:nvPr/>
         </p:nvSpPr>
@@ -29465,7 +30089,7 @@
       </p:sp>
       <p:sp>
         <p:nvSpPr>
-          <p:cNvPr id="19" name="Shape 17"/>
+          <p:cNvPr id="20" name="Shape 18"/>
           <p:cNvSpPr/>
           <p:nvPr/>
         </p:nvSpPr>
@@ -29485,7 +30109,7 @@
       </p:sp>
       <p:sp>
         <p:nvSpPr>
-          <p:cNvPr id="20" name="Text 18"/>
+          <p:cNvPr id="21" name="Text 19"/>
           <p:cNvSpPr/>
           <p:nvPr/>
         </p:nvSpPr>
@@ -29524,7 +30148,7 @@
       </p:sp>
       <p:sp>
         <p:nvSpPr>
-          <p:cNvPr id="21" name="Text 19"/>
+          <p:cNvPr id="22" name="Text 20"/>
           <p:cNvSpPr/>
           <p:nvPr/>
         </p:nvSpPr>
@@ -29563,7 +30187,7 @@
       </p:sp>
       <p:sp>
         <p:nvSpPr>
-          <p:cNvPr id="22" name="Shape 20"/>
+          <p:cNvPr id="23" name="Shape 21"/>
           <p:cNvSpPr/>
           <p:nvPr/>
         </p:nvSpPr>
@@ -29583,7 +30207,7 @@
       </p:sp>
       <p:sp>
         <p:nvSpPr>
-          <p:cNvPr id="23" name="Text 21"/>
+          <p:cNvPr id="24" name="Text 22"/>
           <p:cNvSpPr/>
           <p:nvPr/>
         </p:nvSpPr>
@@ -29622,7 +30246,7 @@
       </p:sp>
       <p:sp>
         <p:nvSpPr>
-          <p:cNvPr id="24" name="Text 22"/>
+          <p:cNvPr id="25" name="Text 23"/>
           <p:cNvSpPr/>
           <p:nvPr/>
         </p:nvSpPr>
@@ -29661,7 +30285,7 @@
       </p:sp>
       <p:sp>
         <p:nvSpPr>
-          <p:cNvPr id="25" name="Shape 23"/>
+          <p:cNvPr id="26" name="Shape 24"/>
           <p:cNvSpPr/>
           <p:nvPr/>
         </p:nvSpPr>
@@ -29695,7 +30319,7 @@
       </p:sp>
       <p:sp>
         <p:nvSpPr>
-          <p:cNvPr id="26" name="Text 24"/>
+          <p:cNvPr id="27" name="Text 25"/>
           <p:cNvSpPr/>
           <p:nvPr/>
         </p:nvSpPr>
@@ -31408,7 +32032,7 @@
       </p:graphicFrame>
       <p:sp>
         <p:nvSpPr>
-          <p:cNvPr id="28" name="Text 25"/>
+          <p:cNvPr id="29" name="Text 26"/>
           <p:cNvSpPr/>
           <p:nvPr/>
         </p:nvSpPr>
@@ -31447,7 +32071,7 @@
       </p:sp>
       <p:graphicFrame>
         <p:nvGraphicFramePr>
-          <p:cNvPr id="29" name="Chart 0" descr=""/>
+          <p:cNvPr id="30" name="Chart 0" descr=""/>
           <p:cNvGraphicFramePr/>
           <p:nvPr/>
         </p:nvGraphicFramePr>
@@ -31463,7 +32087,7 @@
       </p:graphicFrame>
       <p:sp>
         <p:nvSpPr>
-          <p:cNvPr id="30" name="Text 26"/>
+          <p:cNvPr id="31" name="Text 27"/>
           <p:cNvSpPr/>
           <p:nvPr/>
         </p:nvSpPr>
@@ -31502,7 +32126,7 @@
       </p:sp>
       <p:sp>
         <p:nvSpPr>
-          <p:cNvPr id="31" name="Text 27"/>
+          <p:cNvPr id="32" name="Text 28"/>
           <p:cNvSpPr/>
           <p:nvPr/>
         </p:nvSpPr>
@@ -31573,7 +32197,46 @@
       </p:grpSpPr>
       <p:sp>
         <p:nvSpPr>
-          <p:cNvPr id="2" name="Shape 0"/>
+          <p:cNvPr id="2" name="Text 0"/>
+          <p:cNvSpPr/>
+          <p:nvPr/>
+        </p:nvSpPr>
+        <p:spPr>
+          <a:xfrm>
+            <a:off x="411480" y="91440"/>
+            <a:ext cx="8321040" cy="182880"/>
+          </a:xfrm>
+          <a:prstGeom prst="rect">
+            <a:avLst/>
+          </a:prstGeom>
+          <a:noFill/>
+          <a:ln/>
+        </p:spPr>
+        <p:txBody>
+          <a:bodyPr wrap="square" lIns="0" tIns="0" rIns="0" bIns="0" rtlCol="0" anchor="ctr"/>
+          <a:lstStyle/>
+          <a:p>
+            <a:pPr algn="l" indent="0" marL="0">
+              <a:buNone/>
+            </a:pPr>
+            <a:r>
+              <a:rPr lang="en-US" sz="850" b="1" spc="300" kern="0" dirty="0">
+                <a:solidFill>
+                  <a:srgbClr val="64748B"/>
+                </a:solidFill>
+                <a:latin typeface="Calibri" pitchFamily="34" charset="0"/>
+                <a:ea typeface="Calibri" pitchFamily="34" charset="-122"/>
+                <a:cs typeface="Calibri" pitchFamily="34" charset="-120"/>
+              </a:rPr>
+              <a:t>РОЗДІЛ 5 · АРХІТЕКТУРА СИСТЕМИ</a:t>
+            </a:r>
+            <a:endParaRPr lang="en-US" sz="850" dirty="0"/>
+          </a:p>
+        </p:txBody>
+      </p:sp>
+      <p:sp>
+        <p:nvSpPr>
+          <p:cNvPr id="3" name="Shape 1"/>
           <p:cNvSpPr/>
           <p:nvPr/>
         </p:nvSpPr>
@@ -31593,7 +32256,7 @@
       </p:sp>
       <p:sp>
         <p:nvSpPr>
-          <p:cNvPr id="3" name="Text 1"/>
+          <p:cNvPr id="4" name="Text 2"/>
           <p:cNvSpPr/>
           <p:nvPr/>
         </p:nvSpPr>
@@ -31632,7 +32295,7 @@
       </p:sp>
       <p:sp>
         <p:nvSpPr>
-          <p:cNvPr id="4" name="Shape 2"/>
+          <p:cNvPr id="5" name="Shape 3"/>
           <p:cNvSpPr/>
           <p:nvPr/>
         </p:nvSpPr>
@@ -31666,7 +32329,7 @@
       </p:sp>
       <p:sp>
         <p:nvSpPr>
-          <p:cNvPr id="5" name="Shape 3"/>
+          <p:cNvPr id="6" name="Shape 4"/>
           <p:cNvSpPr/>
           <p:nvPr/>
         </p:nvSpPr>
@@ -31686,7 +32349,7 @@
       </p:sp>
       <p:sp>
         <p:nvSpPr>
-          <p:cNvPr id="6" name="Shape 4"/>
+          <p:cNvPr id="7" name="Shape 5"/>
           <p:cNvSpPr/>
           <p:nvPr/>
         </p:nvSpPr>
@@ -31711,7 +32374,7 @@
       </p:sp>
       <p:pic>
         <p:nvPicPr>
-          <p:cNvPr id="7" name="Image 0" descr="preencoded.png">    </p:cNvPr>
+          <p:cNvPr id="8" name="Image 0" descr="preencoded.png">    </p:cNvPr>
           <p:cNvPicPr>
             <a:picLocks noChangeAspect="1"/>
           </p:cNvPicPr>
@@ -31735,7 +32398,7 @@
       </p:pic>
       <p:sp>
         <p:nvSpPr>
-          <p:cNvPr id="8" name="Text 5"/>
+          <p:cNvPr id="9" name="Text 6"/>
           <p:cNvSpPr/>
           <p:nvPr/>
         </p:nvSpPr>
@@ -31774,7 +32437,7 @@
       </p:sp>
       <p:sp>
         <p:nvSpPr>
-          <p:cNvPr id="9" name="Text 6"/>
+          <p:cNvPr id="10" name="Text 7"/>
           <p:cNvSpPr/>
           <p:nvPr/>
         </p:nvSpPr>
@@ -31830,7 +32493,7 @@
       </p:sp>
       <p:pic>
         <p:nvPicPr>
-          <p:cNvPr id="10" name="Image 1" descr="preencoded.png">    </p:cNvPr>
+          <p:cNvPr id="11" name="Image 1" descr="preencoded.png">    </p:cNvPr>
           <p:cNvPicPr>
             <a:picLocks noChangeAspect="1"/>
           </p:cNvPicPr>
@@ -31854,7 +32517,7 @@
       </p:pic>
       <p:sp>
         <p:nvSpPr>
-          <p:cNvPr id="11" name="Shape 7"/>
+          <p:cNvPr id="12" name="Shape 8"/>
           <p:cNvSpPr/>
           <p:nvPr/>
         </p:nvSpPr>
@@ -31888,7 +32551,7 @@
       </p:sp>
       <p:sp>
         <p:nvSpPr>
-          <p:cNvPr id="12" name="Shape 8"/>
+          <p:cNvPr id="13" name="Shape 9"/>
           <p:cNvSpPr/>
           <p:nvPr/>
         </p:nvSpPr>
@@ -31908,7 +32571,7 @@
       </p:sp>
       <p:sp>
         <p:nvSpPr>
-          <p:cNvPr id="13" name="Shape 9"/>
+          <p:cNvPr id="14" name="Shape 10"/>
           <p:cNvSpPr/>
           <p:nvPr/>
         </p:nvSpPr>
@@ -31933,7 +32596,7 @@
       </p:sp>
       <p:pic>
         <p:nvPicPr>
-          <p:cNvPr id="14" name="Image 2" descr="preencoded.png">    </p:cNvPr>
+          <p:cNvPr id="15" name="Image 2" descr="preencoded.png">    </p:cNvPr>
           <p:cNvPicPr>
             <a:picLocks noChangeAspect="1"/>
           </p:cNvPicPr>
@@ -31957,7 +32620,7 @@
       </p:pic>
       <p:sp>
         <p:nvSpPr>
-          <p:cNvPr id="15" name="Text 10"/>
+          <p:cNvPr id="16" name="Text 11"/>
           <p:cNvSpPr/>
           <p:nvPr/>
         </p:nvSpPr>
@@ -31996,7 +32659,7 @@
       </p:sp>
       <p:sp>
         <p:nvSpPr>
-          <p:cNvPr id="16" name="Text 11"/>
+          <p:cNvPr id="17" name="Text 12"/>
           <p:cNvSpPr/>
           <p:nvPr/>
         </p:nvSpPr>
@@ -32052,7 +32715,7 @@
       </p:sp>
       <p:pic>
         <p:nvPicPr>
-          <p:cNvPr id="17" name="Image 3" descr="preencoded.png">    </p:cNvPr>
+          <p:cNvPr id="18" name="Image 3" descr="preencoded.png">    </p:cNvPr>
           <p:cNvPicPr>
             <a:picLocks noChangeAspect="1"/>
           </p:cNvPicPr>
@@ -32076,7 +32739,7 @@
       </p:pic>
       <p:sp>
         <p:nvSpPr>
-          <p:cNvPr id="18" name="Shape 12"/>
+          <p:cNvPr id="19" name="Shape 13"/>
           <p:cNvSpPr/>
           <p:nvPr/>
         </p:nvSpPr>
@@ -32110,7 +32773,7 @@
       </p:sp>
       <p:sp>
         <p:nvSpPr>
-          <p:cNvPr id="19" name="Shape 13"/>
+          <p:cNvPr id="20" name="Shape 14"/>
           <p:cNvSpPr/>
           <p:nvPr/>
         </p:nvSpPr>
@@ -32130,7 +32793,7 @@
       </p:sp>
       <p:sp>
         <p:nvSpPr>
-          <p:cNvPr id="20" name="Shape 14"/>
+          <p:cNvPr id="21" name="Shape 15"/>
           <p:cNvSpPr/>
           <p:nvPr/>
         </p:nvSpPr>
@@ -32155,7 +32818,7 @@
       </p:sp>
       <p:pic>
         <p:nvPicPr>
-          <p:cNvPr id="21" name="Image 4" descr="preencoded.png">    </p:cNvPr>
+          <p:cNvPr id="22" name="Image 4" descr="preencoded.png">    </p:cNvPr>
           <p:cNvPicPr>
             <a:picLocks noChangeAspect="1"/>
           </p:cNvPicPr>
@@ -32179,7 +32842,7 @@
       </p:pic>
       <p:sp>
         <p:nvSpPr>
-          <p:cNvPr id="22" name="Text 15"/>
+          <p:cNvPr id="23" name="Text 16"/>
           <p:cNvSpPr/>
           <p:nvPr/>
         </p:nvSpPr>
@@ -32218,7 +32881,7 @@
       </p:sp>
       <p:sp>
         <p:nvSpPr>
-          <p:cNvPr id="23" name="Text 16"/>
+          <p:cNvPr id="24" name="Text 17"/>
           <p:cNvSpPr/>
           <p:nvPr/>
         </p:nvSpPr>
@@ -32274,7 +32937,7 @@
       </p:sp>
       <p:pic>
         <p:nvPicPr>
-          <p:cNvPr id="24" name="Image 5" descr="preencoded.png">    </p:cNvPr>
+          <p:cNvPr id="25" name="Image 5" descr="preencoded.png">    </p:cNvPr>
           <p:cNvPicPr>
             <a:picLocks noChangeAspect="1"/>
           </p:cNvPicPr>
@@ -32298,7 +32961,7 @@
       </p:pic>
       <p:sp>
         <p:nvSpPr>
-          <p:cNvPr id="25" name="Shape 17"/>
+          <p:cNvPr id="26" name="Shape 18"/>
           <p:cNvSpPr/>
           <p:nvPr/>
         </p:nvSpPr>
@@ -32332,7 +32995,7 @@
       </p:sp>
       <p:sp>
         <p:nvSpPr>
-          <p:cNvPr id="26" name="Shape 18"/>
+          <p:cNvPr id="27" name="Shape 19"/>
           <p:cNvSpPr/>
           <p:nvPr/>
         </p:nvSpPr>
@@ -32352,7 +33015,7 @@
       </p:sp>
       <p:sp>
         <p:nvSpPr>
-          <p:cNvPr id="27" name="Shape 19"/>
+          <p:cNvPr id="28" name="Shape 20"/>
           <p:cNvSpPr/>
           <p:nvPr/>
         </p:nvSpPr>
@@ -32377,7 +33040,7 @@
       </p:sp>
       <p:pic>
         <p:nvPicPr>
-          <p:cNvPr id="28" name="Image 6" descr="preencoded.png">    </p:cNvPr>
+          <p:cNvPr id="29" name="Image 6" descr="preencoded.png">    </p:cNvPr>
           <p:cNvPicPr>
             <a:picLocks noChangeAspect="1"/>
           </p:cNvPicPr>
@@ -32401,7 +33064,7 @@
       </p:pic>
       <p:sp>
         <p:nvSpPr>
-          <p:cNvPr id="29" name="Text 20"/>
+          <p:cNvPr id="30" name="Text 21"/>
           <p:cNvSpPr/>
           <p:nvPr/>
         </p:nvSpPr>
@@ -32440,7 +33103,7 @@
       </p:sp>
       <p:sp>
         <p:nvSpPr>
-          <p:cNvPr id="30" name="Text 21"/>
+          <p:cNvPr id="31" name="Text 22"/>
           <p:cNvSpPr/>
           <p:nvPr/>
         </p:nvSpPr>
@@ -32496,7 +33159,7 @@
       </p:sp>
       <p:pic>
         <p:nvPicPr>
-          <p:cNvPr id="31" name="Image 7" descr="preencoded.png">    </p:cNvPr>
+          <p:cNvPr id="32" name="Image 7" descr="preencoded.png">    </p:cNvPr>
           <p:cNvPicPr>
             <a:picLocks noChangeAspect="1"/>
           </p:cNvPicPr>
@@ -32520,7 +33183,7 @@
       </p:pic>
       <p:sp>
         <p:nvSpPr>
-          <p:cNvPr id="32" name="Shape 22"/>
+          <p:cNvPr id="33" name="Shape 23"/>
           <p:cNvSpPr/>
           <p:nvPr/>
         </p:nvSpPr>
@@ -32554,7 +33217,7 @@
       </p:sp>
       <p:sp>
         <p:nvSpPr>
-          <p:cNvPr id="33" name="Shape 23"/>
+          <p:cNvPr id="34" name="Shape 24"/>
           <p:cNvSpPr/>
           <p:nvPr/>
         </p:nvSpPr>
@@ -32574,7 +33237,7 @@
       </p:sp>
       <p:sp>
         <p:nvSpPr>
-          <p:cNvPr id="34" name="Shape 24"/>
+          <p:cNvPr id="35" name="Shape 25"/>
           <p:cNvSpPr/>
           <p:nvPr/>
         </p:nvSpPr>
@@ -32599,7 +33262,7 @@
       </p:sp>
       <p:pic>
         <p:nvPicPr>
-          <p:cNvPr id="35" name="Image 8" descr="preencoded.png">    </p:cNvPr>
+          <p:cNvPr id="36" name="Image 8" descr="preencoded.png">    </p:cNvPr>
           <p:cNvPicPr>
             <a:picLocks noChangeAspect="1"/>
           </p:cNvPicPr>
@@ -32623,7 +33286,7 @@
       </p:pic>
       <p:sp>
         <p:nvSpPr>
-          <p:cNvPr id="36" name="Text 25"/>
+          <p:cNvPr id="37" name="Text 26"/>
           <p:cNvSpPr/>
           <p:nvPr/>
         </p:nvSpPr>
@@ -32662,7 +33325,7 @@
       </p:sp>
       <p:sp>
         <p:nvSpPr>
-          <p:cNvPr id="37" name="Text 26"/>
+          <p:cNvPr id="38" name="Text 27"/>
           <p:cNvSpPr/>
           <p:nvPr/>
         </p:nvSpPr>
@@ -32718,7 +33381,7 @@
       </p:sp>
       <p:sp>
         <p:nvSpPr>
-          <p:cNvPr id="38" name="Shape 27"/>
+          <p:cNvPr id="39" name="Shape 28"/>
           <p:cNvSpPr/>
           <p:nvPr/>
         </p:nvSpPr>
@@ -32752,7 +33415,7 @@
       </p:sp>
       <p:pic>
         <p:nvPicPr>
-          <p:cNvPr id="39" name="Image 9" descr="preencoded.png">    </p:cNvPr>
+          <p:cNvPr id="40" name="Image 9" descr="preencoded.png">    </p:cNvPr>
           <p:cNvPicPr>
             <a:picLocks noChangeAspect="1"/>
           </p:cNvPicPr>
@@ -32776,7 +33439,7 @@
       </p:pic>
       <p:sp>
         <p:nvSpPr>
-          <p:cNvPr id="40" name="Text 28"/>
+          <p:cNvPr id="41" name="Text 29"/>
           <p:cNvSpPr/>
           <p:nvPr/>
         </p:nvSpPr>
@@ -32815,7 +33478,7 @@
       </p:sp>
       <p:sp>
         <p:nvSpPr>
-          <p:cNvPr id="41" name="Shape 29"/>
+          <p:cNvPr id="42" name="Shape 30"/>
           <p:cNvSpPr/>
           <p:nvPr/>
         </p:nvSpPr>
@@ -32849,7 +33512,7 @@
       </p:sp>
       <p:pic>
         <p:nvPicPr>
-          <p:cNvPr id="42" name="Image 10" descr="preencoded.png">    </p:cNvPr>
+          <p:cNvPr id="43" name="Image 10" descr="preencoded.png">    </p:cNvPr>
           <p:cNvPicPr>
             <a:picLocks noChangeAspect="1"/>
           </p:cNvPicPr>
@@ -32873,7 +33536,7 @@
       </p:pic>
       <p:sp>
         <p:nvSpPr>
-          <p:cNvPr id="43" name="Text 30"/>
+          <p:cNvPr id="44" name="Text 31"/>
           <p:cNvSpPr/>
           <p:nvPr/>
         </p:nvSpPr>
@@ -32912,7 +33575,7 @@
       </p:sp>
       <p:sp>
         <p:nvSpPr>
-          <p:cNvPr id="44" name="Shape 31"/>
+          <p:cNvPr id="45" name="Shape 32"/>
           <p:cNvSpPr/>
           <p:nvPr/>
         </p:nvSpPr>
@@ -32939,7 +33602,7 @@
       </p:sp>
       <p:sp>
         <p:nvSpPr>
-          <p:cNvPr id="45" name="Text 32"/>
+          <p:cNvPr id="46" name="Text 33"/>
           <p:cNvSpPr/>
           <p:nvPr/>
         </p:nvSpPr>
@@ -33104,7 +33767,7 @@
       </p:sp>
       <p:sp>
         <p:nvSpPr>
-          <p:cNvPr id="46" name="Text 33"/>
+          <p:cNvPr id="47" name="Text 34"/>
           <p:cNvSpPr/>
           <p:nvPr/>
         </p:nvSpPr>
@@ -33143,7 +33806,7 @@
       </p:sp>
       <p:sp>
         <p:nvSpPr>
-          <p:cNvPr id="47" name="Text 34"/>
+          <p:cNvPr id="48" name="Text 35"/>
           <p:cNvSpPr/>
           <p:nvPr/>
         </p:nvSpPr>

--- a/thesis/Nesterenko_Presentation.pptx
+++ b/thesis/Nesterenko_Presentation.pptx
@@ -10162,48 +10162,33 @@
           </a:p>
         </p:txBody>
       </p:sp>
-      <p:sp>
-        <p:nvSpPr>
-          <p:cNvPr id="53" name="Text 48"/>
-          <p:cNvSpPr/>
-          <p:nvPr/>
-        </p:nvSpPr>
-        <p:spPr>
-          <a:xfrm>
-            <a:off x="411480" y="4850892"/>
-            <a:ext cx="6858000" cy="228600"/>
-          </a:xfrm>
-          <a:prstGeom prst="rect">
-            <a:avLst/>
-          </a:prstGeom>
-          <a:noFill/>
-          <a:ln/>
-        </p:spPr>
-        <p:txBody>
-          <a:bodyPr wrap="square" lIns="0" tIns="0" rIns="0" bIns="0" rtlCol="0" anchor="ctr"/>
-          <a:lstStyle/>
-          <a:p>
-            <a:pPr algn="l" indent="0" marL="0">
-              <a:buNone/>
-            </a:pPr>
-            <a:r>
-              <a:rPr lang="en-US" sz="900" dirty="0">
-                <a:solidFill>
-                  <a:srgbClr val="64748B"/>
-                </a:solidFill>
-                <a:latin typeface="Calibri" pitchFamily="34" charset="0"/>
-                <a:ea typeface="Calibri" pitchFamily="34" charset="-122"/>
-                <a:cs typeface="Calibri" pitchFamily="34" charset="-120"/>
-              </a:rPr>
-              <a:t>Нестеренко В.В.   ·   ХНУРЕ, ІПЗм-24-1   ·   2026</a:t>
-            </a:r>
-            <a:endParaRPr lang="en-US" sz="900" dirty="0"/>
-          </a:p>
-        </p:txBody>
-      </p:sp>
-      <p:sp>
-        <p:nvSpPr>
-          <p:cNvPr id="54" name="Text 49"/>
+      <p:pic>
+        <p:nvPicPr>
+          <p:cNvPr id="53" name="Image 3" descr="D:\repos\kb-semantic-search-benchmark\thesis\scripts\_logo_hex.png">    </p:cNvPr>
+          <p:cNvPicPr>
+            <a:picLocks noChangeAspect="1"/>
+          </p:cNvPicPr>
+          <p:nvPr/>
+        </p:nvPicPr>
+        <p:blipFill>
+          <a:blip r:embed="rId4"/>
+          <a:stretch>
+            <a:fillRect/>
+          </a:stretch>
+        </p:blipFill>
+        <p:spPr>
+          <a:xfrm>
+            <a:off x="411480" y="4686300"/>
+            <a:ext cx="502920" cy="338328"/>
+          </a:xfrm>
+          <a:prstGeom prst="rect">
+            <a:avLst/>
+          </a:prstGeom>
+        </p:spPr>
+      </p:pic>
+      <p:sp>
+        <p:nvSpPr>
+          <p:cNvPr id="54" name="Text 48"/>
           <p:cNvSpPr/>
           <p:nvPr/>
         </p:nvSpPr>
@@ -11849,48 +11834,33 @@
           </a:p>
         </p:txBody>
       </p:sp>
-      <p:sp>
-        <p:nvSpPr>
-          <p:cNvPr id="47" name="Text 41"/>
-          <p:cNvSpPr/>
-          <p:nvPr/>
-        </p:nvSpPr>
-        <p:spPr>
-          <a:xfrm>
-            <a:off x="411480" y="4850892"/>
-            <a:ext cx="6858000" cy="228600"/>
-          </a:xfrm>
-          <a:prstGeom prst="rect">
-            <a:avLst/>
-          </a:prstGeom>
-          <a:noFill/>
-          <a:ln/>
-        </p:spPr>
-        <p:txBody>
-          <a:bodyPr wrap="square" lIns="0" tIns="0" rIns="0" bIns="0" rtlCol="0" anchor="ctr"/>
-          <a:lstStyle/>
-          <a:p>
-            <a:pPr algn="l" indent="0" marL="0">
-              <a:buNone/>
-            </a:pPr>
-            <a:r>
-              <a:rPr lang="en-US" sz="900" dirty="0">
-                <a:solidFill>
-                  <a:srgbClr val="64748B"/>
-                </a:solidFill>
-                <a:latin typeface="Calibri" pitchFamily="34" charset="0"/>
-                <a:ea typeface="Calibri" pitchFamily="34" charset="-122"/>
-                <a:cs typeface="Calibri" pitchFamily="34" charset="-120"/>
-              </a:rPr>
-              <a:t>Нестеренко В.В.   ·   ХНУРЕ, ІПЗм-24-1   ·   2026</a:t>
-            </a:r>
-            <a:endParaRPr lang="en-US" sz="900" dirty="0"/>
-          </a:p>
-        </p:txBody>
-      </p:sp>
-      <p:sp>
-        <p:nvSpPr>
-          <p:cNvPr id="48" name="Text 42"/>
+      <p:pic>
+        <p:nvPicPr>
+          <p:cNvPr id="47" name="Image 3" descr="D:\repos\kb-semantic-search-benchmark\thesis\scripts\_logo_hex.png">    </p:cNvPr>
+          <p:cNvPicPr>
+            <a:picLocks noChangeAspect="1"/>
+          </p:cNvPicPr>
+          <p:nvPr/>
+        </p:nvPicPr>
+        <p:blipFill>
+          <a:blip r:embed="rId5"/>
+          <a:stretch>
+            <a:fillRect/>
+          </a:stretch>
+        </p:blipFill>
+        <p:spPr>
+          <a:xfrm>
+            <a:off x="411480" y="4686300"/>
+            <a:ext cx="502920" cy="338328"/>
+          </a:xfrm>
+          <a:prstGeom prst="rect">
+            <a:avLst/>
+          </a:prstGeom>
+        </p:spPr>
+      </p:pic>
+      <p:sp>
+        <p:nvSpPr>
+          <p:cNvPr id="48" name="Text 41"/>
           <p:cNvSpPr/>
           <p:nvPr/>
         </p:nvSpPr>
@@ -13537,48 +13507,33 @@
           </a:p>
         </p:txBody>
       </p:sp>
-      <p:sp>
-        <p:nvSpPr>
-          <p:cNvPr id="46" name="Text 41"/>
-          <p:cNvSpPr/>
-          <p:nvPr/>
-        </p:nvSpPr>
-        <p:spPr>
-          <a:xfrm>
-            <a:off x="411480" y="4850892"/>
-            <a:ext cx="6858000" cy="228600"/>
-          </a:xfrm>
-          <a:prstGeom prst="rect">
-            <a:avLst/>
-          </a:prstGeom>
-          <a:noFill/>
-          <a:ln/>
-        </p:spPr>
-        <p:txBody>
-          <a:bodyPr wrap="square" lIns="0" tIns="0" rIns="0" bIns="0" rtlCol="0" anchor="ctr"/>
-          <a:lstStyle/>
-          <a:p>
-            <a:pPr algn="l" indent="0" marL="0">
-              <a:buNone/>
-            </a:pPr>
-            <a:r>
-              <a:rPr lang="en-US" sz="900" dirty="0">
-                <a:solidFill>
-                  <a:srgbClr val="64748B"/>
-                </a:solidFill>
-                <a:latin typeface="Calibri" pitchFamily="34" charset="0"/>
-                <a:ea typeface="Calibri" pitchFamily="34" charset="-122"/>
-                <a:cs typeface="Calibri" pitchFamily="34" charset="-120"/>
-              </a:rPr>
-              <a:t>Нестеренко В.В.   ·   ХНУРЕ, ІПЗм-24-1   ·   2026</a:t>
-            </a:r>
-            <a:endParaRPr lang="en-US" sz="900" dirty="0"/>
-          </a:p>
-        </p:txBody>
-      </p:sp>
-      <p:sp>
-        <p:nvSpPr>
-          <p:cNvPr id="47" name="Text 42"/>
+      <p:pic>
+        <p:nvPicPr>
+          <p:cNvPr id="46" name="Image 3" descr="D:\repos\kb-semantic-search-benchmark\thesis\scripts\_logo_hex.png">    </p:cNvPr>
+          <p:cNvPicPr>
+            <a:picLocks noChangeAspect="1"/>
+          </p:cNvPicPr>
+          <p:nvPr/>
+        </p:nvPicPr>
+        <p:blipFill>
+          <a:blip r:embed="rId4"/>
+          <a:stretch>
+            <a:fillRect/>
+          </a:stretch>
+        </p:blipFill>
+        <p:spPr>
+          <a:xfrm>
+            <a:off x="411480" y="4686300"/>
+            <a:ext cx="502920" cy="338328"/>
+          </a:xfrm>
+          <a:prstGeom prst="rect">
+            <a:avLst/>
+          </a:prstGeom>
+        </p:spPr>
+      </p:pic>
+      <p:sp>
+        <p:nvSpPr>
+          <p:cNvPr id="47" name="Text 41"/>
           <p:cNvSpPr/>
           <p:nvPr/>
         </p:nvSpPr>
@@ -14939,48 +14894,33 @@
           </a:p>
         </p:txBody>
       </p:sp>
-      <p:sp>
-        <p:nvSpPr>
-          <p:cNvPr id="40" name="Text 37"/>
-          <p:cNvSpPr/>
-          <p:nvPr/>
-        </p:nvSpPr>
-        <p:spPr>
-          <a:xfrm>
-            <a:off x="411480" y="4850892"/>
-            <a:ext cx="6858000" cy="228600"/>
-          </a:xfrm>
-          <a:prstGeom prst="rect">
-            <a:avLst/>
-          </a:prstGeom>
-          <a:noFill/>
-          <a:ln/>
-        </p:spPr>
-        <p:txBody>
-          <a:bodyPr wrap="square" lIns="0" tIns="0" rIns="0" bIns="0" rtlCol="0" anchor="ctr"/>
-          <a:lstStyle/>
-          <a:p>
-            <a:pPr algn="l" indent="0" marL="0">
-              <a:buNone/>
-            </a:pPr>
-            <a:r>
-              <a:rPr lang="en-US" sz="900" dirty="0">
-                <a:solidFill>
-                  <a:srgbClr val="64748B"/>
-                </a:solidFill>
-                <a:latin typeface="Calibri" pitchFamily="34" charset="0"/>
-                <a:ea typeface="Calibri" pitchFamily="34" charset="-122"/>
-                <a:cs typeface="Calibri" pitchFamily="34" charset="-120"/>
-              </a:rPr>
-              <a:t>Нестеренко В.В.   ·   ХНУРЕ, ІПЗм-24-1   ·   2026</a:t>
-            </a:r>
-            <a:endParaRPr lang="en-US" sz="900" dirty="0"/>
-          </a:p>
-        </p:txBody>
-      </p:sp>
-      <p:sp>
-        <p:nvSpPr>
-          <p:cNvPr id="41" name="Text 38"/>
+      <p:pic>
+        <p:nvPicPr>
+          <p:cNvPr id="40" name="Image 0" descr="D:\repos\kb-semantic-search-benchmark\thesis\scripts\_logo_hex.png">    </p:cNvPr>
+          <p:cNvPicPr>
+            <a:picLocks noChangeAspect="1"/>
+          </p:cNvPicPr>
+          <p:nvPr/>
+        </p:nvPicPr>
+        <p:blipFill>
+          <a:blip r:embed="rId2"/>
+          <a:stretch>
+            <a:fillRect/>
+          </a:stretch>
+        </p:blipFill>
+        <p:spPr>
+          <a:xfrm>
+            <a:off x="411480" y="4686300"/>
+            <a:ext cx="502920" cy="338328"/>
+          </a:xfrm>
+          <a:prstGeom prst="rect">
+            <a:avLst/>
+          </a:prstGeom>
+        </p:spPr>
+      </p:pic>
+      <p:sp>
+        <p:nvSpPr>
+          <p:cNvPr id="41" name="Text 37"/>
           <p:cNvSpPr/>
           <p:nvPr/>
         </p:nvSpPr>
@@ -15503,48 +15443,33 @@
           </a:graphicData>
         </a:graphic>
       </p:graphicFrame>
-      <p:sp>
-        <p:nvSpPr>
-          <p:cNvPr id="17" name="Text 11"/>
-          <p:cNvSpPr/>
-          <p:nvPr/>
-        </p:nvSpPr>
-        <p:spPr>
-          <a:xfrm>
-            <a:off x="411480" y="4850892"/>
-            <a:ext cx="6858000" cy="228600"/>
-          </a:xfrm>
-          <a:prstGeom prst="rect">
-            <a:avLst/>
-          </a:prstGeom>
-          <a:noFill/>
-          <a:ln/>
-        </p:spPr>
-        <p:txBody>
-          <a:bodyPr wrap="square" lIns="0" tIns="0" rIns="0" bIns="0" rtlCol="0" anchor="ctr"/>
-          <a:lstStyle/>
-          <a:p>
-            <a:pPr algn="l" indent="0" marL="0">
-              <a:buNone/>
-            </a:pPr>
-            <a:r>
-              <a:rPr lang="en-US" sz="900" dirty="0">
-                <a:solidFill>
-                  <a:srgbClr val="64748B"/>
-                </a:solidFill>
-                <a:latin typeface="Calibri" pitchFamily="34" charset="0"/>
-                <a:ea typeface="Calibri" pitchFamily="34" charset="-122"/>
-                <a:cs typeface="Calibri" pitchFamily="34" charset="-120"/>
-              </a:rPr>
-              <a:t>Нестеренко В.В.   ·   ХНУРЕ, ІПЗм-24-1   ·   2026</a:t>
-            </a:r>
-            <a:endParaRPr lang="en-US" sz="900" dirty="0"/>
-          </a:p>
-        </p:txBody>
-      </p:sp>
-      <p:sp>
-        <p:nvSpPr>
-          <p:cNvPr id="18" name="Text 12"/>
+      <p:pic>
+        <p:nvPicPr>
+          <p:cNvPr id="17" name="Image 0" descr="D:\repos\kb-semantic-search-benchmark\thesis\scripts\_logo_hex.png">    </p:cNvPr>
+          <p:cNvPicPr>
+            <a:picLocks noChangeAspect="1"/>
+          </p:cNvPicPr>
+          <p:nvPr/>
+        </p:nvPicPr>
+        <p:blipFill>
+          <a:blip r:embed="rId5"/>
+          <a:stretch>
+            <a:fillRect/>
+          </a:stretch>
+        </p:blipFill>
+        <p:spPr>
+          <a:xfrm>
+            <a:off x="411480" y="4686300"/>
+            <a:ext cx="502920" cy="338328"/>
+          </a:xfrm>
+          <a:prstGeom prst="rect">
+            <a:avLst/>
+          </a:prstGeom>
+        </p:spPr>
+      </p:pic>
+      <p:sp>
+        <p:nvSpPr>
+          <p:cNvPr id="18" name="Text 11"/>
           <p:cNvSpPr/>
           <p:nvPr/>
         </p:nvSpPr>
@@ -16479,48 +16404,33 @@
           </a:graphicData>
         </a:graphic>
       </p:graphicFrame>
-      <p:sp>
-        <p:nvSpPr>
-          <p:cNvPr id="28" name="Text 25"/>
-          <p:cNvSpPr/>
-          <p:nvPr/>
-        </p:nvSpPr>
-        <p:spPr>
-          <a:xfrm>
-            <a:off x="411480" y="4850892"/>
-            <a:ext cx="6858000" cy="228600"/>
-          </a:xfrm>
-          <a:prstGeom prst="rect">
-            <a:avLst/>
-          </a:prstGeom>
-          <a:noFill/>
-          <a:ln/>
-        </p:spPr>
-        <p:txBody>
-          <a:bodyPr wrap="square" lIns="0" tIns="0" rIns="0" bIns="0" rtlCol="0" anchor="ctr"/>
-          <a:lstStyle/>
-          <a:p>
-            <a:pPr algn="l" indent="0" marL="0">
-              <a:buNone/>
-            </a:pPr>
-            <a:r>
-              <a:rPr lang="en-US" sz="900" dirty="0">
-                <a:solidFill>
-                  <a:srgbClr val="64748B"/>
-                </a:solidFill>
-                <a:latin typeface="Calibri" pitchFamily="34" charset="0"/>
-                <a:ea typeface="Calibri" pitchFamily="34" charset="-122"/>
-                <a:cs typeface="Calibri" pitchFamily="34" charset="-120"/>
-              </a:rPr>
-              <a:t>Нестеренко В.В.   ·   ХНУРЕ, ІПЗм-24-1   ·   2026</a:t>
-            </a:r>
-            <a:endParaRPr lang="en-US" sz="900" dirty="0"/>
-          </a:p>
-        </p:txBody>
-      </p:sp>
-      <p:sp>
-        <p:nvSpPr>
-          <p:cNvPr id="29" name="Text 26"/>
+      <p:pic>
+        <p:nvPicPr>
+          <p:cNvPr id="28" name="Image 0" descr="D:\repos\kb-semantic-search-benchmark\thesis\scripts\_logo_hex.png">    </p:cNvPr>
+          <p:cNvPicPr>
+            <a:picLocks noChangeAspect="1"/>
+          </p:cNvPicPr>
+          <p:nvPr/>
+        </p:nvPicPr>
+        <p:blipFill>
+          <a:blip r:embed="rId2"/>
+          <a:stretch>
+            <a:fillRect/>
+          </a:stretch>
+        </p:blipFill>
+        <p:spPr>
+          <a:xfrm>
+            <a:off x="411480" y="4686300"/>
+            <a:ext cx="502920" cy="338328"/>
+          </a:xfrm>
+          <a:prstGeom prst="rect">
+            <a:avLst/>
+          </a:prstGeom>
+        </p:spPr>
+      </p:pic>
+      <p:sp>
+        <p:nvSpPr>
+          <p:cNvPr id="29" name="Text 25"/>
           <p:cNvSpPr/>
           <p:nvPr/>
         </p:nvSpPr>
@@ -17904,48 +17814,33 @@
           </a:p>
         </p:txBody>
       </p:sp>
-      <p:sp>
-        <p:nvSpPr>
-          <p:cNvPr id="40" name="Text 37"/>
-          <p:cNvSpPr/>
-          <p:nvPr/>
-        </p:nvSpPr>
-        <p:spPr>
-          <a:xfrm>
-            <a:off x="411480" y="4850892"/>
-            <a:ext cx="6858000" cy="228600"/>
-          </a:xfrm>
-          <a:prstGeom prst="rect">
-            <a:avLst/>
-          </a:prstGeom>
-          <a:noFill/>
-          <a:ln/>
-        </p:spPr>
-        <p:txBody>
-          <a:bodyPr wrap="square" lIns="0" tIns="0" rIns="0" bIns="0" rtlCol="0" anchor="ctr"/>
-          <a:lstStyle/>
-          <a:p>
-            <a:pPr algn="l" indent="0" marL="0">
-              <a:buNone/>
-            </a:pPr>
-            <a:r>
-              <a:rPr lang="en-US" sz="900" dirty="0">
-                <a:solidFill>
-                  <a:srgbClr val="64748B"/>
-                </a:solidFill>
-                <a:latin typeface="Calibri" pitchFamily="34" charset="0"/>
-                <a:ea typeface="Calibri" pitchFamily="34" charset="-122"/>
-                <a:cs typeface="Calibri" pitchFamily="34" charset="-120"/>
-              </a:rPr>
-              <a:t>Нестеренко В.В.   ·   ХНУРЕ, ІПЗм-24-1   ·   2026</a:t>
-            </a:r>
-            <a:endParaRPr lang="en-US" sz="900" dirty="0"/>
-          </a:p>
-        </p:txBody>
-      </p:sp>
-      <p:sp>
-        <p:nvSpPr>
-          <p:cNvPr id="41" name="Text 38"/>
+      <p:pic>
+        <p:nvPicPr>
+          <p:cNvPr id="40" name="Image 0" descr="D:\repos\kb-semantic-search-benchmark\thesis\scripts\_logo_hex.png">    </p:cNvPr>
+          <p:cNvPicPr>
+            <a:picLocks noChangeAspect="1"/>
+          </p:cNvPicPr>
+          <p:nvPr/>
+        </p:nvPicPr>
+        <p:blipFill>
+          <a:blip r:embed="rId2"/>
+          <a:stretch>
+            <a:fillRect/>
+          </a:stretch>
+        </p:blipFill>
+        <p:spPr>
+          <a:xfrm>
+            <a:off x="411480" y="4686300"/>
+            <a:ext cx="502920" cy="338328"/>
+          </a:xfrm>
+          <a:prstGeom prst="rect">
+            <a:avLst/>
+          </a:prstGeom>
+        </p:spPr>
+      </p:pic>
+      <p:sp>
+        <p:nvSpPr>
+          <p:cNvPr id="41" name="Text 37"/>
           <p:cNvSpPr/>
           <p:nvPr/>
         </p:nvSpPr>
@@ -18909,48 +18804,33 @@
           </a:p>
         </p:txBody>
       </p:sp>
-      <p:sp>
-        <p:nvSpPr>
-          <p:cNvPr id="25" name="Text 23"/>
-          <p:cNvSpPr/>
-          <p:nvPr/>
-        </p:nvSpPr>
-        <p:spPr>
-          <a:xfrm>
-            <a:off x="411480" y="4850892"/>
-            <a:ext cx="6858000" cy="228600"/>
-          </a:xfrm>
-          <a:prstGeom prst="rect">
-            <a:avLst/>
-          </a:prstGeom>
-          <a:noFill/>
-          <a:ln/>
-        </p:spPr>
-        <p:txBody>
-          <a:bodyPr wrap="square" lIns="0" tIns="0" rIns="0" bIns="0" rtlCol="0" anchor="ctr"/>
-          <a:lstStyle/>
-          <a:p>
-            <a:pPr algn="l" indent="0" marL="0">
-              <a:buNone/>
-            </a:pPr>
-            <a:r>
-              <a:rPr lang="en-US" sz="900" dirty="0">
-                <a:solidFill>
-                  <a:srgbClr val="64748B"/>
-                </a:solidFill>
-                <a:latin typeface="Calibri" pitchFamily="34" charset="0"/>
-                <a:ea typeface="Calibri" pitchFamily="34" charset="-122"/>
-                <a:cs typeface="Calibri" pitchFamily="34" charset="-120"/>
-              </a:rPr>
-              <a:t>Нестеренко В.В.   ·   ХНУРЕ, ІПЗм-24-1   ·   2026</a:t>
-            </a:r>
-            <a:endParaRPr lang="en-US" sz="900" dirty="0"/>
-          </a:p>
-        </p:txBody>
-      </p:sp>
-      <p:sp>
-        <p:nvSpPr>
-          <p:cNvPr id="26" name="Text 24"/>
+      <p:pic>
+        <p:nvPicPr>
+          <p:cNvPr id="25" name="Image 0" descr="D:\repos\kb-semantic-search-benchmark\thesis\scripts\_logo_hex.png">    </p:cNvPr>
+          <p:cNvPicPr>
+            <a:picLocks noChangeAspect="1"/>
+          </p:cNvPicPr>
+          <p:nvPr/>
+        </p:nvPicPr>
+        <p:blipFill>
+          <a:blip r:embed="rId1"/>
+          <a:stretch>
+            <a:fillRect/>
+          </a:stretch>
+        </p:blipFill>
+        <p:spPr>
+          <a:xfrm>
+            <a:off x="411480" y="4686300"/>
+            <a:ext cx="502920" cy="338328"/>
+          </a:xfrm>
+          <a:prstGeom prst="rect">
+            <a:avLst/>
+          </a:prstGeom>
+        </p:spPr>
+      </p:pic>
+      <p:sp>
+        <p:nvSpPr>
+          <p:cNvPr id="26" name="Text 23"/>
           <p:cNvSpPr/>
           <p:nvPr/>
         </p:nvSpPr>
@@ -20049,9 +19929,33 @@
           </a:p>
         </p:txBody>
       </p:sp>
-      <p:sp>
-        <p:nvSpPr>
-          <p:cNvPr id="35" name="Text 28"/>
+      <p:pic>
+        <p:nvPicPr>
+          <p:cNvPr id="35" name="Image 5" descr="D:\repos\kb-semantic-search-benchmark\thesis\scripts\_logo_hex.png">    </p:cNvPr>
+          <p:cNvPicPr>
+            <a:picLocks noChangeAspect="1"/>
+          </p:cNvPicPr>
+          <p:nvPr/>
+        </p:nvPicPr>
+        <p:blipFill>
+          <a:blip r:embed="rId6"/>
+          <a:stretch>
+            <a:fillRect/>
+          </a:stretch>
+        </p:blipFill>
+        <p:spPr>
+          <a:xfrm>
+            <a:off x="411480" y="4686300"/>
+            <a:ext cx="502920" cy="338328"/>
+          </a:xfrm>
+          <a:prstGeom prst="rect">
+            <a:avLst/>
+          </a:prstGeom>
+        </p:spPr>
+      </p:pic>
+      <p:sp>
+        <p:nvSpPr>
+          <p:cNvPr id="36" name="Text 28"/>
           <p:cNvSpPr/>
           <p:nvPr/>
         </p:nvSpPr>
@@ -21384,48 +21288,33 @@
           </a:p>
         </p:txBody>
       </p:sp>
-      <p:sp>
-        <p:nvSpPr>
-          <p:cNvPr id="39" name="Text 36"/>
-          <p:cNvSpPr/>
-          <p:nvPr/>
-        </p:nvSpPr>
-        <p:spPr>
-          <a:xfrm>
-            <a:off x="411480" y="4850892"/>
-            <a:ext cx="6858000" cy="228600"/>
-          </a:xfrm>
-          <a:prstGeom prst="rect">
-            <a:avLst/>
-          </a:prstGeom>
-          <a:noFill/>
-          <a:ln/>
-        </p:spPr>
-        <p:txBody>
-          <a:bodyPr wrap="square" lIns="0" tIns="0" rIns="0" bIns="0" rtlCol="0" anchor="ctr"/>
-          <a:lstStyle/>
-          <a:p>
-            <a:pPr algn="l" indent="0" marL="0">
-              <a:buNone/>
-            </a:pPr>
-            <a:r>
-              <a:rPr lang="en-US" sz="900" dirty="0">
-                <a:solidFill>
-                  <a:srgbClr val="64748B"/>
-                </a:solidFill>
-                <a:latin typeface="Calibri" pitchFamily="34" charset="0"/>
-                <a:ea typeface="Calibri" pitchFamily="34" charset="-122"/>
-                <a:cs typeface="Calibri" pitchFamily="34" charset="-120"/>
-              </a:rPr>
-              <a:t>Нестеренко В.В.   ·   ХНУРЕ, ІПЗм-24-1   ·   2026</a:t>
-            </a:r>
-            <a:endParaRPr lang="en-US" sz="900" dirty="0"/>
-          </a:p>
-        </p:txBody>
-      </p:sp>
-      <p:sp>
-        <p:nvSpPr>
-          <p:cNvPr id="40" name="Text 37"/>
+      <p:pic>
+        <p:nvPicPr>
+          <p:cNvPr id="39" name="Image 1" descr="D:\repos\kb-semantic-search-benchmark\thesis\scripts\_logo_hex.png">    </p:cNvPr>
+          <p:cNvPicPr>
+            <a:picLocks noChangeAspect="1"/>
+          </p:cNvPicPr>
+          <p:nvPr/>
+        </p:nvPicPr>
+        <p:blipFill>
+          <a:blip r:embed="rId2"/>
+          <a:stretch>
+            <a:fillRect/>
+          </a:stretch>
+        </p:blipFill>
+        <p:spPr>
+          <a:xfrm>
+            <a:off x="411480" y="4686300"/>
+            <a:ext cx="502920" cy="338328"/>
+          </a:xfrm>
+          <a:prstGeom prst="rect">
+            <a:avLst/>
+          </a:prstGeom>
+        </p:spPr>
+      </p:pic>
+      <p:sp>
+        <p:nvSpPr>
+          <p:cNvPr id="40" name="Text 36"/>
           <p:cNvSpPr/>
           <p:nvPr/>
         </p:nvSpPr>
@@ -23047,48 +22936,33 @@
           </a:p>
         </p:txBody>
       </p:sp>
-      <p:sp>
-        <p:nvSpPr>
-          <p:cNvPr id="41" name="Text 38"/>
-          <p:cNvSpPr/>
-          <p:nvPr/>
-        </p:nvSpPr>
-        <p:spPr>
-          <a:xfrm>
-            <a:off x="411480" y="4850892"/>
-            <a:ext cx="6858000" cy="228600"/>
-          </a:xfrm>
-          <a:prstGeom prst="rect">
-            <a:avLst/>
-          </a:prstGeom>
-          <a:noFill/>
-          <a:ln/>
-        </p:spPr>
-        <p:txBody>
-          <a:bodyPr wrap="square" lIns="0" tIns="0" rIns="0" bIns="0" rtlCol="0" anchor="ctr"/>
-          <a:lstStyle/>
-          <a:p>
-            <a:pPr algn="l" indent="0" marL="0">
-              <a:buNone/>
-            </a:pPr>
-            <a:r>
-              <a:rPr lang="en-US" sz="900" dirty="0">
-                <a:solidFill>
-                  <a:srgbClr val="64748B"/>
-                </a:solidFill>
-                <a:latin typeface="Calibri" pitchFamily="34" charset="0"/>
-                <a:ea typeface="Calibri" pitchFamily="34" charset="-122"/>
-                <a:cs typeface="Calibri" pitchFamily="34" charset="-120"/>
-              </a:rPr>
-              <a:t>Нестеренко В.В.   ·   ХНУРЕ, ІПЗм-24-1   ·   2026</a:t>
-            </a:r>
-            <a:endParaRPr lang="en-US" sz="900" dirty="0"/>
-          </a:p>
-        </p:txBody>
-      </p:sp>
-      <p:sp>
-        <p:nvSpPr>
-          <p:cNvPr id="42" name="Text 39"/>
+      <p:pic>
+        <p:nvPicPr>
+          <p:cNvPr id="41" name="Image 1" descr="D:\repos\kb-semantic-search-benchmark\thesis\scripts\_logo_hex.png">    </p:cNvPr>
+          <p:cNvPicPr>
+            <a:picLocks noChangeAspect="1"/>
+          </p:cNvPicPr>
+          <p:nvPr/>
+        </p:nvPicPr>
+        <p:blipFill>
+          <a:blip r:embed="rId2"/>
+          <a:stretch>
+            <a:fillRect/>
+          </a:stretch>
+        </p:blipFill>
+        <p:spPr>
+          <a:xfrm>
+            <a:off x="411480" y="4686300"/>
+            <a:ext cx="502920" cy="338328"/>
+          </a:xfrm>
+          <a:prstGeom prst="rect">
+            <a:avLst/>
+          </a:prstGeom>
+        </p:spPr>
+      </p:pic>
+      <p:sp>
+        <p:nvSpPr>
+          <p:cNvPr id="42" name="Text 38"/>
           <p:cNvSpPr/>
           <p:nvPr/>
         </p:nvSpPr>
@@ -24352,48 +24226,33 @@
           </a:p>
         </p:txBody>
       </p:sp>
-      <p:sp>
-        <p:nvSpPr>
-          <p:cNvPr id="39" name="Text 37"/>
-          <p:cNvSpPr/>
-          <p:nvPr/>
-        </p:nvSpPr>
-        <p:spPr>
-          <a:xfrm>
-            <a:off x="411480" y="4850892"/>
-            <a:ext cx="6858000" cy="228600"/>
-          </a:xfrm>
-          <a:prstGeom prst="rect">
-            <a:avLst/>
-          </a:prstGeom>
-          <a:noFill/>
-          <a:ln/>
-        </p:spPr>
-        <p:txBody>
-          <a:bodyPr wrap="square" lIns="0" tIns="0" rIns="0" bIns="0" rtlCol="0" anchor="ctr"/>
-          <a:lstStyle/>
-          <a:p>
-            <a:pPr algn="l" indent="0" marL="0">
-              <a:buNone/>
-            </a:pPr>
-            <a:r>
-              <a:rPr lang="en-US" sz="900" dirty="0">
-                <a:solidFill>
-                  <a:srgbClr val="64748B"/>
-                </a:solidFill>
-                <a:latin typeface="Calibri" pitchFamily="34" charset="0"/>
-                <a:ea typeface="Calibri" pitchFamily="34" charset="-122"/>
-                <a:cs typeface="Calibri" pitchFamily="34" charset="-120"/>
-              </a:rPr>
-              <a:t>Нестеренко В.В.   ·   ХНУРЕ, ІПЗм-24-1   ·   2026</a:t>
-            </a:r>
-            <a:endParaRPr lang="en-US" sz="900" dirty="0"/>
-          </a:p>
-        </p:txBody>
-      </p:sp>
-      <p:sp>
-        <p:nvSpPr>
-          <p:cNvPr id="40" name="Text 38"/>
+      <p:pic>
+        <p:nvPicPr>
+          <p:cNvPr id="39" name="Image 0" descr="D:\repos\kb-semantic-search-benchmark\thesis\scripts\_logo_hex.png">    </p:cNvPr>
+          <p:cNvPicPr>
+            <a:picLocks noChangeAspect="1"/>
+          </p:cNvPicPr>
+          <p:nvPr/>
+        </p:nvPicPr>
+        <p:blipFill>
+          <a:blip r:embed="rId1"/>
+          <a:stretch>
+            <a:fillRect/>
+          </a:stretch>
+        </p:blipFill>
+        <p:spPr>
+          <a:xfrm>
+            <a:off x="411480" y="4686300"/>
+            <a:ext cx="502920" cy="338328"/>
+          </a:xfrm>
+          <a:prstGeom prst="rect">
+            <a:avLst/>
+          </a:prstGeom>
+        </p:spPr>
+      </p:pic>
+      <p:sp>
+        <p:nvSpPr>
+          <p:cNvPr id="40" name="Text 37"/>
           <p:cNvSpPr/>
           <p:nvPr/>
         </p:nvSpPr>
@@ -26324,48 +26183,33 @@
           </a:graphicData>
         </a:graphic>
       </p:graphicFrame>
-      <p:sp>
-        <p:nvSpPr>
-          <p:cNvPr id="54" name="Text 50"/>
-          <p:cNvSpPr/>
-          <p:nvPr/>
-        </p:nvSpPr>
-        <p:spPr>
-          <a:xfrm>
-            <a:off x="411480" y="4850892"/>
-            <a:ext cx="6858000" cy="228600"/>
-          </a:xfrm>
-          <a:prstGeom prst="rect">
-            <a:avLst/>
-          </a:prstGeom>
-          <a:noFill/>
-          <a:ln/>
-        </p:spPr>
-        <p:txBody>
-          <a:bodyPr wrap="square" lIns="0" tIns="0" rIns="0" bIns="0" rtlCol="0" anchor="ctr"/>
-          <a:lstStyle/>
-          <a:p>
-            <a:pPr algn="l" indent="0" marL="0">
-              <a:buNone/>
-            </a:pPr>
-            <a:r>
-              <a:rPr lang="en-US" sz="900" dirty="0">
-                <a:solidFill>
-                  <a:srgbClr val="64748B"/>
-                </a:solidFill>
-                <a:latin typeface="Calibri" pitchFamily="34" charset="0"/>
-                <a:ea typeface="Calibri" pitchFamily="34" charset="-122"/>
-                <a:cs typeface="Calibri" pitchFamily="34" charset="-120"/>
-              </a:rPr>
-              <a:t>Нестеренко В.В.   ·   ХНУРЕ, ІПЗм-24-1   ·   2026</a:t>
-            </a:r>
-            <a:endParaRPr lang="en-US" sz="900" dirty="0"/>
-          </a:p>
-        </p:txBody>
-      </p:sp>
-      <p:sp>
-        <p:nvSpPr>
-          <p:cNvPr id="55" name="Text 51"/>
+      <p:pic>
+        <p:nvPicPr>
+          <p:cNvPr id="54" name="Image 0" descr="D:\repos\kb-semantic-search-benchmark\thesis\scripts\_logo_hex.png">    </p:cNvPr>
+          <p:cNvPicPr>
+            <a:picLocks noChangeAspect="1"/>
+          </p:cNvPicPr>
+          <p:nvPr/>
+        </p:nvPicPr>
+        <p:blipFill>
+          <a:blip r:embed="rId3"/>
+          <a:stretch>
+            <a:fillRect/>
+          </a:stretch>
+        </p:blipFill>
+        <p:spPr>
+          <a:xfrm>
+            <a:off x="411480" y="4686300"/>
+            <a:ext cx="502920" cy="338328"/>
+          </a:xfrm>
+          <a:prstGeom prst="rect">
+            <a:avLst/>
+          </a:prstGeom>
+        </p:spPr>
+      </p:pic>
+      <p:sp>
+        <p:nvSpPr>
+          <p:cNvPr id="55" name="Text 50"/>
           <p:cNvSpPr/>
           <p:nvPr/>
         </p:nvSpPr>
@@ -28025,48 +27869,33 @@
           </a:p>
         </p:txBody>
       </p:sp>
-      <p:sp>
-        <p:nvSpPr>
-          <p:cNvPr id="45" name="Text 40"/>
-          <p:cNvSpPr/>
-          <p:nvPr/>
-        </p:nvSpPr>
-        <p:spPr>
-          <a:xfrm>
-            <a:off x="411480" y="4850892"/>
-            <a:ext cx="6858000" cy="228600"/>
-          </a:xfrm>
-          <a:prstGeom prst="rect">
-            <a:avLst/>
-          </a:prstGeom>
-          <a:noFill/>
-          <a:ln/>
-        </p:spPr>
-        <p:txBody>
-          <a:bodyPr wrap="square" lIns="0" tIns="0" rIns="0" bIns="0" rtlCol="0" anchor="ctr"/>
-          <a:lstStyle/>
-          <a:p>
-            <a:pPr algn="l" indent="0" marL="0">
-              <a:buNone/>
-            </a:pPr>
-            <a:r>
-              <a:rPr lang="en-US" sz="900" dirty="0">
-                <a:solidFill>
-                  <a:srgbClr val="64748B"/>
-                </a:solidFill>
-                <a:latin typeface="Calibri" pitchFamily="34" charset="0"/>
-                <a:ea typeface="Calibri" pitchFamily="34" charset="-122"/>
-                <a:cs typeface="Calibri" pitchFamily="34" charset="-120"/>
-              </a:rPr>
-              <a:t>Нестеренко В.В.   ·   ХНУРЕ, ІПЗм-24-1   ·   2026</a:t>
-            </a:r>
-            <a:endParaRPr lang="en-US" sz="900" dirty="0"/>
-          </a:p>
-        </p:txBody>
-      </p:sp>
-      <p:sp>
-        <p:nvSpPr>
-          <p:cNvPr id="46" name="Text 41"/>
+      <p:pic>
+        <p:nvPicPr>
+          <p:cNvPr id="45" name="Image 3" descr="D:\repos\kb-semantic-search-benchmark\thesis\scripts\_logo_hex.png">    </p:cNvPr>
+          <p:cNvPicPr>
+            <a:picLocks noChangeAspect="1"/>
+          </p:cNvPicPr>
+          <p:nvPr/>
+        </p:nvPicPr>
+        <p:blipFill>
+          <a:blip r:embed="rId4"/>
+          <a:stretch>
+            <a:fillRect/>
+          </a:stretch>
+        </p:blipFill>
+        <p:spPr>
+          <a:xfrm>
+            <a:off x="411480" y="4686300"/>
+            <a:ext cx="502920" cy="338328"/>
+          </a:xfrm>
+          <a:prstGeom prst="rect">
+            <a:avLst/>
+          </a:prstGeom>
+        </p:spPr>
+      </p:pic>
+      <p:sp>
+        <p:nvSpPr>
+          <p:cNvPr id="46" name="Text 40"/>
           <p:cNvSpPr/>
           <p:nvPr/>
         </p:nvSpPr>
@@ -29385,48 +29214,33 @@
           </a:p>
         </p:txBody>
       </p:sp>
-      <p:sp>
-        <p:nvSpPr>
-          <p:cNvPr id="37" name="Text 35"/>
-          <p:cNvSpPr/>
-          <p:nvPr/>
-        </p:nvSpPr>
-        <p:spPr>
-          <a:xfrm>
-            <a:off x="411480" y="4850892"/>
-            <a:ext cx="6858000" cy="228600"/>
-          </a:xfrm>
-          <a:prstGeom prst="rect">
-            <a:avLst/>
-          </a:prstGeom>
-          <a:noFill/>
-          <a:ln/>
-        </p:spPr>
-        <p:txBody>
-          <a:bodyPr wrap="square" lIns="0" tIns="0" rIns="0" bIns="0" rtlCol="0" anchor="ctr"/>
-          <a:lstStyle/>
-          <a:p>
-            <a:pPr algn="l" indent="0" marL="0">
-              <a:buNone/>
-            </a:pPr>
-            <a:r>
-              <a:rPr lang="en-US" sz="900" dirty="0">
-                <a:solidFill>
-                  <a:srgbClr val="64748B"/>
-                </a:solidFill>
-                <a:latin typeface="Calibri" pitchFamily="34" charset="0"/>
-                <a:ea typeface="Calibri" pitchFamily="34" charset="-122"/>
-                <a:cs typeface="Calibri" pitchFamily="34" charset="-120"/>
-              </a:rPr>
-              <a:t>Нестеренко В.В.   ·   ХНУРЕ, ІПЗм-24-1   ·   2026</a:t>
-            </a:r>
-            <a:endParaRPr lang="en-US" sz="900" dirty="0"/>
-          </a:p>
-        </p:txBody>
-      </p:sp>
-      <p:sp>
-        <p:nvSpPr>
-          <p:cNvPr id="38" name="Text 36"/>
+      <p:pic>
+        <p:nvPicPr>
+          <p:cNvPr id="37" name="Image 0" descr="D:\repos\kb-semantic-search-benchmark\thesis\scripts\_logo_hex.png">    </p:cNvPr>
+          <p:cNvPicPr>
+            <a:picLocks noChangeAspect="1"/>
+          </p:cNvPicPr>
+          <p:nvPr/>
+        </p:nvPicPr>
+        <p:blipFill>
+          <a:blip r:embed="rId1"/>
+          <a:stretch>
+            <a:fillRect/>
+          </a:stretch>
+        </p:blipFill>
+        <p:spPr>
+          <a:xfrm>
+            <a:off x="411480" y="4686300"/>
+            <a:ext cx="502920" cy="338328"/>
+          </a:xfrm>
+          <a:prstGeom prst="rect">
+            <a:avLst/>
+          </a:prstGeom>
+        </p:spPr>
+      </p:pic>
+      <p:sp>
+        <p:nvSpPr>
+          <p:cNvPr id="38" name="Text 35"/>
           <p:cNvSpPr/>
           <p:nvPr/>
         </p:nvSpPr>
@@ -32085,48 +31899,33 @@
           </a:graphicData>
         </a:graphic>
       </p:graphicFrame>
-      <p:sp>
-        <p:nvSpPr>
-          <p:cNvPr id="31" name="Text 27"/>
-          <p:cNvSpPr/>
-          <p:nvPr/>
-        </p:nvSpPr>
-        <p:spPr>
-          <a:xfrm>
-            <a:off x="411480" y="4850892"/>
-            <a:ext cx="6858000" cy="228600"/>
-          </a:xfrm>
-          <a:prstGeom prst="rect">
-            <a:avLst/>
-          </a:prstGeom>
-          <a:noFill/>
-          <a:ln/>
-        </p:spPr>
-        <p:txBody>
-          <a:bodyPr wrap="square" lIns="0" tIns="0" rIns="0" bIns="0" rtlCol="0" anchor="ctr"/>
-          <a:lstStyle/>
-          <a:p>
-            <a:pPr algn="l" indent="0" marL="0">
-              <a:buNone/>
-            </a:pPr>
-            <a:r>
-              <a:rPr lang="en-US" sz="900" dirty="0">
-                <a:solidFill>
-                  <a:srgbClr val="64748B"/>
-                </a:solidFill>
-                <a:latin typeface="Calibri" pitchFamily="34" charset="0"/>
-                <a:ea typeface="Calibri" pitchFamily="34" charset="-122"/>
-                <a:cs typeface="Calibri" pitchFamily="34" charset="-120"/>
-              </a:rPr>
-              <a:t>Нестеренко В.В.   ·   ХНУРЕ, ІПЗм-24-1   ·   2026</a:t>
-            </a:r>
-            <a:endParaRPr lang="en-US" sz="900" dirty="0"/>
-          </a:p>
-        </p:txBody>
-      </p:sp>
-      <p:sp>
-        <p:nvSpPr>
-          <p:cNvPr id="32" name="Text 28"/>
+      <p:pic>
+        <p:nvPicPr>
+          <p:cNvPr id="31" name="Image 0" descr="D:\repos\kb-semantic-search-benchmark\thesis\scripts\_logo_hex.png">    </p:cNvPr>
+          <p:cNvPicPr>
+            <a:picLocks noChangeAspect="1"/>
+          </p:cNvPicPr>
+          <p:nvPr/>
+        </p:nvPicPr>
+        <p:blipFill>
+          <a:blip r:embed="rId2"/>
+          <a:stretch>
+            <a:fillRect/>
+          </a:stretch>
+        </p:blipFill>
+        <p:spPr>
+          <a:xfrm>
+            <a:off x="411480" y="4686300"/>
+            <a:ext cx="502920" cy="338328"/>
+          </a:xfrm>
+          <a:prstGeom prst="rect">
+            <a:avLst/>
+          </a:prstGeom>
+        </p:spPr>
+      </p:pic>
+      <p:sp>
+        <p:nvSpPr>
+          <p:cNvPr id="32" name="Text 27"/>
           <p:cNvSpPr/>
           <p:nvPr/>
         </p:nvSpPr>
@@ -33765,48 +33564,33 @@
           </a:p>
         </p:txBody>
       </p:sp>
-      <p:sp>
-        <p:nvSpPr>
-          <p:cNvPr id="47" name="Text 34"/>
-          <p:cNvSpPr/>
-          <p:nvPr/>
-        </p:nvSpPr>
-        <p:spPr>
-          <a:xfrm>
-            <a:off x="411480" y="4850892"/>
-            <a:ext cx="6858000" cy="228600"/>
-          </a:xfrm>
-          <a:prstGeom prst="rect">
-            <a:avLst/>
-          </a:prstGeom>
-          <a:noFill/>
-          <a:ln/>
-        </p:spPr>
-        <p:txBody>
-          <a:bodyPr wrap="square" lIns="0" tIns="0" rIns="0" bIns="0" rtlCol="0" anchor="ctr"/>
-          <a:lstStyle/>
-          <a:p>
-            <a:pPr algn="l" indent="0" marL="0">
-              <a:buNone/>
-            </a:pPr>
-            <a:r>
-              <a:rPr lang="en-US" sz="900" dirty="0">
-                <a:solidFill>
-                  <a:srgbClr val="64748B"/>
-                </a:solidFill>
-                <a:latin typeface="Calibri" pitchFamily="34" charset="0"/>
-                <a:ea typeface="Calibri" pitchFamily="34" charset="-122"/>
-                <a:cs typeface="Calibri" pitchFamily="34" charset="-120"/>
-              </a:rPr>
-              <a:t>Нестеренко В.В.   ·   ХНУРЕ, ІПЗм-24-1   ·   2026</a:t>
-            </a:r>
-            <a:endParaRPr lang="en-US" sz="900" dirty="0"/>
-          </a:p>
-        </p:txBody>
-      </p:sp>
-      <p:sp>
-        <p:nvSpPr>
-          <p:cNvPr id="48" name="Text 35"/>
+      <p:pic>
+        <p:nvPicPr>
+          <p:cNvPr id="47" name="Image 11" descr="D:\repos\kb-semantic-search-benchmark\thesis\scripts\_logo_hex.png">    </p:cNvPr>
+          <p:cNvPicPr>
+            <a:picLocks noChangeAspect="1"/>
+          </p:cNvPicPr>
+          <p:nvPr/>
+        </p:nvPicPr>
+        <p:blipFill>
+          <a:blip r:embed="rId12"/>
+          <a:stretch>
+            <a:fillRect/>
+          </a:stretch>
+        </p:blipFill>
+        <p:spPr>
+          <a:xfrm>
+            <a:off x="411480" y="4686300"/>
+            <a:ext cx="502920" cy="338328"/>
+          </a:xfrm>
+          <a:prstGeom prst="rect">
+            <a:avLst/>
+          </a:prstGeom>
+        </p:spPr>
+      </p:pic>
+      <p:sp>
+        <p:nvSpPr>
+          <p:cNvPr id="48" name="Text 34"/>
           <p:cNvSpPr/>
           <p:nvPr/>
         </p:nvSpPr>

--- a/thesis/Nesterenko_Presentation.pptx
+++ b/thesis/Nesterenko_Presentation.pptx
@@ -21489,7 +21489,7 @@
         </p:nvSpPr>
         <p:spPr>
           <a:xfrm>
-            <a:off x="777240" y="2331720"/>
+            <a:off x="777240" y="2697480"/>
             <a:ext cx="7589520" cy="22860"/>
           </a:xfrm>
           <a:prstGeom prst="rect">
@@ -21509,7 +21509,7 @@
         </p:nvSpPr>
         <p:spPr>
           <a:xfrm>
-            <a:off x="320040" y="1737360"/>
+            <a:off x="320040" y="2103120"/>
             <a:ext cx="914400" cy="274320"/>
           </a:xfrm>
           <a:prstGeom prst="rect">
@@ -21548,7 +21548,7 @@
         </p:nvSpPr>
         <p:spPr>
           <a:xfrm>
-            <a:off x="640080" y="2208276"/>
+            <a:off x="640080" y="2574036"/>
             <a:ext cx="274320" cy="274320"/>
           </a:xfrm>
           <a:prstGeom prst="ellipse">
@@ -21573,7 +21573,7 @@
         </p:nvSpPr>
         <p:spPr>
           <a:xfrm>
-            <a:off x="0" y="2560320"/>
+            <a:off x="0" y="2926080"/>
             <a:ext cx="1554480" cy="274320"/>
           </a:xfrm>
           <a:prstGeom prst="rect">
@@ -21612,7 +21612,7 @@
         </p:nvSpPr>
         <p:spPr>
           <a:xfrm>
-            <a:off x="0" y="2834640"/>
+            <a:off x="0" y="3200400"/>
             <a:ext cx="1554480" cy="201168"/>
           </a:xfrm>
           <a:prstGeom prst="rect">
@@ -21651,8 +21651,8 @@
         </p:nvSpPr>
         <p:spPr>
           <a:xfrm>
-            <a:off x="-91440" y="3044952"/>
-            <a:ext cx="1737360" cy="594360"/>
+            <a:off x="-91440" y="3410712"/>
+            <a:ext cx="1737360" cy="868680"/>
           </a:xfrm>
           <a:prstGeom prst="rect">
             <a:avLst/>
@@ -21668,7 +21668,7 @@
               <a:buNone/>
             </a:pPr>
             <a:r>
-              <a:rPr lang="en-US" sz="950" dirty="0">
+              <a:rPr lang="en-US" sz="1000" dirty="0">
                 <a:solidFill>
                   <a:srgbClr val="475569"/>
                 </a:solidFill>
@@ -21678,14 +21678,14 @@
               </a:rPr>
               <a:t>Статистичні</a:t>
             </a:r>
-            <a:endParaRPr lang="en-US" sz="950" dirty="0"/>
+            <a:endParaRPr lang="en-US" sz="1000" dirty="0"/>
           </a:p>
           <a:p>
             <a:pPr algn="ctr" indent="0" marL="0">
               <a:buNone/>
             </a:pPr>
             <a:r>
-              <a:rPr lang="en-US" sz="950" dirty="0">
+              <a:rPr lang="en-US" sz="1000" dirty="0">
                 <a:solidFill>
                   <a:srgbClr val="475569"/>
                 </a:solidFill>
@@ -21695,7 +21695,7 @@
               </a:rPr>
               <a:t>векторні подання</a:t>
             </a:r>
-            <a:endParaRPr lang="en-US" sz="950" dirty="0"/>
+            <a:endParaRPr lang="en-US" sz="1000" dirty="0"/>
           </a:p>
         </p:txBody>
       </p:sp>
@@ -21707,7 +21707,7 @@
         </p:nvSpPr>
         <p:spPr>
           <a:xfrm>
-            <a:off x="1837944" y="1737360"/>
+            <a:off x="1837944" y="2103120"/>
             <a:ext cx="914400" cy="274320"/>
           </a:xfrm>
           <a:prstGeom prst="rect">
@@ -21746,7 +21746,7 @@
         </p:nvSpPr>
         <p:spPr>
           <a:xfrm>
-            <a:off x="2157984" y="2208276"/>
+            <a:off x="2157984" y="2574036"/>
             <a:ext cx="274320" cy="274320"/>
           </a:xfrm>
           <a:prstGeom prst="ellipse">
@@ -21771,7 +21771,7 @@
         </p:nvSpPr>
         <p:spPr>
           <a:xfrm>
-            <a:off x="1517904" y="2560320"/>
+            <a:off x="1517904" y="2926080"/>
             <a:ext cx="1554480" cy="274320"/>
           </a:xfrm>
           <a:prstGeom prst="rect">
@@ -21810,7 +21810,7 @@
         </p:nvSpPr>
         <p:spPr>
           <a:xfrm>
-            <a:off x="1517904" y="2834640"/>
+            <a:off x="1517904" y="3200400"/>
             <a:ext cx="1554480" cy="201168"/>
           </a:xfrm>
           <a:prstGeom prst="rect">
@@ -21849,8 +21849,8 @@
         </p:nvSpPr>
         <p:spPr>
           <a:xfrm>
-            <a:off x="1426464" y="3044952"/>
-            <a:ext cx="1737360" cy="594360"/>
+            <a:off x="1426464" y="3410712"/>
+            <a:ext cx="1737360" cy="868680"/>
           </a:xfrm>
           <a:prstGeom prst="rect">
             <a:avLst/>
@@ -21866,7 +21866,7 @@
               <a:buNone/>
             </a:pPr>
             <a:r>
-              <a:rPr lang="en-US" sz="950" dirty="0">
+              <a:rPr lang="en-US" sz="1000" dirty="0">
                 <a:solidFill>
                   <a:srgbClr val="475569"/>
                 </a:solidFill>
@@ -21876,14 +21876,14 @@
               </a:rPr>
               <a:t>Трансформери,</a:t>
             </a:r>
-            <a:endParaRPr lang="en-US" sz="950" dirty="0"/>
+            <a:endParaRPr lang="en-US" sz="1000" dirty="0"/>
           </a:p>
           <a:p>
             <a:pPr algn="ctr" indent="0" marL="0">
               <a:buNone/>
             </a:pPr>
             <a:r>
-              <a:rPr lang="en-US" sz="950" dirty="0">
+              <a:rPr lang="en-US" sz="1000" dirty="0">
                 <a:solidFill>
                   <a:srgbClr val="475569"/>
                 </a:solidFill>
@@ -21893,7 +21893,7 @@
               </a:rPr>
               <a:t>контекстність</a:t>
             </a:r>
-            <a:endParaRPr lang="en-US" sz="950" dirty="0"/>
+            <a:endParaRPr lang="en-US" sz="1000" dirty="0"/>
           </a:p>
         </p:txBody>
       </p:sp>
@@ -21905,7 +21905,7 @@
         </p:nvSpPr>
         <p:spPr>
           <a:xfrm>
-            <a:off x="3355848" y="1737360"/>
+            <a:off x="3355848" y="2103120"/>
             <a:ext cx="914400" cy="274320"/>
           </a:xfrm>
           <a:prstGeom prst="rect">
@@ -21944,7 +21944,7 @@
         </p:nvSpPr>
         <p:spPr>
           <a:xfrm>
-            <a:off x="3675888" y="2208276"/>
+            <a:off x="3675888" y="2574036"/>
             <a:ext cx="274320" cy="274320"/>
           </a:xfrm>
           <a:prstGeom prst="ellipse">
@@ -21969,7 +21969,7 @@
         </p:nvSpPr>
         <p:spPr>
           <a:xfrm>
-            <a:off x="3035808" y="2560320"/>
+            <a:off x="3035808" y="2926080"/>
             <a:ext cx="1554480" cy="274320"/>
           </a:xfrm>
           <a:prstGeom prst="rect">
@@ -22008,7 +22008,7 @@
         </p:nvSpPr>
         <p:spPr>
           <a:xfrm>
-            <a:off x="3035808" y="2834640"/>
+            <a:off x="3035808" y="3200400"/>
             <a:ext cx="1554480" cy="201168"/>
           </a:xfrm>
           <a:prstGeom prst="rect">
@@ -22047,8 +22047,8 @@
         </p:nvSpPr>
         <p:spPr>
           <a:xfrm>
-            <a:off x="2944368" y="3044952"/>
-            <a:ext cx="1737360" cy="594360"/>
+            <a:off x="2944368" y="3410712"/>
+            <a:ext cx="1737360" cy="868680"/>
           </a:xfrm>
           <a:prstGeom prst="rect">
             <a:avLst/>
@@ -22064,7 +22064,7 @@
               <a:buNone/>
             </a:pPr>
             <a:r>
-              <a:rPr lang="en-US" sz="950" dirty="0">
+              <a:rPr lang="en-US" sz="1000" dirty="0">
                 <a:solidFill>
                   <a:srgbClr val="475569"/>
                 </a:solidFill>
@@ -22074,14 +22074,14 @@
               </a:rPr>
               <a:t>Семантичні</a:t>
             </a:r>
-            <a:endParaRPr lang="en-US" sz="950" dirty="0"/>
+            <a:endParaRPr lang="en-US" sz="1000" dirty="0"/>
           </a:p>
           <a:p>
             <a:pPr algn="ctr" indent="0" marL="0">
               <a:buNone/>
             </a:pPr>
             <a:r>
-              <a:rPr lang="en-US" sz="950" dirty="0">
+              <a:rPr lang="en-US" sz="1000" dirty="0">
                 <a:solidFill>
                   <a:srgbClr val="475569"/>
                 </a:solidFill>
@@ -22091,7 +22091,7 @@
               </a:rPr>
               <a:t>векторизатори</a:t>
             </a:r>
-            <a:endParaRPr lang="en-US" sz="950" dirty="0"/>
+            <a:endParaRPr lang="en-US" sz="1000" dirty="0"/>
           </a:p>
         </p:txBody>
       </p:sp>
@@ -22103,7 +22103,7 @@
         </p:nvSpPr>
         <p:spPr>
           <a:xfrm>
-            <a:off x="4873752" y="1737360"/>
+            <a:off x="4873752" y="2103120"/>
             <a:ext cx="914400" cy="274320"/>
           </a:xfrm>
           <a:prstGeom prst="rect">
@@ -22142,7 +22142,7 @@
         </p:nvSpPr>
         <p:spPr>
           <a:xfrm>
-            <a:off x="5193792" y="2208276"/>
+            <a:off x="5193792" y="2574036"/>
             <a:ext cx="274320" cy="274320"/>
           </a:xfrm>
           <a:prstGeom prst="ellipse">
@@ -22167,7 +22167,7 @@
         </p:nvSpPr>
         <p:spPr>
           <a:xfrm>
-            <a:off x="4553712" y="2560320"/>
+            <a:off x="4553712" y="2926080"/>
             <a:ext cx="1554480" cy="274320"/>
           </a:xfrm>
           <a:prstGeom prst="rect">
@@ -22206,7 +22206,7 @@
         </p:nvSpPr>
         <p:spPr>
           <a:xfrm>
-            <a:off x="4553712" y="2834640"/>
+            <a:off x="4553712" y="3200400"/>
             <a:ext cx="1554480" cy="201168"/>
           </a:xfrm>
           <a:prstGeom prst="rect">
@@ -22245,8 +22245,8 @@
         </p:nvSpPr>
         <p:spPr>
           <a:xfrm>
-            <a:off x="4462272" y="3044952"/>
-            <a:ext cx="1737360" cy="594360"/>
+            <a:off x="4462272" y="3410712"/>
+            <a:ext cx="1737360" cy="868680"/>
           </a:xfrm>
           <a:prstGeom prst="rect">
             <a:avLst/>
@@ -22262,7 +22262,7 @@
               <a:buNone/>
             </a:pPr>
             <a:r>
-              <a:rPr lang="en-US" sz="950" dirty="0">
+              <a:rPr lang="en-US" sz="1000" dirty="0">
                 <a:solidFill>
                   <a:srgbClr val="475569"/>
                 </a:solidFill>
@@ -22272,14 +22272,14 @@
               </a:rPr>
               <a:t>Multilingual,</a:t>
             </a:r>
-            <a:endParaRPr lang="en-US" sz="950" dirty="0"/>
+            <a:endParaRPr lang="en-US" sz="1000" dirty="0"/>
           </a:p>
           <a:p>
             <a:pPr algn="ctr" indent="0" marL="0">
               <a:buNone/>
             </a:pPr>
             <a:r>
-              <a:rPr lang="en-US" sz="950" dirty="0">
+              <a:rPr lang="en-US" sz="1000" dirty="0">
                 <a:solidFill>
                   <a:srgbClr val="475569"/>
                 </a:solidFill>
@@ -22289,7 +22289,7 @@
               </a:rPr>
               <a:t>contrastive</a:t>
             </a:r>
-            <a:endParaRPr lang="en-US" sz="950" dirty="0"/>
+            <a:endParaRPr lang="en-US" sz="1000" dirty="0"/>
           </a:p>
         </p:txBody>
       </p:sp>
@@ -22301,7 +22301,7 @@
         </p:nvSpPr>
         <p:spPr>
           <a:xfrm>
-            <a:off x="6391656" y="1737360"/>
+            <a:off x="6391656" y="2103120"/>
             <a:ext cx="914400" cy="274320"/>
           </a:xfrm>
           <a:prstGeom prst="rect">
@@ -22340,7 +22340,7 @@
         </p:nvSpPr>
         <p:spPr>
           <a:xfrm>
-            <a:off x="6711696" y="2208276"/>
+            <a:off x="6711696" y="2574036"/>
             <a:ext cx="274320" cy="274320"/>
           </a:xfrm>
           <a:prstGeom prst="ellipse">
@@ -22365,7 +22365,7 @@
         </p:nvSpPr>
         <p:spPr>
           <a:xfrm>
-            <a:off x="6071616" y="2560320"/>
+            <a:off x="6071616" y="2926080"/>
             <a:ext cx="1554480" cy="274320"/>
           </a:xfrm>
           <a:prstGeom prst="rect">
@@ -22404,7 +22404,7 @@
         </p:nvSpPr>
         <p:spPr>
           <a:xfrm>
-            <a:off x="6071616" y="2834640"/>
+            <a:off x="6071616" y="3200400"/>
             <a:ext cx="1554480" cy="201168"/>
           </a:xfrm>
           <a:prstGeom prst="rect">
@@ -22443,8 +22443,8 @@
         </p:nvSpPr>
         <p:spPr>
           <a:xfrm>
-            <a:off x="5980176" y="3044952"/>
-            <a:ext cx="1737360" cy="594360"/>
+            <a:off x="5980176" y="3410712"/>
+            <a:ext cx="1737360" cy="868680"/>
           </a:xfrm>
           <a:prstGeom prst="rect">
             <a:avLst/>
@@ -22460,7 +22460,7 @@
               <a:buNone/>
             </a:pPr>
             <a:r>
-              <a:rPr lang="en-US" sz="950" dirty="0">
+              <a:rPr lang="en-US" sz="1000" dirty="0">
                 <a:solidFill>
                   <a:srgbClr val="475569"/>
                 </a:solidFill>
@@ -22470,14 +22470,14 @@
               </a:rPr>
               <a:t>Multi-functionality,</a:t>
             </a:r>
-            <a:endParaRPr lang="en-US" sz="950" dirty="0"/>
+            <a:endParaRPr lang="en-US" sz="1000" dirty="0"/>
           </a:p>
           <a:p>
             <a:pPr algn="ctr" indent="0" marL="0">
               <a:buNone/>
             </a:pPr>
             <a:r>
-              <a:rPr lang="en-US" sz="950" dirty="0">
+              <a:rPr lang="en-US" sz="1000" dirty="0">
                 <a:solidFill>
                   <a:srgbClr val="475569"/>
                 </a:solidFill>
@@ -22487,7 +22487,7 @@
               </a:rPr>
               <a:t>long context</a:t>
             </a:r>
-            <a:endParaRPr lang="en-US" sz="950" dirty="0"/>
+            <a:endParaRPr lang="en-US" sz="1000" dirty="0"/>
           </a:p>
         </p:txBody>
       </p:sp>
@@ -22499,7 +22499,7 @@
         </p:nvSpPr>
         <p:spPr>
           <a:xfrm>
-            <a:off x="7909560" y="1737360"/>
+            <a:off x="7909560" y="2103120"/>
             <a:ext cx="914400" cy="274320"/>
           </a:xfrm>
           <a:prstGeom prst="rect">
@@ -22538,7 +22538,7 @@
         </p:nvSpPr>
         <p:spPr>
           <a:xfrm>
-            <a:off x="8229600" y="2208276"/>
+            <a:off x="8229600" y="2574036"/>
             <a:ext cx="274320" cy="274320"/>
           </a:xfrm>
           <a:prstGeom prst="ellipse">
@@ -22563,7 +22563,7 @@
         </p:nvSpPr>
         <p:spPr>
           <a:xfrm>
-            <a:off x="7589520" y="2560320"/>
+            <a:off x="7589520" y="2926080"/>
             <a:ext cx="1554480" cy="274320"/>
           </a:xfrm>
           <a:prstGeom prst="rect">
@@ -22602,7 +22602,7 @@
         </p:nvSpPr>
         <p:spPr>
           <a:xfrm>
-            <a:off x="7589520" y="2834640"/>
+            <a:off x="7589520" y="3200400"/>
             <a:ext cx="1554480" cy="201168"/>
           </a:xfrm>
           <a:prstGeom prst="rect">
@@ -22641,8 +22641,8 @@
         </p:nvSpPr>
         <p:spPr>
           <a:xfrm>
-            <a:off x="7498080" y="3044952"/>
-            <a:ext cx="1737360" cy="594360"/>
+            <a:off x="7498080" y="3410712"/>
+            <a:ext cx="1737360" cy="868680"/>
           </a:xfrm>
           <a:prstGeom prst="rect">
             <a:avLst/>
@@ -22658,7 +22658,7 @@
               <a:buNone/>
             </a:pPr>
             <a:r>
-              <a:rPr lang="en-US" sz="950" dirty="0">
+              <a:rPr lang="en-US" sz="1000" dirty="0">
                 <a:solidFill>
                   <a:srgbClr val="475569"/>
                 </a:solidFill>
@@ -22668,14 +22668,14 @@
               </a:rPr>
               <a:t>Decoder-based,</a:t>
             </a:r>
-            <a:endParaRPr lang="en-US" sz="950" dirty="0"/>
+            <a:endParaRPr lang="en-US" sz="1000" dirty="0"/>
           </a:p>
           <a:p>
             <a:pPr algn="ctr" indent="0" marL="0">
               <a:buNone/>
             </a:pPr>
             <a:r>
-              <a:rPr lang="en-US" sz="950" dirty="0">
+              <a:rPr lang="en-US" sz="1000" dirty="0">
                 <a:solidFill>
                   <a:srgbClr val="475569"/>
                 </a:solidFill>
@@ -22685,7 +22685,7 @@
               </a:rPr>
               <a:t>instruction-aware</a:t>
             </a:r>
-            <a:endParaRPr lang="en-US" sz="950" dirty="0"/>
+            <a:endParaRPr lang="en-US" sz="1000" dirty="0"/>
           </a:p>
         </p:txBody>
       </p:sp>
@@ -22836,12 +22836,12 @@
         </p:nvSpPr>
         <p:spPr>
           <a:xfrm>
-            <a:off x="411480" y="4315968"/>
-            <a:ext cx="8321040" cy="411480"/>
+            <a:off x="411480" y="4297680"/>
+            <a:ext cx="8321040" cy="365760"/>
           </a:xfrm>
           <a:prstGeom prst="roundRect">
             <a:avLst>
-              <a:gd name="adj" fmla="val 13333"/>
+              <a:gd name="adj" fmla="val 15000"/>
             </a:avLst>
           </a:prstGeom>
           <a:solidFill>
@@ -22863,8 +22863,8 @@
         </p:nvSpPr>
         <p:spPr>
           <a:xfrm>
-            <a:off x="411480" y="4315968"/>
-            <a:ext cx="8321040" cy="411480"/>
+            <a:off x="411480" y="4297680"/>
+            <a:ext cx="8321040" cy="365760"/>
           </a:xfrm>
           <a:prstGeom prst="rect">
             <a:avLst/>
@@ -23199,7 +23199,7 @@
         <p:spPr>
           <a:xfrm>
             <a:off x="685800" y="1463040"/>
-            <a:ext cx="2788920" cy="1188720"/>
+            <a:ext cx="2788920" cy="868680"/>
           </a:xfrm>
           <a:prstGeom prst="rect">
             <a:avLst/>
@@ -23240,7 +23240,7 @@
         </p:nvSpPr>
         <p:spPr>
           <a:xfrm>
-            <a:off x="685800" y="2761488"/>
+            <a:off x="685800" y="2487168"/>
             <a:ext cx="91440" cy="91440"/>
           </a:xfrm>
           <a:prstGeom prst="ellipse">
@@ -23260,7 +23260,7 @@
         </p:nvSpPr>
         <p:spPr>
           <a:xfrm>
-            <a:off x="868680" y="2651760"/>
+            <a:off x="868680" y="2377440"/>
             <a:ext cx="2606040" cy="320040"/>
           </a:xfrm>
           <a:prstGeom prst="rect">
@@ -23299,7 +23299,7 @@
         </p:nvSpPr>
         <p:spPr>
           <a:xfrm>
-            <a:off x="685800" y="3127248"/>
+            <a:off x="685800" y="2944368"/>
             <a:ext cx="91440" cy="91440"/>
           </a:xfrm>
           <a:prstGeom prst="ellipse">
@@ -23319,7 +23319,7 @@
         </p:nvSpPr>
         <p:spPr>
           <a:xfrm>
-            <a:off x="868680" y="3017520"/>
+            <a:off x="868680" y="2834640"/>
             <a:ext cx="2606040" cy="320040"/>
           </a:xfrm>
           <a:prstGeom prst="rect">
@@ -23358,7 +23358,7 @@
         </p:nvSpPr>
         <p:spPr>
           <a:xfrm>
-            <a:off x="685800" y="3493008"/>
+            <a:off x="685800" y="3401568"/>
             <a:ext cx="91440" cy="91440"/>
           </a:xfrm>
           <a:prstGeom prst="ellipse">
@@ -23378,7 +23378,7 @@
         </p:nvSpPr>
         <p:spPr>
           <a:xfrm>
-            <a:off x="868680" y="3383280"/>
+            <a:off x="868680" y="3291840"/>
             <a:ext cx="2606040" cy="320040"/>
           </a:xfrm>
           <a:prstGeom prst="rect">
@@ -23476,7 +23476,7 @@
         </p:nvSpPr>
         <p:spPr>
           <a:xfrm>
-            <a:off x="685800" y="4224528"/>
+            <a:off x="685800" y="4315968"/>
             <a:ext cx="91440" cy="91440"/>
           </a:xfrm>
           <a:prstGeom prst="ellipse">
@@ -23496,7 +23496,7 @@
         </p:nvSpPr>
         <p:spPr>
           <a:xfrm>
-            <a:off x="868680" y="4114800"/>
+            <a:off x="868680" y="4206240"/>
             <a:ext cx="2606040" cy="320040"/>
           </a:xfrm>
           <a:prstGeom prst="rect">
@@ -32100,8 +32100,8 @@
         </p:nvSpPr>
         <p:spPr>
           <a:xfrm>
-            <a:off x="411480" y="1188720"/>
-            <a:ext cx="1335024" cy="1691640"/>
+            <a:off x="411480" y="1097280"/>
+            <a:ext cx="1335024" cy="1920240"/>
           </a:xfrm>
           <a:prstGeom prst="roundRect">
             <a:avLst>
@@ -32134,7 +32134,7 @@
         </p:nvSpPr>
         <p:spPr>
           <a:xfrm>
-            <a:off x="411480" y="1188720"/>
+            <a:off x="411480" y="1097280"/>
             <a:ext cx="1335024" cy="91440"/>
           </a:xfrm>
           <a:prstGeom prst="rect">
@@ -32154,7 +32154,7 @@
         </p:nvSpPr>
         <p:spPr>
           <a:xfrm>
-            <a:off x="804672" y="1463040"/>
+            <a:off x="804672" y="1371600"/>
             <a:ext cx="548640" cy="548640"/>
           </a:xfrm>
           <a:prstGeom prst="ellipse">
@@ -32187,7 +32187,7 @@
         </p:blipFill>
         <p:spPr>
           <a:xfrm>
-            <a:off x="914400" y="1572768"/>
+            <a:off x="914400" y="1481328"/>
             <a:ext cx="329184" cy="329184"/>
           </a:xfrm>
           <a:prstGeom prst="rect">
@@ -32203,7 +32203,7 @@
         </p:nvSpPr>
         <p:spPr>
           <a:xfrm>
-            <a:off x="411480" y="2057400"/>
+            <a:off x="411480" y="1965960"/>
             <a:ext cx="1335024" cy="292608"/>
           </a:xfrm>
           <a:prstGeom prst="rect">
@@ -32242,7 +32242,7 @@
         </p:nvSpPr>
         <p:spPr>
           <a:xfrm>
-            <a:off x="502920" y="2377440"/>
+            <a:off x="502920" y="2286000"/>
             <a:ext cx="1152144" cy="457200"/>
           </a:xfrm>
           <a:prstGeom prst="rect">
@@ -32306,7 +32306,7 @@
         </p:blipFill>
         <p:spPr>
           <a:xfrm>
-            <a:off x="1792224" y="1924812"/>
+            <a:off x="1792224" y="1947672"/>
             <a:ext cx="329184" cy="219456"/>
           </a:xfrm>
           <a:prstGeom prst="rect">
@@ -32322,8 +32322,8 @@
         </p:nvSpPr>
         <p:spPr>
           <a:xfrm>
-            <a:off x="2157984" y="1188720"/>
-            <a:ext cx="1335024" cy="1691640"/>
+            <a:off x="2157984" y="1097280"/>
+            <a:ext cx="1335024" cy="1920240"/>
           </a:xfrm>
           <a:prstGeom prst="roundRect">
             <a:avLst>
@@ -32356,7 +32356,7 @@
         </p:nvSpPr>
         <p:spPr>
           <a:xfrm>
-            <a:off x="2157984" y="1188720"/>
+            <a:off x="2157984" y="1097280"/>
             <a:ext cx="1335024" cy="91440"/>
           </a:xfrm>
           <a:prstGeom prst="rect">
@@ -32376,7 +32376,7 @@
         </p:nvSpPr>
         <p:spPr>
           <a:xfrm>
-            <a:off x="2551176" y="1463040"/>
+            <a:off x="2551176" y="1371600"/>
             <a:ext cx="548640" cy="548640"/>
           </a:xfrm>
           <a:prstGeom prst="ellipse">
@@ -32409,7 +32409,7 @@
         </p:blipFill>
         <p:spPr>
           <a:xfrm>
-            <a:off x="2660904" y="1572768"/>
+            <a:off x="2660904" y="1481328"/>
             <a:ext cx="329184" cy="329184"/>
           </a:xfrm>
           <a:prstGeom prst="rect">
@@ -32425,7 +32425,7 @@
         </p:nvSpPr>
         <p:spPr>
           <a:xfrm>
-            <a:off x="2157984" y="2057400"/>
+            <a:off x="2157984" y="1965960"/>
             <a:ext cx="1335024" cy="292608"/>
           </a:xfrm>
           <a:prstGeom prst="rect">
@@ -32464,7 +32464,7 @@
         </p:nvSpPr>
         <p:spPr>
           <a:xfrm>
-            <a:off x="2249424" y="2377440"/>
+            <a:off x="2249424" y="2286000"/>
             <a:ext cx="1152144" cy="457200"/>
           </a:xfrm>
           <a:prstGeom prst="rect">
@@ -32528,7 +32528,7 @@
         </p:blipFill>
         <p:spPr>
           <a:xfrm>
-            <a:off x="3538728" y="1924812"/>
+            <a:off x="3538728" y="1947672"/>
             <a:ext cx="329184" cy="219456"/>
           </a:xfrm>
           <a:prstGeom prst="rect">
@@ -32544,8 +32544,8 @@
         </p:nvSpPr>
         <p:spPr>
           <a:xfrm>
-            <a:off x="3904488" y="1188720"/>
-            <a:ext cx="1335024" cy="1691640"/>
+            <a:off x="3904488" y="1097280"/>
+            <a:ext cx="1335024" cy="1920240"/>
           </a:xfrm>
           <a:prstGeom prst="roundRect">
             <a:avLst>
@@ -32578,7 +32578,7 @@
         </p:nvSpPr>
         <p:spPr>
           <a:xfrm>
-            <a:off x="3904488" y="1188720"/>
+            <a:off x="3904488" y="1097280"/>
             <a:ext cx="1335024" cy="91440"/>
           </a:xfrm>
           <a:prstGeom prst="rect">
@@ -32598,7 +32598,7 @@
         </p:nvSpPr>
         <p:spPr>
           <a:xfrm>
-            <a:off x="4297680" y="1463040"/>
+            <a:off x="4297680" y="1371600"/>
             <a:ext cx="548640" cy="548640"/>
           </a:xfrm>
           <a:prstGeom prst="ellipse">
@@ -32631,7 +32631,7 @@
         </p:blipFill>
         <p:spPr>
           <a:xfrm>
-            <a:off x="4407408" y="1572768"/>
+            <a:off x="4407408" y="1481328"/>
             <a:ext cx="329184" cy="329184"/>
           </a:xfrm>
           <a:prstGeom prst="rect">
@@ -32647,7 +32647,7 @@
         </p:nvSpPr>
         <p:spPr>
           <a:xfrm>
-            <a:off x="3904488" y="2057400"/>
+            <a:off x="3904488" y="1965960"/>
             <a:ext cx="1335024" cy="292608"/>
           </a:xfrm>
           <a:prstGeom prst="rect">
@@ -32686,7 +32686,7 @@
         </p:nvSpPr>
         <p:spPr>
           <a:xfrm>
-            <a:off x="3995928" y="2377440"/>
+            <a:off x="3995928" y="2286000"/>
             <a:ext cx="1152144" cy="457200"/>
           </a:xfrm>
           <a:prstGeom prst="rect">
@@ -32750,7 +32750,7 @@
         </p:blipFill>
         <p:spPr>
           <a:xfrm>
-            <a:off x="5285232" y="1924812"/>
+            <a:off x="5285232" y="1947672"/>
             <a:ext cx="329184" cy="219456"/>
           </a:xfrm>
           <a:prstGeom prst="rect">
@@ -32766,8 +32766,8 @@
         </p:nvSpPr>
         <p:spPr>
           <a:xfrm>
-            <a:off x="5650992" y="1188720"/>
-            <a:ext cx="1335024" cy="1691640"/>
+            <a:off x="5650992" y="1097280"/>
+            <a:ext cx="1335024" cy="1920240"/>
           </a:xfrm>
           <a:prstGeom prst="roundRect">
             <a:avLst>
@@ -32800,7 +32800,7 @@
         </p:nvSpPr>
         <p:spPr>
           <a:xfrm>
-            <a:off x="5650992" y="1188720"/>
+            <a:off x="5650992" y="1097280"/>
             <a:ext cx="1335024" cy="91440"/>
           </a:xfrm>
           <a:prstGeom prst="rect">
@@ -32820,7 +32820,7 @@
         </p:nvSpPr>
         <p:spPr>
           <a:xfrm>
-            <a:off x="6044184" y="1463040"/>
+            <a:off x="6044184" y="1371600"/>
             <a:ext cx="548640" cy="548640"/>
           </a:xfrm>
           <a:prstGeom prst="ellipse">
@@ -32853,7 +32853,7 @@
         </p:blipFill>
         <p:spPr>
           <a:xfrm>
-            <a:off x="6153912" y="1572768"/>
+            <a:off x="6153912" y="1481328"/>
             <a:ext cx="329184" cy="329184"/>
           </a:xfrm>
           <a:prstGeom prst="rect">
@@ -32869,7 +32869,7 @@
         </p:nvSpPr>
         <p:spPr>
           <a:xfrm>
-            <a:off x="5650992" y="2057400"/>
+            <a:off x="5650992" y="1965960"/>
             <a:ext cx="1335024" cy="292608"/>
           </a:xfrm>
           <a:prstGeom prst="rect">
@@ -32908,7 +32908,7 @@
         </p:nvSpPr>
         <p:spPr>
           <a:xfrm>
-            <a:off x="5742432" y="2377440"/>
+            <a:off x="5742432" y="2286000"/>
             <a:ext cx="1152144" cy="457200"/>
           </a:xfrm>
           <a:prstGeom prst="rect">
@@ -32972,7 +32972,7 @@
         </p:blipFill>
         <p:spPr>
           <a:xfrm>
-            <a:off x="7031736" y="1924812"/>
+            <a:off x="7031736" y="1947672"/>
             <a:ext cx="329184" cy="219456"/>
           </a:xfrm>
           <a:prstGeom prst="rect">
@@ -32988,8 +32988,8 @@
         </p:nvSpPr>
         <p:spPr>
           <a:xfrm>
-            <a:off x="7397496" y="1188720"/>
-            <a:ext cx="1335024" cy="1691640"/>
+            <a:off x="7397496" y="1097280"/>
+            <a:ext cx="1335024" cy="1920240"/>
           </a:xfrm>
           <a:prstGeom prst="roundRect">
             <a:avLst>
@@ -33022,7 +33022,7 @@
         </p:nvSpPr>
         <p:spPr>
           <a:xfrm>
-            <a:off x="7397496" y="1188720"/>
+            <a:off x="7397496" y="1097280"/>
             <a:ext cx="1335024" cy="91440"/>
           </a:xfrm>
           <a:prstGeom prst="rect">
@@ -33042,7 +33042,7 @@
         </p:nvSpPr>
         <p:spPr>
           <a:xfrm>
-            <a:off x="7790688" y="1463040"/>
+            <a:off x="7790688" y="1371600"/>
             <a:ext cx="548640" cy="548640"/>
           </a:xfrm>
           <a:prstGeom prst="ellipse">
@@ -33075,7 +33075,7 @@
         </p:blipFill>
         <p:spPr>
           <a:xfrm>
-            <a:off x="7900416" y="1572768"/>
+            <a:off x="7900416" y="1481328"/>
             <a:ext cx="329184" cy="329184"/>
           </a:xfrm>
           <a:prstGeom prst="rect">
@@ -33091,7 +33091,7 @@
         </p:nvSpPr>
         <p:spPr>
           <a:xfrm>
-            <a:off x="7397496" y="2057400"/>
+            <a:off x="7397496" y="1965960"/>
             <a:ext cx="1335024" cy="292608"/>
           </a:xfrm>
           <a:prstGeom prst="rect">
@@ -33130,7 +33130,7 @@
         </p:nvSpPr>
         <p:spPr>
           <a:xfrm>
-            <a:off x="7488936" y="2377440"/>
+            <a:off x="7488936" y="2286000"/>
             <a:ext cx="1152144" cy="457200"/>
           </a:xfrm>
           <a:prstGeom prst="rect">
@@ -33186,7 +33186,7 @@
         </p:nvSpPr>
         <p:spPr>
           <a:xfrm>
-            <a:off x="411480" y="3246120"/>
+            <a:off x="411480" y="3291840"/>
             <a:ext cx="2011680" cy="502920"/>
           </a:xfrm>
           <a:prstGeom prst="roundRect">
@@ -33228,7 +33228,7 @@
         </p:blipFill>
         <p:spPr>
           <a:xfrm>
-            <a:off x="521208" y="3355848"/>
+            <a:off x="521208" y="3401568"/>
             <a:ext cx="274320" cy="274320"/>
           </a:xfrm>
           <a:prstGeom prst="rect">
@@ -33244,7 +33244,7 @@
         </p:nvSpPr>
         <p:spPr>
           <a:xfrm>
-            <a:off x="868680" y="3246120"/>
+            <a:off x="868680" y="3291840"/>
             <a:ext cx="1463040" cy="502920"/>
           </a:xfrm>
           <a:prstGeom prst="rect">
@@ -33283,7 +33283,7 @@
         </p:nvSpPr>
         <p:spPr>
           <a:xfrm>
-            <a:off x="6720840" y="3246120"/>
+            <a:off x="6720840" y="3291840"/>
             <a:ext cx="2011680" cy="502920"/>
           </a:xfrm>
           <a:prstGeom prst="roundRect">
@@ -33325,7 +33325,7 @@
         </p:blipFill>
         <p:spPr>
           <a:xfrm>
-            <a:off x="6830568" y="3355848"/>
+            <a:off x="6830568" y="3401568"/>
             <a:ext cx="274320" cy="274320"/>
           </a:xfrm>
           <a:prstGeom prst="rect">
@@ -33341,7 +33341,7 @@
         </p:nvSpPr>
         <p:spPr>
           <a:xfrm>
-            <a:off x="7178040" y="3246120"/>
+            <a:off x="7178040" y="3291840"/>
             <a:ext cx="1463040" cy="502920"/>
           </a:xfrm>
           <a:prstGeom prst="rect">
@@ -33380,12 +33380,12 @@
         </p:nvSpPr>
         <p:spPr>
           <a:xfrm>
-            <a:off x="411480" y="3931920"/>
-            <a:ext cx="8321040" cy="411480"/>
+            <a:off x="411480" y="3977640"/>
+            <a:ext cx="8321040" cy="457200"/>
           </a:xfrm>
           <a:prstGeom prst="roundRect">
             <a:avLst>
-              <a:gd name="adj" fmla="val 13333"/>
+              <a:gd name="adj" fmla="val 12000"/>
             </a:avLst>
           </a:prstGeom>
           <a:solidFill>
@@ -33407,8 +33407,8 @@
         </p:nvSpPr>
         <p:spPr>
           <a:xfrm>
-            <a:off x="411480" y="3931920"/>
-            <a:ext cx="8321040" cy="411480"/>
+            <a:off x="411480" y="3977640"/>
+            <a:ext cx="8321040" cy="457200"/>
           </a:xfrm>
           <a:prstGeom prst="rect">
             <a:avLst/>

--- a/thesis/Nesterenko_Presentation.pptx
+++ b/thesis/Nesterenko_Presentation.pptx
@@ -29416,7 +29416,7 @@
         <p:spPr>
           <a:xfrm>
             <a:off x="411480" y="960120"/>
-            <a:ext cx="4846320" cy="1097280"/>
+            <a:ext cx="4389120" cy="1097280"/>
           </a:xfrm>
           <a:prstGeom prst="roundRect">
             <a:avLst>
@@ -29509,7 +29509,7 @@
         <p:spPr>
           <a:xfrm>
             <a:off x="1280160" y="1069848"/>
-            <a:ext cx="3840480" cy="292608"/>
+            <a:ext cx="3383280" cy="292608"/>
           </a:xfrm>
           <a:prstGeom prst="rect">
             <a:avLst/>
@@ -29548,7 +29548,7 @@
         <p:spPr>
           <a:xfrm>
             <a:off x="1280160" y="1371600"/>
-            <a:ext cx="3840480" cy="292608"/>
+            <a:ext cx="3383280" cy="292608"/>
           </a:xfrm>
           <a:prstGeom prst="rect">
             <a:avLst/>
@@ -29568,7 +29568,7 @@
         <p:spPr>
           <a:xfrm>
             <a:off x="1280160" y="1371600"/>
-            <a:ext cx="3840480" cy="292608"/>
+            <a:ext cx="3383280" cy="292608"/>
           </a:xfrm>
           <a:prstGeom prst="rect">
             <a:avLst/>
@@ -29607,7 +29607,7 @@
         <p:spPr>
           <a:xfrm>
             <a:off x="1280160" y="1691640"/>
-            <a:ext cx="3840480" cy="320040"/>
+            <a:ext cx="3383280" cy="320040"/>
           </a:xfrm>
           <a:prstGeom prst="rect">
             <a:avLst/>
@@ -29646,7 +29646,7 @@
         <p:spPr>
           <a:xfrm>
             <a:off x="411480" y="2167128"/>
-            <a:ext cx="4846320" cy="1097280"/>
+            <a:ext cx="4389120" cy="1097280"/>
           </a:xfrm>
           <a:prstGeom prst="roundRect">
             <a:avLst>
@@ -29739,7 +29739,7 @@
         <p:spPr>
           <a:xfrm>
             <a:off x="1280160" y="2276856"/>
-            <a:ext cx="3840480" cy="292608"/>
+            <a:ext cx="3383280" cy="292608"/>
           </a:xfrm>
           <a:prstGeom prst="rect">
             <a:avLst/>
@@ -29778,7 +29778,7 @@
         <p:spPr>
           <a:xfrm>
             <a:off x="1280160" y="2578608"/>
-            <a:ext cx="3840480" cy="292608"/>
+            <a:ext cx="3383280" cy="292608"/>
           </a:xfrm>
           <a:prstGeom prst="rect">
             <a:avLst/>
@@ -29798,7 +29798,7 @@
         <p:spPr>
           <a:xfrm>
             <a:off x="1280160" y="2578608"/>
-            <a:ext cx="3840480" cy="292608"/>
+            <a:ext cx="3383280" cy="292608"/>
           </a:xfrm>
           <a:prstGeom prst="rect">
             <a:avLst/>
@@ -29837,7 +29837,7 @@
         <p:spPr>
           <a:xfrm>
             <a:off x="1280160" y="2898648"/>
-            <a:ext cx="3840480" cy="320040"/>
+            <a:ext cx="3383280" cy="320040"/>
           </a:xfrm>
           <a:prstGeom prst="rect">
             <a:avLst/>
@@ -29876,7 +29876,7 @@
         <p:spPr>
           <a:xfrm>
             <a:off x="411480" y="3374136"/>
-            <a:ext cx="4846320" cy="1097280"/>
+            <a:ext cx="4389120" cy="1097280"/>
           </a:xfrm>
           <a:prstGeom prst="roundRect">
             <a:avLst>
@@ -29969,7 +29969,7 @@
         <p:spPr>
           <a:xfrm>
             <a:off x="1280160" y="3483864"/>
-            <a:ext cx="3840480" cy="292608"/>
+            <a:ext cx="3383280" cy="292608"/>
           </a:xfrm>
           <a:prstGeom prst="rect">
             <a:avLst/>
@@ -30008,7 +30008,7 @@
         <p:spPr>
           <a:xfrm>
             <a:off x="1280160" y="3785616"/>
-            <a:ext cx="3840480" cy="292608"/>
+            <a:ext cx="3383280" cy="292608"/>
           </a:xfrm>
           <a:prstGeom prst="rect">
             <a:avLst/>
@@ -30028,7 +30028,7 @@
         <p:spPr>
           <a:xfrm>
             <a:off x="1280160" y="3785616"/>
-            <a:ext cx="3840480" cy="292608"/>
+            <a:ext cx="3383280" cy="292608"/>
           </a:xfrm>
           <a:prstGeom prst="rect">
             <a:avLst/>
@@ -30067,7 +30067,7 @@
         <p:spPr>
           <a:xfrm>
             <a:off x="1280160" y="4105656"/>
-            <a:ext cx="3840480" cy="320040"/>
+            <a:ext cx="3383280" cy="320040"/>
           </a:xfrm>
           <a:prstGeom prst="rect">
             <a:avLst/>
@@ -30105,12 +30105,12 @@
         </p:nvSpPr>
         <p:spPr>
           <a:xfrm>
-            <a:off x="5440680" y="960120"/>
-            <a:ext cx="3291840" cy="3703320"/>
+            <a:off x="4983480" y="960120"/>
+            <a:ext cx="3749040" cy="3703320"/>
           </a:xfrm>
           <a:prstGeom prst="roundRect">
             <a:avLst>
-              <a:gd name="adj" fmla="val 1667"/>
+              <a:gd name="adj" fmla="val 1481"/>
             </a:avLst>
           </a:prstGeom>
           <a:solidFill>
@@ -30139,8 +30139,8 @@
         </p:nvSpPr>
         <p:spPr>
           <a:xfrm>
-            <a:off x="5577840" y="1051560"/>
-            <a:ext cx="3017520" cy="274320"/>
+            <a:off x="5120640" y="1051560"/>
+            <a:ext cx="3474720" cy="274320"/>
           </a:xfrm>
           <a:prstGeom prst="rect">
             <a:avLst/>
@@ -30164,7 +30164,7 @@
                 <a:ea typeface="Calibri" pitchFamily="34" charset="-122"/>
                 <a:cs typeface="Calibri" pitchFamily="34" charset="-120"/>
               </a:rPr>
-              <a:t>ПРОФІЛІ ВАГ КРИТЕРІЇВ ЗА ДОМЕНАМИ</a:t>
+              <a:t>ПРОФІЛІ ВАГ КРИТЕРІЇВ ЗА ДОМЕНАМИ  (k = 10)</a:t>
             </a:r>
             <a:endParaRPr lang="en-US" sz="900" dirty="0"/>
           </a:p>
@@ -30185,8 +30185,8 @@
           </p:nvPr>
         </p:nvGraphicFramePr>
         <p:xfrm>
-          <a:off x="5577840" y="1371600"/>
-          <a:ext cx="3017520" cy="914400"/>
+          <a:off x="5120640" y="1371600"/>
+          <a:ext cx="3474720" cy="914400"/>
         </p:xfrm>
         <a:graphic>
           <a:graphicData uri="http://schemas.openxmlformats.org/drawingml/2006/table">
@@ -30286,7 +30286,7 @@
                           <a:ea typeface="Calibri" pitchFamily="34" charset="-122"/>
                           <a:cs typeface="Calibri" pitchFamily="34" charset="-120"/>
                         </a:rPr>
-                        <a:t>nDCG@k</a:t>
+                        <a:t>nDCG</a:t>
                       </a:r>
                       <a:endParaRPr lang="en-US" sz="1000" dirty="0">
                         <a:latin typeface="Calibri" charset="0"/>
@@ -30354,7 +30354,7 @@
                           <a:ea typeface="Calibri" pitchFamily="34" charset="-122"/>
                           <a:cs typeface="Calibri" pitchFamily="34" charset="-120"/>
                         </a:rPr>
-                        <a:t>MRR@k</a:t>
+                        <a:t>MRR</a:t>
                       </a:r>
                       <a:endParaRPr lang="en-US" sz="1000" dirty="0">
                         <a:latin typeface="Calibri" charset="0"/>
@@ -30422,7 +30422,7 @@
                           <a:ea typeface="Calibri" pitchFamily="34" charset="-122"/>
                           <a:cs typeface="Calibri" pitchFamily="34" charset="-120"/>
                         </a:rPr>
-                        <a:t>Recall@k</a:t>
+                        <a:t>Recall</a:t>
                       </a:r>
                       <a:endParaRPr lang="en-US" sz="1000" dirty="0">
                         <a:latin typeface="Calibri" charset="0"/>
@@ -30490,7 +30490,7 @@
                           <a:ea typeface="Calibri" pitchFamily="34" charset="-122"/>
                           <a:cs typeface="Calibri" pitchFamily="34" charset="-120"/>
                         </a:rPr>
-                        <a:t>P@k</a:t>
+                        <a:t>P</a:t>
                       </a:r>
                       <a:endParaRPr lang="en-US" sz="1000" dirty="0">
                         <a:latin typeface="Calibri" charset="0"/>
@@ -31852,8 +31852,8 @@
         </p:nvSpPr>
         <p:spPr>
           <a:xfrm>
-            <a:off x="5577840" y="2880360"/>
-            <a:ext cx="3017520" cy="228600"/>
+            <a:off x="5120640" y="2880360"/>
+            <a:ext cx="3474720" cy="228600"/>
           </a:xfrm>
           <a:prstGeom prst="rect">
             <a:avLst/>
@@ -31890,8 +31890,8 @@
           <p:nvPr/>
         </p:nvGraphicFramePr>
         <p:xfrm>
-          <a:off x="5532120" y="3154680"/>
-          <a:ext cx="3108960" cy="1508760"/>
+          <a:off x="5074920" y="3154680"/>
+          <a:ext cx="3566160" cy="1508760"/>
         </p:xfrm>
         <a:graphic xmlns:a="http://schemas.openxmlformats.org/drawingml/2006/main">
           <a:graphicData uri="http://schemas.openxmlformats.org/drawingml/2006/chart">

--- a/thesis/Nesterenko_Presentation.pptx
+++ b/thesis/Nesterenko_Presentation.pptx
@@ -17021,8 +17021,8 @@
         </p:nvSpPr>
         <p:spPr>
           <a:xfrm>
-            <a:off x="6062472" y="1325880"/>
-            <a:ext cx="2560320" cy="201168"/>
+            <a:off x="6062472" y="1316736"/>
+            <a:ext cx="2560320" cy="164592"/>
           </a:xfrm>
           <a:prstGeom prst="rect">
             <a:avLst/>
@@ -17038,7 +17038,7 @@
               <a:buNone/>
             </a:pPr>
             <a:r>
-              <a:rPr lang="en-US" sz="900" b="1" spc="150" kern="0" dirty="0">
+              <a:rPr lang="en-US" sz="850" b="1" spc="150" kern="0" dirty="0">
                 <a:solidFill>
                   <a:srgbClr val="64748B"/>
                 </a:solidFill>
@@ -17048,85 +17048,85 @@
               </a:rPr>
               <a:t>Лідер якості</a:t>
             </a:r>
+            <a:endParaRPr lang="en-US" sz="850" dirty="0"/>
+          </a:p>
+        </p:txBody>
+      </p:sp>
+      <p:sp>
+        <p:nvSpPr>
+          <p:cNvPr id="18" name="Text 15"/>
+          <p:cNvSpPr/>
+          <p:nvPr/>
+        </p:nvSpPr>
+        <p:spPr>
+          <a:xfrm>
+            <a:off x="6062472" y="1472184"/>
+            <a:ext cx="2560320" cy="219456"/>
+          </a:xfrm>
+          <a:prstGeom prst="rect">
+            <a:avLst/>
+          </a:prstGeom>
+          <a:noFill/>
+          <a:ln/>
+        </p:spPr>
+        <p:txBody>
+          <a:bodyPr wrap="square" lIns="0" tIns="0" rIns="0" bIns="0" rtlCol="0" anchor="t"/>
+          <a:lstStyle/>
+          <a:p>
+            <a:pPr algn="l" indent="0" marL="0">
+              <a:buNone/>
+            </a:pPr>
+            <a:r>
+              <a:rPr lang="en-US" sz="1200" b="1" dirty="0">
+                <a:solidFill>
+                  <a:srgbClr val="F59E0B"/>
+                </a:solidFill>
+                <a:latin typeface="Calibri" pitchFamily="34" charset="0"/>
+                <a:ea typeface="Calibri" pitchFamily="34" charset="-122"/>
+                <a:cs typeface="Calibri" pitchFamily="34" charset="-120"/>
+              </a:rPr>
+              <a:t>BGE-M3</a:t>
+            </a:r>
+            <a:endParaRPr lang="en-US" sz="1200" dirty="0"/>
+          </a:p>
+        </p:txBody>
+      </p:sp>
+      <p:sp>
+        <p:nvSpPr>
+          <p:cNvPr id="19" name="Text 16"/>
+          <p:cNvSpPr/>
+          <p:nvPr/>
+        </p:nvSpPr>
+        <p:spPr>
+          <a:xfrm>
+            <a:off x="6062472" y="1691640"/>
+            <a:ext cx="2560320" cy="182880"/>
+          </a:xfrm>
+          <a:prstGeom prst="rect">
+            <a:avLst/>
+          </a:prstGeom>
+          <a:noFill/>
+          <a:ln/>
+        </p:spPr>
+        <p:txBody>
+          <a:bodyPr wrap="square" lIns="0" tIns="0" rIns="0" bIns="0" rtlCol="0" anchor="t"/>
+          <a:lstStyle/>
+          <a:p>
+            <a:pPr algn="l" indent="0" marL="0">
+              <a:buNone/>
+            </a:pPr>
+            <a:r>
+              <a:rPr lang="en-US" sz="900" dirty="0">
+                <a:solidFill>
+                  <a:srgbClr val="475569"/>
+                </a:solidFill>
+                <a:latin typeface="Calibri" pitchFamily="34" charset="0"/>
+                <a:ea typeface="Calibri" pitchFamily="34" charset="-122"/>
+                <a:cs typeface="Calibri" pitchFamily="34" charset="-120"/>
+              </a:rPr>
+              <a:t>найвища nDCG (0.672 на Tech), ~228 мс</a:t>
+            </a:r>
             <a:endParaRPr lang="en-US" sz="900" dirty="0"/>
-          </a:p>
-        </p:txBody>
-      </p:sp>
-      <p:sp>
-        <p:nvSpPr>
-          <p:cNvPr id="18" name="Text 15"/>
-          <p:cNvSpPr/>
-          <p:nvPr/>
-        </p:nvSpPr>
-        <p:spPr>
-          <a:xfrm>
-            <a:off x="6062472" y="1527048"/>
-            <a:ext cx="2560320" cy="256032"/>
-          </a:xfrm>
-          <a:prstGeom prst="rect">
-            <a:avLst/>
-          </a:prstGeom>
-          <a:noFill/>
-          <a:ln/>
-        </p:spPr>
-        <p:txBody>
-          <a:bodyPr wrap="square" lIns="0" tIns="0" rIns="0" bIns="0" rtlCol="0" anchor="t"/>
-          <a:lstStyle/>
-          <a:p>
-            <a:pPr algn="l" indent="0" marL="0">
-              <a:buNone/>
-            </a:pPr>
-            <a:r>
-              <a:rPr lang="en-US" sz="1300" b="1" dirty="0">
-                <a:solidFill>
-                  <a:srgbClr val="F59E0B"/>
-                </a:solidFill>
-                <a:latin typeface="Calibri" pitchFamily="34" charset="0"/>
-                <a:ea typeface="Calibri" pitchFamily="34" charset="-122"/>
-                <a:cs typeface="Calibri" pitchFamily="34" charset="-120"/>
-              </a:rPr>
-              <a:t>BGE-M3</a:t>
-            </a:r>
-            <a:endParaRPr lang="en-US" sz="1300" dirty="0"/>
-          </a:p>
-        </p:txBody>
-      </p:sp>
-      <p:sp>
-        <p:nvSpPr>
-          <p:cNvPr id="19" name="Text 16"/>
-          <p:cNvSpPr/>
-          <p:nvPr/>
-        </p:nvSpPr>
-        <p:spPr>
-          <a:xfrm>
-            <a:off x="6062472" y="1783080"/>
-            <a:ext cx="2560320" cy="91440"/>
-          </a:xfrm>
-          <a:prstGeom prst="rect">
-            <a:avLst/>
-          </a:prstGeom>
-          <a:noFill/>
-          <a:ln/>
-        </p:spPr>
-        <p:txBody>
-          <a:bodyPr wrap="square" lIns="0" tIns="0" rIns="0" bIns="0" rtlCol="0" anchor="t"/>
-          <a:lstStyle/>
-          <a:p>
-            <a:pPr algn="l" indent="0" marL="0">
-              <a:buNone/>
-            </a:pPr>
-            <a:r>
-              <a:rPr lang="en-US" sz="950" dirty="0">
-                <a:solidFill>
-                  <a:srgbClr val="475569"/>
-                </a:solidFill>
-                <a:latin typeface="Calibri" pitchFamily="34" charset="0"/>
-                <a:ea typeface="Calibri" pitchFamily="34" charset="-122"/>
-                <a:cs typeface="Calibri" pitchFamily="34" charset="-120"/>
-              </a:rPr>
-              <a:t>найвища nDCG (0.672 на Tech), ~228 мс</a:t>
-            </a:r>
-            <a:endParaRPr lang="en-US" sz="950" dirty="0"/>
           </a:p>
         </p:txBody>
       </p:sp>
@@ -17192,8 +17192,8 @@
         </p:nvSpPr>
         <p:spPr>
           <a:xfrm>
-            <a:off x="6062472" y="2011680"/>
-            <a:ext cx="2560320" cy="201168"/>
+            <a:off x="6062472" y="2002536"/>
+            <a:ext cx="2560320" cy="164592"/>
           </a:xfrm>
           <a:prstGeom prst="rect">
             <a:avLst/>
@@ -17209,7 +17209,7 @@
               <a:buNone/>
             </a:pPr>
             <a:r>
-              <a:rPr lang="en-US" sz="900" b="1" spc="150" kern="0" dirty="0">
+              <a:rPr lang="en-US" sz="850" b="1" spc="150" kern="0" dirty="0">
                 <a:solidFill>
                   <a:srgbClr val="64748B"/>
                 </a:solidFill>
@@ -17219,85 +17219,85 @@
               </a:rPr>
               <a:t>Найшвидший</a:t>
             </a:r>
+            <a:endParaRPr lang="en-US" sz="850" dirty="0"/>
+          </a:p>
+        </p:txBody>
+      </p:sp>
+      <p:sp>
+        <p:nvSpPr>
+          <p:cNvPr id="23" name="Text 20"/>
+          <p:cNvSpPr/>
+          <p:nvPr/>
+        </p:nvSpPr>
+        <p:spPr>
+          <a:xfrm>
+            <a:off x="6062472" y="2157984"/>
+            <a:ext cx="2560320" cy="219456"/>
+          </a:xfrm>
+          <a:prstGeom prst="rect">
+            <a:avLst/>
+          </a:prstGeom>
+          <a:noFill/>
+          <a:ln/>
+        </p:spPr>
+        <p:txBody>
+          <a:bodyPr wrap="square" lIns="0" tIns="0" rIns="0" bIns="0" rtlCol="0" anchor="t"/>
+          <a:lstStyle/>
+          <a:p>
+            <a:pPr algn="l" indent="0" marL="0">
+              <a:buNone/>
+            </a:pPr>
+            <a:r>
+              <a:rPr lang="en-US" sz="1200" b="1" dirty="0">
+                <a:solidFill>
+                  <a:srgbClr val="64748B"/>
+                </a:solidFill>
+                <a:latin typeface="Calibri" pitchFamily="34" charset="0"/>
+                <a:ea typeface="Calibri" pitchFamily="34" charset="-122"/>
+                <a:cs typeface="Calibri" pitchFamily="34" charset="-120"/>
+              </a:rPr>
+              <a:t>BM25</a:t>
+            </a:r>
+            <a:endParaRPr lang="en-US" sz="1200" dirty="0"/>
+          </a:p>
+        </p:txBody>
+      </p:sp>
+      <p:sp>
+        <p:nvSpPr>
+          <p:cNvPr id="24" name="Text 21"/>
+          <p:cNvSpPr/>
+          <p:nvPr/>
+        </p:nvSpPr>
+        <p:spPr>
+          <a:xfrm>
+            <a:off x="6062472" y="2377440"/>
+            <a:ext cx="2560320" cy="182880"/>
+          </a:xfrm>
+          <a:prstGeom prst="rect">
+            <a:avLst/>
+          </a:prstGeom>
+          <a:noFill/>
+          <a:ln/>
+        </p:spPr>
+        <p:txBody>
+          <a:bodyPr wrap="square" lIns="0" tIns="0" rIns="0" bIns="0" rtlCol="0" anchor="t"/>
+          <a:lstStyle/>
+          <a:p>
+            <a:pPr algn="l" indent="0" marL="0">
+              <a:buNone/>
+            </a:pPr>
+            <a:r>
+              <a:rPr lang="en-US" sz="900" dirty="0">
+                <a:solidFill>
+                  <a:srgbClr val="475569"/>
+                </a:solidFill>
+                <a:latin typeface="Calibri" pitchFamily="34" charset="0"/>
+                <a:ea typeface="Calibri" pitchFamily="34" charset="-122"/>
+                <a:cs typeface="Calibri" pitchFamily="34" charset="-120"/>
+              </a:rPr>
+              <a:t>&lt;3 мс, але якість обмежена</a:t>
+            </a:r>
             <a:endParaRPr lang="en-US" sz="900" dirty="0"/>
-          </a:p>
-        </p:txBody>
-      </p:sp>
-      <p:sp>
-        <p:nvSpPr>
-          <p:cNvPr id="23" name="Text 20"/>
-          <p:cNvSpPr/>
-          <p:nvPr/>
-        </p:nvSpPr>
-        <p:spPr>
-          <a:xfrm>
-            <a:off x="6062472" y="2212848"/>
-            <a:ext cx="2560320" cy="256032"/>
-          </a:xfrm>
-          <a:prstGeom prst="rect">
-            <a:avLst/>
-          </a:prstGeom>
-          <a:noFill/>
-          <a:ln/>
-        </p:spPr>
-        <p:txBody>
-          <a:bodyPr wrap="square" lIns="0" tIns="0" rIns="0" bIns="0" rtlCol="0" anchor="t"/>
-          <a:lstStyle/>
-          <a:p>
-            <a:pPr algn="l" indent="0" marL="0">
-              <a:buNone/>
-            </a:pPr>
-            <a:r>
-              <a:rPr lang="en-US" sz="1300" b="1" dirty="0">
-                <a:solidFill>
-                  <a:srgbClr val="64748B"/>
-                </a:solidFill>
-                <a:latin typeface="Calibri" pitchFamily="34" charset="0"/>
-                <a:ea typeface="Calibri" pitchFamily="34" charset="-122"/>
-                <a:cs typeface="Calibri" pitchFamily="34" charset="-120"/>
-              </a:rPr>
-              <a:t>BM25</a:t>
-            </a:r>
-            <a:endParaRPr lang="en-US" sz="1300" dirty="0"/>
-          </a:p>
-        </p:txBody>
-      </p:sp>
-      <p:sp>
-        <p:nvSpPr>
-          <p:cNvPr id="24" name="Text 21"/>
-          <p:cNvSpPr/>
-          <p:nvPr/>
-        </p:nvSpPr>
-        <p:spPr>
-          <a:xfrm>
-            <a:off x="6062472" y="2468880"/>
-            <a:ext cx="2560320" cy="91440"/>
-          </a:xfrm>
-          <a:prstGeom prst="rect">
-            <a:avLst/>
-          </a:prstGeom>
-          <a:noFill/>
-          <a:ln/>
-        </p:spPr>
-        <p:txBody>
-          <a:bodyPr wrap="square" lIns="0" tIns="0" rIns="0" bIns="0" rtlCol="0" anchor="t"/>
-          <a:lstStyle/>
-          <a:p>
-            <a:pPr algn="l" indent="0" marL="0">
-              <a:buNone/>
-            </a:pPr>
-            <a:r>
-              <a:rPr lang="en-US" sz="950" dirty="0">
-                <a:solidFill>
-                  <a:srgbClr val="475569"/>
-                </a:solidFill>
-                <a:latin typeface="Calibri" pitchFamily="34" charset="0"/>
-                <a:ea typeface="Calibri" pitchFamily="34" charset="-122"/>
-                <a:cs typeface="Calibri" pitchFamily="34" charset="-120"/>
-              </a:rPr>
-              <a:t>&lt;3 мс, але якість обмежена</a:t>
-            </a:r>
-            <a:endParaRPr lang="en-US" sz="950" dirty="0"/>
           </a:p>
         </p:txBody>
       </p:sp>
@@ -17363,8 +17363,8 @@
         </p:nvSpPr>
         <p:spPr>
           <a:xfrm>
-            <a:off x="6062472" y="2697480"/>
-            <a:ext cx="2560320" cy="201168"/>
+            <a:off x="6062472" y="2688336"/>
+            <a:ext cx="2560320" cy="164592"/>
           </a:xfrm>
           <a:prstGeom prst="rect">
             <a:avLst/>
@@ -17380,7 +17380,7 @@
               <a:buNone/>
             </a:pPr>
             <a:r>
-              <a:rPr lang="en-US" sz="900" b="1" spc="150" kern="0" dirty="0">
+              <a:rPr lang="en-US" sz="850" b="1" spc="150" kern="0" dirty="0">
                 <a:solidFill>
                   <a:srgbClr val="64748B"/>
                 </a:solidFill>
@@ -17390,85 +17390,85 @@
               </a:rPr>
               <a:t>Альтернатива</a:t>
             </a:r>
+            <a:endParaRPr lang="en-US" sz="850" dirty="0"/>
+          </a:p>
+        </p:txBody>
+      </p:sp>
+      <p:sp>
+        <p:nvSpPr>
+          <p:cNvPr id="28" name="Text 25"/>
+          <p:cNvSpPr/>
+          <p:nvPr/>
+        </p:nvSpPr>
+        <p:spPr>
+          <a:xfrm>
+            <a:off x="6062472" y="2843784"/>
+            <a:ext cx="2560320" cy="219456"/>
+          </a:xfrm>
+          <a:prstGeom prst="rect">
+            <a:avLst/>
+          </a:prstGeom>
+          <a:noFill/>
+          <a:ln/>
+        </p:spPr>
+        <p:txBody>
+          <a:bodyPr wrap="square" lIns="0" tIns="0" rIns="0" bIns="0" rtlCol="0" anchor="t"/>
+          <a:lstStyle/>
+          <a:p>
+            <a:pPr algn="l" indent="0" marL="0">
+              <a:buNone/>
+            </a:pPr>
+            <a:r>
+              <a:rPr lang="en-US" sz="1200" b="1" dirty="0">
+                <a:solidFill>
+                  <a:srgbClr val="0891B2"/>
+                </a:solidFill>
+                <a:latin typeface="Calibri" pitchFamily="34" charset="0"/>
+                <a:ea typeface="Calibri" pitchFamily="34" charset="-122"/>
+                <a:cs typeface="Calibri" pitchFamily="34" charset="-120"/>
+              </a:rPr>
+              <a:t>E5-base</a:t>
+            </a:r>
+            <a:endParaRPr lang="en-US" sz="1200" dirty="0"/>
+          </a:p>
+        </p:txBody>
+      </p:sp>
+      <p:sp>
+        <p:nvSpPr>
+          <p:cNvPr id="29" name="Text 26"/>
+          <p:cNvSpPr/>
+          <p:nvPr/>
+        </p:nvSpPr>
+        <p:spPr>
+          <a:xfrm>
+            <a:off x="6062472" y="3063240"/>
+            <a:ext cx="2560320" cy="182880"/>
+          </a:xfrm>
+          <a:prstGeom prst="rect">
+            <a:avLst/>
+          </a:prstGeom>
+          <a:noFill/>
+          <a:ln/>
+        </p:spPr>
+        <p:txBody>
+          <a:bodyPr wrap="square" lIns="0" tIns="0" rIns="0" bIns="0" rtlCol="0" anchor="t"/>
+          <a:lstStyle/>
+          <a:p>
+            <a:pPr algn="l" indent="0" marL="0">
+              <a:buNone/>
+            </a:pPr>
+            <a:r>
+              <a:rPr lang="en-US" sz="900" dirty="0">
+                <a:solidFill>
+                  <a:srgbClr val="475569"/>
+                </a:solidFill>
+                <a:latin typeface="Calibri" pitchFamily="34" charset="0"/>
+                <a:ea typeface="Calibri" pitchFamily="34" charset="-122"/>
+                <a:cs typeface="Calibri" pitchFamily="34" charset="-120"/>
+              </a:rPr>
+              <a:t>~3× швидше за BGE-M3, ~70 мс</a:t>
+            </a:r>
             <a:endParaRPr lang="en-US" sz="900" dirty="0"/>
-          </a:p>
-        </p:txBody>
-      </p:sp>
-      <p:sp>
-        <p:nvSpPr>
-          <p:cNvPr id="28" name="Text 25"/>
-          <p:cNvSpPr/>
-          <p:nvPr/>
-        </p:nvSpPr>
-        <p:spPr>
-          <a:xfrm>
-            <a:off x="6062472" y="2898648"/>
-            <a:ext cx="2560320" cy="256032"/>
-          </a:xfrm>
-          <a:prstGeom prst="rect">
-            <a:avLst/>
-          </a:prstGeom>
-          <a:noFill/>
-          <a:ln/>
-        </p:spPr>
-        <p:txBody>
-          <a:bodyPr wrap="square" lIns="0" tIns="0" rIns="0" bIns="0" rtlCol="0" anchor="t"/>
-          <a:lstStyle/>
-          <a:p>
-            <a:pPr algn="l" indent="0" marL="0">
-              <a:buNone/>
-            </a:pPr>
-            <a:r>
-              <a:rPr lang="en-US" sz="1300" b="1" dirty="0">
-                <a:solidFill>
-                  <a:srgbClr val="0891B2"/>
-                </a:solidFill>
-                <a:latin typeface="Calibri" pitchFamily="34" charset="0"/>
-                <a:ea typeface="Calibri" pitchFamily="34" charset="-122"/>
-                <a:cs typeface="Calibri" pitchFamily="34" charset="-120"/>
-              </a:rPr>
-              <a:t>E5-base</a:t>
-            </a:r>
-            <a:endParaRPr lang="en-US" sz="1300" dirty="0"/>
-          </a:p>
-        </p:txBody>
-      </p:sp>
-      <p:sp>
-        <p:nvSpPr>
-          <p:cNvPr id="29" name="Text 26"/>
-          <p:cNvSpPr/>
-          <p:nvPr/>
-        </p:nvSpPr>
-        <p:spPr>
-          <a:xfrm>
-            <a:off x="6062472" y="3154680"/>
-            <a:ext cx="2560320" cy="91440"/>
-          </a:xfrm>
-          <a:prstGeom prst="rect">
-            <a:avLst/>
-          </a:prstGeom>
-          <a:noFill/>
-          <a:ln/>
-        </p:spPr>
-        <p:txBody>
-          <a:bodyPr wrap="square" lIns="0" tIns="0" rIns="0" bIns="0" rtlCol="0" anchor="t"/>
-          <a:lstStyle/>
-          <a:p>
-            <a:pPr algn="l" indent="0" marL="0">
-              <a:buNone/>
-            </a:pPr>
-            <a:r>
-              <a:rPr lang="en-US" sz="950" dirty="0">
-                <a:solidFill>
-                  <a:srgbClr val="475569"/>
-                </a:solidFill>
-                <a:latin typeface="Calibri" pitchFamily="34" charset="0"/>
-                <a:ea typeface="Calibri" pitchFamily="34" charset="-122"/>
-                <a:cs typeface="Calibri" pitchFamily="34" charset="-120"/>
-              </a:rPr>
-              <a:t>~3× швидше за BGE-M3, ~70 мс</a:t>
-            </a:r>
-            <a:endParaRPr lang="en-US" sz="950" dirty="0"/>
           </a:p>
         </p:txBody>
       </p:sp>
@@ -17534,8 +17534,8 @@
         </p:nvSpPr>
         <p:spPr>
           <a:xfrm>
-            <a:off x="6062472" y="3383280"/>
-            <a:ext cx="2560320" cy="201168"/>
+            <a:off x="6062472" y="3374136"/>
+            <a:ext cx="2560320" cy="164592"/>
           </a:xfrm>
           <a:prstGeom prst="rect">
             <a:avLst/>
@@ -17551,7 +17551,7 @@
               <a:buNone/>
             </a:pPr>
             <a:r>
-              <a:rPr lang="en-US" sz="900" b="1" spc="150" kern="0" dirty="0">
+              <a:rPr lang="en-US" sz="850" b="1" spc="150" kern="0" dirty="0">
                 <a:solidFill>
                   <a:srgbClr val="64748B"/>
                 </a:solidFill>
@@ -17561,85 +17561,85 @@
               </a:rPr>
               <a:t>Лідер на Legal</a:t>
             </a:r>
+            <a:endParaRPr lang="en-US" sz="850" dirty="0"/>
+          </a:p>
+        </p:txBody>
+      </p:sp>
+      <p:sp>
+        <p:nvSpPr>
+          <p:cNvPr id="33" name="Text 30"/>
+          <p:cNvSpPr/>
+          <p:nvPr/>
+        </p:nvSpPr>
+        <p:spPr>
+          <a:xfrm>
+            <a:off x="6062472" y="3529584"/>
+            <a:ext cx="2560320" cy="219456"/>
+          </a:xfrm>
+          <a:prstGeom prst="rect">
+            <a:avLst/>
+          </a:prstGeom>
+          <a:noFill/>
+          <a:ln/>
+        </p:spPr>
+        <p:txBody>
+          <a:bodyPr wrap="square" lIns="0" tIns="0" rIns="0" bIns="0" rtlCol="0" anchor="t"/>
+          <a:lstStyle/>
+          <a:p>
+            <a:pPr algn="l" indent="0" marL="0">
+              <a:buNone/>
+            </a:pPr>
+            <a:r>
+              <a:rPr lang="en-US" sz="1200" b="1" dirty="0">
+                <a:solidFill>
+                  <a:srgbClr val="1E40AF"/>
+                </a:solidFill>
+                <a:latin typeface="Calibri" pitchFamily="34" charset="0"/>
+                <a:ea typeface="Calibri" pitchFamily="34" charset="-122"/>
+                <a:cs typeface="Calibri" pitchFamily="34" charset="-120"/>
+              </a:rPr>
+              <a:t>Qwen3</a:t>
+            </a:r>
+            <a:endParaRPr lang="en-US" sz="1200" dirty="0"/>
+          </a:p>
+        </p:txBody>
+      </p:sp>
+      <p:sp>
+        <p:nvSpPr>
+          <p:cNvPr id="34" name="Text 31"/>
+          <p:cNvSpPr/>
+          <p:nvPr/>
+        </p:nvSpPr>
+        <p:spPr>
+          <a:xfrm>
+            <a:off x="6062472" y="3749040"/>
+            <a:ext cx="2560320" cy="182880"/>
+          </a:xfrm>
+          <a:prstGeom prst="rect">
+            <a:avLst/>
+          </a:prstGeom>
+          <a:noFill/>
+          <a:ln/>
+        </p:spPr>
+        <p:txBody>
+          <a:bodyPr wrap="square" lIns="0" tIns="0" rIns="0" bIns="0" rtlCol="0" anchor="t"/>
+          <a:lstStyle/>
+          <a:p>
+            <a:pPr algn="l" indent="0" marL="0">
+              <a:buNone/>
+            </a:pPr>
+            <a:r>
+              <a:rPr lang="en-US" sz="900" dirty="0">
+                <a:solidFill>
+                  <a:srgbClr val="475569"/>
+                </a:solidFill>
+                <a:latin typeface="Calibri" pitchFamily="34" charset="0"/>
+                <a:ea typeface="Calibri" pitchFamily="34" charset="-122"/>
+                <a:cs typeface="Calibri" pitchFamily="34" charset="-120"/>
+              </a:rPr>
+              <a:t>nDCG=0.320, але ~2× повільніший</a:t>
+            </a:r>
             <a:endParaRPr lang="en-US" sz="900" dirty="0"/>
-          </a:p>
-        </p:txBody>
-      </p:sp>
-      <p:sp>
-        <p:nvSpPr>
-          <p:cNvPr id="33" name="Text 30"/>
-          <p:cNvSpPr/>
-          <p:nvPr/>
-        </p:nvSpPr>
-        <p:spPr>
-          <a:xfrm>
-            <a:off x="6062472" y="3584448"/>
-            <a:ext cx="2560320" cy="256032"/>
-          </a:xfrm>
-          <a:prstGeom prst="rect">
-            <a:avLst/>
-          </a:prstGeom>
-          <a:noFill/>
-          <a:ln/>
-        </p:spPr>
-        <p:txBody>
-          <a:bodyPr wrap="square" lIns="0" tIns="0" rIns="0" bIns="0" rtlCol="0" anchor="t"/>
-          <a:lstStyle/>
-          <a:p>
-            <a:pPr algn="l" indent="0" marL="0">
-              <a:buNone/>
-            </a:pPr>
-            <a:r>
-              <a:rPr lang="en-US" sz="1300" b="1" dirty="0">
-                <a:solidFill>
-                  <a:srgbClr val="1E40AF"/>
-                </a:solidFill>
-                <a:latin typeface="Calibri" pitchFamily="34" charset="0"/>
-                <a:ea typeface="Calibri" pitchFamily="34" charset="-122"/>
-                <a:cs typeface="Calibri" pitchFamily="34" charset="-120"/>
-              </a:rPr>
-              <a:t>Qwen3</a:t>
-            </a:r>
-            <a:endParaRPr lang="en-US" sz="1300" dirty="0"/>
-          </a:p>
-        </p:txBody>
-      </p:sp>
-      <p:sp>
-        <p:nvSpPr>
-          <p:cNvPr id="34" name="Text 31"/>
-          <p:cNvSpPr/>
-          <p:nvPr/>
-        </p:nvSpPr>
-        <p:spPr>
-          <a:xfrm>
-            <a:off x="6062472" y="3840480"/>
-            <a:ext cx="2560320" cy="91440"/>
-          </a:xfrm>
-          <a:prstGeom prst="rect">
-            <a:avLst/>
-          </a:prstGeom>
-          <a:noFill/>
-          <a:ln/>
-        </p:spPr>
-        <p:txBody>
-          <a:bodyPr wrap="square" lIns="0" tIns="0" rIns="0" bIns="0" rtlCol="0" anchor="t"/>
-          <a:lstStyle/>
-          <a:p>
-            <a:pPr algn="l" indent="0" marL="0">
-              <a:buNone/>
-            </a:pPr>
-            <a:r>
-              <a:rPr lang="en-US" sz="950" dirty="0">
-                <a:solidFill>
-                  <a:srgbClr val="475569"/>
-                </a:solidFill>
-                <a:latin typeface="Calibri" pitchFamily="34" charset="0"/>
-                <a:ea typeface="Calibri" pitchFamily="34" charset="-122"/>
-                <a:cs typeface="Calibri" pitchFamily="34" charset="-120"/>
-              </a:rPr>
-              <a:t>nDCG=0.320, але ~2× повільніший</a:t>
-            </a:r>
-            <a:endParaRPr lang="en-US" sz="950" dirty="0"/>
           </a:p>
         </p:txBody>
       </p:sp>
@@ -17705,8 +17705,8 @@
         </p:nvSpPr>
         <p:spPr>
           <a:xfrm>
-            <a:off x="6062472" y="4069080"/>
-            <a:ext cx="2560320" cy="201168"/>
+            <a:off x="6062472" y="4059936"/>
+            <a:ext cx="2560320" cy="164592"/>
           </a:xfrm>
           <a:prstGeom prst="rect">
             <a:avLst/>
@@ -17722,7 +17722,7 @@
               <a:buNone/>
             </a:pPr>
             <a:r>
-              <a:rPr lang="en-US" sz="900" b="1" spc="150" kern="0" dirty="0">
+              <a:rPr lang="en-US" sz="850" b="1" spc="150" kern="0" dirty="0">
                 <a:solidFill>
                   <a:srgbClr val="64748B"/>
                 </a:solidFill>
@@ -17732,85 +17732,85 @@
               </a:rPr>
               <a:t>Найслабший</a:t>
             </a:r>
+            <a:endParaRPr lang="en-US" sz="850" dirty="0"/>
+          </a:p>
+        </p:txBody>
+      </p:sp>
+      <p:sp>
+        <p:nvSpPr>
+          <p:cNvPr id="38" name="Text 35"/>
+          <p:cNvSpPr/>
+          <p:nvPr/>
+        </p:nvSpPr>
+        <p:spPr>
+          <a:xfrm>
+            <a:off x="6062472" y="4215384"/>
+            <a:ext cx="2560320" cy="219456"/>
+          </a:xfrm>
+          <a:prstGeom prst="rect">
+            <a:avLst/>
+          </a:prstGeom>
+          <a:noFill/>
+          <a:ln/>
+        </p:spPr>
+        <p:txBody>
+          <a:bodyPr wrap="square" lIns="0" tIns="0" rIns="0" bIns="0" rtlCol="0" anchor="t"/>
+          <a:lstStyle/>
+          <a:p>
+            <a:pPr algn="l" indent="0" marL="0">
+              <a:buNone/>
+            </a:pPr>
+            <a:r>
+              <a:rPr lang="en-US" sz="1200" b="1" dirty="0">
+                <a:solidFill>
+                  <a:srgbClr val="7C3AED"/>
+                </a:solidFill>
+                <a:latin typeface="Calibri" pitchFamily="34" charset="0"/>
+                <a:ea typeface="Calibri" pitchFamily="34" charset="-122"/>
+                <a:cs typeface="Calibri" pitchFamily="34" charset="-120"/>
+              </a:rPr>
+              <a:t>nomic</a:t>
+            </a:r>
+            <a:endParaRPr lang="en-US" sz="1200" dirty="0"/>
+          </a:p>
+        </p:txBody>
+      </p:sp>
+      <p:sp>
+        <p:nvSpPr>
+          <p:cNvPr id="39" name="Text 36"/>
+          <p:cNvSpPr/>
+          <p:nvPr/>
+        </p:nvSpPr>
+        <p:spPr>
+          <a:xfrm>
+            <a:off x="6062472" y="4434840"/>
+            <a:ext cx="2560320" cy="182880"/>
+          </a:xfrm>
+          <a:prstGeom prst="rect">
+            <a:avLst/>
+          </a:prstGeom>
+          <a:noFill/>
+          <a:ln/>
+        </p:spPr>
+        <p:txBody>
+          <a:bodyPr wrap="square" lIns="0" tIns="0" rIns="0" bIns="0" rtlCol="0" anchor="t"/>
+          <a:lstStyle/>
+          <a:p>
+            <a:pPr algn="l" indent="0" marL="0">
+              <a:buNone/>
+            </a:pPr>
+            <a:r>
+              <a:rPr lang="en-US" sz="900" dirty="0">
+                <a:solidFill>
+                  <a:srgbClr val="475569"/>
+                </a:solidFill>
+                <a:latin typeface="Calibri" pitchFamily="34" charset="0"/>
+                <a:ea typeface="Calibri" pitchFamily="34" charset="-122"/>
+                <a:cs typeface="Calibri" pitchFamily="34" charset="-120"/>
+              </a:rPr>
+              <a:t>поступається навіть BM25</a:t>
+            </a:r>
             <a:endParaRPr lang="en-US" sz="900" dirty="0"/>
-          </a:p>
-        </p:txBody>
-      </p:sp>
-      <p:sp>
-        <p:nvSpPr>
-          <p:cNvPr id="38" name="Text 35"/>
-          <p:cNvSpPr/>
-          <p:nvPr/>
-        </p:nvSpPr>
-        <p:spPr>
-          <a:xfrm>
-            <a:off x="6062472" y="4270248"/>
-            <a:ext cx="2560320" cy="256032"/>
-          </a:xfrm>
-          <a:prstGeom prst="rect">
-            <a:avLst/>
-          </a:prstGeom>
-          <a:noFill/>
-          <a:ln/>
-        </p:spPr>
-        <p:txBody>
-          <a:bodyPr wrap="square" lIns="0" tIns="0" rIns="0" bIns="0" rtlCol="0" anchor="t"/>
-          <a:lstStyle/>
-          <a:p>
-            <a:pPr algn="l" indent="0" marL="0">
-              <a:buNone/>
-            </a:pPr>
-            <a:r>
-              <a:rPr lang="en-US" sz="1300" b="1" dirty="0">
-                <a:solidFill>
-                  <a:srgbClr val="7C3AED"/>
-                </a:solidFill>
-                <a:latin typeface="Calibri" pitchFamily="34" charset="0"/>
-                <a:ea typeface="Calibri" pitchFamily="34" charset="-122"/>
-                <a:cs typeface="Calibri" pitchFamily="34" charset="-120"/>
-              </a:rPr>
-              <a:t>nomic</a:t>
-            </a:r>
-            <a:endParaRPr lang="en-US" sz="1300" dirty="0"/>
-          </a:p>
-        </p:txBody>
-      </p:sp>
-      <p:sp>
-        <p:nvSpPr>
-          <p:cNvPr id="39" name="Text 36"/>
-          <p:cNvSpPr/>
-          <p:nvPr/>
-        </p:nvSpPr>
-        <p:spPr>
-          <a:xfrm>
-            <a:off x="6062472" y="4526280"/>
-            <a:ext cx="2560320" cy="91440"/>
-          </a:xfrm>
-          <a:prstGeom prst="rect">
-            <a:avLst/>
-          </a:prstGeom>
-          <a:noFill/>
-          <a:ln/>
-        </p:spPr>
-        <p:txBody>
-          <a:bodyPr wrap="square" lIns="0" tIns="0" rIns="0" bIns="0" rtlCol="0" anchor="t"/>
-          <a:lstStyle/>
-          <a:p>
-            <a:pPr algn="l" indent="0" marL="0">
-              <a:buNone/>
-            </a:pPr>
-            <a:r>
-              <a:rPr lang="en-US" sz="950" dirty="0">
-                <a:solidFill>
-                  <a:srgbClr val="475569"/>
-                </a:solidFill>
-                <a:latin typeface="Calibri" pitchFamily="34" charset="0"/>
-                <a:ea typeface="Calibri" pitchFamily="34" charset="-122"/>
-                <a:cs typeface="Calibri" pitchFamily="34" charset="-120"/>
-              </a:rPr>
-              <a:t>поступається навіть BM25</a:t>
-            </a:r>
-            <a:endParaRPr lang="en-US" sz="950" dirty="0"/>
           </a:p>
         </p:txBody>
       </p:sp>

--- a/thesis/Nesterenko_Presentation.pptx
+++ b/thesis/Nesterenko_Presentation.pptx
@@ -8101,7 +8101,7 @@
     <p:bg>
       <p:bgPr>
         <a:solidFill>
-          <a:srgbClr val="0F172A"/>
+          <a:srgbClr val="FFFFFF"/>
         </a:solidFill>
       </p:bgPr>
     </p:bg>
@@ -8127,15 +8127,35 @@
         </p:nvSpPr>
         <p:spPr>
           <a:xfrm>
-            <a:off x="6949440" y="-1280160"/>
-            <a:ext cx="3840480" cy="3840480"/>
+            <a:off x="7040880" y="-1280160"/>
+            <a:ext cx="4023360" cy="4023360"/>
           </a:xfrm>
           <a:prstGeom prst="ellipse">
             <a:avLst/>
           </a:prstGeom>
           <a:solidFill>
-            <a:srgbClr val="1E3A8A">
-              <a:alpha val="70000"/>
+            <a:srgbClr val="EFF6FF"/>
+          </a:solidFill>
+          <a:ln/>
+        </p:spPr>
+      </p:sp>
+      <p:sp>
+        <p:nvSpPr>
+          <p:cNvPr id="3" name="Shape 1"/>
+          <p:cNvSpPr/>
+          <p:nvPr/>
+        </p:nvSpPr>
+        <p:spPr>
+          <a:xfrm>
+            <a:off x="7680960" y="-640080"/>
+            <a:ext cx="2651760" cy="2651760"/>
+          </a:xfrm>
+          <a:prstGeom prst="ellipse">
+            <a:avLst/>
+          </a:prstGeom>
+          <a:solidFill>
+            <a:srgbClr val="1E40AF">
+              <a:alpha val="12000"/>
             </a:srgbClr>
           </a:solidFill>
           <a:ln/>
@@ -8143,21 +8163,21 @@
       </p:sp>
       <p:sp>
         <p:nvSpPr>
-          <p:cNvPr id="3" name="Shape 1"/>
-          <p:cNvSpPr/>
-          <p:nvPr/>
-        </p:nvSpPr>
-        <p:spPr>
-          <a:xfrm>
-            <a:off x="7498080" y="-731520"/>
-            <a:ext cx="2743200" cy="2743200"/>
+          <p:cNvPr id="4" name="Shape 2"/>
+          <p:cNvSpPr/>
+          <p:nvPr/>
+        </p:nvSpPr>
+        <p:spPr>
+          <a:xfrm>
+            <a:off x="8138160" y="-182880"/>
+            <a:ext cx="1463040" cy="1463040"/>
           </a:xfrm>
           <a:prstGeom prst="ellipse">
             <a:avLst/>
           </a:prstGeom>
           <a:solidFill>
-            <a:srgbClr val="1E40AF">
-              <a:alpha val="50000"/>
+            <a:srgbClr val="F59E0B">
+              <a:alpha val="22000"/>
             </a:srgbClr>
           </a:solidFill>
           <a:ln/>
@@ -8165,44 +8185,20 @@
       </p:sp>
       <p:sp>
         <p:nvSpPr>
-          <p:cNvPr id="4" name="Shape 2"/>
-          <p:cNvSpPr/>
-          <p:nvPr/>
-        </p:nvSpPr>
-        <p:spPr>
-          <a:xfrm>
-            <a:off x="7863840" y="-365760"/>
-            <a:ext cx="1645920" cy="1645920"/>
-          </a:xfrm>
-          <a:prstGeom prst="ellipse">
+          <p:cNvPr id="5" name="Shape 3"/>
+          <p:cNvSpPr/>
+          <p:nvPr/>
+        </p:nvSpPr>
+        <p:spPr>
+          <a:xfrm>
+            <a:off x="0" y="0"/>
+            <a:ext cx="164592" cy="5143500"/>
+          </a:xfrm>
+          <a:prstGeom prst="rect">
             <a:avLst/>
           </a:prstGeom>
           <a:solidFill>
-            <a:srgbClr val="F59E0B">
-              <a:alpha val="40000"/>
-            </a:srgbClr>
-          </a:solidFill>
-          <a:ln/>
-        </p:spPr>
-      </p:sp>
-      <p:sp>
-        <p:nvSpPr>
-          <p:cNvPr id="5" name="Shape 3"/>
-          <p:cNvSpPr/>
-          <p:nvPr/>
-        </p:nvSpPr>
-        <p:spPr>
-          <a:xfrm>
-            <a:off x="-365760" y="3840480"/>
-            <a:ext cx="1280160" cy="1280160"/>
-          </a:xfrm>
-          <a:prstGeom prst="rect">
-            <a:avLst/>
-          </a:prstGeom>
-          <a:solidFill>
-            <a:srgbClr val="0891B2">
-              <a:alpha val="50000"/>
-            </a:srgbClr>
+            <a:srgbClr val="1E40AF"/>
           </a:solidFill>
           <a:ln/>
         </p:spPr>
@@ -8224,9 +8220,9 @@
             </a:avLst>
           </a:prstGeom>
           <a:solidFill>
-            <a:srgbClr val="0F172A"/>
+            <a:srgbClr val="FEF3C7"/>
           </a:solidFill>
-          <a:ln w="12700">
+          <a:ln w="9525">
             <a:solidFill>
               <a:srgbClr val="F59E0B"/>
             </a:solidFill>
@@ -8261,7 +8257,7 @@
             <a:r>
               <a:rPr lang="en-US" sz="1000" b="1" spc="200" kern="0" dirty="0">
                 <a:solidFill>
-                  <a:srgbClr val="F59E0B"/>
+                  <a:srgbClr val="D97706"/>
                 </a:solidFill>
                 <a:latin typeface="Calibri" pitchFamily="34" charset="0"/>
                 <a:ea typeface="Calibri" pitchFamily="34" charset="-122"/>
@@ -8300,7 +8296,7 @@
             <a:r>
               <a:rPr lang="en-US" sz="2600" b="1" dirty="0">
                 <a:solidFill>
-                  <a:srgbClr val="F1F5F9"/>
+                  <a:srgbClr val="0F172A"/>
                 </a:solidFill>
                 <a:latin typeface="Calibri" pitchFamily="34" charset="0"/>
                 <a:ea typeface="Calibri" pitchFamily="34" charset="-122"/>
@@ -8362,7 +8358,7 @@
             <a:r>
               <a:rPr lang="en-US" sz="1300" dirty="0">
                 <a:solidFill>
-                  <a:srgbClr val="94A3B8"/>
+                  <a:srgbClr val="64748B"/>
                 </a:solidFill>
                 <a:latin typeface="Calibri" pitchFamily="34" charset="0"/>
                 <a:ea typeface="Calibri" pitchFamily="34" charset="-122"/>
@@ -8379,7 +8375,7 @@
             <a:r>
               <a:rPr lang="en-US" sz="1400" b="1" dirty="0">
                 <a:solidFill>
-                  <a:srgbClr val="F1F5F9"/>
+                  <a:srgbClr val="0F172A"/>
                 </a:solidFill>
                 <a:latin typeface="Calibri" pitchFamily="34" charset="0"/>
                 <a:ea typeface="Calibri" pitchFamily="34" charset="-122"/>
@@ -8399,7 +8395,7 @@
             <a:r>
               <a:rPr lang="en-US" sz="1300" dirty="0">
                 <a:solidFill>
-                  <a:srgbClr val="94A3B8"/>
+                  <a:srgbClr val="64748B"/>
                 </a:solidFill>
                 <a:latin typeface="Calibri" pitchFamily="34" charset="0"/>
                 <a:ea typeface="Calibri" pitchFamily="34" charset="-122"/>
@@ -8416,7 +8412,7 @@
             <a:r>
               <a:rPr lang="en-US" sz="1400" b="1" dirty="0">
                 <a:solidFill>
-                  <a:srgbClr val="F1F5F9"/>
+                  <a:srgbClr val="0F172A"/>
                 </a:solidFill>
                 <a:latin typeface="Calibri" pitchFamily="34" charset="0"/>
                 <a:ea typeface="Calibri" pitchFamily="34" charset="-122"/>
@@ -8455,7 +8451,7 @@
             <a:r>
               <a:rPr lang="en-US" sz="1300" dirty="0">
                 <a:solidFill>
-                  <a:srgbClr val="94A3B8"/>
+                  <a:srgbClr val="64748B"/>
                 </a:solidFill>
                 <a:latin typeface="Calibri" pitchFamily="34" charset="0"/>
                 <a:ea typeface="Calibri" pitchFamily="34" charset="-122"/>
@@ -8472,7 +8468,7 @@
             <a:r>
               <a:rPr lang="en-US" sz="1400" b="1" dirty="0">
                 <a:solidFill>
-                  <a:srgbClr val="F1F5F9"/>
+                  <a:srgbClr val="0F172A"/>
                 </a:solidFill>
                 <a:latin typeface="Calibri" pitchFamily="34" charset="0"/>
                 <a:ea typeface="Calibri" pitchFamily="34" charset="-122"/>
@@ -8535,7 +8531,7 @@
             <a:r>
               <a:rPr lang="en-US" sz="1100" dirty="0">
                 <a:solidFill>
-                  <a:srgbClr val="94A3B8"/>
+                  <a:srgbClr val="475569"/>
                 </a:solidFill>
                 <a:latin typeface="Calibri" pitchFamily="34" charset="0"/>
                 <a:ea typeface="Calibri" pitchFamily="34" charset="-122"/>
@@ -18881,7 +18877,7 @@
     <p:bg>
       <p:bgPr>
         <a:solidFill>
-          <a:srgbClr val="0F172A"/>
+          <a:srgbClr val="FFFFFF"/>
         </a:solidFill>
       </p:bgPr>
     </p:bg>
@@ -18914,8 +18910,28 @@
             <a:avLst/>
           </a:prstGeom>
           <a:solidFill>
-            <a:srgbClr val="1E40AF">
-              <a:alpha val="30000"/>
+            <a:srgbClr val="EFF6FF"/>
+          </a:solidFill>
+          <a:ln/>
+        </p:spPr>
+      </p:sp>
+      <p:sp>
+        <p:nvSpPr>
+          <p:cNvPr id="3" name="Shape 1"/>
+          <p:cNvSpPr/>
+          <p:nvPr/>
+        </p:nvSpPr>
+        <p:spPr>
+          <a:xfrm>
+            <a:off x="7315200" y="3657600"/>
+            <a:ext cx="3200400" cy="3200400"/>
+          </a:xfrm>
+          <a:prstGeom prst="ellipse">
+            <a:avLst/>
+          </a:prstGeom>
+          <a:solidFill>
+            <a:srgbClr val="F59E0B">
+              <a:alpha val="20000"/>
             </a:srgbClr>
           </a:solidFill>
           <a:ln/>
@@ -18923,28 +18939,6 @@
       </p:sp>
       <p:sp>
         <p:nvSpPr>
-          <p:cNvPr id="3" name="Shape 1"/>
-          <p:cNvSpPr/>
-          <p:nvPr/>
-        </p:nvSpPr>
-        <p:spPr>
-          <a:xfrm>
-            <a:off x="7315200" y="3657600"/>
-            <a:ext cx="3200400" cy="3200400"/>
-          </a:xfrm>
-          <a:prstGeom prst="ellipse">
-            <a:avLst/>
-          </a:prstGeom>
-          <a:solidFill>
-            <a:srgbClr val="F59E0B">
-              <a:alpha val="25000"/>
-            </a:srgbClr>
-          </a:solidFill>
-          <a:ln/>
-        </p:spPr>
-      </p:sp>
-      <p:sp>
-        <p:nvSpPr>
           <p:cNvPr id="4" name="Text 2"/>
           <p:cNvSpPr/>
           <p:nvPr/>
@@ -18970,7 +18964,7 @@
             <a:r>
               <a:rPr lang="en-US" sz="850" b="1" spc="300" kern="0" dirty="0">
                 <a:solidFill>
-                  <a:srgbClr val="94A3B8"/>
+                  <a:srgbClr val="64748B"/>
                 </a:solidFill>
                 <a:latin typeface="Calibri" pitchFamily="34" charset="0"/>
                 <a:ea typeface="Calibri" pitchFamily="34" charset="-122"/>
@@ -19029,7 +19023,7 @@
             <a:r>
               <a:rPr lang="en-US" sz="2200" b="1" dirty="0">
                 <a:solidFill>
-                  <a:srgbClr val="F1F5F9"/>
+                  <a:srgbClr val="0F172A"/>
                 </a:solidFill>
                 <a:latin typeface="Calibri" pitchFamily="34" charset="0"/>
                 <a:ea typeface="Calibri" pitchFamily="34" charset="-122"/>
@@ -19155,9 +19149,9 @@
             </a:avLst>
           </a:prstGeom>
           <a:solidFill>
-            <a:srgbClr val="1E293B"/>
+            <a:srgbClr val="FFFFFF"/>
           </a:solidFill>
-          <a:ln w="12700">
+          <a:ln w="15875">
             <a:solidFill>
               <a:srgbClr val="F59E0B"/>
             </a:solidFill>
@@ -19173,10 +19167,10 @@
         </p:nvSpPr>
         <p:spPr>
           <a:xfrm>
-            <a:off x="594360" y="1810512"/>
-            <a:ext cx="502920" cy="502920"/>
-          </a:xfrm>
-          <a:prstGeom prst="ellipse">
+            <a:off x="411480" y="1645920"/>
+            <a:ext cx="91440" cy="1257300"/>
+          </a:xfrm>
+          <a:prstGeom prst="rect">
             <a:avLst/>
           </a:prstGeom>
           <a:solidFill>
@@ -19185,9 +19179,29 @@
           <a:ln/>
         </p:spPr>
       </p:sp>
+      <p:sp>
+        <p:nvSpPr>
+          <p:cNvPr id="12" name="Shape 9"/>
+          <p:cNvSpPr/>
+          <p:nvPr/>
+        </p:nvSpPr>
+        <p:spPr>
+          <a:xfrm>
+            <a:off x="640080" y="1810512"/>
+            <a:ext cx="502920" cy="502920"/>
+          </a:xfrm>
+          <a:prstGeom prst="ellipse">
+            <a:avLst/>
+          </a:prstGeom>
+          <a:solidFill>
+            <a:srgbClr val="F59E0B"/>
+          </a:solidFill>
+          <a:ln/>
+        </p:spPr>
+      </p:sp>
       <p:pic>
         <p:nvPicPr>
-          <p:cNvPr id="12" name="Image 1" descr="preencoded.png">    </p:cNvPr>
+          <p:cNvPr id="13" name="Image 1" descr="preencoded.png">    </p:cNvPr>
           <p:cNvPicPr>
             <a:picLocks noChangeAspect="1"/>
           </p:cNvPicPr>
@@ -19201,7 +19215,7 @@
         </p:blipFill>
         <p:spPr>
           <a:xfrm>
-            <a:off x="694944" y="1911096"/>
+            <a:off x="740664" y="1911096"/>
             <a:ext cx="292608" cy="292608"/>
           </a:xfrm>
           <a:prstGeom prst="rect">
@@ -19211,14 +19225,14 @@
       </p:pic>
       <p:sp>
         <p:nvSpPr>
-          <p:cNvPr id="13" name="Text 9"/>
-          <p:cNvSpPr/>
-          <p:nvPr/>
-        </p:nvSpPr>
-        <p:spPr>
-          <a:xfrm>
-            <a:off x="1188720" y="1737360"/>
-            <a:ext cx="3154680" cy="320040"/>
+          <p:cNvPr id="14" name="Text 10"/>
+          <p:cNvSpPr/>
+          <p:nvPr/>
+        </p:nvSpPr>
+        <p:spPr>
+          <a:xfrm>
+            <a:off x="1234440" y="1737360"/>
+            <a:ext cx="3108960" cy="320040"/>
           </a:xfrm>
           <a:prstGeom prst="rect">
             <a:avLst/>
@@ -19250,14 +19264,14 @@
       </p:sp>
       <p:sp>
         <p:nvSpPr>
-          <p:cNvPr id="14" name="Text 10"/>
-          <p:cNvSpPr/>
-          <p:nvPr/>
-        </p:nvSpPr>
-        <p:spPr>
-          <a:xfrm>
-            <a:off x="1188720" y="2066544"/>
-            <a:ext cx="3154680" cy="228600"/>
+          <p:cNvPr id="15" name="Text 11"/>
+          <p:cNvSpPr/>
+          <p:nvPr/>
+        </p:nvSpPr>
+        <p:spPr>
+          <a:xfrm>
+            <a:off x="1234440" y="2066544"/>
+            <a:ext cx="3108960" cy="228600"/>
           </a:xfrm>
           <a:prstGeom prst="rect">
             <a:avLst/>
@@ -19275,7 +19289,7 @@
             <a:r>
               <a:rPr lang="en-US" sz="1000" b="1" dirty="0">
                 <a:solidFill>
-                  <a:srgbClr val="F1F5F9"/>
+                  <a:srgbClr val="1E293B"/>
                 </a:solidFill>
                 <a:latin typeface="Calibri" pitchFamily="34" charset="0"/>
                 <a:ea typeface="Calibri" pitchFamily="34" charset="-122"/>
@@ -19289,14 +19303,14 @@
       </p:sp>
       <p:sp>
         <p:nvSpPr>
-          <p:cNvPr id="15" name="Text 11"/>
-          <p:cNvSpPr/>
-          <p:nvPr/>
-        </p:nvSpPr>
-        <p:spPr>
-          <a:xfrm>
-            <a:off x="594360" y="2423160"/>
-            <a:ext cx="3703320" cy="388620"/>
+          <p:cNvPr id="16" name="Text 12"/>
+          <p:cNvSpPr/>
+          <p:nvPr/>
+        </p:nvSpPr>
+        <p:spPr>
+          <a:xfrm>
+            <a:off x="640080" y="2423160"/>
+            <a:ext cx="3657600" cy="388620"/>
           </a:xfrm>
           <a:prstGeom prst="rect">
             <a:avLst/>
@@ -19314,7 +19328,7 @@
             <a:r>
               <a:rPr lang="en-US" sz="1000" dirty="0">
                 <a:solidFill>
-                  <a:srgbClr val="94A3B8"/>
+                  <a:srgbClr val="475569"/>
                 </a:solidFill>
                 <a:latin typeface="Calibri" pitchFamily="34" charset="0"/>
                 <a:ea typeface="Calibri" pitchFamily="34" charset="-122"/>
@@ -19328,7 +19342,7 @@
       </p:sp>
       <p:sp>
         <p:nvSpPr>
-          <p:cNvPr id="16" name="Shape 12"/>
+          <p:cNvPr id="17" name="Shape 13"/>
           <p:cNvSpPr/>
           <p:nvPr/>
         </p:nvSpPr>
@@ -19343,11 +19357,11 @@
             </a:avLst>
           </a:prstGeom>
           <a:solidFill>
-            <a:srgbClr val="1E293B"/>
+            <a:srgbClr val="FFFFFF"/>
           </a:solidFill>
-          <a:ln w="12700">
+          <a:ln w="15875">
             <a:solidFill>
-              <a:srgbClr val="06B6D4"/>
+              <a:srgbClr val="0891B2"/>
             </a:solidFill>
             <a:prstDash val="solid"/>
           </a:ln>
@@ -19355,27 +19369,47 @@
       </p:sp>
       <p:sp>
         <p:nvSpPr>
-          <p:cNvPr id="17" name="Shape 13"/>
-          <p:cNvSpPr/>
-          <p:nvPr/>
-        </p:nvSpPr>
-        <p:spPr>
-          <a:xfrm>
-            <a:off x="4846320" y="1810512"/>
+          <p:cNvPr id="18" name="Shape 14"/>
+          <p:cNvSpPr/>
+          <p:nvPr/>
+        </p:nvSpPr>
+        <p:spPr>
+          <a:xfrm>
+            <a:off x="4663440" y="1645920"/>
+            <a:ext cx="91440" cy="1257300"/>
+          </a:xfrm>
+          <a:prstGeom prst="rect">
+            <a:avLst/>
+          </a:prstGeom>
+          <a:solidFill>
+            <a:srgbClr val="0891B2"/>
+          </a:solidFill>
+          <a:ln/>
+        </p:spPr>
+      </p:sp>
+      <p:sp>
+        <p:nvSpPr>
+          <p:cNvPr id="19" name="Shape 15"/>
+          <p:cNvSpPr/>
+          <p:nvPr/>
+        </p:nvSpPr>
+        <p:spPr>
+          <a:xfrm>
+            <a:off x="4892040" y="1810512"/>
             <a:ext cx="502920" cy="502920"/>
           </a:xfrm>
           <a:prstGeom prst="ellipse">
             <a:avLst/>
           </a:prstGeom>
           <a:solidFill>
-            <a:srgbClr val="06B6D4"/>
+            <a:srgbClr val="0891B2"/>
           </a:solidFill>
           <a:ln/>
         </p:spPr>
       </p:sp>
       <p:pic>
         <p:nvPicPr>
-          <p:cNvPr id="18" name="Image 2" descr="preencoded.png">    </p:cNvPr>
+          <p:cNvPr id="20" name="Image 2" descr="preencoded.png">    </p:cNvPr>
           <p:cNvPicPr>
             <a:picLocks noChangeAspect="1"/>
           </p:cNvPicPr>
@@ -19389,7 +19423,7 @@
         </p:blipFill>
         <p:spPr>
           <a:xfrm>
-            <a:off x="4946904" y="1911096"/>
+            <a:off x="4992624" y="1911096"/>
             <a:ext cx="292608" cy="292608"/>
           </a:xfrm>
           <a:prstGeom prst="rect">
@@ -19399,14 +19433,14 @@
       </p:pic>
       <p:sp>
         <p:nvSpPr>
-          <p:cNvPr id="19" name="Text 14"/>
-          <p:cNvSpPr/>
-          <p:nvPr/>
-        </p:nvSpPr>
-        <p:spPr>
-          <a:xfrm>
-            <a:off x="5440680" y="1737360"/>
-            <a:ext cx="3154680" cy="320040"/>
+          <p:cNvPr id="21" name="Text 16"/>
+          <p:cNvSpPr/>
+          <p:nvPr/>
+        </p:nvSpPr>
+        <p:spPr>
+          <a:xfrm>
+            <a:off x="5486400" y="1737360"/>
+            <a:ext cx="3108960" cy="320040"/>
           </a:xfrm>
           <a:prstGeom prst="rect">
             <a:avLst/>
@@ -19424,7 +19458,7 @@
             <a:r>
               <a:rPr lang="en-US" sz="1600" b="1" dirty="0">
                 <a:solidFill>
-                  <a:srgbClr val="06B6D4"/>
+                  <a:srgbClr val="0891B2"/>
                 </a:solidFill>
                 <a:latin typeface="Calibri" pitchFamily="34" charset="0"/>
                 <a:ea typeface="Calibri" pitchFamily="34" charset="-122"/>
@@ -19438,14 +19472,14 @@
       </p:sp>
       <p:sp>
         <p:nvSpPr>
-          <p:cNvPr id="20" name="Text 15"/>
-          <p:cNvSpPr/>
-          <p:nvPr/>
-        </p:nvSpPr>
-        <p:spPr>
-          <a:xfrm>
-            <a:off x="5440680" y="2066544"/>
-            <a:ext cx="3154680" cy="228600"/>
+          <p:cNvPr id="22" name="Text 17"/>
+          <p:cNvSpPr/>
+          <p:nvPr/>
+        </p:nvSpPr>
+        <p:spPr>
+          <a:xfrm>
+            <a:off x="5486400" y="2066544"/>
+            <a:ext cx="3108960" cy="228600"/>
           </a:xfrm>
           <a:prstGeom prst="rect">
             <a:avLst/>
@@ -19463,7 +19497,7 @@
             <a:r>
               <a:rPr lang="en-US" sz="1000" b="1" dirty="0">
                 <a:solidFill>
-                  <a:srgbClr val="F1F5F9"/>
+                  <a:srgbClr val="1E293B"/>
                 </a:solidFill>
                 <a:latin typeface="Calibri" pitchFamily="34" charset="0"/>
                 <a:ea typeface="Calibri" pitchFamily="34" charset="-122"/>
@@ -19477,14 +19511,14 @@
       </p:sp>
       <p:sp>
         <p:nvSpPr>
-          <p:cNvPr id="21" name="Text 16"/>
-          <p:cNvSpPr/>
-          <p:nvPr/>
-        </p:nvSpPr>
-        <p:spPr>
-          <a:xfrm>
-            <a:off x="4846320" y="2423160"/>
-            <a:ext cx="3703320" cy="388620"/>
+          <p:cNvPr id="23" name="Text 18"/>
+          <p:cNvSpPr/>
+          <p:nvPr/>
+        </p:nvSpPr>
+        <p:spPr>
+          <a:xfrm>
+            <a:off x="4892040" y="2423160"/>
+            <a:ext cx="3657600" cy="388620"/>
           </a:xfrm>
           <a:prstGeom prst="rect">
             <a:avLst/>
@@ -19502,7 +19536,7 @@
             <a:r>
               <a:rPr lang="en-US" sz="1000" dirty="0">
                 <a:solidFill>
-                  <a:srgbClr val="94A3B8"/>
+                  <a:srgbClr val="475569"/>
                 </a:solidFill>
                 <a:latin typeface="Calibri" pitchFamily="34" charset="0"/>
                 <a:ea typeface="Calibri" pitchFamily="34" charset="-122"/>
@@ -19516,7 +19550,7 @@
       </p:sp>
       <p:sp>
         <p:nvSpPr>
-          <p:cNvPr id="22" name="Shape 17"/>
+          <p:cNvPr id="24" name="Shape 19"/>
           <p:cNvSpPr/>
           <p:nvPr/>
         </p:nvSpPr>
@@ -19531,11 +19565,11 @@
             </a:avLst>
           </a:prstGeom>
           <a:solidFill>
-            <a:srgbClr val="1E293B"/>
+            <a:srgbClr val="FFFFFF"/>
           </a:solidFill>
-          <a:ln w="12700">
+          <a:ln w="15875">
             <a:solidFill>
-              <a:srgbClr val="3B82F6"/>
+              <a:srgbClr val="1E40AF"/>
             </a:solidFill>
             <a:prstDash val="solid"/>
           </a:ln>
@@ -19543,27 +19577,47 @@
       </p:sp>
       <p:sp>
         <p:nvSpPr>
-          <p:cNvPr id="23" name="Shape 18"/>
-          <p:cNvSpPr/>
-          <p:nvPr/>
-        </p:nvSpPr>
-        <p:spPr>
-          <a:xfrm>
-            <a:off x="594360" y="3204972"/>
+          <p:cNvPr id="25" name="Shape 20"/>
+          <p:cNvSpPr/>
+          <p:nvPr/>
+        </p:nvSpPr>
+        <p:spPr>
+          <a:xfrm>
+            <a:off x="411480" y="3040380"/>
+            <a:ext cx="91440" cy="1257300"/>
+          </a:xfrm>
+          <a:prstGeom prst="rect">
+            <a:avLst/>
+          </a:prstGeom>
+          <a:solidFill>
+            <a:srgbClr val="1E40AF"/>
+          </a:solidFill>
+          <a:ln/>
+        </p:spPr>
+      </p:sp>
+      <p:sp>
+        <p:nvSpPr>
+          <p:cNvPr id="26" name="Shape 21"/>
+          <p:cNvSpPr/>
+          <p:nvPr/>
+        </p:nvSpPr>
+        <p:spPr>
+          <a:xfrm>
+            <a:off x="640080" y="3204972"/>
             <a:ext cx="502920" cy="502920"/>
           </a:xfrm>
           <a:prstGeom prst="ellipse">
             <a:avLst/>
           </a:prstGeom>
           <a:solidFill>
-            <a:srgbClr val="3B82F6"/>
+            <a:srgbClr val="1E40AF"/>
           </a:solidFill>
           <a:ln/>
         </p:spPr>
       </p:sp>
       <p:pic>
         <p:nvPicPr>
-          <p:cNvPr id="24" name="Image 3" descr="preencoded.png">    </p:cNvPr>
+          <p:cNvPr id="27" name="Image 3" descr="preencoded.png">    </p:cNvPr>
           <p:cNvPicPr>
             <a:picLocks noChangeAspect="1"/>
           </p:cNvPicPr>
@@ -19577,7 +19631,7 @@
         </p:blipFill>
         <p:spPr>
           <a:xfrm>
-            <a:off x="694944" y="3305556"/>
+            <a:off x="740664" y="3305556"/>
             <a:ext cx="292608" cy="292608"/>
           </a:xfrm>
           <a:prstGeom prst="rect">
@@ -19587,14 +19641,14 @@
       </p:pic>
       <p:sp>
         <p:nvSpPr>
-          <p:cNvPr id="25" name="Text 19"/>
-          <p:cNvSpPr/>
-          <p:nvPr/>
-        </p:nvSpPr>
-        <p:spPr>
-          <a:xfrm>
-            <a:off x="1188720" y="3131820"/>
-            <a:ext cx="3154680" cy="320040"/>
+          <p:cNvPr id="28" name="Text 22"/>
+          <p:cNvSpPr/>
+          <p:nvPr/>
+        </p:nvSpPr>
+        <p:spPr>
+          <a:xfrm>
+            <a:off x="1234440" y="3131820"/>
+            <a:ext cx="3108960" cy="320040"/>
           </a:xfrm>
           <a:prstGeom prst="rect">
             <a:avLst/>
@@ -19612,7 +19666,7 @@
             <a:r>
               <a:rPr lang="en-US" sz="1600" b="1" dirty="0">
                 <a:solidFill>
-                  <a:srgbClr val="3B82F6"/>
+                  <a:srgbClr val="1E40AF"/>
                 </a:solidFill>
                 <a:latin typeface="Calibri" pitchFamily="34" charset="0"/>
                 <a:ea typeface="Calibri" pitchFamily="34" charset="-122"/>
@@ -19626,14 +19680,14 @@
       </p:sp>
       <p:sp>
         <p:nvSpPr>
-          <p:cNvPr id="26" name="Text 20"/>
-          <p:cNvSpPr/>
-          <p:nvPr/>
-        </p:nvSpPr>
-        <p:spPr>
-          <a:xfrm>
-            <a:off x="1188720" y="3461004"/>
-            <a:ext cx="3154680" cy="228600"/>
+          <p:cNvPr id="29" name="Text 23"/>
+          <p:cNvSpPr/>
+          <p:nvPr/>
+        </p:nvSpPr>
+        <p:spPr>
+          <a:xfrm>
+            <a:off x="1234440" y="3461004"/>
+            <a:ext cx="3108960" cy="228600"/>
           </a:xfrm>
           <a:prstGeom prst="rect">
             <a:avLst/>
@@ -19651,7 +19705,7 @@
             <a:r>
               <a:rPr lang="en-US" sz="1000" b="1" dirty="0">
                 <a:solidFill>
-                  <a:srgbClr val="F1F5F9"/>
+                  <a:srgbClr val="1E293B"/>
                 </a:solidFill>
                 <a:latin typeface="Calibri" pitchFamily="34" charset="0"/>
                 <a:ea typeface="Calibri" pitchFamily="34" charset="-122"/>
@@ -19665,14 +19719,14 @@
       </p:sp>
       <p:sp>
         <p:nvSpPr>
-          <p:cNvPr id="27" name="Text 21"/>
-          <p:cNvSpPr/>
-          <p:nvPr/>
-        </p:nvSpPr>
-        <p:spPr>
-          <a:xfrm>
-            <a:off x="594360" y="3817620"/>
-            <a:ext cx="3703320" cy="388620"/>
+          <p:cNvPr id="30" name="Text 24"/>
+          <p:cNvSpPr/>
+          <p:nvPr/>
+        </p:nvSpPr>
+        <p:spPr>
+          <a:xfrm>
+            <a:off x="640080" y="3817620"/>
+            <a:ext cx="3657600" cy="388620"/>
           </a:xfrm>
           <a:prstGeom prst="rect">
             <a:avLst/>
@@ -19690,7 +19744,7 @@
             <a:r>
               <a:rPr lang="en-US" sz="1000" dirty="0">
                 <a:solidFill>
-                  <a:srgbClr val="94A3B8"/>
+                  <a:srgbClr val="475569"/>
                 </a:solidFill>
                 <a:latin typeface="Calibri" pitchFamily="34" charset="0"/>
                 <a:ea typeface="Calibri" pitchFamily="34" charset="-122"/>
@@ -19704,7 +19758,7 @@
       </p:sp>
       <p:sp>
         <p:nvSpPr>
-          <p:cNvPr id="28" name="Shape 22"/>
+          <p:cNvPr id="31" name="Shape 25"/>
           <p:cNvSpPr/>
           <p:nvPr/>
         </p:nvSpPr>
@@ -19719,11 +19773,11 @@
             </a:avLst>
           </a:prstGeom>
           <a:solidFill>
-            <a:srgbClr val="1E293B"/>
+            <a:srgbClr val="FFFFFF"/>
           </a:solidFill>
-          <a:ln w="12700">
+          <a:ln w="15875">
             <a:solidFill>
-              <a:srgbClr val="94A3B8"/>
+              <a:srgbClr val="64748B"/>
             </a:solidFill>
             <a:prstDash val="solid"/>
           </a:ln>
@@ -19731,27 +19785,47 @@
       </p:sp>
       <p:sp>
         <p:nvSpPr>
-          <p:cNvPr id="29" name="Shape 23"/>
-          <p:cNvSpPr/>
-          <p:nvPr/>
-        </p:nvSpPr>
-        <p:spPr>
-          <a:xfrm>
-            <a:off x="4846320" y="3204972"/>
+          <p:cNvPr id="32" name="Shape 26"/>
+          <p:cNvSpPr/>
+          <p:nvPr/>
+        </p:nvSpPr>
+        <p:spPr>
+          <a:xfrm>
+            <a:off x="4663440" y="3040380"/>
+            <a:ext cx="91440" cy="1257300"/>
+          </a:xfrm>
+          <a:prstGeom prst="rect">
+            <a:avLst/>
+          </a:prstGeom>
+          <a:solidFill>
+            <a:srgbClr val="64748B"/>
+          </a:solidFill>
+          <a:ln/>
+        </p:spPr>
+      </p:sp>
+      <p:sp>
+        <p:nvSpPr>
+          <p:cNvPr id="33" name="Shape 27"/>
+          <p:cNvSpPr/>
+          <p:nvPr/>
+        </p:nvSpPr>
+        <p:spPr>
+          <a:xfrm>
+            <a:off x="4892040" y="3204972"/>
             <a:ext cx="502920" cy="502920"/>
           </a:xfrm>
           <a:prstGeom prst="ellipse">
             <a:avLst/>
           </a:prstGeom>
           <a:solidFill>
-            <a:srgbClr val="94A3B8"/>
+            <a:srgbClr val="64748B"/>
           </a:solidFill>
           <a:ln/>
         </p:spPr>
       </p:sp>
       <p:pic>
         <p:nvPicPr>
-          <p:cNvPr id="30" name="Image 4" descr="preencoded.png">    </p:cNvPr>
+          <p:cNvPr id="34" name="Image 4" descr="preencoded.png">    </p:cNvPr>
           <p:cNvPicPr>
             <a:picLocks noChangeAspect="1"/>
           </p:cNvPicPr>
@@ -19765,7 +19839,7 @@
         </p:blipFill>
         <p:spPr>
           <a:xfrm>
-            <a:off x="4946904" y="3305556"/>
+            <a:off x="4992624" y="3305556"/>
             <a:ext cx="292608" cy="292608"/>
           </a:xfrm>
           <a:prstGeom prst="rect">
@@ -19775,14 +19849,14 @@
       </p:pic>
       <p:sp>
         <p:nvSpPr>
-          <p:cNvPr id="31" name="Text 24"/>
-          <p:cNvSpPr/>
-          <p:nvPr/>
-        </p:nvSpPr>
-        <p:spPr>
-          <a:xfrm>
-            <a:off x="5440680" y="3131820"/>
-            <a:ext cx="3154680" cy="320040"/>
+          <p:cNvPr id="35" name="Text 28"/>
+          <p:cNvSpPr/>
+          <p:nvPr/>
+        </p:nvSpPr>
+        <p:spPr>
+          <a:xfrm>
+            <a:off x="5486400" y="3131820"/>
+            <a:ext cx="3108960" cy="320040"/>
           </a:xfrm>
           <a:prstGeom prst="rect">
             <a:avLst/>
@@ -19800,7 +19874,7 @@
             <a:r>
               <a:rPr lang="en-US" sz="1600" b="1" dirty="0">
                 <a:solidFill>
-                  <a:srgbClr val="94A3B8"/>
+                  <a:srgbClr val="64748B"/>
                 </a:solidFill>
                 <a:latin typeface="Calibri" pitchFamily="34" charset="0"/>
                 <a:ea typeface="Calibri" pitchFamily="34" charset="-122"/>
@@ -19814,14 +19888,14 @@
       </p:sp>
       <p:sp>
         <p:nvSpPr>
-          <p:cNvPr id="32" name="Text 25"/>
-          <p:cNvSpPr/>
-          <p:nvPr/>
-        </p:nvSpPr>
-        <p:spPr>
-          <a:xfrm>
-            <a:off x="5440680" y="3461004"/>
-            <a:ext cx="3154680" cy="228600"/>
+          <p:cNvPr id="36" name="Text 29"/>
+          <p:cNvSpPr/>
+          <p:nvPr/>
+        </p:nvSpPr>
+        <p:spPr>
+          <a:xfrm>
+            <a:off x="5486400" y="3461004"/>
+            <a:ext cx="3108960" cy="228600"/>
           </a:xfrm>
           <a:prstGeom prst="rect">
             <a:avLst/>
@@ -19839,7 +19913,7 @@
             <a:r>
               <a:rPr lang="en-US" sz="1000" b="1" dirty="0">
                 <a:solidFill>
-                  <a:srgbClr val="F1F5F9"/>
+                  <a:srgbClr val="1E293B"/>
                 </a:solidFill>
                 <a:latin typeface="Calibri" pitchFamily="34" charset="0"/>
                 <a:ea typeface="Calibri" pitchFamily="34" charset="-122"/>
@@ -19853,14 +19927,14 @@
       </p:sp>
       <p:sp>
         <p:nvSpPr>
-          <p:cNvPr id="33" name="Text 26"/>
-          <p:cNvSpPr/>
-          <p:nvPr/>
-        </p:nvSpPr>
-        <p:spPr>
-          <a:xfrm>
-            <a:off x="4846320" y="3817620"/>
-            <a:ext cx="3703320" cy="388620"/>
+          <p:cNvPr id="37" name="Text 30"/>
+          <p:cNvSpPr/>
+          <p:nvPr/>
+        </p:nvSpPr>
+        <p:spPr>
+          <a:xfrm>
+            <a:off x="4892040" y="3817620"/>
+            <a:ext cx="3657600" cy="388620"/>
           </a:xfrm>
           <a:prstGeom prst="rect">
             <a:avLst/>
@@ -19878,7 +19952,7 @@
             <a:r>
               <a:rPr lang="en-US" sz="1000" dirty="0">
                 <a:solidFill>
-                  <a:srgbClr val="94A3B8"/>
+                  <a:srgbClr val="475569"/>
                 </a:solidFill>
                 <a:latin typeface="Calibri" pitchFamily="34" charset="0"/>
                 <a:ea typeface="Calibri" pitchFamily="34" charset="-122"/>
@@ -19892,7 +19966,7 @@
       </p:sp>
       <p:sp>
         <p:nvSpPr>
-          <p:cNvPr id="34" name="Text 27"/>
+          <p:cNvPr id="38" name="Text 31"/>
           <p:cNvSpPr/>
           <p:nvPr/>
         </p:nvSpPr>
@@ -19917,7 +19991,7 @@
             <a:r>
               <a:rPr lang="en-US" sz="2400" b="1" i="1" dirty="0">
                 <a:solidFill>
-                  <a:srgbClr val="F59E0B"/>
+                  <a:srgbClr val="D97706"/>
                 </a:solidFill>
                 <a:latin typeface="Cambria" pitchFamily="34" charset="0"/>
                 <a:ea typeface="Cambria" pitchFamily="34" charset="-122"/>
@@ -19931,7 +20005,7 @@
       </p:sp>
       <p:pic>
         <p:nvPicPr>
-          <p:cNvPr id="35" name="Image 5" descr="D:\repos\kb-semantic-search-benchmark\thesis\scripts\_logo_hex.png">    </p:cNvPr>
+          <p:cNvPr id="39" name="Image 5" descr="D:\repos\kb-semantic-search-benchmark\thesis\scripts\_logo_hex.png">    </p:cNvPr>
           <p:cNvPicPr>
             <a:picLocks noChangeAspect="1"/>
           </p:cNvPicPr>
@@ -19955,7 +20029,7 @@
       </p:pic>
       <p:sp>
         <p:nvSpPr>
-          <p:cNvPr id="36" name="Text 28"/>
+          <p:cNvPr id="40" name="Text 32"/>
           <p:cNvSpPr/>
           <p:nvPr/>
         </p:nvSpPr>
@@ -19980,7 +20054,7 @@
             <a:r>
               <a:rPr lang="en-US" sz="900" dirty="0">
                 <a:solidFill>
-                  <a:srgbClr val="94A3B8"/>
+                  <a:srgbClr val="64748B"/>
                 </a:solidFill>
                 <a:latin typeface="Calibri" pitchFamily="34" charset="0"/>
                 <a:ea typeface="Calibri" pitchFamily="34" charset="-122"/>

--- a/thesis/Nesterenko_Presentation.pptx
+++ b/thesis/Nesterenko_Presentation.pptx
@@ -649,604 +649,6 @@
     <c:autoTitleDeleted val="1"/>
     <c:plotArea>
       <c:layout/>
-      <c:barChart>
-        <c:barDir val="col"/>
-        <c:grouping val="clustered"/>
-        <c:varyColors val="0"/>
-        <c:ser>
-          <c:idx val="0"/>
-          <c:order val="0"/>
-          <c:tx>
-            <c:strRef>
-              <c:f>Sheet1!$B$1</c:f>
-              <c:strCache>
-                <c:ptCount val="1"/>
-                <c:pt idx="0">
-                  <c:v>BGE-M3</c:v>
-                </c:pt>
-              </c:strCache>
-            </c:strRef>
-          </c:tx>
-          <c:spPr>
-            <a:solidFill>
-              <a:srgbClr val="F59E0B"/>
-            </a:solidFill>
-            <a:effectLst/>
-          </c:spPr>
-          <c:invertIfNegative val="0"/>
-          <c:dLbls>
-            <c:numFmt formatCode="0.00" sourceLinked="0"/>
-            <c:txPr>
-              <a:bodyPr/>
-              <a:lstStyle/>
-              <a:p>
-                <a:pPr>
-                  <a:defRPr b="0" i="0" strike="noStrike" sz="750" u="none">
-                    <a:solidFill>
-                      <a:srgbClr val="1E293B"/>
-                    </a:solidFill>
-                    <a:latin typeface="Calibri"/>
-                  </a:defRPr>
-                </a:pPr>
-              </a:p>
-            </c:txPr>
-            <c:showLegendKey val="0"/>
-            <c:showVal val="1"/>
-            <c:showCatName val="0"/>
-            <c:showSerName val="0"/>
-            <c:showPercent val="0"/>
-            <c:showBubbleSize val="0"/>
-            <c:showLeaderLines val="0"/>
-          </c:dLbls>
-          <c:cat>
-            <c:multiLvlStrRef>
-              <c:f>Sheet1!$A$2:$A$4</c:f>
-              <c:multiLvlStrCache>
-                <c:ptCount val="3"/>
-                <c:lvl>
-                  <c:pt idx="0">
-                    <c:v>Технічний</c:v>
-                  </c:pt>
-                  <c:pt idx="1">
-                    <c:v>Юридичний</c:v>
-                  </c:pt>
-                  <c:pt idx="2">
-                    <c:v>Медичний</c:v>
-                  </c:pt>
-                </c:lvl>
-              </c:multiLvlStrCache>
-            </c:multiLvlStrRef>
-          </c:cat>
-          <c:val>
-            <c:numRef>
-              <c:f>Sheet1!$B$2:$B$4</c:f>
-              <c:numCache>
-                <c:formatCode>General</c:formatCode>
-                <c:ptCount val="3"/>
-                <c:pt idx="0">
-                  <c:v>0.904</c:v>
-                </c:pt>
-                <c:pt idx="1">
-                  <c:v>0.872</c:v>
-                </c:pt>
-                <c:pt idx="2">
-                  <c:v>0.912</c:v>
-                </c:pt>
-              </c:numCache>
-            </c:numRef>
-          </c:val>
-        </c:ser>
-        <c:ser>
-          <c:idx val="1"/>
-          <c:order val="1"/>
-          <c:tx>
-            <c:strRef>
-              <c:f>Sheet1!$C$1</c:f>
-              <c:strCache>
-                <c:ptCount val="1"/>
-                <c:pt idx="0">
-                  <c:v>Qwen3</c:v>
-                </c:pt>
-              </c:strCache>
-            </c:strRef>
-          </c:tx>
-          <c:spPr>
-            <a:solidFill>
-              <a:srgbClr val="1E40AF"/>
-            </a:solidFill>
-            <a:effectLst/>
-          </c:spPr>
-          <c:invertIfNegative val="0"/>
-          <c:dLbls>
-            <c:numFmt formatCode="0.00" sourceLinked="0"/>
-            <c:txPr>
-              <a:bodyPr/>
-              <a:lstStyle/>
-              <a:p>
-                <a:pPr>
-                  <a:defRPr b="0" i="0" strike="noStrike" sz="750" u="none">
-                    <a:solidFill>
-                      <a:srgbClr val="1E293B"/>
-                    </a:solidFill>
-                    <a:latin typeface="Calibri"/>
-                  </a:defRPr>
-                </a:pPr>
-              </a:p>
-            </c:txPr>
-            <c:showLegendKey val="0"/>
-            <c:showVal val="1"/>
-            <c:showCatName val="0"/>
-            <c:showSerName val="0"/>
-            <c:showPercent val="0"/>
-            <c:showBubbleSize val="0"/>
-            <c:showLeaderLines val="0"/>
-          </c:dLbls>
-          <c:cat>
-            <c:multiLvlStrRef>
-              <c:f>Sheet1!$A$2:$A$4</c:f>
-              <c:multiLvlStrCache>
-                <c:ptCount val="3"/>
-                <c:lvl>
-                  <c:pt idx="0">
-                    <c:v>Технічний</c:v>
-                  </c:pt>
-                  <c:pt idx="1">
-                    <c:v>Юридичний</c:v>
-                  </c:pt>
-                  <c:pt idx="2">
-                    <c:v>Медичний</c:v>
-                  </c:pt>
-                </c:lvl>
-              </c:multiLvlStrCache>
-            </c:multiLvlStrRef>
-          </c:cat>
-          <c:val>
-            <c:numRef>
-              <c:f>Sheet1!$C$2:$C$4</c:f>
-              <c:numCache>
-                <c:formatCode>General</c:formatCode>
-                <c:ptCount val="3"/>
-                <c:pt idx="0">
-                  <c:v>0.825</c:v>
-                </c:pt>
-                <c:pt idx="1">
-                  <c:v>0.914</c:v>
-                </c:pt>
-                <c:pt idx="2">
-                  <c:v>0.802</c:v>
-                </c:pt>
-              </c:numCache>
-            </c:numRef>
-          </c:val>
-        </c:ser>
-        <c:ser>
-          <c:idx val="2"/>
-          <c:order val="2"/>
-          <c:tx>
-            <c:strRef>
-              <c:f>Sheet1!$D$1</c:f>
-              <c:strCache>
-                <c:ptCount val="1"/>
-                <c:pt idx="0">
-                  <c:v>E5-base</c:v>
-                </c:pt>
-              </c:strCache>
-            </c:strRef>
-          </c:tx>
-          <c:spPr>
-            <a:solidFill>
-              <a:srgbClr val="0891B2"/>
-            </a:solidFill>
-            <a:effectLst/>
-          </c:spPr>
-          <c:invertIfNegative val="0"/>
-          <c:dLbls>
-            <c:numFmt formatCode="0.00" sourceLinked="0"/>
-            <c:txPr>
-              <a:bodyPr/>
-              <a:lstStyle/>
-              <a:p>
-                <a:pPr>
-                  <a:defRPr b="0" i="0" strike="noStrike" sz="750" u="none">
-                    <a:solidFill>
-                      <a:srgbClr val="1E293B"/>
-                    </a:solidFill>
-                    <a:latin typeface="Calibri"/>
-                  </a:defRPr>
-                </a:pPr>
-              </a:p>
-            </c:txPr>
-            <c:showLegendKey val="0"/>
-            <c:showVal val="1"/>
-            <c:showCatName val="0"/>
-            <c:showSerName val="0"/>
-            <c:showPercent val="0"/>
-            <c:showBubbleSize val="0"/>
-            <c:showLeaderLines val="0"/>
-          </c:dLbls>
-          <c:cat>
-            <c:multiLvlStrRef>
-              <c:f>Sheet1!$A$2:$A$4</c:f>
-              <c:multiLvlStrCache>
-                <c:ptCount val="3"/>
-                <c:lvl>
-                  <c:pt idx="0">
-                    <c:v>Технічний</c:v>
-                  </c:pt>
-                  <c:pt idx="1">
-                    <c:v>Юридичний</c:v>
-                  </c:pt>
-                  <c:pt idx="2">
-                    <c:v>Медичний</c:v>
-                  </c:pt>
-                </c:lvl>
-              </c:multiLvlStrCache>
-            </c:multiLvlStrRef>
-          </c:cat>
-          <c:val>
-            <c:numRef>
-              <c:f>Sheet1!$D$2:$D$4</c:f>
-              <c:numCache>
-                <c:formatCode>General</c:formatCode>
-                <c:ptCount val="3"/>
-                <c:pt idx="0">
-                  <c:v>0.875</c:v>
-                </c:pt>
-                <c:pt idx="1">
-                  <c:v>0.844</c:v>
-                </c:pt>
-                <c:pt idx="2">
-                  <c:v>0.901</c:v>
-                </c:pt>
-              </c:numCache>
-            </c:numRef>
-          </c:val>
-        </c:ser>
-        <c:ser>
-          <c:idx val="3"/>
-          <c:order val="3"/>
-          <c:tx>
-            <c:strRef>
-              <c:f>Sheet1!$E$1</c:f>
-              <c:strCache>
-                <c:ptCount val="1"/>
-                <c:pt idx="0">
-                  <c:v>BM25</c:v>
-                </c:pt>
-              </c:strCache>
-            </c:strRef>
-          </c:tx>
-          <c:spPr>
-            <a:solidFill>
-              <a:srgbClr val="64748B"/>
-            </a:solidFill>
-            <a:effectLst/>
-          </c:spPr>
-          <c:invertIfNegative val="0"/>
-          <c:dLbls>
-            <c:numFmt formatCode="0.00" sourceLinked="0"/>
-            <c:txPr>
-              <a:bodyPr/>
-              <a:lstStyle/>
-              <a:p>
-                <a:pPr>
-                  <a:defRPr b="0" i="0" strike="noStrike" sz="750" u="none">
-                    <a:solidFill>
-                      <a:srgbClr val="1E293B"/>
-                    </a:solidFill>
-                    <a:latin typeface="Calibri"/>
-                  </a:defRPr>
-                </a:pPr>
-              </a:p>
-            </c:txPr>
-            <c:showLegendKey val="0"/>
-            <c:showVal val="1"/>
-            <c:showCatName val="0"/>
-            <c:showSerName val="0"/>
-            <c:showPercent val="0"/>
-            <c:showBubbleSize val="0"/>
-            <c:showLeaderLines val="0"/>
-          </c:dLbls>
-          <c:cat>
-            <c:multiLvlStrRef>
-              <c:f>Sheet1!$A$2:$A$4</c:f>
-              <c:multiLvlStrCache>
-                <c:ptCount val="3"/>
-                <c:lvl>
-                  <c:pt idx="0">
-                    <c:v>Технічний</c:v>
-                  </c:pt>
-                  <c:pt idx="1">
-                    <c:v>Юридичний</c:v>
-                  </c:pt>
-                  <c:pt idx="2">
-                    <c:v>Медичний</c:v>
-                  </c:pt>
-                </c:lvl>
-              </c:multiLvlStrCache>
-            </c:multiLvlStrRef>
-          </c:cat>
-          <c:val>
-            <c:numRef>
-              <c:f>Sheet1!$E$2:$E$4</c:f>
-              <c:numCache>
-                <c:formatCode>General</c:formatCode>
-                <c:ptCount val="3"/>
-                <c:pt idx="0">
-                  <c:v>0.795</c:v>
-                </c:pt>
-                <c:pt idx="1">
-                  <c:v>0.741</c:v>
-                </c:pt>
-                <c:pt idx="2">
-                  <c:v>0.817</c:v>
-                </c:pt>
-              </c:numCache>
-            </c:numRef>
-          </c:val>
-        </c:ser>
-        <c:ser>
-          <c:idx val="4"/>
-          <c:order val="4"/>
-          <c:tx>
-            <c:strRef>
-              <c:f>Sheet1!$F$1</c:f>
-              <c:strCache>
-                <c:ptCount val="1"/>
-                <c:pt idx="0">
-                  <c:v>nomic</c:v>
-                </c:pt>
-              </c:strCache>
-            </c:strRef>
-          </c:tx>
-          <c:spPr>
-            <a:solidFill>
-              <a:srgbClr val="7C3AED"/>
-            </a:solidFill>
-            <a:effectLst/>
-          </c:spPr>
-          <c:invertIfNegative val="0"/>
-          <c:dLbls>
-            <c:numFmt formatCode="0.00" sourceLinked="0"/>
-            <c:txPr>
-              <a:bodyPr/>
-              <a:lstStyle/>
-              <a:p>
-                <a:pPr>
-                  <a:defRPr b="0" i="0" strike="noStrike" sz="750" u="none">
-                    <a:solidFill>
-                      <a:srgbClr val="1E293B"/>
-                    </a:solidFill>
-                    <a:latin typeface="Calibri"/>
-                  </a:defRPr>
-                </a:pPr>
-              </a:p>
-            </c:txPr>
-            <c:showLegendKey val="0"/>
-            <c:showVal val="1"/>
-            <c:showCatName val="0"/>
-            <c:showSerName val="0"/>
-            <c:showPercent val="0"/>
-            <c:showBubbleSize val="0"/>
-            <c:showLeaderLines val="0"/>
-          </c:dLbls>
-          <c:cat>
-            <c:multiLvlStrRef>
-              <c:f>Sheet1!$A$2:$A$4</c:f>
-              <c:multiLvlStrCache>
-                <c:ptCount val="3"/>
-                <c:lvl>
-                  <c:pt idx="0">
-                    <c:v>Технічний</c:v>
-                  </c:pt>
-                  <c:pt idx="1">
-                    <c:v>Юридичний</c:v>
-                  </c:pt>
-                  <c:pt idx="2">
-                    <c:v>Медичний</c:v>
-                  </c:pt>
-                </c:lvl>
-              </c:multiLvlStrCache>
-            </c:multiLvlStrRef>
-          </c:cat>
-          <c:val>
-            <c:numRef>
-              <c:f>Sheet1!$F$2:$F$4</c:f>
-              <c:numCache>
-                <c:formatCode>General</c:formatCode>
-                <c:ptCount val="3"/>
-                <c:pt idx="0">
-                  <c:v>0.611</c:v>
-                </c:pt>
-                <c:pt idx="1">
-                  <c:v>0.503</c:v>
-                </c:pt>
-                <c:pt idx="2">
-                  <c:v>0.568</c:v>
-                </c:pt>
-              </c:numCache>
-            </c:numRef>
-          </c:val>
-        </c:ser>
-        <c:dLbls>
-          <c:numFmt formatCode="0.00" sourceLinked="0"/>
-          <c:txPr>
-            <a:bodyPr/>
-            <a:lstStyle/>
-            <a:p>
-              <a:pPr>
-                <a:defRPr b="0" i="0" strike="noStrike" sz="750" u="none">
-                  <a:solidFill>
-                    <a:srgbClr val="1E293B"/>
-                  </a:solidFill>
-                  <a:latin typeface="Calibri"/>
-                </a:defRPr>
-              </a:pPr>
-            </a:p>
-          </c:txPr>
-          <c:showLegendKey val="0"/>
-          <c:showVal val="1"/>
-          <c:showCatName val="0"/>
-          <c:showSerName val="0"/>
-          <c:showPercent val="0"/>
-          <c:showBubbleSize val="0"/>
-          <c:showLeaderLines val="0"/>
-        </c:dLbls>
-        <c:gapWidth val="150"/>
-        <c:overlap val="0"/>
-        <c:axId val="2094734554"/>
-        <c:axId val="2094734552"/>
-        <c:axId val="2094734556"/>
-      </c:barChart>
-      <c:catAx>
-        <c:axId val="2094734554"/>
-        <c:scaling>
-          <c:orientation val="minMax"/>
-        </c:scaling>
-        <c:delete val="0"/>
-        <c:axPos val="b"/>
-        <c:numFmt formatCode="General" sourceLinked="1"/>
-        <c:majorTickMark val="out"/>
-        <c:minorTickMark val="none"/>
-        <c:tickLblPos val="low"/>
-        <c:spPr>
-          <a:ln w="12700" cap="flat">
-            <a:solidFill>
-              <a:srgbClr val="888888"/>
-            </a:solidFill>
-            <a:prstDash val="solid"/>
-            <a:round/>
-          </a:ln>
-        </c:spPr>
-        <c:txPr>
-          <a:bodyPr/>
-          <a:lstStyle/>
-          <a:p>
-            <a:pPr>
-              <a:defRPr sz="1000" b="0" i="0" u="none" strike="noStrike">
-                <a:solidFill>
-                  <a:srgbClr val="1E293B"/>
-                </a:solidFill>
-                <a:latin typeface="Calibri"/>
-              </a:defRPr>
-            </a:pPr>
-            <a:endParaRPr lang="en-US"/>
-          </a:p>
-        </c:txPr>
-        <c:crossAx val="2094734552"/>
-        <c:crosses val="autoZero"/>
-        <c:auto val="1"/>
-        <c:lblAlgn val="ctr"/>
-        <c:noMultiLvlLbl val="1"/>
-      </c:catAx>
-      <c:valAx>
-        <c:axId val="2094734552"/>
-        <c:scaling>
-          <c:orientation val="minMax"/>
-          <c:max val="1"/>
-          <c:min val="0"/>
-        </c:scaling>
-        <c:delete val="0"/>
-        <c:axPos val="l"/>
-        <c:majorGridlines>
-          <c:spPr>
-            <a:ln w="6350" cap="flat">
-              <a:solidFill>
-                <a:srgbClr val="E2E8F0"/>
-              </a:solidFill>
-              <a:prstDash val="solid"/>
-              <a:round/>
-            </a:ln>
-          </c:spPr>
-        </c:majorGridlines>
-        <c:numFmt formatCode="General" sourceLinked="0"/>
-        <c:majorTickMark val="out"/>
-        <c:minorTickMark val="none"/>
-        <c:tickLblPos val="nextTo"/>
-        <c:spPr>
-          <a:ln w="12700" cap="flat">
-            <a:solidFill>
-              <a:srgbClr val="888888"/>
-            </a:solidFill>
-            <a:prstDash val="solid"/>
-            <a:round/>
-          </a:ln>
-        </c:spPr>
-        <c:txPr>
-          <a:bodyPr/>
-          <a:lstStyle/>
-          <a:p>
-            <a:pPr>
-              <a:defRPr sz="900" b="0" i="0" u="none" strike="noStrike">
-                <a:solidFill>
-                  <a:srgbClr val="475569"/>
-                </a:solidFill>
-                <a:latin typeface="Calibri"/>
-              </a:defRPr>
-            </a:pPr>
-            <a:endParaRPr lang="en-US"/>
-          </a:p>
-        </c:txPr>
-        <c:crossAx val="2094734554"/>
-        <c:crosses val="autoZero"/>
-        <c:crossBetween val="between"/>
-      </c:valAx>
-      <c:spPr>
-        <a:solidFill>
-          <a:srgbClr val="F8FAFC"/>
-        </a:solidFill>
-        <a:ln>
-          <a:noFill/>
-        </a:ln>
-        <a:effectLst/>
-      </c:spPr>
-    </c:plotArea>
-    <c:legend>
-      <c:legendPos val="b"/>
-      <c:overlay val="0"/>
-      <c:txPr>
-        <a:bodyPr/>
-        <a:lstStyle/>
-        <a:p>
-          <a:pPr>
-            <a:defRPr sz="900">
-              <a:solidFill>
-                <a:srgbClr val="1E293B"/>
-              </a:solidFill>
-              <a:latin typeface="Calibri"/>
-              <a:cs typeface="Calibri"/>
-            </a:defRPr>
-          </a:pPr>
-          <a:endParaRPr lang="en-US"/>
-        </a:p>
-      </c:txPr>
-    </c:legend>
-    <c:plotVisOnly val="1"/>
-    <c:dispBlanksAs val="span"/>
-  </c:chart>
-  <c:spPr>
-    <a:solidFill>
-      <a:srgbClr val="F8FAFC"/>
-    </a:solidFill>
-    <a:ln>
-      <a:noFill/>
-    </a:ln>
-    <a:effectLst/>
-  </c:spPr>
-  <c:externalData r:id="rId1">
-    <c:autoUpdate val="0"/>
-  </c:externalData>
-</c:chartSpace>
-</file>
-
-<file path=ppt/charts/chart11.xml><?xml version="1.0" encoding="utf-8"?>
-<c:chartSpace xmlns:c="http://schemas.openxmlformats.org/drawingml/2006/chart" xmlns:a="http://schemas.openxmlformats.org/drawingml/2006/main" xmlns:r="http://schemas.openxmlformats.org/officeDocument/2006/relationships">
-  <c:date1904 val="0"/>
-  <c:roundedCorners val="1"/>
-  <c:chart>
-    <c:autoTitleDeleted val="1"/>
-    <c:plotArea>
-      <c:layout/>
       <c:scatterChart>
         <c:scatterStyle val="lineMarker"/>
         <c:varyColors val="0"/>
@@ -2681,258 +2083,6 @@
     <c:autoTitleDeleted val="1"/>
     <c:plotArea>
       <c:layout/>
-      <c:doughnutChart>
-        <c:varyColors val="1"/>
-        <c:ser>
-          <c:idx val="0"/>
-          <c:order val="0"/>
-          <c:tx>
-            <c:strRef>
-              <c:f>Sheet1!$B$1</c:f>
-              <c:strCache>
-                <c:ptCount val="1"/>
-                <c:pt idx="0">
-                  <c:v>Чанки</c:v>
-                </c:pt>
-              </c:strCache>
-            </c:strRef>
-          </c:tx>
-          <c:spPr>
-            <a:solidFill>
-              <a:schemeClr val="accent1"/>
-            </a:solidFill>
-            <a:ln w="9525" cap="flat">
-              <a:solidFill>
-                <a:srgbClr val="F9F9F9"/>
-              </a:solidFill>
-              <a:prstDash val="solid"/>
-              <a:round/>
-            </a:ln>
-            <a:effectLst/>
-          </c:spPr>
-          <c:dPt>
-            <c:idx val="0"/>
-            <c:bubble3D val="0"/>
-            <c:spPr>
-              <a:solidFill>
-                <a:srgbClr val="1E40AF"/>
-              </a:solidFill>
-              <a:effectLst/>
-            </c:spPr>
-          </c:dPt>
-          <c:dPt>
-            <c:idx val="1"/>
-            <c:bubble3D val="0"/>
-            <c:spPr>
-              <a:solidFill>
-                <a:srgbClr val="7C3AED"/>
-              </a:solidFill>
-              <a:effectLst/>
-            </c:spPr>
-          </c:dPt>
-          <c:dPt>
-            <c:idx val="2"/>
-            <c:bubble3D val="0"/>
-            <c:spPr>
-              <a:solidFill>
-                <a:srgbClr val="E11D48"/>
-              </a:solidFill>
-              <a:effectLst/>
-            </c:spPr>
-          </c:dPt>
-          <c:dLbls>
-            <c:dLbl>
-              <c:idx val="0"/>
-              <c:numFmt formatCode="0%" sourceLinked="0"/>
-              <c:spPr/>
-              <c:txPr>
-                <a:bodyPr/>
-                <a:lstStyle/>
-                <a:p>
-                  <a:pPr>
-                    <a:defRPr sz="1000" b="1" i="0" u="none" strike="noStrike">
-                      <a:solidFill>
-                        <a:srgbClr val="1E293B"/>
-                      </a:solidFill>
-                      <a:latin typeface="Calibri"/>
-                    </a:defRPr>
-                  </a:pPr>
-                </a:p>
-              </c:txPr>
-              <c:showLegendKey val="0"/>
-              <c:showVal val="0"/>
-              <c:showCatName val="0"/>
-              <c:showSerName val="0"/>
-              <c:showPercent val="1"/>
-              <c:showBubbleSize val="0"/>
-            </c:dLbl>
-            <c:dLbl>
-              <c:idx val="1"/>
-              <c:numFmt formatCode="0%" sourceLinked="0"/>
-              <c:spPr/>
-              <c:txPr>
-                <a:bodyPr/>
-                <a:lstStyle/>
-                <a:p>
-                  <a:pPr>
-                    <a:defRPr sz="1000" b="1" i="0" u="none" strike="noStrike">
-                      <a:solidFill>
-                        <a:srgbClr val="1E293B"/>
-                      </a:solidFill>
-                      <a:latin typeface="Calibri"/>
-                    </a:defRPr>
-                  </a:pPr>
-                </a:p>
-              </c:txPr>
-              <c:showLegendKey val="0"/>
-              <c:showVal val="0"/>
-              <c:showCatName val="0"/>
-              <c:showSerName val="0"/>
-              <c:showPercent val="1"/>
-              <c:showBubbleSize val="0"/>
-            </c:dLbl>
-            <c:dLbl>
-              <c:idx val="2"/>
-              <c:numFmt formatCode="0%" sourceLinked="0"/>
-              <c:spPr/>
-              <c:txPr>
-                <a:bodyPr/>
-                <a:lstStyle/>
-                <a:p>
-                  <a:pPr>
-                    <a:defRPr sz="1000" b="1" i="0" u="none" strike="noStrike">
-                      <a:solidFill>
-                        <a:srgbClr val="1E293B"/>
-                      </a:solidFill>
-                      <a:latin typeface="Calibri"/>
-                    </a:defRPr>
-                  </a:pPr>
-                </a:p>
-              </c:txPr>
-              <c:showLegendKey val="0"/>
-              <c:showVal val="0"/>
-              <c:showCatName val="0"/>
-              <c:showSerName val="0"/>
-              <c:showPercent val="1"/>
-              <c:showBubbleSize val="0"/>
-            </c:dLbl>
-            <c:numFmt formatCode="0%" sourceLinked="0"/>
-            <c:txPr>
-              <a:bodyPr/>
-              <a:lstStyle/>
-              <a:p>
-                <a:pPr>
-                  <a:defRPr sz="1800" b="1" i="0" u="none" strike="noStrike">
-                    <a:solidFill>
-                      <a:srgbClr val="000000"/>
-                    </a:solidFill>
-                    <a:latin typeface="Arial"/>
-                  </a:defRPr>
-                </a:pPr>
-              </a:p>
-            </c:txPr>
-            <c:showLegendKey val="0"/>
-            <c:showVal val="0"/>
-            <c:showCatName val="1"/>
-            <c:showSerName val="0"/>
-            <c:showPercent val="1"/>
-            <c:showBubbleSize val="0"/>
-            <c:showLeaderLines val="0"/>
-          </c:dLbls>
-          <c:cat>
-            <c:strRef>
-              <c:f>Sheet1!$A$2:$A$4</c:f>
-              <c:strCache>
-                <c:ptCount val="3"/>
-                <c:pt idx="0">
-                  <c:v>Технічний (178)</c:v>
-                </c:pt>
-                <c:pt idx="1">
-                  <c:v>Юридичний (1046)</c:v>
-                </c:pt>
-                <c:pt idx="2">
-                  <c:v>Медичний (267)</c:v>
-                </c:pt>
-              </c:strCache>
-            </c:strRef>
-          </c:cat>
-          <c:val>
-            <c:numRef>
-              <c:f>Sheet1!$B$2:$B$4</c:f>
-              <c:numCache>
-                <c:ptCount val="3"/>
-                <c:pt idx="0">
-                  <c:v>178</c:v>
-                </c:pt>
-                <c:pt idx="1">
-                  <c:v>1046</c:v>
-                </c:pt>
-                <c:pt idx="2">
-                  <c:v>267</c:v>
-                </c:pt>
-              </c:numCache>
-            </c:numRef>
-          </c:val>
-        </c:ser>
-        <c:firstSliceAng val="0"/>
-        <c:holeSize val="60"/>
-      </c:doughnutChart>
-      <c:spPr>
-        <a:solidFill>
-          <a:srgbClr val="F8FAFC"/>
-        </a:solidFill>
-        <a:ln>
-          <a:noFill/>
-        </a:ln>
-        <a:effectLst/>
-      </c:spPr>
-    </c:plotArea>
-    <c:legend>
-      <c:legendPos val="b"/>
-      <c:overlay val="0"/>
-      <c:txPr>
-        <a:bodyPr/>
-        <a:lstStyle/>
-        <a:p>
-          <a:pPr>
-            <a:defRPr sz="900">
-              <a:solidFill>
-                <a:srgbClr val="475569"/>
-              </a:solidFill>
-              <a:latin typeface="Calibri"/>
-              <a:cs typeface="Calibri"/>
-            </a:defRPr>
-          </a:pPr>
-          <a:endParaRPr lang="en-US"/>
-        </a:p>
-      </c:txPr>
-    </c:legend>
-    <c:plotVisOnly val="1"/>
-    <c:dispBlanksAs val="span"/>
-  </c:chart>
-  <c:spPr>
-    <a:solidFill>
-      <a:srgbClr val="F8FAFC"/>
-    </a:solidFill>
-    <a:ln>
-      <a:noFill/>
-    </a:ln>
-    <a:effectLst/>
-  </c:spPr>
-  <c:externalData r:id="rId1">
-    <c:autoUpdate val="0"/>
-  </c:externalData>
-</c:chartSpace>
-</file>
-
-<file path=ppt/charts/chart5.xml><?xml version="1.0" encoding="utf-8"?>
-<c:chartSpace xmlns:c="http://schemas.openxmlformats.org/drawingml/2006/chart" xmlns:a="http://schemas.openxmlformats.org/drawingml/2006/main" xmlns:r="http://schemas.openxmlformats.org/officeDocument/2006/relationships">
-  <c:date1904 val="0"/>
-  <c:roundedCorners val="1"/>
-  <c:chart>
-    <c:autoTitleDeleted val="1"/>
-    <c:plotArea>
-      <c:layout/>
       <c:barChart>
         <c:barDir val="col"/>
         <c:grouping val="clustered"/>
@@ -3523,7 +2673,7 @@
 </c:chartSpace>
 </file>
 
-<file path=ppt/charts/chart6.xml><?xml version="1.0" encoding="utf-8"?>
+<file path=ppt/charts/chart5.xml><?xml version="1.0" encoding="utf-8"?>
 <c:chartSpace xmlns:c="http://schemas.openxmlformats.org/drawingml/2006/chart" xmlns:a="http://schemas.openxmlformats.org/drawingml/2006/main" xmlns:r="http://schemas.openxmlformats.org/officeDocument/2006/relationships">
   <c:date1904 val="0"/>
   <c:roundedCorners val="1"/>
@@ -4121,7 +3271,7 @@
 </c:chartSpace>
 </file>
 
-<file path=ppt/charts/chart7.xml><?xml version="1.0" encoding="utf-8"?>
+<file path=ppt/charts/chart6.xml><?xml version="1.0" encoding="utf-8"?>
 <c:chartSpace xmlns:c="http://schemas.openxmlformats.org/drawingml/2006/chart" xmlns:a="http://schemas.openxmlformats.org/drawingml/2006/main" xmlns:r="http://schemas.openxmlformats.org/officeDocument/2006/relationships">
   <c:date1904 val="0"/>
   <c:roundedCorners val="1"/>
@@ -4699,7 +3849,7 @@
 </c:chartSpace>
 </file>
 
-<file path=ppt/charts/chart8.xml><?xml version="1.0" encoding="utf-8"?>
+<file path=ppt/charts/chart7.xml><?xml version="1.0" encoding="utf-8"?>
 <c:chartSpace xmlns:c="http://schemas.openxmlformats.org/drawingml/2006/chart" xmlns:a="http://schemas.openxmlformats.org/drawingml/2006/main" xmlns:r="http://schemas.openxmlformats.org/officeDocument/2006/relationships">
   <c:date1904 val="0"/>
   <c:roundedCorners val="1"/>
@@ -5277,7 +4427,7 @@
 </c:chartSpace>
 </file>
 
-<file path=ppt/charts/chart9.xml><?xml version="1.0" encoding="utf-8"?>
+<file path=ppt/charts/chart8.xml><?xml version="1.0" encoding="utf-8"?>
 <c:chartSpace xmlns:c="http://schemas.openxmlformats.org/drawingml/2006/chart" xmlns:a="http://schemas.openxmlformats.org/drawingml/2006/main" xmlns:r="http://schemas.openxmlformats.org/officeDocument/2006/relationships">
   <c:date1904 val="0"/>
   <c:roundedCorners val="1"/>
@@ -5855,6 +5005,604 @@
 </c:chartSpace>
 </file>
 
+<file path=ppt/charts/chart9.xml><?xml version="1.0" encoding="utf-8"?>
+<c:chartSpace xmlns:c="http://schemas.openxmlformats.org/drawingml/2006/chart" xmlns:a="http://schemas.openxmlformats.org/drawingml/2006/main" xmlns:r="http://schemas.openxmlformats.org/officeDocument/2006/relationships">
+  <c:date1904 val="0"/>
+  <c:roundedCorners val="1"/>
+  <c:chart>
+    <c:autoTitleDeleted val="1"/>
+    <c:plotArea>
+      <c:layout/>
+      <c:barChart>
+        <c:barDir val="col"/>
+        <c:grouping val="clustered"/>
+        <c:varyColors val="0"/>
+        <c:ser>
+          <c:idx val="0"/>
+          <c:order val="0"/>
+          <c:tx>
+            <c:strRef>
+              <c:f>Sheet1!$B$1</c:f>
+              <c:strCache>
+                <c:ptCount val="1"/>
+                <c:pt idx="0">
+                  <c:v>BGE-M3</c:v>
+                </c:pt>
+              </c:strCache>
+            </c:strRef>
+          </c:tx>
+          <c:spPr>
+            <a:solidFill>
+              <a:srgbClr val="F59E0B"/>
+            </a:solidFill>
+            <a:effectLst/>
+          </c:spPr>
+          <c:invertIfNegative val="0"/>
+          <c:dLbls>
+            <c:numFmt formatCode="0.00" sourceLinked="0"/>
+            <c:txPr>
+              <a:bodyPr/>
+              <a:lstStyle/>
+              <a:p>
+                <a:pPr>
+                  <a:defRPr b="0" i="0" strike="noStrike" sz="750" u="none">
+                    <a:solidFill>
+                      <a:srgbClr val="1E293B"/>
+                    </a:solidFill>
+                    <a:latin typeface="Calibri"/>
+                  </a:defRPr>
+                </a:pPr>
+              </a:p>
+            </c:txPr>
+            <c:showLegendKey val="0"/>
+            <c:showVal val="1"/>
+            <c:showCatName val="0"/>
+            <c:showSerName val="0"/>
+            <c:showPercent val="0"/>
+            <c:showBubbleSize val="0"/>
+            <c:showLeaderLines val="0"/>
+          </c:dLbls>
+          <c:cat>
+            <c:multiLvlStrRef>
+              <c:f>Sheet1!$A$2:$A$4</c:f>
+              <c:multiLvlStrCache>
+                <c:ptCount val="3"/>
+                <c:lvl>
+                  <c:pt idx="0">
+                    <c:v>Технічний</c:v>
+                  </c:pt>
+                  <c:pt idx="1">
+                    <c:v>Юридичний</c:v>
+                  </c:pt>
+                  <c:pt idx="2">
+                    <c:v>Медичний</c:v>
+                  </c:pt>
+                </c:lvl>
+              </c:multiLvlStrCache>
+            </c:multiLvlStrRef>
+          </c:cat>
+          <c:val>
+            <c:numRef>
+              <c:f>Sheet1!$B$2:$B$4</c:f>
+              <c:numCache>
+                <c:formatCode>General</c:formatCode>
+                <c:ptCount val="3"/>
+                <c:pt idx="0">
+                  <c:v>0.904</c:v>
+                </c:pt>
+                <c:pt idx="1">
+                  <c:v>0.872</c:v>
+                </c:pt>
+                <c:pt idx="2">
+                  <c:v>0.912</c:v>
+                </c:pt>
+              </c:numCache>
+            </c:numRef>
+          </c:val>
+        </c:ser>
+        <c:ser>
+          <c:idx val="1"/>
+          <c:order val="1"/>
+          <c:tx>
+            <c:strRef>
+              <c:f>Sheet1!$C$1</c:f>
+              <c:strCache>
+                <c:ptCount val="1"/>
+                <c:pt idx="0">
+                  <c:v>Qwen3</c:v>
+                </c:pt>
+              </c:strCache>
+            </c:strRef>
+          </c:tx>
+          <c:spPr>
+            <a:solidFill>
+              <a:srgbClr val="1E40AF"/>
+            </a:solidFill>
+            <a:effectLst/>
+          </c:spPr>
+          <c:invertIfNegative val="0"/>
+          <c:dLbls>
+            <c:numFmt formatCode="0.00" sourceLinked="0"/>
+            <c:txPr>
+              <a:bodyPr/>
+              <a:lstStyle/>
+              <a:p>
+                <a:pPr>
+                  <a:defRPr b="0" i="0" strike="noStrike" sz="750" u="none">
+                    <a:solidFill>
+                      <a:srgbClr val="1E293B"/>
+                    </a:solidFill>
+                    <a:latin typeface="Calibri"/>
+                  </a:defRPr>
+                </a:pPr>
+              </a:p>
+            </c:txPr>
+            <c:showLegendKey val="0"/>
+            <c:showVal val="1"/>
+            <c:showCatName val="0"/>
+            <c:showSerName val="0"/>
+            <c:showPercent val="0"/>
+            <c:showBubbleSize val="0"/>
+            <c:showLeaderLines val="0"/>
+          </c:dLbls>
+          <c:cat>
+            <c:multiLvlStrRef>
+              <c:f>Sheet1!$A$2:$A$4</c:f>
+              <c:multiLvlStrCache>
+                <c:ptCount val="3"/>
+                <c:lvl>
+                  <c:pt idx="0">
+                    <c:v>Технічний</c:v>
+                  </c:pt>
+                  <c:pt idx="1">
+                    <c:v>Юридичний</c:v>
+                  </c:pt>
+                  <c:pt idx="2">
+                    <c:v>Медичний</c:v>
+                  </c:pt>
+                </c:lvl>
+              </c:multiLvlStrCache>
+            </c:multiLvlStrRef>
+          </c:cat>
+          <c:val>
+            <c:numRef>
+              <c:f>Sheet1!$C$2:$C$4</c:f>
+              <c:numCache>
+                <c:formatCode>General</c:formatCode>
+                <c:ptCount val="3"/>
+                <c:pt idx="0">
+                  <c:v>0.825</c:v>
+                </c:pt>
+                <c:pt idx="1">
+                  <c:v>0.914</c:v>
+                </c:pt>
+                <c:pt idx="2">
+                  <c:v>0.802</c:v>
+                </c:pt>
+              </c:numCache>
+            </c:numRef>
+          </c:val>
+        </c:ser>
+        <c:ser>
+          <c:idx val="2"/>
+          <c:order val="2"/>
+          <c:tx>
+            <c:strRef>
+              <c:f>Sheet1!$D$1</c:f>
+              <c:strCache>
+                <c:ptCount val="1"/>
+                <c:pt idx="0">
+                  <c:v>E5-base</c:v>
+                </c:pt>
+              </c:strCache>
+            </c:strRef>
+          </c:tx>
+          <c:spPr>
+            <a:solidFill>
+              <a:srgbClr val="0891B2"/>
+            </a:solidFill>
+            <a:effectLst/>
+          </c:spPr>
+          <c:invertIfNegative val="0"/>
+          <c:dLbls>
+            <c:numFmt formatCode="0.00" sourceLinked="0"/>
+            <c:txPr>
+              <a:bodyPr/>
+              <a:lstStyle/>
+              <a:p>
+                <a:pPr>
+                  <a:defRPr b="0" i="0" strike="noStrike" sz="750" u="none">
+                    <a:solidFill>
+                      <a:srgbClr val="1E293B"/>
+                    </a:solidFill>
+                    <a:latin typeface="Calibri"/>
+                  </a:defRPr>
+                </a:pPr>
+              </a:p>
+            </c:txPr>
+            <c:showLegendKey val="0"/>
+            <c:showVal val="1"/>
+            <c:showCatName val="0"/>
+            <c:showSerName val="0"/>
+            <c:showPercent val="0"/>
+            <c:showBubbleSize val="0"/>
+            <c:showLeaderLines val="0"/>
+          </c:dLbls>
+          <c:cat>
+            <c:multiLvlStrRef>
+              <c:f>Sheet1!$A$2:$A$4</c:f>
+              <c:multiLvlStrCache>
+                <c:ptCount val="3"/>
+                <c:lvl>
+                  <c:pt idx="0">
+                    <c:v>Технічний</c:v>
+                  </c:pt>
+                  <c:pt idx="1">
+                    <c:v>Юридичний</c:v>
+                  </c:pt>
+                  <c:pt idx="2">
+                    <c:v>Медичний</c:v>
+                  </c:pt>
+                </c:lvl>
+              </c:multiLvlStrCache>
+            </c:multiLvlStrRef>
+          </c:cat>
+          <c:val>
+            <c:numRef>
+              <c:f>Sheet1!$D$2:$D$4</c:f>
+              <c:numCache>
+                <c:formatCode>General</c:formatCode>
+                <c:ptCount val="3"/>
+                <c:pt idx="0">
+                  <c:v>0.875</c:v>
+                </c:pt>
+                <c:pt idx="1">
+                  <c:v>0.844</c:v>
+                </c:pt>
+                <c:pt idx="2">
+                  <c:v>0.901</c:v>
+                </c:pt>
+              </c:numCache>
+            </c:numRef>
+          </c:val>
+        </c:ser>
+        <c:ser>
+          <c:idx val="3"/>
+          <c:order val="3"/>
+          <c:tx>
+            <c:strRef>
+              <c:f>Sheet1!$E$1</c:f>
+              <c:strCache>
+                <c:ptCount val="1"/>
+                <c:pt idx="0">
+                  <c:v>BM25</c:v>
+                </c:pt>
+              </c:strCache>
+            </c:strRef>
+          </c:tx>
+          <c:spPr>
+            <a:solidFill>
+              <a:srgbClr val="64748B"/>
+            </a:solidFill>
+            <a:effectLst/>
+          </c:spPr>
+          <c:invertIfNegative val="0"/>
+          <c:dLbls>
+            <c:numFmt formatCode="0.00" sourceLinked="0"/>
+            <c:txPr>
+              <a:bodyPr/>
+              <a:lstStyle/>
+              <a:p>
+                <a:pPr>
+                  <a:defRPr b="0" i="0" strike="noStrike" sz="750" u="none">
+                    <a:solidFill>
+                      <a:srgbClr val="1E293B"/>
+                    </a:solidFill>
+                    <a:latin typeface="Calibri"/>
+                  </a:defRPr>
+                </a:pPr>
+              </a:p>
+            </c:txPr>
+            <c:showLegendKey val="0"/>
+            <c:showVal val="1"/>
+            <c:showCatName val="0"/>
+            <c:showSerName val="0"/>
+            <c:showPercent val="0"/>
+            <c:showBubbleSize val="0"/>
+            <c:showLeaderLines val="0"/>
+          </c:dLbls>
+          <c:cat>
+            <c:multiLvlStrRef>
+              <c:f>Sheet1!$A$2:$A$4</c:f>
+              <c:multiLvlStrCache>
+                <c:ptCount val="3"/>
+                <c:lvl>
+                  <c:pt idx="0">
+                    <c:v>Технічний</c:v>
+                  </c:pt>
+                  <c:pt idx="1">
+                    <c:v>Юридичний</c:v>
+                  </c:pt>
+                  <c:pt idx="2">
+                    <c:v>Медичний</c:v>
+                  </c:pt>
+                </c:lvl>
+              </c:multiLvlStrCache>
+            </c:multiLvlStrRef>
+          </c:cat>
+          <c:val>
+            <c:numRef>
+              <c:f>Sheet1!$E$2:$E$4</c:f>
+              <c:numCache>
+                <c:formatCode>General</c:formatCode>
+                <c:ptCount val="3"/>
+                <c:pt idx="0">
+                  <c:v>0.795</c:v>
+                </c:pt>
+                <c:pt idx="1">
+                  <c:v>0.741</c:v>
+                </c:pt>
+                <c:pt idx="2">
+                  <c:v>0.817</c:v>
+                </c:pt>
+              </c:numCache>
+            </c:numRef>
+          </c:val>
+        </c:ser>
+        <c:ser>
+          <c:idx val="4"/>
+          <c:order val="4"/>
+          <c:tx>
+            <c:strRef>
+              <c:f>Sheet1!$F$1</c:f>
+              <c:strCache>
+                <c:ptCount val="1"/>
+                <c:pt idx="0">
+                  <c:v>nomic</c:v>
+                </c:pt>
+              </c:strCache>
+            </c:strRef>
+          </c:tx>
+          <c:spPr>
+            <a:solidFill>
+              <a:srgbClr val="7C3AED"/>
+            </a:solidFill>
+            <a:effectLst/>
+          </c:spPr>
+          <c:invertIfNegative val="0"/>
+          <c:dLbls>
+            <c:numFmt formatCode="0.00" sourceLinked="0"/>
+            <c:txPr>
+              <a:bodyPr/>
+              <a:lstStyle/>
+              <a:p>
+                <a:pPr>
+                  <a:defRPr b="0" i="0" strike="noStrike" sz="750" u="none">
+                    <a:solidFill>
+                      <a:srgbClr val="1E293B"/>
+                    </a:solidFill>
+                    <a:latin typeface="Calibri"/>
+                  </a:defRPr>
+                </a:pPr>
+              </a:p>
+            </c:txPr>
+            <c:showLegendKey val="0"/>
+            <c:showVal val="1"/>
+            <c:showCatName val="0"/>
+            <c:showSerName val="0"/>
+            <c:showPercent val="0"/>
+            <c:showBubbleSize val="0"/>
+            <c:showLeaderLines val="0"/>
+          </c:dLbls>
+          <c:cat>
+            <c:multiLvlStrRef>
+              <c:f>Sheet1!$A$2:$A$4</c:f>
+              <c:multiLvlStrCache>
+                <c:ptCount val="3"/>
+                <c:lvl>
+                  <c:pt idx="0">
+                    <c:v>Технічний</c:v>
+                  </c:pt>
+                  <c:pt idx="1">
+                    <c:v>Юридичний</c:v>
+                  </c:pt>
+                  <c:pt idx="2">
+                    <c:v>Медичний</c:v>
+                  </c:pt>
+                </c:lvl>
+              </c:multiLvlStrCache>
+            </c:multiLvlStrRef>
+          </c:cat>
+          <c:val>
+            <c:numRef>
+              <c:f>Sheet1!$F$2:$F$4</c:f>
+              <c:numCache>
+                <c:formatCode>General</c:formatCode>
+                <c:ptCount val="3"/>
+                <c:pt idx="0">
+                  <c:v>0.611</c:v>
+                </c:pt>
+                <c:pt idx="1">
+                  <c:v>0.503</c:v>
+                </c:pt>
+                <c:pt idx="2">
+                  <c:v>0.568</c:v>
+                </c:pt>
+              </c:numCache>
+            </c:numRef>
+          </c:val>
+        </c:ser>
+        <c:dLbls>
+          <c:numFmt formatCode="0.00" sourceLinked="0"/>
+          <c:txPr>
+            <a:bodyPr/>
+            <a:lstStyle/>
+            <a:p>
+              <a:pPr>
+                <a:defRPr b="0" i="0" strike="noStrike" sz="750" u="none">
+                  <a:solidFill>
+                    <a:srgbClr val="1E293B"/>
+                  </a:solidFill>
+                  <a:latin typeface="Calibri"/>
+                </a:defRPr>
+              </a:pPr>
+            </a:p>
+          </c:txPr>
+          <c:showLegendKey val="0"/>
+          <c:showVal val="1"/>
+          <c:showCatName val="0"/>
+          <c:showSerName val="0"/>
+          <c:showPercent val="0"/>
+          <c:showBubbleSize val="0"/>
+          <c:showLeaderLines val="0"/>
+        </c:dLbls>
+        <c:gapWidth val="150"/>
+        <c:overlap val="0"/>
+        <c:axId val="2094734554"/>
+        <c:axId val="2094734552"/>
+        <c:axId val="2094734556"/>
+      </c:barChart>
+      <c:catAx>
+        <c:axId val="2094734554"/>
+        <c:scaling>
+          <c:orientation val="minMax"/>
+        </c:scaling>
+        <c:delete val="0"/>
+        <c:axPos val="b"/>
+        <c:numFmt formatCode="General" sourceLinked="1"/>
+        <c:majorTickMark val="out"/>
+        <c:minorTickMark val="none"/>
+        <c:tickLblPos val="low"/>
+        <c:spPr>
+          <a:ln w="12700" cap="flat">
+            <a:solidFill>
+              <a:srgbClr val="888888"/>
+            </a:solidFill>
+            <a:prstDash val="solid"/>
+            <a:round/>
+          </a:ln>
+        </c:spPr>
+        <c:txPr>
+          <a:bodyPr/>
+          <a:lstStyle/>
+          <a:p>
+            <a:pPr>
+              <a:defRPr sz="1000" b="0" i="0" u="none" strike="noStrike">
+                <a:solidFill>
+                  <a:srgbClr val="1E293B"/>
+                </a:solidFill>
+                <a:latin typeface="Calibri"/>
+              </a:defRPr>
+            </a:pPr>
+            <a:endParaRPr lang="en-US"/>
+          </a:p>
+        </c:txPr>
+        <c:crossAx val="2094734552"/>
+        <c:crosses val="autoZero"/>
+        <c:auto val="1"/>
+        <c:lblAlgn val="ctr"/>
+        <c:noMultiLvlLbl val="1"/>
+      </c:catAx>
+      <c:valAx>
+        <c:axId val="2094734552"/>
+        <c:scaling>
+          <c:orientation val="minMax"/>
+          <c:max val="1"/>
+          <c:min val="0"/>
+        </c:scaling>
+        <c:delete val="0"/>
+        <c:axPos val="l"/>
+        <c:majorGridlines>
+          <c:spPr>
+            <a:ln w="6350" cap="flat">
+              <a:solidFill>
+                <a:srgbClr val="E2E8F0"/>
+              </a:solidFill>
+              <a:prstDash val="solid"/>
+              <a:round/>
+            </a:ln>
+          </c:spPr>
+        </c:majorGridlines>
+        <c:numFmt formatCode="General" sourceLinked="0"/>
+        <c:majorTickMark val="out"/>
+        <c:minorTickMark val="none"/>
+        <c:tickLblPos val="nextTo"/>
+        <c:spPr>
+          <a:ln w="12700" cap="flat">
+            <a:solidFill>
+              <a:srgbClr val="888888"/>
+            </a:solidFill>
+            <a:prstDash val="solid"/>
+            <a:round/>
+          </a:ln>
+        </c:spPr>
+        <c:txPr>
+          <a:bodyPr/>
+          <a:lstStyle/>
+          <a:p>
+            <a:pPr>
+              <a:defRPr sz="900" b="0" i="0" u="none" strike="noStrike">
+                <a:solidFill>
+                  <a:srgbClr val="475569"/>
+                </a:solidFill>
+                <a:latin typeface="Calibri"/>
+              </a:defRPr>
+            </a:pPr>
+            <a:endParaRPr lang="en-US"/>
+          </a:p>
+        </c:txPr>
+        <c:crossAx val="2094734554"/>
+        <c:crosses val="autoZero"/>
+        <c:crossBetween val="between"/>
+      </c:valAx>
+      <c:spPr>
+        <a:solidFill>
+          <a:srgbClr val="F8FAFC"/>
+        </a:solidFill>
+        <a:ln>
+          <a:noFill/>
+        </a:ln>
+        <a:effectLst/>
+      </c:spPr>
+    </c:plotArea>
+    <c:legend>
+      <c:legendPos val="b"/>
+      <c:overlay val="0"/>
+      <c:txPr>
+        <a:bodyPr/>
+        <a:lstStyle/>
+        <a:p>
+          <a:pPr>
+            <a:defRPr sz="900">
+              <a:solidFill>
+                <a:srgbClr val="1E293B"/>
+              </a:solidFill>
+              <a:latin typeface="Calibri"/>
+              <a:cs typeface="Calibri"/>
+            </a:defRPr>
+          </a:pPr>
+          <a:endParaRPr lang="en-US"/>
+        </a:p>
+      </c:txPr>
+    </c:legend>
+    <c:plotVisOnly val="1"/>
+    <c:dispBlanksAs val="span"/>
+  </c:chart>
+  <c:spPr>
+    <a:solidFill>
+      <a:srgbClr val="F8FAFC"/>
+    </a:solidFill>
+    <a:ln>
+      <a:noFill/>
+    </a:ln>
+    <a:effectLst/>
+  </c:spPr>
+  <c:externalData r:id="rId1">
+    <c:autoUpdate val="0"/>
+  </c:externalData>
+</c:chartSpace>
+</file>
+
 <file path=ppt/notesMasters/notesMaster1.xml><?xml version="1.0" encoding="utf-8"?>
 <p:notesMaster xmlns:a="http://schemas.openxmlformats.org/drawingml/2006/main" xmlns:r="http://schemas.openxmlformats.org/officeDocument/2006/relationships" xmlns:p="http://schemas.openxmlformats.org/presentationml/2006/main">
   <p:cSld>
@@ -10412,7 +10160,7 @@
                 <a:ea typeface="Calibri" pitchFamily="34" charset="-122"/>
                 <a:cs typeface="Calibri" pitchFamily="34" charset="-120"/>
               </a:rPr>
-              <a:t>:  3 домени  ·  32 документи  ·  1 491 чанк  ·  300 запитів  ·  qrels вручну</a:t>
+              <a:t>:  3 домени  ·  32 документи  ·  300 запитів  ·  qrels сформовано вручну</a:t>
             </a:r>
             <a:endParaRPr lang="en-US" sz="1100" dirty="0"/>
           </a:p>
@@ -10608,7 +10356,7 @@
         <p:spPr>
           <a:xfrm>
             <a:off x="1325880" y="1905000"/>
-            <a:ext cx="1005840" cy="274320"/>
+            <a:ext cx="1508760" cy="274320"/>
           </a:xfrm>
           <a:prstGeom prst="rect">
             <a:avLst/>
@@ -10624,7 +10372,7 @@
               <a:buNone/>
             </a:pPr>
             <a:r>
-              <a:rPr lang="en-US" sz="1800" b="1" dirty="0">
+              <a:rPr lang="en-US" sz="2200" b="1" dirty="0">
                 <a:solidFill>
                   <a:srgbClr val="1E40AF"/>
                 </a:solidFill>
@@ -10634,7 +10382,7 @@
               </a:rPr>
               <a:t>10</a:t>
             </a:r>
-            <a:endParaRPr lang="en-US" sz="1800" dirty="0"/>
+            <a:endParaRPr lang="en-US" sz="2200" dirty="0"/>
           </a:p>
         </p:txBody>
       </p:sp>
@@ -10646,8 +10394,8 @@
         </p:nvSpPr>
         <p:spPr>
           <a:xfrm>
-            <a:off x="1325880" y="2161032"/>
-            <a:ext cx="1005840" cy="182880"/>
+            <a:off x="1325880" y="2179320"/>
+            <a:ext cx="1508760" cy="182880"/>
           </a:xfrm>
           <a:prstGeom prst="rect">
             <a:avLst/>
@@ -10685,8 +10433,8 @@
         </p:nvSpPr>
         <p:spPr>
           <a:xfrm>
-            <a:off x="2331720" y="1905000"/>
-            <a:ext cx="1005840" cy="274320"/>
+            <a:off x="2834640" y="1905000"/>
+            <a:ext cx="1508760" cy="274320"/>
           </a:xfrm>
           <a:prstGeom prst="rect">
             <a:avLst/>
@@ -10702,7 +10450,7 @@
               <a:buNone/>
             </a:pPr>
             <a:r>
-              <a:rPr lang="en-US" sz="1800" b="1" dirty="0">
+              <a:rPr lang="en-US" sz="2200" b="1" dirty="0">
                 <a:solidFill>
                   <a:srgbClr val="1E40AF"/>
                 </a:solidFill>
@@ -10710,9 +10458,9 @@
                 <a:ea typeface="Calibri" pitchFamily="34" charset="-122"/>
                 <a:cs typeface="Calibri" pitchFamily="34" charset="-120"/>
               </a:rPr>
-              <a:t>178</a:t>
-            </a:r>
-            <a:endParaRPr lang="en-US" sz="1800" dirty="0"/>
+              <a:t>100</a:t>
+            </a:r>
+            <a:endParaRPr lang="en-US" sz="2200" dirty="0"/>
           </a:p>
         </p:txBody>
       </p:sp>
@@ -10724,8 +10472,8 @@
         </p:nvSpPr>
         <p:spPr>
           <a:xfrm>
-            <a:off x="2331720" y="2161032"/>
-            <a:ext cx="1005840" cy="182880"/>
+            <a:off x="2834640" y="2179320"/>
+            <a:ext cx="1508760" cy="182880"/>
           </a:xfrm>
           <a:prstGeom prst="rect">
             <a:avLst/>
@@ -10749,7 +10497,7 @@
                 <a:ea typeface="Calibri" pitchFamily="34" charset="-122"/>
                 <a:cs typeface="Calibri" pitchFamily="34" charset="-120"/>
               </a:rPr>
-              <a:t>чанки</a:t>
+              <a:t>запити</a:t>
             </a:r>
             <a:endParaRPr lang="en-US" sz="900" dirty="0"/>
           </a:p>
@@ -10757,85 +10505,7 @@
       </p:sp>
       <p:sp>
         <p:nvSpPr>
-          <p:cNvPr id="16" name="Text 13"/>
-          <p:cNvSpPr/>
-          <p:nvPr/>
-        </p:nvSpPr>
-        <p:spPr>
-          <a:xfrm>
-            <a:off x="3337560" y="1905000"/>
-            <a:ext cx="1005840" cy="274320"/>
-          </a:xfrm>
-          <a:prstGeom prst="rect">
-            <a:avLst/>
-          </a:prstGeom>
-          <a:noFill/>
-          <a:ln/>
-        </p:spPr>
-        <p:txBody>
-          <a:bodyPr wrap="square" lIns="0" tIns="0" rIns="0" bIns="0" rtlCol="0" anchor="ctr"/>
-          <a:lstStyle/>
-          <a:p>
-            <a:pPr algn="l" indent="0" marL="0">
-              <a:buNone/>
-            </a:pPr>
-            <a:r>
-              <a:rPr lang="en-US" sz="1800" b="1" dirty="0">
-                <a:solidFill>
-                  <a:srgbClr val="1E40AF"/>
-                </a:solidFill>
-                <a:latin typeface="Calibri" pitchFamily="34" charset="0"/>
-                <a:ea typeface="Calibri" pitchFamily="34" charset="-122"/>
-                <a:cs typeface="Calibri" pitchFamily="34" charset="-120"/>
-              </a:rPr>
-              <a:t>100</a:t>
-            </a:r>
-            <a:endParaRPr lang="en-US" sz="1800" dirty="0"/>
-          </a:p>
-        </p:txBody>
-      </p:sp>
-      <p:sp>
-        <p:nvSpPr>
-          <p:cNvPr id="17" name="Text 14"/>
-          <p:cNvSpPr/>
-          <p:nvPr/>
-        </p:nvSpPr>
-        <p:spPr>
-          <a:xfrm>
-            <a:off x="3337560" y="2161032"/>
-            <a:ext cx="1005840" cy="182880"/>
-          </a:xfrm>
-          <a:prstGeom prst="rect">
-            <a:avLst/>
-          </a:prstGeom>
-          <a:noFill/>
-          <a:ln/>
-        </p:spPr>
-        <p:txBody>
-          <a:bodyPr wrap="square" lIns="0" tIns="0" rIns="0" bIns="0" rtlCol="0" anchor="ctr"/>
-          <a:lstStyle/>
-          <a:p>
-            <a:pPr algn="l" indent="0" marL="0">
-              <a:buNone/>
-            </a:pPr>
-            <a:r>
-              <a:rPr lang="en-US" sz="900" dirty="0">
-                <a:solidFill>
-                  <a:srgbClr val="64748B"/>
-                </a:solidFill>
-                <a:latin typeface="Calibri" pitchFamily="34" charset="0"/>
-                <a:ea typeface="Calibri" pitchFamily="34" charset="-122"/>
-                <a:cs typeface="Calibri" pitchFamily="34" charset="-120"/>
-              </a:rPr>
-              <a:t>запити</a:t>
-            </a:r>
-            <a:endParaRPr lang="en-US" sz="900" dirty="0"/>
-          </a:p>
-        </p:txBody>
-      </p:sp>
-      <p:sp>
-        <p:nvSpPr>
-          <p:cNvPr id="18" name="Shape 15"/>
+          <p:cNvPr id="16" name="Shape 13"/>
           <p:cNvSpPr/>
           <p:nvPr/>
         </p:nvSpPr>
@@ -10869,7 +10539,7 @@
       </p:sp>
       <p:sp>
         <p:nvSpPr>
-          <p:cNvPr id="19" name="Shape 16"/>
+          <p:cNvPr id="17" name="Shape 14"/>
           <p:cNvSpPr/>
           <p:nvPr/>
         </p:nvSpPr>
@@ -10889,7 +10559,7 @@
       </p:sp>
       <p:sp>
         <p:nvSpPr>
-          <p:cNvPr id="20" name="Shape 17"/>
+          <p:cNvPr id="18" name="Shape 15"/>
           <p:cNvSpPr/>
           <p:nvPr/>
         </p:nvSpPr>
@@ -10914,7 +10584,7 @@
       </p:sp>
       <p:pic>
         <p:nvPicPr>
-          <p:cNvPr id="21" name="Image 1" descr="preencoded.png">    </p:cNvPr>
+          <p:cNvPr id="19" name="Image 1" descr="preencoded.png">    </p:cNvPr>
           <p:cNvPicPr>
             <a:picLocks noChangeAspect="1"/>
           </p:cNvPicPr>
@@ -10938,7 +10608,7 @@
       </p:pic>
       <p:sp>
         <p:nvSpPr>
-          <p:cNvPr id="22" name="Text 18"/>
+          <p:cNvPr id="20" name="Text 16"/>
           <p:cNvSpPr/>
           <p:nvPr/>
         </p:nvSpPr>
@@ -10977,7 +10647,7 @@
       </p:sp>
       <p:sp>
         <p:nvSpPr>
-          <p:cNvPr id="23" name="Text 19"/>
+          <p:cNvPr id="21" name="Text 17"/>
           <p:cNvSpPr/>
           <p:nvPr/>
         </p:nvSpPr>
@@ -11016,14 +10686,92 @@
       </p:sp>
       <p:sp>
         <p:nvSpPr>
+          <p:cNvPr id="22" name="Text 18"/>
+          <p:cNvSpPr/>
+          <p:nvPr/>
+        </p:nvSpPr>
+        <p:spPr>
+          <a:xfrm>
+            <a:off x="1325880" y="3032760"/>
+            <a:ext cx="1508760" cy="274320"/>
+          </a:xfrm>
+          <a:prstGeom prst="rect">
+            <a:avLst/>
+          </a:prstGeom>
+          <a:noFill/>
+          <a:ln/>
+        </p:spPr>
+        <p:txBody>
+          <a:bodyPr wrap="square" lIns="0" tIns="0" rIns="0" bIns="0" rtlCol="0" anchor="ctr"/>
+          <a:lstStyle/>
+          <a:p>
+            <a:pPr algn="l" indent="0" marL="0">
+              <a:buNone/>
+            </a:pPr>
+            <a:r>
+              <a:rPr lang="en-US" sz="2200" b="1" dirty="0">
+                <a:solidFill>
+                  <a:srgbClr val="7C3AED"/>
+                </a:solidFill>
+                <a:latin typeface="Calibri" pitchFamily="34" charset="0"/>
+                <a:ea typeface="Calibri" pitchFamily="34" charset="-122"/>
+                <a:cs typeface="Calibri" pitchFamily="34" charset="-120"/>
+              </a:rPr>
+              <a:t>13</a:t>
+            </a:r>
+            <a:endParaRPr lang="en-US" sz="2200" dirty="0"/>
+          </a:p>
+        </p:txBody>
+      </p:sp>
+      <p:sp>
+        <p:nvSpPr>
+          <p:cNvPr id="23" name="Text 19"/>
+          <p:cNvSpPr/>
+          <p:nvPr/>
+        </p:nvSpPr>
+        <p:spPr>
+          <a:xfrm>
+            <a:off x="1325880" y="3307080"/>
+            <a:ext cx="1508760" cy="182880"/>
+          </a:xfrm>
+          <a:prstGeom prst="rect">
+            <a:avLst/>
+          </a:prstGeom>
+          <a:noFill/>
+          <a:ln/>
+        </p:spPr>
+        <p:txBody>
+          <a:bodyPr wrap="square" lIns="0" tIns="0" rIns="0" bIns="0" rtlCol="0" anchor="ctr"/>
+          <a:lstStyle/>
+          <a:p>
+            <a:pPr algn="l" indent="0" marL="0">
+              <a:buNone/>
+            </a:pPr>
+            <a:r>
+              <a:rPr lang="en-US" sz="900" dirty="0">
+                <a:solidFill>
+                  <a:srgbClr val="64748B"/>
+                </a:solidFill>
+                <a:latin typeface="Calibri" pitchFamily="34" charset="0"/>
+                <a:ea typeface="Calibri" pitchFamily="34" charset="-122"/>
+                <a:cs typeface="Calibri" pitchFamily="34" charset="-120"/>
+              </a:rPr>
+              <a:t>документи</a:t>
+            </a:r>
+            <a:endParaRPr lang="en-US" sz="900" dirty="0"/>
+          </a:p>
+        </p:txBody>
+      </p:sp>
+      <p:sp>
+        <p:nvSpPr>
           <p:cNvPr id="24" name="Text 20"/>
           <p:cNvSpPr/>
           <p:nvPr/>
         </p:nvSpPr>
         <p:spPr>
           <a:xfrm>
-            <a:off x="1325880" y="3032760"/>
-            <a:ext cx="1005840" cy="274320"/>
+            <a:off x="2834640" y="3032760"/>
+            <a:ext cx="1508760" cy="274320"/>
           </a:xfrm>
           <a:prstGeom prst="rect">
             <a:avLst/>
@@ -11039,7 +10787,7 @@
               <a:buNone/>
             </a:pPr>
             <a:r>
-              <a:rPr lang="en-US" sz="1800" b="1" dirty="0">
+              <a:rPr lang="en-US" sz="2200" b="1" dirty="0">
                 <a:solidFill>
                   <a:srgbClr val="7C3AED"/>
                 </a:solidFill>
@@ -11047,9 +10795,9 @@
                 <a:ea typeface="Calibri" pitchFamily="34" charset="-122"/>
                 <a:cs typeface="Calibri" pitchFamily="34" charset="-120"/>
               </a:rPr>
-              <a:t>13</a:t>
-            </a:r>
-            <a:endParaRPr lang="en-US" sz="1800" dirty="0"/>
+              <a:t>100</a:t>
+            </a:r>
+            <a:endParaRPr lang="en-US" sz="2200" dirty="0"/>
           </a:p>
         </p:txBody>
       </p:sp>
@@ -11061,8 +10809,8 @@
         </p:nvSpPr>
         <p:spPr>
           <a:xfrm>
-            <a:off x="1325880" y="3288792"/>
-            <a:ext cx="1005840" cy="182880"/>
+            <a:off x="2834640" y="3307080"/>
+            <a:ext cx="1508760" cy="182880"/>
           </a:xfrm>
           <a:prstGeom prst="rect">
             <a:avLst/>
@@ -11086,7 +10834,7 @@
                 <a:ea typeface="Calibri" pitchFamily="34" charset="-122"/>
                 <a:cs typeface="Calibri" pitchFamily="34" charset="-120"/>
               </a:rPr>
-              <a:t>документи</a:t>
+              <a:t>запити</a:t>
             </a:r>
             <a:endParaRPr lang="en-US" sz="900" dirty="0"/>
           </a:p>
@@ -11094,163 +10842,7 @@
       </p:sp>
       <p:sp>
         <p:nvSpPr>
-          <p:cNvPr id="26" name="Text 22"/>
-          <p:cNvSpPr/>
-          <p:nvPr/>
-        </p:nvSpPr>
-        <p:spPr>
-          <a:xfrm>
-            <a:off x="2331720" y="3032760"/>
-            <a:ext cx="1005840" cy="274320"/>
-          </a:xfrm>
-          <a:prstGeom prst="rect">
-            <a:avLst/>
-          </a:prstGeom>
-          <a:noFill/>
-          <a:ln/>
-        </p:spPr>
-        <p:txBody>
-          <a:bodyPr wrap="square" lIns="0" tIns="0" rIns="0" bIns="0" rtlCol="0" anchor="ctr"/>
-          <a:lstStyle/>
-          <a:p>
-            <a:pPr algn="l" indent="0" marL="0">
-              <a:buNone/>
-            </a:pPr>
-            <a:r>
-              <a:rPr lang="en-US" sz="1800" b="1" dirty="0">
-                <a:solidFill>
-                  <a:srgbClr val="7C3AED"/>
-                </a:solidFill>
-                <a:latin typeface="Calibri" pitchFamily="34" charset="0"/>
-                <a:ea typeface="Calibri" pitchFamily="34" charset="-122"/>
-                <a:cs typeface="Calibri" pitchFamily="34" charset="-120"/>
-              </a:rPr>
-              <a:t>1046</a:t>
-            </a:r>
-            <a:endParaRPr lang="en-US" sz="1800" dirty="0"/>
-          </a:p>
-        </p:txBody>
-      </p:sp>
-      <p:sp>
-        <p:nvSpPr>
-          <p:cNvPr id="27" name="Text 23"/>
-          <p:cNvSpPr/>
-          <p:nvPr/>
-        </p:nvSpPr>
-        <p:spPr>
-          <a:xfrm>
-            <a:off x="2331720" y="3288792"/>
-            <a:ext cx="1005840" cy="182880"/>
-          </a:xfrm>
-          <a:prstGeom prst="rect">
-            <a:avLst/>
-          </a:prstGeom>
-          <a:noFill/>
-          <a:ln/>
-        </p:spPr>
-        <p:txBody>
-          <a:bodyPr wrap="square" lIns="0" tIns="0" rIns="0" bIns="0" rtlCol="0" anchor="ctr"/>
-          <a:lstStyle/>
-          <a:p>
-            <a:pPr algn="l" indent="0" marL="0">
-              <a:buNone/>
-            </a:pPr>
-            <a:r>
-              <a:rPr lang="en-US" sz="900" dirty="0">
-                <a:solidFill>
-                  <a:srgbClr val="64748B"/>
-                </a:solidFill>
-                <a:latin typeface="Calibri" pitchFamily="34" charset="0"/>
-                <a:ea typeface="Calibri" pitchFamily="34" charset="-122"/>
-                <a:cs typeface="Calibri" pitchFamily="34" charset="-120"/>
-              </a:rPr>
-              <a:t>чанки</a:t>
-            </a:r>
-            <a:endParaRPr lang="en-US" sz="900" dirty="0"/>
-          </a:p>
-        </p:txBody>
-      </p:sp>
-      <p:sp>
-        <p:nvSpPr>
-          <p:cNvPr id="28" name="Text 24"/>
-          <p:cNvSpPr/>
-          <p:nvPr/>
-        </p:nvSpPr>
-        <p:spPr>
-          <a:xfrm>
-            <a:off x="3337560" y="3032760"/>
-            <a:ext cx="1005840" cy="274320"/>
-          </a:xfrm>
-          <a:prstGeom prst="rect">
-            <a:avLst/>
-          </a:prstGeom>
-          <a:noFill/>
-          <a:ln/>
-        </p:spPr>
-        <p:txBody>
-          <a:bodyPr wrap="square" lIns="0" tIns="0" rIns="0" bIns="0" rtlCol="0" anchor="ctr"/>
-          <a:lstStyle/>
-          <a:p>
-            <a:pPr algn="l" indent="0" marL="0">
-              <a:buNone/>
-            </a:pPr>
-            <a:r>
-              <a:rPr lang="en-US" sz="1800" b="1" dirty="0">
-                <a:solidFill>
-                  <a:srgbClr val="7C3AED"/>
-                </a:solidFill>
-                <a:latin typeface="Calibri" pitchFamily="34" charset="0"/>
-                <a:ea typeface="Calibri" pitchFamily="34" charset="-122"/>
-                <a:cs typeface="Calibri" pitchFamily="34" charset="-120"/>
-              </a:rPr>
-              <a:t>100</a:t>
-            </a:r>
-            <a:endParaRPr lang="en-US" sz="1800" dirty="0"/>
-          </a:p>
-        </p:txBody>
-      </p:sp>
-      <p:sp>
-        <p:nvSpPr>
-          <p:cNvPr id="29" name="Text 25"/>
-          <p:cNvSpPr/>
-          <p:nvPr/>
-        </p:nvSpPr>
-        <p:spPr>
-          <a:xfrm>
-            <a:off x="3337560" y="3288792"/>
-            <a:ext cx="1005840" cy="182880"/>
-          </a:xfrm>
-          <a:prstGeom prst="rect">
-            <a:avLst/>
-          </a:prstGeom>
-          <a:noFill/>
-          <a:ln/>
-        </p:spPr>
-        <p:txBody>
-          <a:bodyPr wrap="square" lIns="0" tIns="0" rIns="0" bIns="0" rtlCol="0" anchor="ctr"/>
-          <a:lstStyle/>
-          <a:p>
-            <a:pPr algn="l" indent="0" marL="0">
-              <a:buNone/>
-            </a:pPr>
-            <a:r>
-              <a:rPr lang="en-US" sz="900" dirty="0">
-                <a:solidFill>
-                  <a:srgbClr val="64748B"/>
-                </a:solidFill>
-                <a:latin typeface="Calibri" pitchFamily="34" charset="0"/>
-                <a:ea typeface="Calibri" pitchFamily="34" charset="-122"/>
-                <a:cs typeface="Calibri" pitchFamily="34" charset="-120"/>
-              </a:rPr>
-              <a:t>запити</a:t>
-            </a:r>
-            <a:endParaRPr lang="en-US" sz="900" dirty="0"/>
-          </a:p>
-        </p:txBody>
-      </p:sp>
-      <p:sp>
-        <p:nvSpPr>
-          <p:cNvPr id="30" name="Shape 26"/>
+          <p:cNvPr id="26" name="Shape 22"/>
           <p:cNvSpPr/>
           <p:nvPr/>
         </p:nvSpPr>
@@ -11284,7 +10876,7 @@
       </p:sp>
       <p:sp>
         <p:nvSpPr>
-          <p:cNvPr id="31" name="Shape 27"/>
+          <p:cNvPr id="27" name="Shape 23"/>
           <p:cNvSpPr/>
           <p:nvPr/>
         </p:nvSpPr>
@@ -11304,7 +10896,7 @@
       </p:sp>
       <p:sp>
         <p:nvSpPr>
-          <p:cNvPr id="32" name="Shape 28"/>
+          <p:cNvPr id="28" name="Shape 24"/>
           <p:cNvSpPr/>
           <p:nvPr/>
         </p:nvSpPr>
@@ -11329,7 +10921,7 @@
       </p:sp>
       <p:pic>
         <p:nvPicPr>
-          <p:cNvPr id="33" name="Image 2" descr="preencoded.png">    </p:cNvPr>
+          <p:cNvPr id="29" name="Image 2" descr="preencoded.png">    </p:cNvPr>
           <p:cNvPicPr>
             <a:picLocks noChangeAspect="1"/>
           </p:cNvPicPr>
@@ -11353,7 +10945,7 @@
       </p:pic>
       <p:sp>
         <p:nvSpPr>
-          <p:cNvPr id="34" name="Text 29"/>
+          <p:cNvPr id="30" name="Text 25"/>
           <p:cNvSpPr/>
           <p:nvPr/>
         </p:nvSpPr>
@@ -11392,7 +10984,7 @@
       </p:sp>
       <p:sp>
         <p:nvSpPr>
-          <p:cNvPr id="35" name="Text 30"/>
+          <p:cNvPr id="31" name="Text 26"/>
           <p:cNvSpPr/>
           <p:nvPr/>
         </p:nvSpPr>
@@ -11431,14 +11023,14 @@
       </p:sp>
       <p:sp>
         <p:nvSpPr>
-          <p:cNvPr id="36" name="Text 31"/>
+          <p:cNvPr id="32" name="Text 27"/>
           <p:cNvSpPr/>
           <p:nvPr/>
         </p:nvSpPr>
         <p:spPr>
           <a:xfrm>
             <a:off x="1325880" y="4160520"/>
-            <a:ext cx="1005840" cy="274320"/>
+            <a:ext cx="1508760" cy="274320"/>
           </a:xfrm>
           <a:prstGeom prst="rect">
             <a:avLst/>
@@ -11454,7 +11046,7 @@
               <a:buNone/>
             </a:pPr>
             <a:r>
-              <a:rPr lang="en-US" sz="1800" b="1" dirty="0">
+              <a:rPr lang="en-US" sz="2200" b="1" dirty="0">
                 <a:solidFill>
                   <a:srgbClr val="E11D48"/>
                 </a:solidFill>
@@ -11464,20 +11056,20 @@
               </a:rPr>
               <a:t>9</a:t>
             </a:r>
-            <a:endParaRPr lang="en-US" sz="1800" dirty="0"/>
-          </a:p>
-        </p:txBody>
-      </p:sp>
-      <p:sp>
-        <p:nvSpPr>
-          <p:cNvPr id="37" name="Text 32"/>
-          <p:cNvSpPr/>
-          <p:nvPr/>
-        </p:nvSpPr>
-        <p:spPr>
-          <a:xfrm>
-            <a:off x="1325880" y="4416552"/>
-            <a:ext cx="1005840" cy="182880"/>
+            <a:endParaRPr lang="en-US" sz="2200" dirty="0"/>
+          </a:p>
+        </p:txBody>
+      </p:sp>
+      <p:sp>
+        <p:nvSpPr>
+          <p:cNvPr id="33" name="Text 28"/>
+          <p:cNvSpPr/>
+          <p:nvPr/>
+        </p:nvSpPr>
+        <p:spPr>
+          <a:xfrm>
+            <a:off x="1325880" y="4434840"/>
+            <a:ext cx="1508760" cy="182880"/>
           </a:xfrm>
           <a:prstGeom prst="rect">
             <a:avLst/>
@@ -11509,14 +11101,14 @@
       </p:sp>
       <p:sp>
         <p:nvSpPr>
-          <p:cNvPr id="38" name="Text 33"/>
-          <p:cNvSpPr/>
-          <p:nvPr/>
-        </p:nvSpPr>
-        <p:spPr>
-          <a:xfrm>
-            <a:off x="2331720" y="4160520"/>
-            <a:ext cx="1005840" cy="274320"/>
+          <p:cNvPr id="34" name="Text 29"/>
+          <p:cNvSpPr/>
+          <p:nvPr/>
+        </p:nvSpPr>
+        <p:spPr>
+          <a:xfrm>
+            <a:off x="2834640" y="4160520"/>
+            <a:ext cx="1508760" cy="274320"/>
           </a:xfrm>
           <a:prstGeom prst="rect">
             <a:avLst/>
@@ -11532,7 +11124,7 @@
               <a:buNone/>
             </a:pPr>
             <a:r>
-              <a:rPr lang="en-US" sz="1800" b="1" dirty="0">
+              <a:rPr lang="en-US" sz="2200" b="1" dirty="0">
                 <a:solidFill>
                   <a:srgbClr val="E11D48"/>
                 </a:solidFill>
@@ -11540,22 +11132,22 @@
                 <a:ea typeface="Calibri" pitchFamily="34" charset="-122"/>
                 <a:cs typeface="Calibri" pitchFamily="34" charset="-120"/>
               </a:rPr>
-              <a:t>267</a:t>
-            </a:r>
-            <a:endParaRPr lang="en-US" sz="1800" dirty="0"/>
-          </a:p>
-        </p:txBody>
-      </p:sp>
-      <p:sp>
-        <p:nvSpPr>
-          <p:cNvPr id="39" name="Text 34"/>
-          <p:cNvSpPr/>
-          <p:nvPr/>
-        </p:nvSpPr>
-        <p:spPr>
-          <a:xfrm>
-            <a:off x="2331720" y="4416552"/>
-            <a:ext cx="1005840" cy="182880"/>
+              <a:t>100</a:t>
+            </a:r>
+            <a:endParaRPr lang="en-US" sz="2200" dirty="0"/>
+          </a:p>
+        </p:txBody>
+      </p:sp>
+      <p:sp>
+        <p:nvSpPr>
+          <p:cNvPr id="35" name="Text 30"/>
+          <p:cNvSpPr/>
+          <p:nvPr/>
+        </p:nvSpPr>
+        <p:spPr>
+          <a:xfrm>
+            <a:off x="2834640" y="4434840"/>
+            <a:ext cx="1508760" cy="182880"/>
           </a:xfrm>
           <a:prstGeom prst="rect">
             <a:avLst/>
@@ -11579,7 +11171,7 @@
                 <a:ea typeface="Calibri" pitchFamily="34" charset="-122"/>
                 <a:cs typeface="Calibri" pitchFamily="34" charset="-120"/>
               </a:rPr>
-              <a:t>чанки</a:t>
+              <a:t>запити</a:t>
             </a:r>
             <a:endParaRPr lang="en-US" sz="900" dirty="0"/>
           </a:p>
@@ -11587,85 +11179,7 @@
       </p:sp>
       <p:sp>
         <p:nvSpPr>
-          <p:cNvPr id="40" name="Text 35"/>
-          <p:cNvSpPr/>
-          <p:nvPr/>
-        </p:nvSpPr>
-        <p:spPr>
-          <a:xfrm>
-            <a:off x="3337560" y="4160520"/>
-            <a:ext cx="1005840" cy="274320"/>
-          </a:xfrm>
-          <a:prstGeom prst="rect">
-            <a:avLst/>
-          </a:prstGeom>
-          <a:noFill/>
-          <a:ln/>
-        </p:spPr>
-        <p:txBody>
-          <a:bodyPr wrap="square" lIns="0" tIns="0" rIns="0" bIns="0" rtlCol="0" anchor="ctr"/>
-          <a:lstStyle/>
-          <a:p>
-            <a:pPr algn="l" indent="0" marL="0">
-              <a:buNone/>
-            </a:pPr>
-            <a:r>
-              <a:rPr lang="en-US" sz="1800" b="1" dirty="0">
-                <a:solidFill>
-                  <a:srgbClr val="E11D48"/>
-                </a:solidFill>
-                <a:latin typeface="Calibri" pitchFamily="34" charset="0"/>
-                <a:ea typeface="Calibri" pitchFamily="34" charset="-122"/>
-                <a:cs typeface="Calibri" pitchFamily="34" charset="-120"/>
-              </a:rPr>
-              <a:t>100</a:t>
-            </a:r>
-            <a:endParaRPr lang="en-US" sz="1800" dirty="0"/>
-          </a:p>
-        </p:txBody>
-      </p:sp>
-      <p:sp>
-        <p:nvSpPr>
-          <p:cNvPr id="41" name="Text 36"/>
-          <p:cNvSpPr/>
-          <p:nvPr/>
-        </p:nvSpPr>
-        <p:spPr>
-          <a:xfrm>
-            <a:off x="3337560" y="4416552"/>
-            <a:ext cx="1005840" cy="182880"/>
-          </a:xfrm>
-          <a:prstGeom prst="rect">
-            <a:avLst/>
-          </a:prstGeom>
-          <a:noFill/>
-          <a:ln/>
-        </p:spPr>
-        <p:txBody>
-          <a:bodyPr wrap="square" lIns="0" tIns="0" rIns="0" bIns="0" rtlCol="0" anchor="ctr"/>
-          <a:lstStyle/>
-          <a:p>
-            <a:pPr algn="l" indent="0" marL="0">
-              <a:buNone/>
-            </a:pPr>
-            <a:r>
-              <a:rPr lang="en-US" sz="900" dirty="0">
-                <a:solidFill>
-                  <a:srgbClr val="64748B"/>
-                </a:solidFill>
-                <a:latin typeface="Calibri" pitchFamily="34" charset="0"/>
-                <a:ea typeface="Calibri" pitchFamily="34" charset="-122"/>
-                <a:cs typeface="Calibri" pitchFamily="34" charset="-120"/>
-              </a:rPr>
-              <a:t>запити</a:t>
-            </a:r>
-            <a:endParaRPr lang="en-US" sz="900" dirty="0"/>
-          </a:p>
-        </p:txBody>
-      </p:sp>
-      <p:sp>
-        <p:nvSpPr>
-          <p:cNvPr id="42" name="Shape 37"/>
+          <p:cNvPr id="36" name="Shape 31"/>
           <p:cNvSpPr/>
           <p:nvPr/>
         </p:nvSpPr>
@@ -11699,14 +11213,248 @@
       </p:sp>
       <p:sp>
         <p:nvSpPr>
+          <p:cNvPr id="37" name="Text 32"/>
+          <p:cNvSpPr/>
+          <p:nvPr/>
+        </p:nvSpPr>
+        <p:spPr>
+          <a:xfrm>
+            <a:off x="4892040" y="1508760"/>
+            <a:ext cx="3657600" cy="228600"/>
+          </a:xfrm>
+          <a:prstGeom prst="rect">
+            <a:avLst/>
+          </a:prstGeom>
+          <a:noFill/>
+          <a:ln/>
+        </p:spPr>
+        <p:txBody>
+          <a:bodyPr wrap="square" lIns="0" tIns="0" rIns="0" bIns="0" rtlCol="0" anchor="ctr"/>
+          <a:lstStyle/>
+          <a:p>
+            <a:pPr algn="l" indent="0" marL="0">
+              <a:buNone/>
+            </a:pPr>
+            <a:r>
+              <a:rPr lang="en-US" sz="900" b="1" spc="200" kern="0" dirty="0">
+                <a:solidFill>
+                  <a:srgbClr val="64748B"/>
+                </a:solidFill>
+                <a:latin typeface="Calibri" pitchFamily="34" charset="0"/>
+                <a:ea typeface="Calibri" pitchFamily="34" charset="-122"/>
+                <a:cs typeface="Calibri" pitchFamily="34" charset="-120"/>
+              </a:rPr>
+              <a:t>ЗБАЛАНСОВАНА ОЦІНКА</a:t>
+            </a:r>
+            <a:endParaRPr lang="en-US" sz="900" dirty="0"/>
+          </a:p>
+        </p:txBody>
+      </p:sp>
+      <p:sp>
+        <p:nvSpPr>
+          <p:cNvPr id="38" name="Text 33"/>
+          <p:cNvSpPr/>
+          <p:nvPr/>
+        </p:nvSpPr>
+        <p:spPr>
+          <a:xfrm>
+            <a:off x="4892040" y="1874520"/>
+            <a:ext cx="1219200" cy="1097280"/>
+          </a:xfrm>
+          <a:prstGeom prst="rect">
+            <a:avLst/>
+          </a:prstGeom>
+          <a:noFill/>
+          <a:ln/>
+        </p:spPr>
+        <p:txBody>
+          <a:bodyPr wrap="square" lIns="0" tIns="0" rIns="0" bIns="0" rtlCol="0" anchor="ctr"/>
+          <a:lstStyle/>
+          <a:p>
+            <a:pPr algn="ctr" indent="0" marL="0">
+              <a:buNone/>
+            </a:pPr>
+            <a:r>
+              <a:rPr lang="en-US" sz="6000" b="1" dirty="0">
+                <a:solidFill>
+                  <a:srgbClr val="1E40AF"/>
+                </a:solidFill>
+                <a:latin typeface="Calibri" pitchFamily="34" charset="0"/>
+                <a:ea typeface="Calibri" pitchFamily="34" charset="-122"/>
+                <a:cs typeface="Calibri" pitchFamily="34" charset="-120"/>
+              </a:rPr>
+              <a:t>100</a:t>
+            </a:r>
+            <a:endParaRPr lang="en-US" sz="6000" dirty="0"/>
+          </a:p>
+        </p:txBody>
+      </p:sp>
+      <p:sp>
+        <p:nvSpPr>
+          <p:cNvPr id="39" name="Text 34"/>
+          <p:cNvSpPr/>
+          <p:nvPr/>
+        </p:nvSpPr>
+        <p:spPr>
+          <a:xfrm>
+            <a:off x="4892040" y="2971800"/>
+            <a:ext cx="1219200" cy="274320"/>
+          </a:xfrm>
+          <a:prstGeom prst="rect">
+            <a:avLst/>
+          </a:prstGeom>
+          <a:noFill/>
+          <a:ln/>
+        </p:spPr>
+        <p:txBody>
+          <a:bodyPr wrap="square" lIns="0" tIns="0" rIns="0" bIns="0" rtlCol="0" anchor="ctr"/>
+          <a:lstStyle/>
+          <a:p>
+            <a:pPr algn="ctr" indent="0" marL="0">
+              <a:buNone/>
+            </a:pPr>
+            <a:r>
+              <a:rPr lang="en-US" sz="1100" b="1" dirty="0">
+                <a:solidFill>
+                  <a:srgbClr val="1E293B"/>
+                </a:solidFill>
+                <a:latin typeface="Calibri" pitchFamily="34" charset="0"/>
+                <a:ea typeface="Calibri" pitchFamily="34" charset="-122"/>
+                <a:cs typeface="Calibri" pitchFamily="34" charset="-120"/>
+              </a:rPr>
+              <a:t>Технічний</a:t>
+            </a:r>
+            <a:endParaRPr lang="en-US" sz="1100" dirty="0"/>
+          </a:p>
+        </p:txBody>
+      </p:sp>
+      <p:sp>
+        <p:nvSpPr>
+          <p:cNvPr id="40" name="Text 35"/>
+          <p:cNvSpPr/>
+          <p:nvPr/>
+        </p:nvSpPr>
+        <p:spPr>
+          <a:xfrm>
+            <a:off x="4892040" y="3227832"/>
+            <a:ext cx="1219200" cy="201168"/>
+          </a:xfrm>
+          <a:prstGeom prst="rect">
+            <a:avLst/>
+          </a:prstGeom>
+          <a:noFill/>
+          <a:ln/>
+        </p:spPr>
+        <p:txBody>
+          <a:bodyPr wrap="square" lIns="0" tIns="0" rIns="0" bIns="0" rtlCol="0" anchor="ctr"/>
+          <a:lstStyle/>
+          <a:p>
+            <a:pPr algn="ctr" indent="0" marL="0">
+              <a:buNone/>
+            </a:pPr>
+            <a:r>
+              <a:rPr lang="en-US" sz="900" dirty="0">
+                <a:solidFill>
+                  <a:srgbClr val="64748B"/>
+                </a:solidFill>
+                <a:latin typeface="Calibri" pitchFamily="34" charset="0"/>
+                <a:ea typeface="Calibri" pitchFamily="34" charset="-122"/>
+                <a:cs typeface="Calibri" pitchFamily="34" charset="-120"/>
+              </a:rPr>
+              <a:t>запитів</a:t>
+            </a:r>
+            <a:endParaRPr lang="en-US" sz="900" dirty="0"/>
+          </a:p>
+        </p:txBody>
+      </p:sp>
+      <p:sp>
+        <p:nvSpPr>
+          <p:cNvPr id="41" name="Text 36"/>
+          <p:cNvSpPr/>
+          <p:nvPr/>
+        </p:nvSpPr>
+        <p:spPr>
+          <a:xfrm>
+            <a:off x="6111240" y="1874520"/>
+            <a:ext cx="1219200" cy="1097280"/>
+          </a:xfrm>
+          <a:prstGeom prst="rect">
+            <a:avLst/>
+          </a:prstGeom>
+          <a:noFill/>
+          <a:ln/>
+        </p:spPr>
+        <p:txBody>
+          <a:bodyPr wrap="square" lIns="0" tIns="0" rIns="0" bIns="0" rtlCol="0" anchor="ctr"/>
+          <a:lstStyle/>
+          <a:p>
+            <a:pPr algn="ctr" indent="0" marL="0">
+              <a:buNone/>
+            </a:pPr>
+            <a:r>
+              <a:rPr lang="en-US" sz="6000" b="1" dirty="0">
+                <a:solidFill>
+                  <a:srgbClr val="7C3AED"/>
+                </a:solidFill>
+                <a:latin typeface="Calibri" pitchFamily="34" charset="0"/>
+                <a:ea typeface="Calibri" pitchFamily="34" charset="-122"/>
+                <a:cs typeface="Calibri" pitchFamily="34" charset="-120"/>
+              </a:rPr>
+              <a:t>100</a:t>
+            </a:r>
+            <a:endParaRPr lang="en-US" sz="6000" dirty="0"/>
+          </a:p>
+        </p:txBody>
+      </p:sp>
+      <p:sp>
+        <p:nvSpPr>
+          <p:cNvPr id="42" name="Text 37"/>
+          <p:cNvSpPr/>
+          <p:nvPr/>
+        </p:nvSpPr>
+        <p:spPr>
+          <a:xfrm>
+            <a:off x="6111240" y="2971800"/>
+            <a:ext cx="1219200" cy="274320"/>
+          </a:xfrm>
+          <a:prstGeom prst="rect">
+            <a:avLst/>
+          </a:prstGeom>
+          <a:noFill/>
+          <a:ln/>
+        </p:spPr>
+        <p:txBody>
+          <a:bodyPr wrap="square" lIns="0" tIns="0" rIns="0" bIns="0" rtlCol="0" anchor="ctr"/>
+          <a:lstStyle/>
+          <a:p>
+            <a:pPr algn="ctr" indent="0" marL="0">
+              <a:buNone/>
+            </a:pPr>
+            <a:r>
+              <a:rPr lang="en-US" sz="1100" b="1" dirty="0">
+                <a:solidFill>
+                  <a:srgbClr val="1E293B"/>
+                </a:solidFill>
+                <a:latin typeface="Calibri" pitchFamily="34" charset="0"/>
+                <a:ea typeface="Calibri" pitchFamily="34" charset="-122"/>
+                <a:cs typeface="Calibri" pitchFamily="34" charset="-120"/>
+              </a:rPr>
+              <a:t>Юридичний</a:t>
+            </a:r>
+            <a:endParaRPr lang="en-US" sz="1100" dirty="0"/>
+          </a:p>
+        </p:txBody>
+      </p:sp>
+      <p:sp>
+        <p:nvSpPr>
           <p:cNvPr id="43" name="Text 38"/>
           <p:cNvSpPr/>
           <p:nvPr/>
         </p:nvSpPr>
         <p:spPr>
           <a:xfrm>
-            <a:off x="4892040" y="1463040"/>
-            <a:ext cx="3657600" cy="228600"/>
+            <a:off x="6111240" y="3227832"/>
+            <a:ext cx="1219200" cy="201168"/>
           </a:xfrm>
           <a:prstGeom prst="rect">
             <a:avLst/>
@@ -11718,11 +11466,11 @@
           <a:bodyPr wrap="square" lIns="0" tIns="0" rIns="0" bIns="0" rtlCol="0" anchor="ctr"/>
           <a:lstStyle/>
           <a:p>
-            <a:pPr algn="l" indent="0" marL="0">
-              <a:buNone/>
-            </a:pPr>
-            <a:r>
-              <a:rPr lang="en-US" sz="900" b="1" spc="200" kern="0" dirty="0">
+            <a:pPr algn="ctr" indent="0" marL="0">
+              <a:buNone/>
+            </a:pPr>
+            <a:r>
+              <a:rPr lang="en-US" sz="900" dirty="0">
                 <a:solidFill>
                   <a:srgbClr val="64748B"/>
                 </a:solidFill>
@@ -11730,38 +11478,22 @@
                 <a:ea typeface="Calibri" pitchFamily="34" charset="-122"/>
                 <a:cs typeface="Calibri" pitchFamily="34" charset="-120"/>
               </a:rPr>
-              <a:t>РОЗПОДІЛ ЧАНКІВ ЗА ДОМЕНАМИ</a:t>
+              <a:t>запитів</a:t>
             </a:r>
             <a:endParaRPr lang="en-US" sz="900" dirty="0"/>
           </a:p>
         </p:txBody>
       </p:sp>
-      <p:graphicFrame>
-        <p:nvGraphicFramePr>
-          <p:cNvPr id="44" name="Chart 0" descr=""/>
-          <p:cNvGraphicFramePr/>
-          <p:nvPr/>
-        </p:nvGraphicFramePr>
-        <p:xfrm>
-          <a:off x="4800600" y="1737360"/>
-          <a:ext cx="3840480" cy="2377440"/>
-        </p:xfrm>
-        <a:graphic xmlns:a="http://schemas.openxmlformats.org/drawingml/2006/main">
-          <a:graphicData uri="http://schemas.openxmlformats.org/drawingml/2006/chart">
-            <c:chart xmlns:c="http://schemas.openxmlformats.org/drawingml/2006/chart" r:id="rId4"/>
-          </a:graphicData>
-        </a:graphic>
-      </p:graphicFrame>
-      <p:sp>
-        <p:nvSpPr>
-          <p:cNvPr id="45" name="Text 39"/>
-          <p:cNvSpPr/>
-          <p:nvPr/>
-        </p:nvSpPr>
-        <p:spPr>
-          <a:xfrm>
-            <a:off x="4800600" y="2507285"/>
-            <a:ext cx="3840480" cy="365760"/>
+      <p:sp>
+        <p:nvSpPr>
+          <p:cNvPr id="44" name="Text 39"/>
+          <p:cNvSpPr/>
+          <p:nvPr/>
+        </p:nvSpPr>
+        <p:spPr>
+          <a:xfrm>
+            <a:off x="7330440" y="1874520"/>
+            <a:ext cx="1219200" cy="1097280"/>
           </a:xfrm>
           <a:prstGeom prst="rect">
             <a:avLst/>
@@ -11777,7 +11509,46 @@
               <a:buNone/>
             </a:pPr>
             <a:r>
-              <a:rPr lang="en-US" sz="2000" b="1" dirty="0">
+              <a:rPr lang="en-US" sz="6000" b="1" dirty="0">
+                <a:solidFill>
+                  <a:srgbClr val="E11D48"/>
+                </a:solidFill>
+                <a:latin typeface="Calibri" pitchFamily="34" charset="0"/>
+                <a:ea typeface="Calibri" pitchFamily="34" charset="-122"/>
+                <a:cs typeface="Calibri" pitchFamily="34" charset="-120"/>
+              </a:rPr>
+              <a:t>100</a:t>
+            </a:r>
+            <a:endParaRPr lang="en-US" sz="6000" dirty="0"/>
+          </a:p>
+        </p:txBody>
+      </p:sp>
+      <p:sp>
+        <p:nvSpPr>
+          <p:cNvPr id="45" name="Text 40"/>
+          <p:cNvSpPr/>
+          <p:nvPr/>
+        </p:nvSpPr>
+        <p:spPr>
+          <a:xfrm>
+            <a:off x="7330440" y="2971800"/>
+            <a:ext cx="1219200" cy="274320"/>
+          </a:xfrm>
+          <a:prstGeom prst="rect">
+            <a:avLst/>
+          </a:prstGeom>
+          <a:noFill/>
+          <a:ln/>
+        </p:spPr>
+        <p:txBody>
+          <a:bodyPr wrap="square" lIns="0" tIns="0" rIns="0" bIns="0" rtlCol="0" anchor="ctr"/>
+          <a:lstStyle/>
+          <a:p>
+            <a:pPr algn="ctr" indent="0" marL="0">
+              <a:buNone/>
+            </a:pPr>
+            <a:r>
+              <a:rPr lang="en-US" sz="1100" b="1" dirty="0">
                 <a:solidFill>
                   <a:srgbClr val="1E293B"/>
                 </a:solidFill>
@@ -11785,22 +11556,22 @@
                 <a:ea typeface="Calibri" pitchFamily="34" charset="-122"/>
                 <a:cs typeface="Calibri" pitchFamily="34" charset="-120"/>
               </a:rPr>
-              <a:t>1 491</a:t>
-            </a:r>
-            <a:endParaRPr lang="en-US" sz="2000" dirty="0"/>
-          </a:p>
-        </p:txBody>
-      </p:sp>
-      <p:sp>
-        <p:nvSpPr>
-          <p:cNvPr id="46" name="Text 40"/>
-          <p:cNvSpPr/>
-          <p:nvPr/>
-        </p:nvSpPr>
-        <p:spPr>
-          <a:xfrm>
-            <a:off x="4800600" y="2873045"/>
-            <a:ext cx="3840480" cy="201168"/>
+              <a:t>Медичний</a:t>
+            </a:r>
+            <a:endParaRPr lang="en-US" sz="1100" dirty="0"/>
+          </a:p>
+        </p:txBody>
+      </p:sp>
+      <p:sp>
+        <p:nvSpPr>
+          <p:cNvPr id="46" name="Text 41"/>
+          <p:cNvSpPr/>
+          <p:nvPr/>
+        </p:nvSpPr>
+        <p:spPr>
+          <a:xfrm>
+            <a:off x="7330440" y="3227832"/>
+            <a:ext cx="1219200" cy="201168"/>
           </a:xfrm>
           <a:prstGeom prst="rect">
             <a:avLst/>
@@ -11824,22 +11595,95 @@
                 <a:ea typeface="Calibri" pitchFamily="34" charset="-122"/>
                 <a:cs typeface="Calibri" pitchFamily="34" charset="-120"/>
               </a:rPr>
-              <a:t>чанків усього</a:t>
+              <a:t>запитів</a:t>
             </a:r>
             <a:endParaRPr lang="en-US" sz="900" dirty="0"/>
+          </a:p>
+        </p:txBody>
+      </p:sp>
+      <p:sp>
+        <p:nvSpPr>
+          <p:cNvPr id="47" name="Shape 42"/>
+          <p:cNvSpPr/>
+          <p:nvPr/>
+        </p:nvSpPr>
+        <p:spPr>
+          <a:xfrm>
+            <a:off x="5074920" y="3630168"/>
+            <a:ext cx="3291840" cy="22860"/>
+          </a:xfrm>
+          <a:prstGeom prst="rect">
+            <a:avLst/>
+          </a:prstGeom>
+          <a:solidFill>
+            <a:srgbClr val="E2E8F0"/>
+          </a:solidFill>
+          <a:ln/>
+        </p:spPr>
+      </p:sp>
+      <p:sp>
+        <p:nvSpPr>
+          <p:cNvPr id="48" name="Text 43"/>
+          <p:cNvSpPr/>
+          <p:nvPr/>
+        </p:nvSpPr>
+        <p:spPr>
+          <a:xfrm>
+            <a:off x="4892040" y="3703320"/>
+            <a:ext cx="3657600" cy="457200"/>
+          </a:xfrm>
+          <a:prstGeom prst="rect">
+            <a:avLst/>
+          </a:prstGeom>
+          <a:noFill/>
+          <a:ln/>
+        </p:spPr>
+        <p:txBody>
+          <a:bodyPr wrap="square" lIns="0" tIns="0" rIns="0" bIns="0" rtlCol="0" anchor="ctr"/>
+          <a:lstStyle/>
+          <a:p>
+            <a:pPr algn="ctr" indent="0" marL="0">
+              <a:buNone/>
+            </a:pPr>
+            <a:r>
+              <a:rPr lang="en-US" sz="2400" b="1" dirty="0">
+                <a:solidFill>
+                  <a:srgbClr val="F59E0B"/>
+                </a:solidFill>
+                <a:latin typeface="Calibri" pitchFamily="34" charset="0"/>
+                <a:ea typeface="Calibri" pitchFamily="34" charset="-122"/>
+                <a:cs typeface="Calibri" pitchFamily="34" charset="-120"/>
+              </a:rPr>
+              <a:t>300</a:t>
+            </a:r>
+            <a:pPr algn="ctr" indent="0" marL="0">
+              <a:buNone/>
+            </a:pPr>
+            <a:r>
+              <a:rPr lang="en-US" sz="1000" dirty="0">
+                <a:solidFill>
+                  <a:srgbClr val="475569"/>
+                </a:solidFill>
+                <a:latin typeface="Calibri" pitchFamily="34" charset="0"/>
+                <a:ea typeface="Calibri" pitchFamily="34" charset="-122"/>
+                <a:cs typeface="Calibri" pitchFamily="34" charset="-120"/>
+              </a:rPr>
+              <a:t>  запитів усього  ·  на яких рахуються per-query метрики</a:t>
+            </a:r>
+            <a:endParaRPr lang="en-US" sz="2400" dirty="0"/>
           </a:p>
         </p:txBody>
       </p:sp>
       <p:pic>
         <p:nvPicPr>
-          <p:cNvPr id="47" name="Image 3" descr="D:\repos\kb-semantic-search-benchmark\thesis\scripts\_logo_hex.png">    </p:cNvPr>
+          <p:cNvPr id="49" name="Image 3" descr="D:\repos\kb-semantic-search-benchmark\thesis\scripts\_logo_hex.png">    </p:cNvPr>
           <p:cNvPicPr>
             <a:picLocks noChangeAspect="1"/>
           </p:cNvPicPr>
           <p:nvPr/>
         </p:nvPicPr>
         <p:blipFill>
-          <a:blip r:embed="rId5"/>
+          <a:blip r:embed="rId4"/>
           <a:stretch>
             <a:fillRect/>
           </a:stretch>
@@ -11856,7 +11700,7 @@
       </p:pic>
       <p:sp>
         <p:nvSpPr>
-          <p:cNvPr id="48" name="Text 41"/>
+          <p:cNvPr id="50" name="Text 44"/>
           <p:cNvSpPr/>
           <p:nvPr/>
         </p:nvSpPr>

--- a/thesis/Nesterenko_Presentation.pptx
+++ b/thesis/Nesterenko_Presentation.pptx
@@ -10175,11 +10175,11 @@
         <p:spPr>
           <a:xfrm>
             <a:off x="411480" y="1371600"/>
-            <a:ext cx="4114800" cy="1036320"/>
+            <a:ext cx="8321040" cy="1024128"/>
           </a:xfrm>
           <a:prstGeom prst="roundRect">
             <a:avLst>
-              <a:gd name="adj" fmla="val 5294"/>
+              <a:gd name="adj" fmla="val 5357"/>
             </a:avLst>
           </a:prstGeom>
           <a:solidFill>
@@ -10209,7 +10209,7 @@
         <p:spPr>
           <a:xfrm>
             <a:off x="411480" y="1371600"/>
-            <a:ext cx="91440" cy="1036320"/>
+            <a:ext cx="91440" cy="1024128"/>
           </a:xfrm>
           <a:prstGeom prst="rect">
             <a:avLst/>
@@ -10228,8 +10228,8 @@
         </p:nvSpPr>
         <p:spPr>
           <a:xfrm>
-            <a:off x="685800" y="1554480"/>
-            <a:ext cx="502920" cy="502920"/>
+            <a:off x="685800" y="1609344"/>
+            <a:ext cx="548640" cy="548640"/>
           </a:xfrm>
           <a:prstGeom prst="ellipse">
             <a:avLst/>
@@ -10261,8 +10261,8 @@
         </p:blipFill>
         <p:spPr>
           <a:xfrm>
-            <a:off x="777240" y="1645920"/>
-            <a:ext cx="320040" cy="320040"/>
+            <a:off x="795528" y="1719072"/>
+            <a:ext cx="329184" cy="329184"/>
           </a:xfrm>
           <a:prstGeom prst="rect">
             <a:avLst/>
@@ -10277,8 +10277,8 @@
         </p:nvSpPr>
         <p:spPr>
           <a:xfrm>
-            <a:off x="1325880" y="1463040"/>
-            <a:ext cx="3017520" cy="274320"/>
+            <a:off x="1417320" y="1554480"/>
+            <a:ext cx="4846320" cy="329184"/>
           </a:xfrm>
           <a:prstGeom prst="rect">
             <a:avLst/>
@@ -10294,7 +10294,7 @@
               <a:buNone/>
             </a:pPr>
             <a:r>
-              <a:rPr lang="en-US" sz="1300" b="1" dirty="0">
+              <a:rPr lang="en-US" sz="1600" b="1" dirty="0">
                 <a:solidFill>
                   <a:srgbClr val="1E293B"/>
                 </a:solidFill>
@@ -10304,7 +10304,7 @@
               </a:rPr>
               <a:t>Технічний</a:t>
             </a:r>
-            <a:endParaRPr lang="en-US" sz="1300" dirty="0"/>
+            <a:endParaRPr lang="en-US" sz="1600" dirty="0"/>
           </a:p>
         </p:txBody>
       </p:sp>
@@ -10316,24 +10316,24 @@
         </p:nvSpPr>
         <p:spPr>
           <a:xfrm>
-            <a:off x="1325880" y="1691640"/>
-            <a:ext cx="3017520" cy="274320"/>
-          </a:xfrm>
-          <a:prstGeom prst="rect">
-            <a:avLst/>
-          </a:prstGeom>
-          <a:noFill/>
-          <a:ln/>
-        </p:spPr>
-        <p:txBody>
-          <a:bodyPr wrap="square" lIns="0" tIns="0" rIns="0" bIns="0" rtlCol="0" anchor="ctr"/>
+            <a:off x="1417320" y="1920240"/>
+            <a:ext cx="4846320" cy="365760"/>
+          </a:xfrm>
+          <a:prstGeom prst="rect">
+            <a:avLst/>
+          </a:prstGeom>
+          <a:noFill/>
+          <a:ln/>
+        </p:spPr>
+        <p:txBody>
+          <a:bodyPr wrap="square" lIns="0" tIns="0" rIns="0" bIns="0" rtlCol="0" anchor="t"/>
           <a:lstStyle/>
           <a:p>
             <a:pPr algn="l" indent="0" marL="0">
               <a:buNone/>
             </a:pPr>
             <a:r>
-              <a:rPr lang="en-US" sz="950" i="1" dirty="0">
+              <a:rPr lang="en-US" sz="1100" i="1" dirty="0">
                 <a:solidFill>
                   <a:srgbClr val="475569"/>
                 </a:solidFill>
@@ -10343,36 +10343,56 @@
               </a:rPr>
               <a:t>програмна інженерія, ML, RAG, аномалії, 3D-друк, лідарні системи</a:t>
             </a:r>
-            <a:endParaRPr lang="en-US" sz="950" dirty="0"/>
-          </a:p>
-        </p:txBody>
-      </p:sp>
-      <p:sp>
-        <p:nvSpPr>
-          <p:cNvPr id="12" name="Text 9"/>
-          <p:cNvSpPr/>
-          <p:nvPr/>
-        </p:nvSpPr>
-        <p:spPr>
-          <a:xfrm>
-            <a:off x="1325880" y="1905000"/>
-            <a:ext cx="1508760" cy="274320"/>
-          </a:xfrm>
-          <a:prstGeom prst="rect">
-            <a:avLst/>
-          </a:prstGeom>
-          <a:noFill/>
-          <a:ln/>
-        </p:spPr>
-        <p:txBody>
-          <a:bodyPr wrap="square" lIns="0" tIns="0" rIns="0" bIns="0" rtlCol="0" anchor="ctr"/>
-          <a:lstStyle/>
-          <a:p>
-            <a:pPr algn="l" indent="0" marL="0">
-              <a:buNone/>
-            </a:pPr>
-            <a:r>
-              <a:rPr lang="en-US" sz="2200" b="1" dirty="0">
+            <a:endParaRPr lang="en-US" sz="1100" dirty="0"/>
+          </a:p>
+        </p:txBody>
+      </p:sp>
+      <p:sp>
+        <p:nvSpPr>
+          <p:cNvPr id="12" name="Shape 9"/>
+          <p:cNvSpPr/>
+          <p:nvPr/>
+        </p:nvSpPr>
+        <p:spPr>
+          <a:xfrm>
+            <a:off x="5989320" y="1600200"/>
+            <a:ext cx="13716" cy="566928"/>
+          </a:xfrm>
+          <a:prstGeom prst="rect">
+            <a:avLst/>
+          </a:prstGeom>
+          <a:solidFill>
+            <a:srgbClr val="E2E8F0"/>
+          </a:solidFill>
+          <a:ln/>
+        </p:spPr>
+      </p:sp>
+      <p:sp>
+        <p:nvSpPr>
+          <p:cNvPr id="13" name="Text 10"/>
+          <p:cNvSpPr/>
+          <p:nvPr/>
+        </p:nvSpPr>
+        <p:spPr>
+          <a:xfrm>
+            <a:off x="6126480" y="1554480"/>
+            <a:ext cx="1188720" cy="460858"/>
+          </a:xfrm>
+          <a:prstGeom prst="rect">
+            <a:avLst/>
+          </a:prstGeom>
+          <a:noFill/>
+          <a:ln/>
+        </p:spPr>
+        <p:txBody>
+          <a:bodyPr wrap="square" lIns="0" tIns="0" rIns="0" bIns="0" rtlCol="0" anchor="b"/>
+          <a:lstStyle/>
+          <a:p>
+            <a:pPr algn="ctr" indent="0" marL="0">
+              <a:buNone/>
+            </a:pPr>
+            <a:r>
+              <a:rPr lang="en-US" sz="3000" b="1" dirty="0">
                 <a:solidFill>
                   <a:srgbClr val="1E40AF"/>
                 </a:solidFill>
@@ -10382,36 +10402,36 @@
               </a:rPr>
               <a:t>10</a:t>
             </a:r>
-            <a:endParaRPr lang="en-US" sz="2200" dirty="0"/>
-          </a:p>
-        </p:txBody>
-      </p:sp>
-      <p:sp>
-        <p:nvSpPr>
-          <p:cNvPr id="13" name="Text 10"/>
-          <p:cNvSpPr/>
-          <p:nvPr/>
-        </p:nvSpPr>
-        <p:spPr>
-          <a:xfrm>
-            <a:off x="1325880" y="2179320"/>
-            <a:ext cx="1508760" cy="182880"/>
-          </a:xfrm>
-          <a:prstGeom prst="rect">
-            <a:avLst/>
-          </a:prstGeom>
-          <a:noFill/>
-          <a:ln/>
-        </p:spPr>
-        <p:txBody>
-          <a:bodyPr wrap="square" lIns="0" tIns="0" rIns="0" bIns="0" rtlCol="0" anchor="ctr"/>
-          <a:lstStyle/>
-          <a:p>
-            <a:pPr algn="l" indent="0" marL="0">
-              <a:buNone/>
-            </a:pPr>
-            <a:r>
-              <a:rPr lang="en-US" sz="900" dirty="0">
+            <a:endParaRPr lang="en-US" sz="3000" dirty="0"/>
+          </a:p>
+        </p:txBody>
+      </p:sp>
+      <p:sp>
+        <p:nvSpPr>
+          <p:cNvPr id="14" name="Text 11"/>
+          <p:cNvSpPr/>
+          <p:nvPr/>
+        </p:nvSpPr>
+        <p:spPr>
+          <a:xfrm>
+            <a:off x="6126480" y="2033626"/>
+            <a:ext cx="1188720" cy="197510"/>
+          </a:xfrm>
+          <a:prstGeom prst="rect">
+            <a:avLst/>
+          </a:prstGeom>
+          <a:noFill/>
+          <a:ln/>
+        </p:spPr>
+        <p:txBody>
+          <a:bodyPr wrap="square" lIns="0" tIns="0" rIns="0" bIns="0" rtlCol="0" anchor="t"/>
+          <a:lstStyle/>
+          <a:p>
+            <a:pPr algn="ctr" indent="0" marL="0">
+              <a:buNone/>
+            </a:pPr>
+            <a:r>
+              <a:rPr lang="en-US" sz="1000" dirty="0">
                 <a:solidFill>
                   <a:srgbClr val="64748B"/>
                 </a:solidFill>
@@ -10421,36 +10441,36 @@
               </a:rPr>
               <a:t>документи</a:t>
             </a:r>
-            <a:endParaRPr lang="en-US" sz="900" dirty="0"/>
-          </a:p>
-        </p:txBody>
-      </p:sp>
-      <p:sp>
-        <p:nvSpPr>
-          <p:cNvPr id="14" name="Text 11"/>
-          <p:cNvSpPr/>
-          <p:nvPr/>
-        </p:nvSpPr>
-        <p:spPr>
-          <a:xfrm>
-            <a:off x="2834640" y="1905000"/>
-            <a:ext cx="1508760" cy="274320"/>
-          </a:xfrm>
-          <a:prstGeom prst="rect">
-            <a:avLst/>
-          </a:prstGeom>
-          <a:noFill/>
-          <a:ln/>
-        </p:spPr>
-        <p:txBody>
-          <a:bodyPr wrap="square" lIns="0" tIns="0" rIns="0" bIns="0" rtlCol="0" anchor="ctr"/>
-          <a:lstStyle/>
-          <a:p>
-            <a:pPr algn="l" indent="0" marL="0">
-              <a:buNone/>
-            </a:pPr>
-            <a:r>
-              <a:rPr lang="en-US" sz="2200" b="1" dirty="0">
+            <a:endParaRPr lang="en-US" sz="1000" dirty="0"/>
+          </a:p>
+        </p:txBody>
+      </p:sp>
+      <p:sp>
+        <p:nvSpPr>
+          <p:cNvPr id="15" name="Text 12"/>
+          <p:cNvSpPr/>
+          <p:nvPr/>
+        </p:nvSpPr>
+        <p:spPr>
+          <a:xfrm>
+            <a:off x="7452360" y="1554480"/>
+            <a:ext cx="1188720" cy="460858"/>
+          </a:xfrm>
+          <a:prstGeom prst="rect">
+            <a:avLst/>
+          </a:prstGeom>
+          <a:noFill/>
+          <a:ln/>
+        </p:spPr>
+        <p:txBody>
+          <a:bodyPr wrap="square" lIns="0" tIns="0" rIns="0" bIns="0" rtlCol="0" anchor="b"/>
+          <a:lstStyle/>
+          <a:p>
+            <a:pPr algn="ctr" indent="0" marL="0">
+              <a:buNone/>
+            </a:pPr>
+            <a:r>
+              <a:rPr lang="en-US" sz="3000" b="1" dirty="0">
                 <a:solidFill>
                   <a:srgbClr val="1E40AF"/>
                 </a:solidFill>
@@ -10460,36 +10480,36 @@
               </a:rPr>
               <a:t>100</a:t>
             </a:r>
-            <a:endParaRPr lang="en-US" sz="2200" dirty="0"/>
-          </a:p>
-        </p:txBody>
-      </p:sp>
-      <p:sp>
-        <p:nvSpPr>
-          <p:cNvPr id="15" name="Text 12"/>
-          <p:cNvSpPr/>
-          <p:nvPr/>
-        </p:nvSpPr>
-        <p:spPr>
-          <a:xfrm>
-            <a:off x="2834640" y="2179320"/>
-            <a:ext cx="1508760" cy="182880"/>
-          </a:xfrm>
-          <a:prstGeom prst="rect">
-            <a:avLst/>
-          </a:prstGeom>
-          <a:noFill/>
-          <a:ln/>
-        </p:spPr>
-        <p:txBody>
-          <a:bodyPr wrap="square" lIns="0" tIns="0" rIns="0" bIns="0" rtlCol="0" anchor="ctr"/>
-          <a:lstStyle/>
-          <a:p>
-            <a:pPr algn="l" indent="0" marL="0">
-              <a:buNone/>
-            </a:pPr>
-            <a:r>
-              <a:rPr lang="en-US" sz="900" dirty="0">
+            <a:endParaRPr lang="en-US" sz="3000" dirty="0"/>
+          </a:p>
+        </p:txBody>
+      </p:sp>
+      <p:sp>
+        <p:nvSpPr>
+          <p:cNvPr id="16" name="Text 13"/>
+          <p:cNvSpPr/>
+          <p:nvPr/>
+        </p:nvSpPr>
+        <p:spPr>
+          <a:xfrm>
+            <a:off x="7452360" y="2033626"/>
+            <a:ext cx="1188720" cy="197510"/>
+          </a:xfrm>
+          <a:prstGeom prst="rect">
+            <a:avLst/>
+          </a:prstGeom>
+          <a:noFill/>
+          <a:ln/>
+        </p:spPr>
+        <p:txBody>
+          <a:bodyPr wrap="square" lIns="0" tIns="0" rIns="0" bIns="0" rtlCol="0" anchor="t"/>
+          <a:lstStyle/>
+          <a:p>
+            <a:pPr algn="ctr" indent="0" marL="0">
+              <a:buNone/>
+            </a:pPr>
+            <a:r>
+              <a:rPr lang="en-US" sz="1000" dirty="0">
                 <a:solidFill>
                   <a:srgbClr val="64748B"/>
                 </a:solidFill>
@@ -10499,24 +10519,24 @@
               </a:rPr>
               <a:t>запити</a:t>
             </a:r>
-            <a:endParaRPr lang="en-US" sz="900" dirty="0"/>
-          </a:p>
-        </p:txBody>
-      </p:sp>
-      <p:sp>
-        <p:nvSpPr>
-          <p:cNvPr id="16" name="Shape 13"/>
-          <p:cNvSpPr/>
-          <p:nvPr/>
-        </p:nvSpPr>
-        <p:spPr>
-          <a:xfrm>
-            <a:off x="411480" y="2499360"/>
-            <a:ext cx="4114800" cy="1036320"/>
+            <a:endParaRPr lang="en-US" sz="1000" dirty="0"/>
+          </a:p>
+        </p:txBody>
+      </p:sp>
+      <p:sp>
+        <p:nvSpPr>
+          <p:cNvPr id="17" name="Shape 14"/>
+          <p:cNvSpPr/>
+          <p:nvPr/>
+        </p:nvSpPr>
+        <p:spPr>
+          <a:xfrm>
+            <a:off x="411480" y="2505456"/>
+            <a:ext cx="8321040" cy="1024128"/>
           </a:xfrm>
           <a:prstGeom prst="roundRect">
             <a:avLst>
-              <a:gd name="adj" fmla="val 5294"/>
+              <a:gd name="adj" fmla="val 5357"/>
             </a:avLst>
           </a:prstGeom>
           <a:solidFill>
@@ -10539,14 +10559,14 @@
       </p:sp>
       <p:sp>
         <p:nvSpPr>
-          <p:cNvPr id="17" name="Shape 14"/>
-          <p:cNvSpPr/>
-          <p:nvPr/>
-        </p:nvSpPr>
-        <p:spPr>
-          <a:xfrm>
-            <a:off x="411480" y="2499360"/>
-            <a:ext cx="91440" cy="1036320"/>
+          <p:cNvPr id="18" name="Shape 15"/>
+          <p:cNvSpPr/>
+          <p:nvPr/>
+        </p:nvSpPr>
+        <p:spPr>
+          <a:xfrm>
+            <a:off x="411480" y="2505456"/>
+            <a:ext cx="91440" cy="1024128"/>
           </a:xfrm>
           <a:prstGeom prst="rect">
             <a:avLst/>
@@ -10559,14 +10579,14 @@
       </p:sp>
       <p:sp>
         <p:nvSpPr>
-          <p:cNvPr id="18" name="Shape 15"/>
-          <p:cNvSpPr/>
-          <p:nvPr/>
-        </p:nvSpPr>
-        <p:spPr>
-          <a:xfrm>
-            <a:off x="685800" y="2682240"/>
-            <a:ext cx="502920" cy="502920"/>
+          <p:cNvPr id="19" name="Shape 16"/>
+          <p:cNvSpPr/>
+          <p:nvPr/>
+        </p:nvSpPr>
+        <p:spPr>
+          <a:xfrm>
+            <a:off x="685800" y="2743200"/>
+            <a:ext cx="548640" cy="548640"/>
           </a:xfrm>
           <a:prstGeom prst="ellipse">
             <a:avLst/>
@@ -10584,7 +10604,7 @@
       </p:sp>
       <p:pic>
         <p:nvPicPr>
-          <p:cNvPr id="19" name="Image 1" descr="preencoded.png">    </p:cNvPr>
+          <p:cNvPr id="20" name="Image 1" descr="preencoded.png">    </p:cNvPr>
           <p:cNvPicPr>
             <a:picLocks noChangeAspect="1"/>
           </p:cNvPicPr>
@@ -10598,8 +10618,8 @@
         </p:blipFill>
         <p:spPr>
           <a:xfrm>
-            <a:off x="777240" y="2773680"/>
-            <a:ext cx="320040" cy="320040"/>
+            <a:off x="795528" y="2852928"/>
+            <a:ext cx="329184" cy="329184"/>
           </a:xfrm>
           <a:prstGeom prst="rect">
             <a:avLst/>
@@ -10608,14 +10628,14 @@
       </p:pic>
       <p:sp>
         <p:nvSpPr>
-          <p:cNvPr id="20" name="Text 16"/>
-          <p:cNvSpPr/>
-          <p:nvPr/>
-        </p:nvSpPr>
-        <p:spPr>
-          <a:xfrm>
-            <a:off x="1325880" y="2590800"/>
-            <a:ext cx="3017520" cy="274320"/>
+          <p:cNvPr id="21" name="Text 17"/>
+          <p:cNvSpPr/>
+          <p:nvPr/>
+        </p:nvSpPr>
+        <p:spPr>
+          <a:xfrm>
+            <a:off x="1417320" y="2688336"/>
+            <a:ext cx="4846320" cy="329184"/>
           </a:xfrm>
           <a:prstGeom prst="rect">
             <a:avLst/>
@@ -10631,7 +10651,7 @@
               <a:buNone/>
             </a:pPr>
             <a:r>
-              <a:rPr lang="en-US" sz="1300" b="1" dirty="0">
+              <a:rPr lang="en-US" sz="1600" b="1" dirty="0">
                 <a:solidFill>
                   <a:srgbClr val="1E293B"/>
                 </a:solidFill>
@@ -10641,36 +10661,36 @@
               </a:rPr>
               <a:t>Юридичний</a:t>
             </a:r>
-            <a:endParaRPr lang="en-US" sz="1300" dirty="0"/>
-          </a:p>
-        </p:txBody>
-      </p:sp>
-      <p:sp>
-        <p:nvSpPr>
-          <p:cNvPr id="21" name="Text 17"/>
-          <p:cNvSpPr/>
-          <p:nvPr/>
-        </p:nvSpPr>
-        <p:spPr>
-          <a:xfrm>
-            <a:off x="1325880" y="2819400"/>
-            <a:ext cx="3017520" cy="274320"/>
-          </a:xfrm>
-          <a:prstGeom prst="rect">
-            <a:avLst/>
-          </a:prstGeom>
-          <a:noFill/>
-          <a:ln/>
-        </p:spPr>
-        <p:txBody>
-          <a:bodyPr wrap="square" lIns="0" tIns="0" rIns="0" bIns="0" rtlCol="0" anchor="ctr"/>
+            <a:endParaRPr lang="en-US" sz="1600" dirty="0"/>
+          </a:p>
+        </p:txBody>
+      </p:sp>
+      <p:sp>
+        <p:nvSpPr>
+          <p:cNvPr id="22" name="Text 18"/>
+          <p:cNvSpPr/>
+          <p:nvPr/>
+        </p:nvSpPr>
+        <p:spPr>
+          <a:xfrm>
+            <a:off x="1417320" y="3054096"/>
+            <a:ext cx="4846320" cy="365760"/>
+          </a:xfrm>
+          <a:prstGeom prst="rect">
+            <a:avLst/>
+          </a:prstGeom>
+          <a:noFill/>
+          <a:ln/>
+        </p:spPr>
+        <p:txBody>
+          <a:bodyPr wrap="square" lIns="0" tIns="0" rIns="0" bIns="0" rtlCol="0" anchor="t"/>
           <a:lstStyle/>
           <a:p>
             <a:pPr algn="l" indent="0" marL="0">
               <a:buNone/>
             </a:pPr>
             <a:r>
-              <a:rPr lang="en-US" sz="950" i="1" dirty="0">
+              <a:rPr lang="en-US" sz="1100" i="1" dirty="0">
                 <a:solidFill>
                   <a:srgbClr val="475569"/>
                 </a:solidFill>
@@ -10680,36 +10700,56 @@
               </a:rPr>
               <a:t>кодекси, нормативно-правові акти, законодавство</a:t>
             </a:r>
-            <a:endParaRPr lang="en-US" sz="950" dirty="0"/>
-          </a:p>
-        </p:txBody>
-      </p:sp>
-      <p:sp>
-        <p:nvSpPr>
-          <p:cNvPr id="22" name="Text 18"/>
-          <p:cNvSpPr/>
-          <p:nvPr/>
-        </p:nvSpPr>
-        <p:spPr>
-          <a:xfrm>
-            <a:off x="1325880" y="3032760"/>
-            <a:ext cx="1508760" cy="274320"/>
-          </a:xfrm>
-          <a:prstGeom prst="rect">
-            <a:avLst/>
-          </a:prstGeom>
-          <a:noFill/>
-          <a:ln/>
-        </p:spPr>
-        <p:txBody>
-          <a:bodyPr wrap="square" lIns="0" tIns="0" rIns="0" bIns="0" rtlCol="0" anchor="ctr"/>
-          <a:lstStyle/>
-          <a:p>
-            <a:pPr algn="l" indent="0" marL="0">
-              <a:buNone/>
-            </a:pPr>
-            <a:r>
-              <a:rPr lang="en-US" sz="2200" b="1" dirty="0">
+            <a:endParaRPr lang="en-US" sz="1100" dirty="0"/>
+          </a:p>
+        </p:txBody>
+      </p:sp>
+      <p:sp>
+        <p:nvSpPr>
+          <p:cNvPr id="23" name="Shape 19"/>
+          <p:cNvSpPr/>
+          <p:nvPr/>
+        </p:nvSpPr>
+        <p:spPr>
+          <a:xfrm>
+            <a:off x="5989320" y="2734056"/>
+            <a:ext cx="13716" cy="566928"/>
+          </a:xfrm>
+          <a:prstGeom prst="rect">
+            <a:avLst/>
+          </a:prstGeom>
+          <a:solidFill>
+            <a:srgbClr val="E2E8F0"/>
+          </a:solidFill>
+          <a:ln/>
+        </p:spPr>
+      </p:sp>
+      <p:sp>
+        <p:nvSpPr>
+          <p:cNvPr id="24" name="Text 20"/>
+          <p:cNvSpPr/>
+          <p:nvPr/>
+        </p:nvSpPr>
+        <p:spPr>
+          <a:xfrm>
+            <a:off x="6126480" y="2688336"/>
+            <a:ext cx="1188720" cy="460858"/>
+          </a:xfrm>
+          <a:prstGeom prst="rect">
+            <a:avLst/>
+          </a:prstGeom>
+          <a:noFill/>
+          <a:ln/>
+        </p:spPr>
+        <p:txBody>
+          <a:bodyPr wrap="square" lIns="0" tIns="0" rIns="0" bIns="0" rtlCol="0" anchor="b"/>
+          <a:lstStyle/>
+          <a:p>
+            <a:pPr algn="ctr" indent="0" marL="0">
+              <a:buNone/>
+            </a:pPr>
+            <a:r>
+              <a:rPr lang="en-US" sz="3000" b="1" dirty="0">
                 <a:solidFill>
                   <a:srgbClr val="7C3AED"/>
                 </a:solidFill>
@@ -10719,36 +10759,36 @@
               </a:rPr>
               <a:t>13</a:t>
             </a:r>
-            <a:endParaRPr lang="en-US" sz="2200" dirty="0"/>
-          </a:p>
-        </p:txBody>
-      </p:sp>
-      <p:sp>
-        <p:nvSpPr>
-          <p:cNvPr id="23" name="Text 19"/>
-          <p:cNvSpPr/>
-          <p:nvPr/>
-        </p:nvSpPr>
-        <p:spPr>
-          <a:xfrm>
-            <a:off x="1325880" y="3307080"/>
-            <a:ext cx="1508760" cy="182880"/>
-          </a:xfrm>
-          <a:prstGeom prst="rect">
-            <a:avLst/>
-          </a:prstGeom>
-          <a:noFill/>
-          <a:ln/>
-        </p:spPr>
-        <p:txBody>
-          <a:bodyPr wrap="square" lIns="0" tIns="0" rIns="0" bIns="0" rtlCol="0" anchor="ctr"/>
-          <a:lstStyle/>
-          <a:p>
-            <a:pPr algn="l" indent="0" marL="0">
-              <a:buNone/>
-            </a:pPr>
-            <a:r>
-              <a:rPr lang="en-US" sz="900" dirty="0">
+            <a:endParaRPr lang="en-US" sz="3000" dirty="0"/>
+          </a:p>
+        </p:txBody>
+      </p:sp>
+      <p:sp>
+        <p:nvSpPr>
+          <p:cNvPr id="25" name="Text 21"/>
+          <p:cNvSpPr/>
+          <p:nvPr/>
+        </p:nvSpPr>
+        <p:spPr>
+          <a:xfrm>
+            <a:off x="6126480" y="3167482"/>
+            <a:ext cx="1188720" cy="197510"/>
+          </a:xfrm>
+          <a:prstGeom prst="rect">
+            <a:avLst/>
+          </a:prstGeom>
+          <a:noFill/>
+          <a:ln/>
+        </p:spPr>
+        <p:txBody>
+          <a:bodyPr wrap="square" lIns="0" tIns="0" rIns="0" bIns="0" rtlCol="0" anchor="t"/>
+          <a:lstStyle/>
+          <a:p>
+            <a:pPr algn="ctr" indent="0" marL="0">
+              <a:buNone/>
+            </a:pPr>
+            <a:r>
+              <a:rPr lang="en-US" sz="1000" dirty="0">
                 <a:solidFill>
                   <a:srgbClr val="64748B"/>
                 </a:solidFill>
@@ -10758,36 +10798,36 @@
               </a:rPr>
               <a:t>документи</a:t>
             </a:r>
-            <a:endParaRPr lang="en-US" sz="900" dirty="0"/>
-          </a:p>
-        </p:txBody>
-      </p:sp>
-      <p:sp>
-        <p:nvSpPr>
-          <p:cNvPr id="24" name="Text 20"/>
-          <p:cNvSpPr/>
-          <p:nvPr/>
-        </p:nvSpPr>
-        <p:spPr>
-          <a:xfrm>
-            <a:off x="2834640" y="3032760"/>
-            <a:ext cx="1508760" cy="274320"/>
-          </a:xfrm>
-          <a:prstGeom prst="rect">
-            <a:avLst/>
-          </a:prstGeom>
-          <a:noFill/>
-          <a:ln/>
-        </p:spPr>
-        <p:txBody>
-          <a:bodyPr wrap="square" lIns="0" tIns="0" rIns="0" bIns="0" rtlCol="0" anchor="ctr"/>
-          <a:lstStyle/>
-          <a:p>
-            <a:pPr algn="l" indent="0" marL="0">
-              <a:buNone/>
-            </a:pPr>
-            <a:r>
-              <a:rPr lang="en-US" sz="2200" b="1" dirty="0">
+            <a:endParaRPr lang="en-US" sz="1000" dirty="0"/>
+          </a:p>
+        </p:txBody>
+      </p:sp>
+      <p:sp>
+        <p:nvSpPr>
+          <p:cNvPr id="26" name="Text 22"/>
+          <p:cNvSpPr/>
+          <p:nvPr/>
+        </p:nvSpPr>
+        <p:spPr>
+          <a:xfrm>
+            <a:off x="7452360" y="2688336"/>
+            <a:ext cx="1188720" cy="460858"/>
+          </a:xfrm>
+          <a:prstGeom prst="rect">
+            <a:avLst/>
+          </a:prstGeom>
+          <a:noFill/>
+          <a:ln/>
+        </p:spPr>
+        <p:txBody>
+          <a:bodyPr wrap="square" lIns="0" tIns="0" rIns="0" bIns="0" rtlCol="0" anchor="b"/>
+          <a:lstStyle/>
+          <a:p>
+            <a:pPr algn="ctr" indent="0" marL="0">
+              <a:buNone/>
+            </a:pPr>
+            <a:r>
+              <a:rPr lang="en-US" sz="3000" b="1" dirty="0">
                 <a:solidFill>
                   <a:srgbClr val="7C3AED"/>
                 </a:solidFill>
@@ -10797,36 +10837,36 @@
               </a:rPr>
               <a:t>100</a:t>
             </a:r>
-            <a:endParaRPr lang="en-US" sz="2200" dirty="0"/>
-          </a:p>
-        </p:txBody>
-      </p:sp>
-      <p:sp>
-        <p:nvSpPr>
-          <p:cNvPr id="25" name="Text 21"/>
-          <p:cNvSpPr/>
-          <p:nvPr/>
-        </p:nvSpPr>
-        <p:spPr>
-          <a:xfrm>
-            <a:off x="2834640" y="3307080"/>
-            <a:ext cx="1508760" cy="182880"/>
-          </a:xfrm>
-          <a:prstGeom prst="rect">
-            <a:avLst/>
-          </a:prstGeom>
-          <a:noFill/>
-          <a:ln/>
-        </p:spPr>
-        <p:txBody>
-          <a:bodyPr wrap="square" lIns="0" tIns="0" rIns="0" bIns="0" rtlCol="0" anchor="ctr"/>
-          <a:lstStyle/>
-          <a:p>
-            <a:pPr algn="l" indent="0" marL="0">
-              <a:buNone/>
-            </a:pPr>
-            <a:r>
-              <a:rPr lang="en-US" sz="900" dirty="0">
+            <a:endParaRPr lang="en-US" sz="3000" dirty="0"/>
+          </a:p>
+        </p:txBody>
+      </p:sp>
+      <p:sp>
+        <p:nvSpPr>
+          <p:cNvPr id="27" name="Text 23"/>
+          <p:cNvSpPr/>
+          <p:nvPr/>
+        </p:nvSpPr>
+        <p:spPr>
+          <a:xfrm>
+            <a:off x="7452360" y="3167482"/>
+            <a:ext cx="1188720" cy="197510"/>
+          </a:xfrm>
+          <a:prstGeom prst="rect">
+            <a:avLst/>
+          </a:prstGeom>
+          <a:noFill/>
+          <a:ln/>
+        </p:spPr>
+        <p:txBody>
+          <a:bodyPr wrap="square" lIns="0" tIns="0" rIns="0" bIns="0" rtlCol="0" anchor="t"/>
+          <a:lstStyle/>
+          <a:p>
+            <a:pPr algn="ctr" indent="0" marL="0">
+              <a:buNone/>
+            </a:pPr>
+            <a:r>
+              <a:rPr lang="en-US" sz="1000" dirty="0">
                 <a:solidFill>
                   <a:srgbClr val="64748B"/>
                 </a:solidFill>
@@ -10836,24 +10876,24 @@
               </a:rPr>
               <a:t>запити</a:t>
             </a:r>
-            <a:endParaRPr lang="en-US" sz="900" dirty="0"/>
-          </a:p>
-        </p:txBody>
-      </p:sp>
-      <p:sp>
-        <p:nvSpPr>
-          <p:cNvPr id="26" name="Shape 22"/>
-          <p:cNvSpPr/>
-          <p:nvPr/>
-        </p:nvSpPr>
-        <p:spPr>
-          <a:xfrm>
-            <a:off x="411480" y="3627120"/>
-            <a:ext cx="4114800" cy="1036320"/>
+            <a:endParaRPr lang="en-US" sz="1000" dirty="0"/>
+          </a:p>
+        </p:txBody>
+      </p:sp>
+      <p:sp>
+        <p:nvSpPr>
+          <p:cNvPr id="28" name="Shape 24"/>
+          <p:cNvSpPr/>
+          <p:nvPr/>
+        </p:nvSpPr>
+        <p:spPr>
+          <a:xfrm>
+            <a:off x="411480" y="3639312"/>
+            <a:ext cx="8321040" cy="1024128"/>
           </a:xfrm>
           <a:prstGeom prst="roundRect">
             <a:avLst>
-              <a:gd name="adj" fmla="val 5294"/>
+              <a:gd name="adj" fmla="val 5357"/>
             </a:avLst>
           </a:prstGeom>
           <a:solidFill>
@@ -10876,14 +10916,14 @@
       </p:sp>
       <p:sp>
         <p:nvSpPr>
-          <p:cNvPr id="27" name="Shape 23"/>
-          <p:cNvSpPr/>
-          <p:nvPr/>
-        </p:nvSpPr>
-        <p:spPr>
-          <a:xfrm>
-            <a:off x="411480" y="3627120"/>
-            <a:ext cx="91440" cy="1036320"/>
+          <p:cNvPr id="29" name="Shape 25"/>
+          <p:cNvSpPr/>
+          <p:nvPr/>
+        </p:nvSpPr>
+        <p:spPr>
+          <a:xfrm>
+            <a:off x="411480" y="3639312"/>
+            <a:ext cx="91440" cy="1024128"/>
           </a:xfrm>
           <a:prstGeom prst="rect">
             <a:avLst/>
@@ -10896,14 +10936,14 @@
       </p:sp>
       <p:sp>
         <p:nvSpPr>
-          <p:cNvPr id="28" name="Shape 24"/>
-          <p:cNvSpPr/>
-          <p:nvPr/>
-        </p:nvSpPr>
-        <p:spPr>
-          <a:xfrm>
-            <a:off x="685800" y="3810000"/>
-            <a:ext cx="502920" cy="502920"/>
+          <p:cNvPr id="30" name="Shape 26"/>
+          <p:cNvSpPr/>
+          <p:nvPr/>
+        </p:nvSpPr>
+        <p:spPr>
+          <a:xfrm>
+            <a:off x="685800" y="3877056"/>
+            <a:ext cx="548640" cy="548640"/>
           </a:xfrm>
           <a:prstGeom prst="ellipse">
             <a:avLst/>
@@ -10921,7 +10961,7 @@
       </p:sp>
       <p:pic>
         <p:nvPicPr>
-          <p:cNvPr id="29" name="Image 2" descr="preencoded.png">    </p:cNvPr>
+          <p:cNvPr id="31" name="Image 2" descr="preencoded.png">    </p:cNvPr>
           <p:cNvPicPr>
             <a:picLocks noChangeAspect="1"/>
           </p:cNvPicPr>
@@ -10935,8 +10975,8 @@
         </p:blipFill>
         <p:spPr>
           <a:xfrm>
-            <a:off x="777240" y="3901440"/>
-            <a:ext cx="320040" cy="320040"/>
+            <a:off x="795528" y="3986784"/>
+            <a:ext cx="329184" cy="329184"/>
           </a:xfrm>
           <a:prstGeom prst="rect">
             <a:avLst/>
@@ -10945,14 +10985,14 @@
       </p:pic>
       <p:sp>
         <p:nvSpPr>
-          <p:cNvPr id="30" name="Text 25"/>
-          <p:cNvSpPr/>
-          <p:nvPr/>
-        </p:nvSpPr>
-        <p:spPr>
-          <a:xfrm>
-            <a:off x="1325880" y="3718560"/>
-            <a:ext cx="3017520" cy="274320"/>
+          <p:cNvPr id="32" name="Text 27"/>
+          <p:cNvSpPr/>
+          <p:nvPr/>
+        </p:nvSpPr>
+        <p:spPr>
+          <a:xfrm>
+            <a:off x="1417320" y="3822192"/>
+            <a:ext cx="4846320" cy="329184"/>
           </a:xfrm>
           <a:prstGeom prst="rect">
             <a:avLst/>
@@ -10968,7 +11008,7 @@
               <a:buNone/>
             </a:pPr>
             <a:r>
-              <a:rPr lang="en-US" sz="1300" b="1" dirty="0">
+              <a:rPr lang="en-US" sz="1600" b="1" dirty="0">
                 <a:solidFill>
                   <a:srgbClr val="1E293B"/>
                 </a:solidFill>
@@ -10978,36 +11018,36 @@
               </a:rPr>
               <a:t>Медичний</a:t>
             </a:r>
-            <a:endParaRPr lang="en-US" sz="1300" dirty="0"/>
-          </a:p>
-        </p:txBody>
-      </p:sp>
-      <p:sp>
-        <p:nvSpPr>
-          <p:cNvPr id="31" name="Text 26"/>
-          <p:cNvSpPr/>
-          <p:nvPr/>
-        </p:nvSpPr>
-        <p:spPr>
-          <a:xfrm>
-            <a:off x="1325880" y="3947160"/>
-            <a:ext cx="3017520" cy="274320"/>
-          </a:xfrm>
-          <a:prstGeom prst="rect">
-            <a:avLst/>
-          </a:prstGeom>
-          <a:noFill/>
-          <a:ln/>
-        </p:spPr>
-        <p:txBody>
-          <a:bodyPr wrap="square" lIns="0" tIns="0" rIns="0" bIns="0" rtlCol="0" anchor="ctr"/>
+            <a:endParaRPr lang="en-US" sz="1600" dirty="0"/>
+          </a:p>
+        </p:txBody>
+      </p:sp>
+      <p:sp>
+        <p:nvSpPr>
+          <p:cNvPr id="33" name="Text 28"/>
+          <p:cNvSpPr/>
+          <p:nvPr/>
+        </p:nvSpPr>
+        <p:spPr>
+          <a:xfrm>
+            <a:off x="1417320" y="4187952"/>
+            <a:ext cx="4846320" cy="365760"/>
+          </a:xfrm>
+          <a:prstGeom prst="rect">
+            <a:avLst/>
+          </a:prstGeom>
+          <a:noFill/>
+          <a:ln/>
+        </p:spPr>
+        <p:txBody>
+          <a:bodyPr wrap="square" lIns="0" tIns="0" rIns="0" bIns="0" rtlCol="0" anchor="t"/>
           <a:lstStyle/>
           <a:p>
             <a:pPr algn="l" indent="0" marL="0">
               <a:buNone/>
             </a:pPr>
             <a:r>
-              <a:rPr lang="en-US" sz="950" i="1" dirty="0">
+              <a:rPr lang="en-US" sz="1100" i="1" dirty="0">
                 <a:solidFill>
                   <a:srgbClr val="475569"/>
                 </a:solidFill>
@@ -11017,600 +11057,20 @@
               </a:rPr>
               <a:t>клінічні протоколи, медичні рекомендації</a:t>
             </a:r>
-            <a:endParaRPr lang="en-US" sz="950" dirty="0"/>
-          </a:p>
-        </p:txBody>
-      </p:sp>
-      <p:sp>
-        <p:nvSpPr>
-          <p:cNvPr id="32" name="Text 27"/>
-          <p:cNvSpPr/>
-          <p:nvPr/>
-        </p:nvSpPr>
-        <p:spPr>
-          <a:xfrm>
-            <a:off x="1325880" y="4160520"/>
-            <a:ext cx="1508760" cy="274320"/>
-          </a:xfrm>
-          <a:prstGeom prst="rect">
-            <a:avLst/>
-          </a:prstGeom>
-          <a:noFill/>
-          <a:ln/>
-        </p:spPr>
-        <p:txBody>
-          <a:bodyPr wrap="square" lIns="0" tIns="0" rIns="0" bIns="0" rtlCol="0" anchor="ctr"/>
-          <a:lstStyle/>
-          <a:p>
-            <a:pPr algn="l" indent="0" marL="0">
-              <a:buNone/>
-            </a:pPr>
-            <a:r>
-              <a:rPr lang="en-US" sz="2200" b="1" dirty="0">
-                <a:solidFill>
-                  <a:srgbClr val="E11D48"/>
-                </a:solidFill>
-                <a:latin typeface="Calibri" pitchFamily="34" charset="0"/>
-                <a:ea typeface="Calibri" pitchFamily="34" charset="-122"/>
-                <a:cs typeface="Calibri" pitchFamily="34" charset="-120"/>
-              </a:rPr>
-              <a:t>9</a:t>
-            </a:r>
-            <a:endParaRPr lang="en-US" sz="2200" dirty="0"/>
-          </a:p>
-        </p:txBody>
-      </p:sp>
-      <p:sp>
-        <p:nvSpPr>
-          <p:cNvPr id="33" name="Text 28"/>
-          <p:cNvSpPr/>
-          <p:nvPr/>
-        </p:nvSpPr>
-        <p:spPr>
-          <a:xfrm>
-            <a:off x="1325880" y="4434840"/>
-            <a:ext cx="1508760" cy="182880"/>
-          </a:xfrm>
-          <a:prstGeom prst="rect">
-            <a:avLst/>
-          </a:prstGeom>
-          <a:noFill/>
-          <a:ln/>
-        </p:spPr>
-        <p:txBody>
-          <a:bodyPr wrap="square" lIns="0" tIns="0" rIns="0" bIns="0" rtlCol="0" anchor="ctr"/>
-          <a:lstStyle/>
-          <a:p>
-            <a:pPr algn="l" indent="0" marL="0">
-              <a:buNone/>
-            </a:pPr>
-            <a:r>
-              <a:rPr lang="en-US" sz="900" dirty="0">
-                <a:solidFill>
-                  <a:srgbClr val="64748B"/>
-                </a:solidFill>
-                <a:latin typeface="Calibri" pitchFamily="34" charset="0"/>
-                <a:ea typeface="Calibri" pitchFamily="34" charset="-122"/>
-                <a:cs typeface="Calibri" pitchFamily="34" charset="-120"/>
-              </a:rPr>
-              <a:t>документи</a:t>
-            </a:r>
-            <a:endParaRPr lang="en-US" sz="900" dirty="0"/>
-          </a:p>
-        </p:txBody>
-      </p:sp>
-      <p:sp>
-        <p:nvSpPr>
-          <p:cNvPr id="34" name="Text 29"/>
-          <p:cNvSpPr/>
-          <p:nvPr/>
-        </p:nvSpPr>
-        <p:spPr>
-          <a:xfrm>
-            <a:off x="2834640" y="4160520"/>
-            <a:ext cx="1508760" cy="274320"/>
-          </a:xfrm>
-          <a:prstGeom prst="rect">
-            <a:avLst/>
-          </a:prstGeom>
-          <a:noFill/>
-          <a:ln/>
-        </p:spPr>
-        <p:txBody>
-          <a:bodyPr wrap="square" lIns="0" tIns="0" rIns="0" bIns="0" rtlCol="0" anchor="ctr"/>
-          <a:lstStyle/>
-          <a:p>
-            <a:pPr algn="l" indent="0" marL="0">
-              <a:buNone/>
-            </a:pPr>
-            <a:r>
-              <a:rPr lang="en-US" sz="2200" b="1" dirty="0">
-                <a:solidFill>
-                  <a:srgbClr val="E11D48"/>
-                </a:solidFill>
-                <a:latin typeface="Calibri" pitchFamily="34" charset="0"/>
-                <a:ea typeface="Calibri" pitchFamily="34" charset="-122"/>
-                <a:cs typeface="Calibri" pitchFamily="34" charset="-120"/>
-              </a:rPr>
-              <a:t>100</a:t>
-            </a:r>
-            <a:endParaRPr lang="en-US" sz="2200" dirty="0"/>
-          </a:p>
-        </p:txBody>
-      </p:sp>
-      <p:sp>
-        <p:nvSpPr>
-          <p:cNvPr id="35" name="Text 30"/>
-          <p:cNvSpPr/>
-          <p:nvPr/>
-        </p:nvSpPr>
-        <p:spPr>
-          <a:xfrm>
-            <a:off x="2834640" y="4434840"/>
-            <a:ext cx="1508760" cy="182880"/>
-          </a:xfrm>
-          <a:prstGeom prst="rect">
-            <a:avLst/>
-          </a:prstGeom>
-          <a:noFill/>
-          <a:ln/>
-        </p:spPr>
-        <p:txBody>
-          <a:bodyPr wrap="square" lIns="0" tIns="0" rIns="0" bIns="0" rtlCol="0" anchor="ctr"/>
-          <a:lstStyle/>
-          <a:p>
-            <a:pPr algn="l" indent="0" marL="0">
-              <a:buNone/>
-            </a:pPr>
-            <a:r>
-              <a:rPr lang="en-US" sz="900" dirty="0">
-                <a:solidFill>
-                  <a:srgbClr val="64748B"/>
-                </a:solidFill>
-                <a:latin typeface="Calibri" pitchFamily="34" charset="0"/>
-                <a:ea typeface="Calibri" pitchFamily="34" charset="-122"/>
-                <a:cs typeface="Calibri" pitchFamily="34" charset="-120"/>
-              </a:rPr>
-              <a:t>запити</a:t>
-            </a:r>
-            <a:endParaRPr lang="en-US" sz="900" dirty="0"/>
-          </a:p>
-        </p:txBody>
-      </p:sp>
-      <p:sp>
-        <p:nvSpPr>
-          <p:cNvPr id="36" name="Shape 31"/>
-          <p:cNvSpPr/>
-          <p:nvPr/>
-        </p:nvSpPr>
-        <p:spPr>
-          <a:xfrm>
-            <a:off x="4709160" y="1371600"/>
-            <a:ext cx="4023360" cy="3291840"/>
-          </a:xfrm>
-          <a:prstGeom prst="roundRect">
-            <a:avLst>
-              <a:gd name="adj" fmla="val 1667"/>
-            </a:avLst>
-          </a:prstGeom>
-          <a:solidFill>
-            <a:srgbClr val="F8FAFC"/>
-          </a:solidFill>
-          <a:ln w="9525">
-            <a:solidFill>
-              <a:srgbClr val="E2E8F0"/>
-            </a:solidFill>
-            <a:prstDash val="solid"/>
-          </a:ln>
-          <a:effectLst>
-            <a:outerShdw sx="100000" sy="100000" kx="0" ky="0" algn="bl" rotWithShape="0" blurRad="76200" dist="12700" dir="5400000">
-              <a:srgbClr val="000000">
-                <a:alpha val="7000"/>
-              </a:srgbClr>
-            </a:outerShdw>
-          </a:effectLst>
-        </p:spPr>
-      </p:sp>
-      <p:sp>
-        <p:nvSpPr>
-          <p:cNvPr id="37" name="Text 32"/>
-          <p:cNvSpPr/>
-          <p:nvPr/>
-        </p:nvSpPr>
-        <p:spPr>
-          <a:xfrm>
-            <a:off x="4892040" y="1508760"/>
-            <a:ext cx="3657600" cy="228600"/>
-          </a:xfrm>
-          <a:prstGeom prst="rect">
-            <a:avLst/>
-          </a:prstGeom>
-          <a:noFill/>
-          <a:ln/>
-        </p:spPr>
-        <p:txBody>
-          <a:bodyPr wrap="square" lIns="0" tIns="0" rIns="0" bIns="0" rtlCol="0" anchor="ctr"/>
-          <a:lstStyle/>
-          <a:p>
-            <a:pPr algn="l" indent="0" marL="0">
-              <a:buNone/>
-            </a:pPr>
-            <a:r>
-              <a:rPr lang="en-US" sz="900" b="1" spc="200" kern="0" dirty="0">
-                <a:solidFill>
-                  <a:srgbClr val="64748B"/>
-                </a:solidFill>
-                <a:latin typeface="Calibri" pitchFamily="34" charset="0"/>
-                <a:ea typeface="Calibri" pitchFamily="34" charset="-122"/>
-                <a:cs typeface="Calibri" pitchFamily="34" charset="-120"/>
-              </a:rPr>
-              <a:t>ЗБАЛАНСОВАНА ОЦІНКА</a:t>
-            </a:r>
-            <a:endParaRPr lang="en-US" sz="900" dirty="0"/>
-          </a:p>
-        </p:txBody>
-      </p:sp>
-      <p:sp>
-        <p:nvSpPr>
-          <p:cNvPr id="38" name="Text 33"/>
-          <p:cNvSpPr/>
-          <p:nvPr/>
-        </p:nvSpPr>
-        <p:spPr>
-          <a:xfrm>
-            <a:off x="4892040" y="1874520"/>
-            <a:ext cx="1219200" cy="1097280"/>
-          </a:xfrm>
-          <a:prstGeom prst="rect">
-            <a:avLst/>
-          </a:prstGeom>
-          <a:noFill/>
-          <a:ln/>
-        </p:spPr>
-        <p:txBody>
-          <a:bodyPr wrap="square" lIns="0" tIns="0" rIns="0" bIns="0" rtlCol="0" anchor="ctr"/>
-          <a:lstStyle/>
-          <a:p>
-            <a:pPr algn="ctr" indent="0" marL="0">
-              <a:buNone/>
-            </a:pPr>
-            <a:r>
-              <a:rPr lang="en-US" sz="6000" b="1" dirty="0">
-                <a:solidFill>
-                  <a:srgbClr val="1E40AF"/>
-                </a:solidFill>
-                <a:latin typeface="Calibri" pitchFamily="34" charset="0"/>
-                <a:ea typeface="Calibri" pitchFamily="34" charset="-122"/>
-                <a:cs typeface="Calibri" pitchFamily="34" charset="-120"/>
-              </a:rPr>
-              <a:t>100</a:t>
-            </a:r>
-            <a:endParaRPr lang="en-US" sz="6000" dirty="0"/>
-          </a:p>
-        </p:txBody>
-      </p:sp>
-      <p:sp>
-        <p:nvSpPr>
-          <p:cNvPr id="39" name="Text 34"/>
-          <p:cNvSpPr/>
-          <p:nvPr/>
-        </p:nvSpPr>
-        <p:spPr>
-          <a:xfrm>
-            <a:off x="4892040" y="2971800"/>
-            <a:ext cx="1219200" cy="274320"/>
-          </a:xfrm>
-          <a:prstGeom prst="rect">
-            <a:avLst/>
-          </a:prstGeom>
-          <a:noFill/>
-          <a:ln/>
-        </p:spPr>
-        <p:txBody>
-          <a:bodyPr wrap="square" lIns="0" tIns="0" rIns="0" bIns="0" rtlCol="0" anchor="ctr"/>
-          <a:lstStyle/>
-          <a:p>
-            <a:pPr algn="ctr" indent="0" marL="0">
-              <a:buNone/>
-            </a:pPr>
-            <a:r>
-              <a:rPr lang="en-US" sz="1100" b="1" dirty="0">
-                <a:solidFill>
-                  <a:srgbClr val="1E293B"/>
-                </a:solidFill>
-                <a:latin typeface="Calibri" pitchFamily="34" charset="0"/>
-                <a:ea typeface="Calibri" pitchFamily="34" charset="-122"/>
-                <a:cs typeface="Calibri" pitchFamily="34" charset="-120"/>
-              </a:rPr>
-              <a:t>Технічний</a:t>
-            </a:r>
             <a:endParaRPr lang="en-US" sz="1100" dirty="0"/>
           </a:p>
         </p:txBody>
       </p:sp>
       <p:sp>
         <p:nvSpPr>
-          <p:cNvPr id="40" name="Text 35"/>
-          <p:cNvSpPr/>
-          <p:nvPr/>
-        </p:nvSpPr>
-        <p:spPr>
-          <a:xfrm>
-            <a:off x="4892040" y="3227832"/>
-            <a:ext cx="1219200" cy="201168"/>
-          </a:xfrm>
-          <a:prstGeom prst="rect">
-            <a:avLst/>
-          </a:prstGeom>
-          <a:noFill/>
-          <a:ln/>
-        </p:spPr>
-        <p:txBody>
-          <a:bodyPr wrap="square" lIns="0" tIns="0" rIns="0" bIns="0" rtlCol="0" anchor="ctr"/>
-          <a:lstStyle/>
-          <a:p>
-            <a:pPr algn="ctr" indent="0" marL="0">
-              <a:buNone/>
-            </a:pPr>
-            <a:r>
-              <a:rPr lang="en-US" sz="900" dirty="0">
-                <a:solidFill>
-                  <a:srgbClr val="64748B"/>
-                </a:solidFill>
-                <a:latin typeface="Calibri" pitchFamily="34" charset="0"/>
-                <a:ea typeface="Calibri" pitchFamily="34" charset="-122"/>
-                <a:cs typeface="Calibri" pitchFamily="34" charset="-120"/>
-              </a:rPr>
-              <a:t>запитів</a:t>
-            </a:r>
-            <a:endParaRPr lang="en-US" sz="900" dirty="0"/>
-          </a:p>
-        </p:txBody>
-      </p:sp>
-      <p:sp>
-        <p:nvSpPr>
-          <p:cNvPr id="41" name="Text 36"/>
-          <p:cNvSpPr/>
-          <p:nvPr/>
-        </p:nvSpPr>
-        <p:spPr>
-          <a:xfrm>
-            <a:off x="6111240" y="1874520"/>
-            <a:ext cx="1219200" cy="1097280"/>
-          </a:xfrm>
-          <a:prstGeom prst="rect">
-            <a:avLst/>
-          </a:prstGeom>
-          <a:noFill/>
-          <a:ln/>
-        </p:spPr>
-        <p:txBody>
-          <a:bodyPr wrap="square" lIns="0" tIns="0" rIns="0" bIns="0" rtlCol="0" anchor="ctr"/>
-          <a:lstStyle/>
-          <a:p>
-            <a:pPr algn="ctr" indent="0" marL="0">
-              <a:buNone/>
-            </a:pPr>
-            <a:r>
-              <a:rPr lang="en-US" sz="6000" b="1" dirty="0">
-                <a:solidFill>
-                  <a:srgbClr val="7C3AED"/>
-                </a:solidFill>
-                <a:latin typeface="Calibri" pitchFamily="34" charset="0"/>
-                <a:ea typeface="Calibri" pitchFamily="34" charset="-122"/>
-                <a:cs typeface="Calibri" pitchFamily="34" charset="-120"/>
-              </a:rPr>
-              <a:t>100</a:t>
-            </a:r>
-            <a:endParaRPr lang="en-US" sz="6000" dirty="0"/>
-          </a:p>
-        </p:txBody>
-      </p:sp>
-      <p:sp>
-        <p:nvSpPr>
-          <p:cNvPr id="42" name="Text 37"/>
-          <p:cNvSpPr/>
-          <p:nvPr/>
-        </p:nvSpPr>
-        <p:spPr>
-          <a:xfrm>
-            <a:off x="6111240" y="2971800"/>
-            <a:ext cx="1219200" cy="274320"/>
-          </a:xfrm>
-          <a:prstGeom prst="rect">
-            <a:avLst/>
-          </a:prstGeom>
-          <a:noFill/>
-          <a:ln/>
-        </p:spPr>
-        <p:txBody>
-          <a:bodyPr wrap="square" lIns="0" tIns="0" rIns="0" bIns="0" rtlCol="0" anchor="ctr"/>
-          <a:lstStyle/>
-          <a:p>
-            <a:pPr algn="ctr" indent="0" marL="0">
-              <a:buNone/>
-            </a:pPr>
-            <a:r>
-              <a:rPr lang="en-US" sz="1100" b="1" dirty="0">
-                <a:solidFill>
-                  <a:srgbClr val="1E293B"/>
-                </a:solidFill>
-                <a:latin typeface="Calibri" pitchFamily="34" charset="0"/>
-                <a:ea typeface="Calibri" pitchFamily="34" charset="-122"/>
-                <a:cs typeface="Calibri" pitchFamily="34" charset="-120"/>
-              </a:rPr>
-              <a:t>Юридичний</a:t>
-            </a:r>
-            <a:endParaRPr lang="en-US" sz="1100" dirty="0"/>
-          </a:p>
-        </p:txBody>
-      </p:sp>
-      <p:sp>
-        <p:nvSpPr>
-          <p:cNvPr id="43" name="Text 38"/>
-          <p:cNvSpPr/>
-          <p:nvPr/>
-        </p:nvSpPr>
-        <p:spPr>
-          <a:xfrm>
-            <a:off x="6111240" y="3227832"/>
-            <a:ext cx="1219200" cy="201168"/>
-          </a:xfrm>
-          <a:prstGeom prst="rect">
-            <a:avLst/>
-          </a:prstGeom>
-          <a:noFill/>
-          <a:ln/>
-        </p:spPr>
-        <p:txBody>
-          <a:bodyPr wrap="square" lIns="0" tIns="0" rIns="0" bIns="0" rtlCol="0" anchor="ctr"/>
-          <a:lstStyle/>
-          <a:p>
-            <a:pPr algn="ctr" indent="0" marL="0">
-              <a:buNone/>
-            </a:pPr>
-            <a:r>
-              <a:rPr lang="en-US" sz="900" dirty="0">
-                <a:solidFill>
-                  <a:srgbClr val="64748B"/>
-                </a:solidFill>
-                <a:latin typeface="Calibri" pitchFamily="34" charset="0"/>
-                <a:ea typeface="Calibri" pitchFamily="34" charset="-122"/>
-                <a:cs typeface="Calibri" pitchFamily="34" charset="-120"/>
-              </a:rPr>
-              <a:t>запитів</a:t>
-            </a:r>
-            <a:endParaRPr lang="en-US" sz="900" dirty="0"/>
-          </a:p>
-        </p:txBody>
-      </p:sp>
-      <p:sp>
-        <p:nvSpPr>
-          <p:cNvPr id="44" name="Text 39"/>
-          <p:cNvSpPr/>
-          <p:nvPr/>
-        </p:nvSpPr>
-        <p:spPr>
-          <a:xfrm>
-            <a:off x="7330440" y="1874520"/>
-            <a:ext cx="1219200" cy="1097280"/>
-          </a:xfrm>
-          <a:prstGeom prst="rect">
-            <a:avLst/>
-          </a:prstGeom>
-          <a:noFill/>
-          <a:ln/>
-        </p:spPr>
-        <p:txBody>
-          <a:bodyPr wrap="square" lIns="0" tIns="0" rIns="0" bIns="0" rtlCol="0" anchor="ctr"/>
-          <a:lstStyle/>
-          <a:p>
-            <a:pPr algn="ctr" indent="0" marL="0">
-              <a:buNone/>
-            </a:pPr>
-            <a:r>
-              <a:rPr lang="en-US" sz="6000" b="1" dirty="0">
-                <a:solidFill>
-                  <a:srgbClr val="E11D48"/>
-                </a:solidFill>
-                <a:latin typeface="Calibri" pitchFamily="34" charset="0"/>
-                <a:ea typeface="Calibri" pitchFamily="34" charset="-122"/>
-                <a:cs typeface="Calibri" pitchFamily="34" charset="-120"/>
-              </a:rPr>
-              <a:t>100</a:t>
-            </a:r>
-            <a:endParaRPr lang="en-US" sz="6000" dirty="0"/>
-          </a:p>
-        </p:txBody>
-      </p:sp>
-      <p:sp>
-        <p:nvSpPr>
-          <p:cNvPr id="45" name="Text 40"/>
-          <p:cNvSpPr/>
-          <p:nvPr/>
-        </p:nvSpPr>
-        <p:spPr>
-          <a:xfrm>
-            <a:off x="7330440" y="2971800"/>
-            <a:ext cx="1219200" cy="274320"/>
-          </a:xfrm>
-          <a:prstGeom prst="rect">
-            <a:avLst/>
-          </a:prstGeom>
-          <a:noFill/>
-          <a:ln/>
-        </p:spPr>
-        <p:txBody>
-          <a:bodyPr wrap="square" lIns="0" tIns="0" rIns="0" bIns="0" rtlCol="0" anchor="ctr"/>
-          <a:lstStyle/>
-          <a:p>
-            <a:pPr algn="ctr" indent="0" marL="0">
-              <a:buNone/>
-            </a:pPr>
-            <a:r>
-              <a:rPr lang="en-US" sz="1100" b="1" dirty="0">
-                <a:solidFill>
-                  <a:srgbClr val="1E293B"/>
-                </a:solidFill>
-                <a:latin typeface="Calibri" pitchFamily="34" charset="0"/>
-                <a:ea typeface="Calibri" pitchFamily="34" charset="-122"/>
-                <a:cs typeface="Calibri" pitchFamily="34" charset="-120"/>
-              </a:rPr>
-              <a:t>Медичний</a:t>
-            </a:r>
-            <a:endParaRPr lang="en-US" sz="1100" dirty="0"/>
-          </a:p>
-        </p:txBody>
-      </p:sp>
-      <p:sp>
-        <p:nvSpPr>
-          <p:cNvPr id="46" name="Text 41"/>
-          <p:cNvSpPr/>
-          <p:nvPr/>
-        </p:nvSpPr>
-        <p:spPr>
-          <a:xfrm>
-            <a:off x="7330440" y="3227832"/>
-            <a:ext cx="1219200" cy="201168"/>
-          </a:xfrm>
-          <a:prstGeom prst="rect">
-            <a:avLst/>
-          </a:prstGeom>
-          <a:noFill/>
-          <a:ln/>
-        </p:spPr>
-        <p:txBody>
-          <a:bodyPr wrap="square" lIns="0" tIns="0" rIns="0" bIns="0" rtlCol="0" anchor="ctr"/>
-          <a:lstStyle/>
-          <a:p>
-            <a:pPr algn="ctr" indent="0" marL="0">
-              <a:buNone/>
-            </a:pPr>
-            <a:r>
-              <a:rPr lang="en-US" sz="900" dirty="0">
-                <a:solidFill>
-                  <a:srgbClr val="64748B"/>
-                </a:solidFill>
-                <a:latin typeface="Calibri" pitchFamily="34" charset="0"/>
-                <a:ea typeface="Calibri" pitchFamily="34" charset="-122"/>
-                <a:cs typeface="Calibri" pitchFamily="34" charset="-120"/>
-              </a:rPr>
-              <a:t>запитів</a:t>
-            </a:r>
-            <a:endParaRPr lang="en-US" sz="900" dirty="0"/>
-          </a:p>
-        </p:txBody>
-      </p:sp>
-      <p:sp>
-        <p:nvSpPr>
-          <p:cNvPr id="47" name="Shape 42"/>
-          <p:cNvSpPr/>
-          <p:nvPr/>
-        </p:nvSpPr>
-        <p:spPr>
-          <a:xfrm>
-            <a:off x="5074920" y="3630168"/>
-            <a:ext cx="3291840" cy="22860"/>
+          <p:cNvPr id="34" name="Shape 29"/>
+          <p:cNvSpPr/>
+          <p:nvPr/>
+        </p:nvSpPr>
+        <p:spPr>
+          <a:xfrm>
+            <a:off x="5989320" y="3867912"/>
+            <a:ext cx="13716" cy="566928"/>
           </a:xfrm>
           <a:prstGeom prst="rect">
             <a:avLst/>
@@ -11623,60 +11083,163 @@
       </p:sp>
       <p:sp>
         <p:nvSpPr>
-          <p:cNvPr id="48" name="Text 43"/>
-          <p:cNvSpPr/>
-          <p:nvPr/>
-        </p:nvSpPr>
-        <p:spPr>
-          <a:xfrm>
-            <a:off x="4892040" y="3703320"/>
-            <a:ext cx="3657600" cy="457200"/>
-          </a:xfrm>
-          <a:prstGeom prst="rect">
-            <a:avLst/>
-          </a:prstGeom>
-          <a:noFill/>
-          <a:ln/>
-        </p:spPr>
-        <p:txBody>
-          <a:bodyPr wrap="square" lIns="0" tIns="0" rIns="0" bIns="0" rtlCol="0" anchor="ctr"/>
+          <p:cNvPr id="35" name="Text 30"/>
+          <p:cNvSpPr/>
+          <p:nvPr/>
+        </p:nvSpPr>
+        <p:spPr>
+          <a:xfrm>
+            <a:off x="6126480" y="3822192"/>
+            <a:ext cx="1188720" cy="460858"/>
+          </a:xfrm>
+          <a:prstGeom prst="rect">
+            <a:avLst/>
+          </a:prstGeom>
+          <a:noFill/>
+          <a:ln/>
+        </p:spPr>
+        <p:txBody>
+          <a:bodyPr wrap="square" lIns="0" tIns="0" rIns="0" bIns="0" rtlCol="0" anchor="b"/>
           <a:lstStyle/>
           <a:p>
             <a:pPr algn="ctr" indent="0" marL="0">
               <a:buNone/>
             </a:pPr>
             <a:r>
-              <a:rPr lang="en-US" sz="2400" b="1" dirty="0">
-                <a:solidFill>
-                  <a:srgbClr val="F59E0B"/>
-                </a:solidFill>
-                <a:latin typeface="Calibri" pitchFamily="34" charset="0"/>
-                <a:ea typeface="Calibri" pitchFamily="34" charset="-122"/>
-                <a:cs typeface="Calibri" pitchFamily="34" charset="-120"/>
-              </a:rPr>
-              <a:t>300</a:t>
-            </a:r>
+              <a:rPr lang="en-US" sz="3000" b="1" dirty="0">
+                <a:solidFill>
+                  <a:srgbClr val="E11D48"/>
+                </a:solidFill>
+                <a:latin typeface="Calibri" pitchFamily="34" charset="0"/>
+                <a:ea typeface="Calibri" pitchFamily="34" charset="-122"/>
+                <a:cs typeface="Calibri" pitchFamily="34" charset="-120"/>
+              </a:rPr>
+              <a:t>9</a:t>
+            </a:r>
+            <a:endParaRPr lang="en-US" sz="3000" dirty="0"/>
+          </a:p>
+        </p:txBody>
+      </p:sp>
+      <p:sp>
+        <p:nvSpPr>
+          <p:cNvPr id="36" name="Text 31"/>
+          <p:cNvSpPr/>
+          <p:nvPr/>
+        </p:nvSpPr>
+        <p:spPr>
+          <a:xfrm>
+            <a:off x="6126480" y="4301338"/>
+            <a:ext cx="1188720" cy="197510"/>
+          </a:xfrm>
+          <a:prstGeom prst="rect">
+            <a:avLst/>
+          </a:prstGeom>
+          <a:noFill/>
+          <a:ln/>
+        </p:spPr>
+        <p:txBody>
+          <a:bodyPr wrap="square" lIns="0" tIns="0" rIns="0" bIns="0" rtlCol="0" anchor="t"/>
+          <a:lstStyle/>
+          <a:p>
             <a:pPr algn="ctr" indent="0" marL="0">
               <a:buNone/>
             </a:pPr>
             <a:r>
               <a:rPr lang="en-US" sz="1000" dirty="0">
                 <a:solidFill>
-                  <a:srgbClr val="475569"/>
-                </a:solidFill>
-                <a:latin typeface="Calibri" pitchFamily="34" charset="0"/>
-                <a:ea typeface="Calibri" pitchFamily="34" charset="-122"/>
-                <a:cs typeface="Calibri" pitchFamily="34" charset="-120"/>
-              </a:rPr>
-              <a:t>  запитів усього  ·  на яких рахуються per-query метрики</a:t>
-            </a:r>
-            <a:endParaRPr lang="en-US" sz="2400" dirty="0"/>
+                  <a:srgbClr val="64748B"/>
+                </a:solidFill>
+                <a:latin typeface="Calibri" pitchFamily="34" charset="0"/>
+                <a:ea typeface="Calibri" pitchFamily="34" charset="-122"/>
+                <a:cs typeface="Calibri" pitchFamily="34" charset="-120"/>
+              </a:rPr>
+              <a:t>документи</a:t>
+            </a:r>
+            <a:endParaRPr lang="en-US" sz="1000" dirty="0"/>
+          </a:p>
+        </p:txBody>
+      </p:sp>
+      <p:sp>
+        <p:nvSpPr>
+          <p:cNvPr id="37" name="Text 32"/>
+          <p:cNvSpPr/>
+          <p:nvPr/>
+        </p:nvSpPr>
+        <p:spPr>
+          <a:xfrm>
+            <a:off x="7452360" y="3822192"/>
+            <a:ext cx="1188720" cy="460858"/>
+          </a:xfrm>
+          <a:prstGeom prst="rect">
+            <a:avLst/>
+          </a:prstGeom>
+          <a:noFill/>
+          <a:ln/>
+        </p:spPr>
+        <p:txBody>
+          <a:bodyPr wrap="square" lIns="0" tIns="0" rIns="0" bIns="0" rtlCol="0" anchor="b"/>
+          <a:lstStyle/>
+          <a:p>
+            <a:pPr algn="ctr" indent="0" marL="0">
+              <a:buNone/>
+            </a:pPr>
+            <a:r>
+              <a:rPr lang="en-US" sz="3000" b="1" dirty="0">
+                <a:solidFill>
+                  <a:srgbClr val="E11D48"/>
+                </a:solidFill>
+                <a:latin typeface="Calibri" pitchFamily="34" charset="0"/>
+                <a:ea typeface="Calibri" pitchFamily="34" charset="-122"/>
+                <a:cs typeface="Calibri" pitchFamily="34" charset="-120"/>
+              </a:rPr>
+              <a:t>100</a:t>
+            </a:r>
+            <a:endParaRPr lang="en-US" sz="3000" dirty="0"/>
+          </a:p>
+        </p:txBody>
+      </p:sp>
+      <p:sp>
+        <p:nvSpPr>
+          <p:cNvPr id="38" name="Text 33"/>
+          <p:cNvSpPr/>
+          <p:nvPr/>
+        </p:nvSpPr>
+        <p:spPr>
+          <a:xfrm>
+            <a:off x="7452360" y="4301338"/>
+            <a:ext cx="1188720" cy="197510"/>
+          </a:xfrm>
+          <a:prstGeom prst="rect">
+            <a:avLst/>
+          </a:prstGeom>
+          <a:noFill/>
+          <a:ln/>
+        </p:spPr>
+        <p:txBody>
+          <a:bodyPr wrap="square" lIns="0" tIns="0" rIns="0" bIns="0" rtlCol="0" anchor="t"/>
+          <a:lstStyle/>
+          <a:p>
+            <a:pPr algn="ctr" indent="0" marL="0">
+              <a:buNone/>
+            </a:pPr>
+            <a:r>
+              <a:rPr lang="en-US" sz="1000" dirty="0">
+                <a:solidFill>
+                  <a:srgbClr val="64748B"/>
+                </a:solidFill>
+                <a:latin typeface="Calibri" pitchFamily="34" charset="0"/>
+                <a:ea typeface="Calibri" pitchFamily="34" charset="-122"/>
+                <a:cs typeface="Calibri" pitchFamily="34" charset="-120"/>
+              </a:rPr>
+              <a:t>запити</a:t>
+            </a:r>
+            <a:endParaRPr lang="en-US" sz="1000" dirty="0"/>
           </a:p>
         </p:txBody>
       </p:sp>
       <p:pic>
         <p:nvPicPr>
-          <p:cNvPr id="49" name="Image 3" descr="D:\repos\kb-semantic-search-benchmark\thesis\scripts\_logo_hex.png">    </p:cNvPr>
+          <p:cNvPr id="39" name="Image 3" descr="D:\repos\kb-semantic-search-benchmark\thesis\scripts\_logo_hex.png">    </p:cNvPr>
           <p:cNvPicPr>
             <a:picLocks noChangeAspect="1"/>
           </p:cNvPicPr>
@@ -11700,7 +11263,7 @@
       </p:pic>
       <p:sp>
         <p:nvSpPr>
-          <p:cNvPr id="50" name="Text 44"/>
+          <p:cNvPr id="40" name="Text 34"/>
           <p:cNvSpPr/>
           <p:nvPr/>
         </p:nvSpPr>

--- a/thesis/Nesterenko_Presentation.pptx
+++ b/thesis/Nesterenko_Presentation.pptx
@@ -15081,8 +15081,8 @@
         </p:nvSpPr>
         <p:spPr>
           <a:xfrm>
-            <a:off x="594360" y="1051560"/>
-            <a:ext cx="3566160" cy="228600"/>
+            <a:off x="594360" y="1033272"/>
+            <a:ext cx="3566160" cy="201168"/>
           </a:xfrm>
           <a:prstGeom prst="rect">
             <a:avLst/>
@@ -15120,8 +15120,8 @@
         </p:nvSpPr>
         <p:spPr>
           <a:xfrm>
-            <a:off x="594360" y="1289304"/>
-            <a:ext cx="3566160" cy="365760"/>
+            <a:off x="594360" y="1234440"/>
+            <a:ext cx="3566160" cy="329184"/>
           </a:xfrm>
           <a:prstGeom prst="rect">
             <a:avLst/>
@@ -15159,17 +15159,17 @@
         </p:nvSpPr>
         <p:spPr>
           <a:xfrm>
-            <a:off x="594360" y="1673352"/>
-            <a:ext cx="3566160" cy="228600"/>
-          </a:xfrm>
-          <a:prstGeom prst="rect">
-            <a:avLst/>
-          </a:prstGeom>
-          <a:noFill/>
-          <a:ln/>
-        </p:spPr>
-        <p:txBody>
-          <a:bodyPr wrap="square" lIns="0" tIns="0" rIns="0" bIns="0" rtlCol="0" anchor="ctr"/>
+            <a:off x="594360" y="1563624"/>
+            <a:ext cx="3566160" cy="310896"/>
+          </a:xfrm>
+          <a:prstGeom prst="rect">
+            <a:avLst/>
+          </a:prstGeom>
+          <a:noFill/>
+          <a:ln/>
+        </p:spPr>
+        <p:txBody>
+          <a:bodyPr wrap="square" lIns="0" tIns="0" rIns="0" bIns="0" rtlCol="0" anchor="t"/>
           <a:lstStyle/>
           <a:p>
             <a:pPr algn="l" indent="0" marL="0">

--- a/thesis/Nesterenko_Presentation.pptx
+++ b/thesis/Nesterenko_Presentation.pptx
@@ -15253,7 +15253,7 @@
         <p:spPr>
           <a:xfrm>
             <a:off x="640080" y="2148840"/>
-            <a:ext cx="3566160" cy="320040"/>
+            <a:ext cx="3566160" cy="219456"/>
           </a:xfrm>
           <a:prstGeom prst="rect">
             <a:avLst/>
@@ -15291,8 +15291,8 @@
         </p:nvSpPr>
         <p:spPr>
           <a:xfrm>
-            <a:off x="640080" y="2468880"/>
-            <a:ext cx="3566160" cy="194310"/>
+            <a:off x="640080" y="2368296"/>
+            <a:ext cx="3566160" cy="267462"/>
           </a:xfrm>
           <a:prstGeom prst="rect">
             <a:avLst/>
@@ -15385,7 +15385,7 @@
         <p:spPr>
           <a:xfrm>
             <a:off x="640080" y="2800350"/>
-            <a:ext cx="3566160" cy="320040"/>
+            <a:ext cx="3566160" cy="219456"/>
           </a:xfrm>
           <a:prstGeom prst="rect">
             <a:avLst/>
@@ -15423,8 +15423,8 @@
         </p:nvSpPr>
         <p:spPr>
           <a:xfrm>
-            <a:off x="640080" y="3120390"/>
-            <a:ext cx="3566160" cy="194310"/>
+            <a:off x="640080" y="3019806"/>
+            <a:ext cx="3566160" cy="267462"/>
           </a:xfrm>
           <a:prstGeom prst="rect">
             <a:avLst/>
@@ -15517,7 +15517,7 @@
         <p:spPr>
           <a:xfrm>
             <a:off x="640080" y="3451860"/>
-            <a:ext cx="3566160" cy="320040"/>
+            <a:ext cx="3566160" cy="219456"/>
           </a:xfrm>
           <a:prstGeom prst="rect">
             <a:avLst/>
@@ -15555,8 +15555,8 @@
         </p:nvSpPr>
         <p:spPr>
           <a:xfrm>
-            <a:off x="640080" y="3771900"/>
-            <a:ext cx="3566160" cy="194310"/>
+            <a:off x="640080" y="3671316"/>
+            <a:ext cx="3566160" cy="267462"/>
           </a:xfrm>
           <a:prstGeom prst="rect">
             <a:avLst/>
@@ -15649,7 +15649,7 @@
         <p:spPr>
           <a:xfrm>
             <a:off x="640080" y="4103370"/>
-            <a:ext cx="3566160" cy="320040"/>
+            <a:ext cx="3566160" cy="219456"/>
           </a:xfrm>
           <a:prstGeom prst="rect">
             <a:avLst/>
@@ -15687,8 +15687,8 @@
         </p:nvSpPr>
         <p:spPr>
           <a:xfrm>
-            <a:off x="640080" y="4423410"/>
-            <a:ext cx="3566160" cy="194310"/>
+            <a:off x="640080" y="4322826"/>
+            <a:ext cx="3566160" cy="267462"/>
           </a:xfrm>
           <a:prstGeom prst="rect">
             <a:avLst/>

--- a/thesis/Nesterenko_Presentation.pptx
+++ b/thesis/Nesterenko_Presentation.pptx
@@ -16286,7 +16286,53 @@
       </p:sp>
       <p:sp>
         <p:nvSpPr>
-          <p:cNvPr id="13" name="Text 10"/>
+          <p:cNvPr id="13" name="Shape 10"/>
+          <p:cNvSpPr/>
+          <p:nvPr/>
+        </p:nvSpPr>
+        <p:spPr>
+          <a:xfrm flipV="1">
+            <a:off x="1128238" y="2010703"/>
+            <a:ext cx="621445" cy="367246"/>
+          </a:xfrm>
+          <a:prstGeom prst="line">
+            <a:avLst/>
+          </a:prstGeom>
+          <a:noFill/>
+          <a:ln w="19050">
+            <a:solidFill>
+              <a:srgbClr val="F59E0B"/>
+            </a:solidFill>
+            <a:prstDash val="dash"/>
+          </a:ln>
+        </p:spPr>
+      </p:sp>
+      <p:sp>
+        <p:nvSpPr>
+          <p:cNvPr id="14" name="Shape 11"/>
+          <p:cNvSpPr/>
+          <p:nvPr/>
+        </p:nvSpPr>
+        <p:spPr>
+          <a:xfrm flipV="1">
+            <a:off x="1749682" y="1835532"/>
+            <a:ext cx="1336326" cy="175170"/>
+          </a:xfrm>
+          <a:prstGeom prst="line">
+            <a:avLst/>
+          </a:prstGeom>
+          <a:noFill/>
+          <a:ln w="19050">
+            <a:solidFill>
+              <a:srgbClr val="F59E0B"/>
+            </a:solidFill>
+            <a:prstDash val="dash"/>
+          </a:ln>
+        </p:spPr>
+      </p:sp>
+      <p:sp>
+        <p:nvSpPr>
+          <p:cNvPr id="15" name="Text 12"/>
           <p:cNvSpPr/>
           <p:nvPr/>
         </p:nvSpPr>
@@ -16325,7 +16371,7 @@
       </p:sp>
       <p:sp>
         <p:nvSpPr>
-          <p:cNvPr id="14" name="Text 11"/>
+          <p:cNvPr id="16" name="Text 13"/>
           <p:cNvSpPr/>
           <p:nvPr/>
         </p:nvSpPr>
@@ -16364,7 +16410,7 @@
       </p:sp>
       <p:sp>
         <p:nvSpPr>
-          <p:cNvPr id="15" name="Shape 12"/>
+          <p:cNvPr id="17" name="Shape 14"/>
           <p:cNvSpPr/>
           <p:nvPr/>
         </p:nvSpPr>
@@ -16398,7 +16444,7 @@
       </p:sp>
       <p:sp>
         <p:nvSpPr>
-          <p:cNvPr id="16" name="Shape 13"/>
+          <p:cNvPr id="18" name="Shape 15"/>
           <p:cNvSpPr/>
           <p:nvPr/>
         </p:nvSpPr>
@@ -16418,7 +16464,7 @@
       </p:sp>
       <p:sp>
         <p:nvSpPr>
-          <p:cNvPr id="17" name="Text 14"/>
+          <p:cNvPr id="19" name="Text 16"/>
           <p:cNvSpPr/>
           <p:nvPr/>
         </p:nvSpPr>
@@ -16449,7 +16495,7 @@
                 <a:ea typeface="Calibri" pitchFamily="34" charset="-122"/>
                 <a:cs typeface="Calibri" pitchFamily="34" charset="-120"/>
               </a:rPr>
-              <a:t>Лідер якості</a:t>
+              <a:t>Парето-оптимальна  ·  лідер якості</a:t>
             </a:r>
             <a:endParaRPr lang="en-US" sz="850" dirty="0"/>
           </a:p>
@@ -16457,7 +16503,7 @@
       </p:sp>
       <p:sp>
         <p:nvSpPr>
-          <p:cNvPr id="18" name="Text 15"/>
+          <p:cNvPr id="20" name="Text 17"/>
           <p:cNvSpPr/>
           <p:nvPr/>
         </p:nvSpPr>
@@ -16496,7 +16542,7 @@
       </p:sp>
       <p:sp>
         <p:nvSpPr>
-          <p:cNvPr id="19" name="Text 16"/>
+          <p:cNvPr id="21" name="Text 18"/>
           <p:cNvSpPr/>
           <p:nvPr/>
         </p:nvSpPr>
@@ -16527,7 +16573,7 @@
                 <a:ea typeface="Calibri" pitchFamily="34" charset="-122"/>
                 <a:cs typeface="Calibri" pitchFamily="34" charset="-120"/>
               </a:rPr>
-              <a:t>найвища nDCG (0.672 на Tech), ~228 мс</a:t>
+              <a:t>найвища nDCG (0.672 на Tech), ~228 мс — основний вибір</a:t>
             </a:r>
             <a:endParaRPr lang="en-US" sz="900" dirty="0"/>
           </a:p>
@@ -16535,7 +16581,7 @@
       </p:sp>
       <p:sp>
         <p:nvSpPr>
-          <p:cNvPr id="20" name="Shape 17"/>
+          <p:cNvPr id="22" name="Shape 19"/>
           <p:cNvSpPr/>
           <p:nvPr/>
         </p:nvSpPr>
@@ -16569,7 +16615,7 @@
       </p:sp>
       <p:sp>
         <p:nvSpPr>
-          <p:cNvPr id="21" name="Shape 18"/>
+          <p:cNvPr id="23" name="Shape 20"/>
           <p:cNvSpPr/>
           <p:nvPr/>
         </p:nvSpPr>
@@ -16582,14 +16628,14 @@
             <a:avLst/>
           </a:prstGeom>
           <a:solidFill>
-            <a:srgbClr val="64748B"/>
+            <a:srgbClr val="0891B2"/>
           </a:solidFill>
           <a:ln/>
         </p:spPr>
       </p:sp>
       <p:sp>
         <p:nvSpPr>
-          <p:cNvPr id="22" name="Text 19"/>
+          <p:cNvPr id="24" name="Text 21"/>
           <p:cNvSpPr/>
           <p:nvPr/>
         </p:nvSpPr>
@@ -16620,7 +16666,7 @@
                 <a:ea typeface="Calibri" pitchFamily="34" charset="-122"/>
                 <a:cs typeface="Calibri" pitchFamily="34" charset="-120"/>
               </a:rPr>
-              <a:t>Найшвидший</a:t>
+              <a:t>Парето-оптимальна  ·  sweet spot</a:t>
             </a:r>
             <a:endParaRPr lang="en-US" sz="850" dirty="0"/>
           </a:p>
@@ -16628,7 +16674,7 @@
       </p:sp>
       <p:sp>
         <p:nvSpPr>
-          <p:cNvPr id="23" name="Text 20"/>
+          <p:cNvPr id="25" name="Text 22"/>
           <p:cNvSpPr/>
           <p:nvPr/>
         </p:nvSpPr>
@@ -16653,13 +16699,13 @@
             <a:r>
               <a:rPr lang="en-US" sz="1200" b="1" dirty="0">
                 <a:solidFill>
-                  <a:srgbClr val="64748B"/>
-                </a:solidFill>
-                <a:latin typeface="Calibri" pitchFamily="34" charset="0"/>
-                <a:ea typeface="Calibri" pitchFamily="34" charset="-122"/>
-                <a:cs typeface="Calibri" pitchFamily="34" charset="-120"/>
-              </a:rPr>
-              <a:t>BM25</a:t>
+                  <a:srgbClr val="0891B2"/>
+                </a:solidFill>
+                <a:latin typeface="Calibri" pitchFamily="34" charset="0"/>
+                <a:ea typeface="Calibri" pitchFamily="34" charset="-122"/>
+                <a:cs typeface="Calibri" pitchFamily="34" charset="-120"/>
+              </a:rPr>
+              <a:t>E5-base</a:t>
             </a:r>
             <a:endParaRPr lang="en-US" sz="1200" dirty="0"/>
           </a:p>
@@ -16667,7 +16713,7 @@
       </p:sp>
       <p:sp>
         <p:nvSpPr>
-          <p:cNvPr id="24" name="Text 21"/>
+          <p:cNvPr id="26" name="Text 23"/>
           <p:cNvSpPr/>
           <p:nvPr/>
         </p:nvSpPr>
@@ -16698,7 +16744,7 @@
                 <a:ea typeface="Calibri" pitchFamily="34" charset="-122"/>
                 <a:cs typeface="Calibri" pitchFamily="34" charset="-120"/>
               </a:rPr>
-              <a:t>&lt;3 мс, але якість обмежена</a:t>
+              <a:t>~70 мс  ·  3× швидше за BGE-M3 з мінімальною втратою якості</a:t>
             </a:r>
             <a:endParaRPr lang="en-US" sz="900" dirty="0"/>
           </a:p>
@@ -16706,7 +16752,7 @@
       </p:sp>
       <p:sp>
         <p:nvSpPr>
-          <p:cNvPr id="25" name="Shape 22"/>
+          <p:cNvPr id="27" name="Shape 24"/>
           <p:cNvSpPr/>
           <p:nvPr/>
         </p:nvSpPr>
@@ -16740,7 +16786,7 @@
       </p:sp>
       <p:sp>
         <p:nvSpPr>
-          <p:cNvPr id="26" name="Shape 23"/>
+          <p:cNvPr id="28" name="Shape 25"/>
           <p:cNvSpPr/>
           <p:nvPr/>
         </p:nvSpPr>
@@ -16753,14 +16799,14 @@
             <a:avLst/>
           </a:prstGeom>
           <a:solidFill>
-            <a:srgbClr val="0891B2"/>
+            <a:srgbClr val="64748B"/>
           </a:solidFill>
           <a:ln/>
         </p:spPr>
       </p:sp>
       <p:sp>
         <p:nvSpPr>
-          <p:cNvPr id="27" name="Text 24"/>
+          <p:cNvPr id="29" name="Text 26"/>
           <p:cNvSpPr/>
           <p:nvPr/>
         </p:nvSpPr>
@@ -16791,7 +16837,7 @@
                 <a:ea typeface="Calibri" pitchFamily="34" charset="-122"/>
                 <a:cs typeface="Calibri" pitchFamily="34" charset="-120"/>
               </a:rPr>
-              <a:t>Альтернатива</a:t>
+              <a:t>Парето-оптимальна  ·  baseline</a:t>
             </a:r>
             <a:endParaRPr lang="en-US" sz="850" dirty="0"/>
           </a:p>
@@ -16799,7 +16845,7 @@
       </p:sp>
       <p:sp>
         <p:nvSpPr>
-          <p:cNvPr id="28" name="Text 25"/>
+          <p:cNvPr id="30" name="Text 27"/>
           <p:cNvSpPr/>
           <p:nvPr/>
         </p:nvSpPr>
@@ -16824,13 +16870,13 @@
             <a:r>
               <a:rPr lang="en-US" sz="1200" b="1" dirty="0">
                 <a:solidFill>
-                  <a:srgbClr val="0891B2"/>
-                </a:solidFill>
-                <a:latin typeface="Calibri" pitchFamily="34" charset="0"/>
-                <a:ea typeface="Calibri" pitchFamily="34" charset="-122"/>
-                <a:cs typeface="Calibri" pitchFamily="34" charset="-120"/>
-              </a:rPr>
-              <a:t>E5-base</a:t>
+                  <a:srgbClr val="64748B"/>
+                </a:solidFill>
+                <a:latin typeface="Calibri" pitchFamily="34" charset="0"/>
+                <a:ea typeface="Calibri" pitchFamily="34" charset="-122"/>
+                <a:cs typeface="Calibri" pitchFamily="34" charset="-120"/>
+              </a:rPr>
+              <a:t>BM25</a:t>
             </a:r>
             <a:endParaRPr lang="en-US" sz="1200" dirty="0"/>
           </a:p>
@@ -16838,7 +16884,7 @@
       </p:sp>
       <p:sp>
         <p:nvSpPr>
-          <p:cNvPr id="29" name="Text 26"/>
+          <p:cNvPr id="31" name="Text 28"/>
           <p:cNvSpPr/>
           <p:nvPr/>
         </p:nvSpPr>
@@ -16869,7 +16915,7 @@
                 <a:ea typeface="Calibri" pitchFamily="34" charset="-122"/>
                 <a:cs typeface="Calibri" pitchFamily="34" charset="-120"/>
               </a:rPr>
-              <a:t>~3× швидше за BGE-M3, ~70 мс</a:t>
+              <a:t>&lt;3 мс  ·  найшвидший, але стеля якості ~0.49 nDCG</a:t>
             </a:r>
             <a:endParaRPr lang="en-US" sz="900" dirty="0"/>
           </a:p>
@@ -16877,7 +16923,7 @@
       </p:sp>
       <p:sp>
         <p:nvSpPr>
-          <p:cNvPr id="30" name="Shape 27"/>
+          <p:cNvPr id="32" name="Shape 29"/>
           <p:cNvSpPr/>
           <p:nvPr/>
         </p:nvSpPr>
@@ -16911,7 +16957,7 @@
       </p:sp>
       <p:sp>
         <p:nvSpPr>
-          <p:cNvPr id="31" name="Shape 28"/>
+          <p:cNvPr id="33" name="Shape 30"/>
           <p:cNvSpPr/>
           <p:nvPr/>
         </p:nvSpPr>
@@ -16931,7 +16977,7 @@
       </p:sp>
       <p:sp>
         <p:nvSpPr>
-          <p:cNvPr id="32" name="Text 29"/>
+          <p:cNvPr id="34" name="Text 31"/>
           <p:cNvSpPr/>
           <p:nvPr/>
         </p:nvSpPr>
@@ -16962,7 +17008,7 @@
                 <a:ea typeface="Calibri" pitchFamily="34" charset="-122"/>
                 <a:cs typeface="Calibri" pitchFamily="34" charset="-120"/>
               </a:rPr>
-              <a:t>Лідер на Legal</a:t>
+              <a:t>Спеціалізована  ·  лідер на Legal</a:t>
             </a:r>
             <a:endParaRPr lang="en-US" sz="850" dirty="0"/>
           </a:p>
@@ -16970,7 +17016,7 @@
       </p:sp>
       <p:sp>
         <p:nvSpPr>
-          <p:cNvPr id="33" name="Text 30"/>
+          <p:cNvPr id="35" name="Text 32"/>
           <p:cNvSpPr/>
           <p:nvPr/>
         </p:nvSpPr>
@@ -17009,7 +17055,7 @@
       </p:sp>
       <p:sp>
         <p:nvSpPr>
-          <p:cNvPr id="34" name="Text 31"/>
+          <p:cNvPr id="36" name="Text 33"/>
           <p:cNvSpPr/>
           <p:nvPr/>
         </p:nvSpPr>
@@ -17040,7 +17086,7 @@
                 <a:ea typeface="Calibri" pitchFamily="34" charset="-122"/>
                 <a:cs typeface="Calibri" pitchFamily="34" charset="-120"/>
               </a:rPr>
-              <a:t>nDCG=0.320, але ~2× повільніший</a:t>
+              <a:t>виграє лише на юридичному (nDCG=0.320), на Tech домінується BGE-M3</a:t>
             </a:r>
             <a:endParaRPr lang="en-US" sz="900" dirty="0"/>
           </a:p>
@@ -17048,7 +17094,7 @@
       </p:sp>
       <p:sp>
         <p:nvSpPr>
-          <p:cNvPr id="35" name="Shape 32"/>
+          <p:cNvPr id="37" name="Shape 34"/>
           <p:cNvSpPr/>
           <p:nvPr/>
         </p:nvSpPr>
@@ -17082,7 +17128,7 @@
       </p:sp>
       <p:sp>
         <p:nvSpPr>
-          <p:cNvPr id="36" name="Shape 33"/>
+          <p:cNvPr id="38" name="Shape 35"/>
           <p:cNvSpPr/>
           <p:nvPr/>
         </p:nvSpPr>
@@ -17102,7 +17148,7 @@
       </p:sp>
       <p:sp>
         <p:nvSpPr>
-          <p:cNvPr id="37" name="Text 34"/>
+          <p:cNvPr id="39" name="Text 36"/>
           <p:cNvSpPr/>
           <p:nvPr/>
         </p:nvSpPr>
@@ -17133,7 +17179,7 @@
                 <a:ea typeface="Calibri" pitchFamily="34" charset="-122"/>
                 <a:cs typeface="Calibri" pitchFamily="34" charset="-120"/>
               </a:rPr>
-              <a:t>Найслабший</a:t>
+              <a:t>Не рекомендується  ·  домінується</a:t>
             </a:r>
             <a:endParaRPr lang="en-US" sz="850" dirty="0"/>
           </a:p>
@@ -17141,7 +17187,7 @@
       </p:sp>
       <p:sp>
         <p:nvSpPr>
-          <p:cNvPr id="38" name="Text 35"/>
+          <p:cNvPr id="40" name="Text 37"/>
           <p:cNvSpPr/>
           <p:nvPr/>
         </p:nvSpPr>
@@ -17180,7 +17226,7 @@
       </p:sp>
       <p:sp>
         <p:nvSpPr>
-          <p:cNvPr id="39" name="Text 36"/>
+          <p:cNvPr id="41" name="Text 38"/>
           <p:cNvSpPr/>
           <p:nvPr/>
         </p:nvSpPr>
@@ -17211,7 +17257,7 @@
                 <a:ea typeface="Calibri" pitchFamily="34" charset="-122"/>
                 <a:cs typeface="Calibri" pitchFamily="34" charset="-120"/>
               </a:rPr>
-              <a:t>поступається навіть BM25</a:t>
+              <a:t>поступається BM25 за якістю при більшій latency — ані швидко, ані точно</a:t>
             </a:r>
             <a:endParaRPr lang="en-US" sz="900" dirty="0"/>
           </a:p>
@@ -17219,7 +17265,7 @@
       </p:sp>
       <p:pic>
         <p:nvPicPr>
-          <p:cNvPr id="40" name="Image 0" descr="D:\repos\kb-semantic-search-benchmark\thesis\scripts\_logo_hex.png">    </p:cNvPr>
+          <p:cNvPr id="42" name="Image 0" descr="D:\repos\kb-semantic-search-benchmark\thesis\scripts\_logo_hex.png">    </p:cNvPr>
           <p:cNvPicPr>
             <a:picLocks noChangeAspect="1"/>
           </p:cNvPicPr>
@@ -17243,7 +17289,7 @@
       </p:pic>
       <p:sp>
         <p:nvSpPr>
-          <p:cNvPr id="41" name="Text 37"/>
+          <p:cNvPr id="43" name="Text 39"/>
           <p:cNvSpPr/>
           <p:nvPr/>
         </p:nvSpPr>

--- a/thesis/Nesterenko_Presentation.pptx
+++ b/thesis/Nesterenko_Presentation.pptx
@@ -16487,7 +16487,7 @@
               <a:buNone/>
             </a:pPr>
             <a:r>
-              <a:rPr lang="en-US" sz="850" b="1" spc="150" kern="0" dirty="0">
+              <a:rPr lang="en-US" sz="850" b="1" spc="100" kern="0" dirty="0">
                 <a:solidFill>
                   <a:srgbClr val="64748B"/>
                 </a:solidFill>
@@ -16509,8 +16509,8 @@
         </p:nvSpPr>
         <p:spPr>
           <a:xfrm>
-            <a:off x="6062472" y="1472184"/>
-            <a:ext cx="2560320" cy="219456"/>
+            <a:off x="6062472" y="1490472"/>
+            <a:ext cx="2560320" cy="201168"/>
           </a:xfrm>
           <a:prstGeom prst="rect">
             <a:avLst/>
@@ -16558,7 +16558,7 @@
           <a:ln/>
         </p:spPr>
         <p:txBody>
-          <a:bodyPr wrap="square" lIns="0" tIns="0" rIns="0" bIns="0" rtlCol="0" anchor="t"/>
+          <a:bodyPr wrap="square" lIns="0" tIns="0" rIns="0" bIns="0" rtlCol="0" anchor="ctr"/>
           <a:lstStyle/>
           <a:p>
             <a:pPr algn="l" indent="0" marL="0">
@@ -16573,7 +16573,7 @@
                 <a:ea typeface="Calibri" pitchFamily="34" charset="-122"/>
                 <a:cs typeface="Calibri" pitchFamily="34" charset="-120"/>
               </a:rPr>
-              <a:t>найвища nDCG (0.672 на Tech), ~228 мс — основний вибір</a:t>
+              <a:t>nDCG = 0.672  ·  ~228 мс  ·  основний вибір</a:t>
             </a:r>
             <a:endParaRPr lang="en-US" sz="900" dirty="0"/>
           </a:p>
@@ -16658,7 +16658,7 @@
               <a:buNone/>
             </a:pPr>
             <a:r>
-              <a:rPr lang="en-US" sz="850" b="1" spc="150" kern="0" dirty="0">
+              <a:rPr lang="en-US" sz="850" b="1" spc="100" kern="0" dirty="0">
                 <a:solidFill>
                   <a:srgbClr val="64748B"/>
                 </a:solidFill>
@@ -16680,8 +16680,8 @@
         </p:nvSpPr>
         <p:spPr>
           <a:xfrm>
-            <a:off x="6062472" y="2157984"/>
-            <a:ext cx="2560320" cy="219456"/>
+            <a:off x="6062472" y="2176272"/>
+            <a:ext cx="2560320" cy="201168"/>
           </a:xfrm>
           <a:prstGeom prst="rect">
             <a:avLst/>
@@ -16729,7 +16729,7 @@
           <a:ln/>
         </p:spPr>
         <p:txBody>
-          <a:bodyPr wrap="square" lIns="0" tIns="0" rIns="0" bIns="0" rtlCol="0" anchor="t"/>
+          <a:bodyPr wrap="square" lIns="0" tIns="0" rIns="0" bIns="0" rtlCol="0" anchor="ctr"/>
           <a:lstStyle/>
           <a:p>
             <a:pPr algn="l" indent="0" marL="0">
@@ -16744,7 +16744,7 @@
                 <a:ea typeface="Calibri" pitchFamily="34" charset="-122"/>
                 <a:cs typeface="Calibri" pitchFamily="34" charset="-120"/>
               </a:rPr>
-              <a:t>~70 мс  ·  3× швидше за BGE-M3 з мінімальною втратою якості</a:t>
+              <a:t>~70 мс  ·  3× швидше за BGE-M3</a:t>
             </a:r>
             <a:endParaRPr lang="en-US" sz="900" dirty="0"/>
           </a:p>
@@ -16829,7 +16829,7 @@
               <a:buNone/>
             </a:pPr>
             <a:r>
-              <a:rPr lang="en-US" sz="850" b="1" spc="150" kern="0" dirty="0">
+              <a:rPr lang="en-US" sz="850" b="1" spc="100" kern="0" dirty="0">
                 <a:solidFill>
                   <a:srgbClr val="64748B"/>
                 </a:solidFill>
@@ -16851,8 +16851,8 @@
         </p:nvSpPr>
         <p:spPr>
           <a:xfrm>
-            <a:off x="6062472" y="2843784"/>
-            <a:ext cx="2560320" cy="219456"/>
+            <a:off x="6062472" y="2862072"/>
+            <a:ext cx="2560320" cy="201168"/>
           </a:xfrm>
           <a:prstGeom prst="rect">
             <a:avLst/>
@@ -16900,7 +16900,7 @@
           <a:ln/>
         </p:spPr>
         <p:txBody>
-          <a:bodyPr wrap="square" lIns="0" tIns="0" rIns="0" bIns="0" rtlCol="0" anchor="t"/>
+          <a:bodyPr wrap="square" lIns="0" tIns="0" rIns="0" bIns="0" rtlCol="0" anchor="ctr"/>
           <a:lstStyle/>
           <a:p>
             <a:pPr algn="l" indent="0" marL="0">
@@ -16915,7 +16915,7 @@
                 <a:ea typeface="Calibri" pitchFamily="34" charset="-122"/>
                 <a:cs typeface="Calibri" pitchFamily="34" charset="-120"/>
               </a:rPr>
-              <a:t>&lt;3 мс  ·  найшвидший, але стеля якості ~0.49 nDCG</a:t>
+              <a:t>&lt;3 мс  ·  стеля якості ~0.49 nDCG</a:t>
             </a:r>
             <a:endParaRPr lang="en-US" sz="900" dirty="0"/>
           </a:p>
@@ -17000,7 +17000,7 @@
               <a:buNone/>
             </a:pPr>
             <a:r>
-              <a:rPr lang="en-US" sz="850" b="1" spc="150" kern="0" dirty="0">
+              <a:rPr lang="en-US" sz="850" b="1" spc="100" kern="0" dirty="0">
                 <a:solidFill>
                   <a:srgbClr val="64748B"/>
                 </a:solidFill>
@@ -17022,8 +17022,8 @@
         </p:nvSpPr>
         <p:spPr>
           <a:xfrm>
-            <a:off x="6062472" y="3529584"/>
-            <a:ext cx="2560320" cy="219456"/>
+            <a:off x="6062472" y="3547872"/>
+            <a:ext cx="2560320" cy="201168"/>
           </a:xfrm>
           <a:prstGeom prst="rect">
             <a:avLst/>
@@ -17071,7 +17071,7 @@
           <a:ln/>
         </p:spPr>
         <p:txBody>
-          <a:bodyPr wrap="square" lIns="0" tIns="0" rIns="0" bIns="0" rtlCol="0" anchor="t"/>
+          <a:bodyPr wrap="square" lIns="0" tIns="0" rIns="0" bIns="0" rtlCol="0" anchor="ctr"/>
           <a:lstStyle/>
           <a:p>
             <a:pPr algn="l" indent="0" marL="0">
@@ -17086,7 +17086,7 @@
                 <a:ea typeface="Calibri" pitchFamily="34" charset="-122"/>
                 <a:cs typeface="Calibri" pitchFamily="34" charset="-120"/>
               </a:rPr>
-              <a:t>виграє лише на юридичному (nDCG=0.320), на Tech домінується BGE-M3</a:t>
+              <a:t>0.320 на Legal  ·  на Tech домінується</a:t>
             </a:r>
             <a:endParaRPr lang="en-US" sz="900" dirty="0"/>
           </a:p>
@@ -17171,7 +17171,7 @@
               <a:buNone/>
             </a:pPr>
             <a:r>
-              <a:rPr lang="en-US" sz="850" b="1" spc="150" kern="0" dirty="0">
+              <a:rPr lang="en-US" sz="850" b="1" spc="100" kern="0" dirty="0">
                 <a:solidFill>
                   <a:srgbClr val="64748B"/>
                 </a:solidFill>
@@ -17193,8 +17193,8 @@
         </p:nvSpPr>
         <p:spPr>
           <a:xfrm>
-            <a:off x="6062472" y="4215384"/>
-            <a:ext cx="2560320" cy="219456"/>
+            <a:off x="6062472" y="4233672"/>
+            <a:ext cx="2560320" cy="201168"/>
           </a:xfrm>
           <a:prstGeom prst="rect">
             <a:avLst/>
@@ -17242,7 +17242,7 @@
           <a:ln/>
         </p:spPr>
         <p:txBody>
-          <a:bodyPr wrap="square" lIns="0" tIns="0" rIns="0" bIns="0" rtlCol="0" anchor="t"/>
+          <a:bodyPr wrap="square" lIns="0" tIns="0" rIns="0" bIns="0" rtlCol="0" anchor="ctr"/>
           <a:lstStyle/>
           <a:p>
             <a:pPr algn="l" indent="0" marL="0">
@@ -17257,7 +17257,7 @@
                 <a:ea typeface="Calibri" pitchFamily="34" charset="-122"/>
                 <a:cs typeface="Calibri" pitchFamily="34" charset="-120"/>
               </a:rPr>
-              <a:t>поступається BM25 за якістю при більшій latency — ані швидко, ані точно</a:t>
+              <a:t>поступається BM25 за якістю</a:t>
             </a:r>
             <a:endParaRPr lang="en-US" sz="900" dirty="0"/>
           </a:p>

--- a/thesis/Nesterenko_Presentation.pptx
+++ b/thesis/Nesterenko_Presentation.pptx
@@ -8228,9 +8228,146 @@
           </a:p>
         </p:txBody>
       </p:sp>
+      <p:sp>
+        <p:nvSpPr>
+          <p:cNvPr id="12" name="Text 10"/>
+          <p:cNvSpPr/>
+          <p:nvPr/>
+        </p:nvSpPr>
+        <p:spPr>
+          <a:xfrm>
+            <a:off x="6583680" y="3886200"/>
+            <a:ext cx="2148840" cy="201168"/>
+          </a:xfrm>
+          <a:prstGeom prst="rect">
+            <a:avLst/>
+          </a:prstGeom>
+          <a:noFill/>
+          <a:ln/>
+        </p:spPr>
+        <p:txBody>
+          <a:bodyPr wrap="square" lIns="0" tIns="0" rIns="0" bIns="0" rtlCol="0" anchor="ctr"/>
+          <a:lstStyle/>
+          <a:p>
+            <a:pPr algn="r" indent="0" marL="0">
+              <a:buNone/>
+            </a:pPr>
+            <a:r>
+              <a:rPr lang="en-US" sz="900" b="1" spc="200" kern="0" dirty="0">
+                <a:solidFill>
+                  <a:srgbClr val="64748B"/>
+                </a:solidFill>
+                <a:latin typeface="Calibri" pitchFamily="34" charset="0"/>
+                <a:ea typeface="Calibri" pitchFamily="34" charset="-122"/>
+                <a:cs typeface="Calibri" pitchFamily="34" charset="-120"/>
+              </a:rPr>
+              <a:t>ДАТА ЗАХИСТУ</a:t>
+            </a:r>
+            <a:endParaRPr lang="en-US" sz="900" dirty="0"/>
+          </a:p>
+        </p:txBody>
+      </p:sp>
+      <p:sp>
+        <p:nvSpPr>
+          <p:cNvPr id="13" name="Text 11"/>
+          <p:cNvSpPr/>
+          <p:nvPr/>
+        </p:nvSpPr>
+        <p:spPr>
+          <a:xfrm>
+            <a:off x="6583680" y="4096512"/>
+            <a:ext cx="2148840" cy="292608"/>
+          </a:xfrm>
+          <a:prstGeom prst="rect">
+            <a:avLst/>
+          </a:prstGeom>
+          <a:noFill/>
+          <a:ln/>
+        </p:spPr>
+        <p:txBody>
+          <a:bodyPr wrap="square" lIns="0" tIns="0" rIns="0" bIns="0" rtlCol="0" anchor="ctr"/>
+          <a:lstStyle/>
+          <a:p>
+            <a:pPr algn="r" indent="0" marL="0">
+              <a:buNone/>
+            </a:pPr>
+            <a:r>
+              <a:rPr lang="en-US" sz="1700" b="1" dirty="0">
+                <a:solidFill>
+                  <a:srgbClr val="0F172A"/>
+                </a:solidFill>
+                <a:latin typeface="Calibri" pitchFamily="34" charset="0"/>
+                <a:ea typeface="Calibri" pitchFamily="34" charset="-122"/>
+                <a:cs typeface="Calibri" pitchFamily="34" charset="-120"/>
+              </a:rPr>
+              <a:t>15 травня 2026</a:t>
+            </a:r>
+            <a:endParaRPr lang="en-US" sz="1700" dirty="0"/>
+          </a:p>
+        </p:txBody>
+      </p:sp>
+      <p:sp>
+        <p:nvSpPr>
+          <p:cNvPr id="14" name="Text 12"/>
+          <p:cNvSpPr/>
+          <p:nvPr/>
+        </p:nvSpPr>
+        <p:spPr>
+          <a:xfrm>
+            <a:off x="6583680" y="4407408"/>
+            <a:ext cx="2148840" cy="201168"/>
+          </a:xfrm>
+          <a:prstGeom prst="rect">
+            <a:avLst/>
+          </a:prstGeom>
+          <a:noFill/>
+          <a:ln/>
+        </p:spPr>
+        <p:txBody>
+          <a:bodyPr wrap="square" lIns="0" tIns="0" rIns="0" bIns="0" rtlCol="0" anchor="ctr"/>
+          <a:lstStyle/>
+          <a:p>
+            <a:pPr algn="r" indent="0" marL="0">
+              <a:buNone/>
+            </a:pPr>
+            <a:r>
+              <a:rPr lang="en-US" sz="1100" i="1" dirty="0">
+                <a:solidFill>
+                  <a:srgbClr val="64748B"/>
+                </a:solidFill>
+                <a:latin typeface="Calibri" pitchFamily="34" charset="0"/>
+                <a:ea typeface="Calibri" pitchFamily="34" charset="-122"/>
+                <a:cs typeface="Calibri" pitchFamily="34" charset="-120"/>
+              </a:rPr>
+              <a:t>Харків</a:t>
+            </a:r>
+            <a:endParaRPr lang="en-US" sz="1100" dirty="0"/>
+          </a:p>
+        </p:txBody>
+      </p:sp>
+      <p:sp>
+        <p:nvSpPr>
+          <p:cNvPr id="15" name="Shape 13"/>
+          <p:cNvSpPr/>
+          <p:nvPr/>
+        </p:nvSpPr>
+        <p:spPr>
+          <a:xfrm>
+            <a:off x="8275320" y="3849624"/>
+            <a:ext cx="457200" cy="36576"/>
+          </a:xfrm>
+          <a:prstGeom prst="rect">
+            <a:avLst/>
+          </a:prstGeom>
+          <a:solidFill>
+            <a:srgbClr val="F59E0B"/>
+          </a:solidFill>
+          <a:ln/>
+        </p:spPr>
+      </p:sp>
       <p:pic>
         <p:nvPicPr>
-          <p:cNvPr id="12" name="Image 0" descr="preencoded.png">    </p:cNvPr>
+          <p:cNvPr id="16" name="Image 0" descr="D:\repos\kb-semantic-search-benchmark\thesis\scripts\_logo_xnure.png">    </p:cNvPr>
           <p:cNvPicPr>
             <a:picLocks noChangeAspect="1"/>
           </p:cNvPicPr>
@@ -8244,56 +8381,17 @@
         </p:blipFill>
         <p:spPr>
           <a:xfrm>
-            <a:off x="7178040" y="4069080"/>
-            <a:ext cx="182880" cy="182880"/>
+            <a:off x="411480" y="4686300"/>
+            <a:ext cx="1645920" cy="365760"/>
           </a:xfrm>
           <a:prstGeom prst="rect">
             <a:avLst/>
           </a:prstGeom>
         </p:spPr>
       </p:pic>
-      <p:sp>
-        <p:nvSpPr>
-          <p:cNvPr id="13" name="Text 10"/>
-          <p:cNvSpPr/>
-          <p:nvPr/>
-        </p:nvSpPr>
-        <p:spPr>
-          <a:xfrm>
-            <a:off x="7406640" y="4023360"/>
-            <a:ext cx="1691640" cy="274320"/>
-          </a:xfrm>
-          <a:prstGeom prst="rect">
-            <a:avLst/>
-          </a:prstGeom>
-          <a:noFill/>
-          <a:ln/>
-        </p:spPr>
-        <p:txBody>
-          <a:bodyPr wrap="square" lIns="0" tIns="0" rIns="0" bIns="0" rtlCol="0" anchor="ctr"/>
-          <a:lstStyle/>
-          <a:p>
-            <a:pPr algn="l" indent="0" marL="0">
-              <a:buNone/>
-            </a:pPr>
-            <a:r>
-              <a:rPr lang="en-US" sz="1100" dirty="0">
-                <a:solidFill>
-                  <a:srgbClr val="475569"/>
-                </a:solidFill>
-                <a:latin typeface="Calibri" pitchFamily="34" charset="0"/>
-                <a:ea typeface="Calibri" pitchFamily="34" charset="-122"/>
-                <a:cs typeface="Calibri" pitchFamily="34" charset="-120"/>
-              </a:rPr>
-              <a:t>15 травня 2026   ·   Харків</a:t>
-            </a:r>
-            <a:endParaRPr lang="en-US" sz="1100" dirty="0"/>
-          </a:p>
-        </p:txBody>
-      </p:sp>
       <p:pic>
         <p:nvPicPr>
-          <p:cNvPr id="14" name="Image 1" descr="D:\repos\kb-semantic-search-benchmark\thesis\scripts\_logo_xnure.png">    </p:cNvPr>
+          <p:cNvPr id="17" name="Image 1" descr="D:\repos\kb-semantic-search-benchmark\thesis\scripts\_logo_kafedra.png">    </p:cNvPr>
           <p:cNvPicPr>
             <a:picLocks noChangeAspect="1"/>
           </p:cNvPicPr>
@@ -8307,8 +8405,8 @@
         </p:blipFill>
         <p:spPr>
           <a:xfrm>
-            <a:off x="411480" y="4686300"/>
-            <a:ext cx="1645920" cy="365760"/>
+            <a:off x="2331720" y="4704588"/>
+            <a:ext cx="1645920" cy="329184"/>
           </a:xfrm>
           <a:prstGeom prst="rect">
             <a:avLst/>
@@ -8317,7 +8415,7 @@
       </p:pic>
       <p:pic>
         <p:nvPicPr>
-          <p:cNvPr id="15" name="Image 2" descr="D:\repos\kb-semantic-search-benchmark\thesis\scripts\_logo_kafedra.png">    </p:cNvPr>
+          <p:cNvPr id="18" name="Image 2" descr="D:\repos\kb-semantic-search-benchmark\thesis\scripts\_logo_hex.png">    </p:cNvPr>
           <p:cNvPicPr>
             <a:picLocks noChangeAspect="1"/>
           </p:cNvPicPr>
@@ -8325,30 +8423,6 @@
         </p:nvPicPr>
         <p:blipFill>
           <a:blip r:embed="rId3"/>
-          <a:stretch>
-            <a:fillRect/>
-          </a:stretch>
-        </p:blipFill>
-        <p:spPr>
-          <a:xfrm>
-            <a:off x="2331720" y="4704588"/>
-            <a:ext cx="1645920" cy="329184"/>
-          </a:xfrm>
-          <a:prstGeom prst="rect">
-            <a:avLst/>
-          </a:prstGeom>
-        </p:spPr>
-      </p:pic>
-      <p:pic>
-        <p:nvPicPr>
-          <p:cNvPr id="16" name="Image 3" descr="D:\repos\kb-semantic-search-benchmark\thesis\scripts\_logo_hex.png">    </p:cNvPr>
-          <p:cNvPicPr>
-            <a:picLocks noChangeAspect="1"/>
-          </p:cNvPicPr>
-          <p:nvPr/>
-        </p:nvPicPr>
-        <p:blipFill>
-          <a:blip r:embed="rId4"/>
           <a:stretch>
             <a:fillRect/>
           </a:stretch>

--- a/thesis/Nesterenko_Presentation.pptx
+++ b/thesis/Nesterenko_Presentation.pptx
@@ -5366,7 +5366,15 @@
           <a:bodyPr/>
           <a:lstStyle/>
           <a:p>
+            <a:r>
+              <a:t>⏱ ~25 сек  ·  слайд 1/18</a:t>
+            </a:r>
             <a:endParaRPr lang="en-US" dirty="0"/>
+          </a:p>
+          <a:p>
+            <a:r>
+              <a:t>Шановні члени екзаменаційної комісії, шановний головуючий! Вашій увазі представляється кваліфікаційна магістерська робота на тему «Дослідження моделей векторних ембеддінгів для семантичного пошуку текстових даних у корпоративних базах знань». Виконав здобувач групи ІПЗм-24-1 Нестеренко Віталій Вячеславович. Науковий керівник — кандидат технічних наук, доцент Русакова Наталія Євгенівна.</a:t>
+            </a:r>
           </a:p>
         </p:txBody>
       </p:sp>
@@ -5450,7 +5458,25 @@
           <a:bodyPr/>
           <a:lstStyle/>
           <a:p>
+            <a:r>
+              <a:t>⏱ ~35 сек  ·  слайд 10/18</a:t>
+            </a:r>
             <a:endParaRPr lang="en-US" dirty="0"/>
+          </a:p>
+          <a:p>
+            <a:r>
+              <a:t>Програмне забезпечення реалізоване на Python 3.11. Для ML-частини використано бібліотеки sentence-transformers, transformers від Hugging Face та PyTorch у CPU-режимі.</a:t>
+            </a:r>
+          </a:p>
+          <a:p>
+            <a:r>
+              <a:t>Для retrieval — бібліотеки FAISS з точним індексом IndexFlatIP та rank_bm25 для лексичної baseline. Дані зберігаються у форматі JSONL — це і чанки, і релевантність qrels.</a:t>
+            </a:r>
+          </a:p>
+          <a:p>
+            <a:r>
+              <a:t>Веб-частина побудована на Flask. Аналіз результатів виконано через NumPy, scikit-learn та власну реалізацію бутстреп-довірчих інтервалів. Версіонування — Git і GitHub.</a:t>
+            </a:r>
           </a:p>
         </p:txBody>
       </p:sp>
@@ -5534,7 +5560,30 @@
           <a:bodyPr/>
           <a:lstStyle/>
           <a:p>
+            <a:r>
+              <a:t>⏱ ~45 сек  ·  слайд 11/18</a:t>
+            </a:r>
             <a:endParaRPr lang="en-US" dirty="0"/>
+          </a:p>
+          <a:p>
+            <a:r>
+              <a:t>Власноруч сформовано україномовний benchmark з трьох предметних доменів. Усього — 32 документи, 300 запитів. Якорі релевантності — qrels — сформовано вручну.</a:t>
+            </a:r>
+          </a:p>
+          <a:p>
+            <a:r>
+              <a:t>Технічний домен: 10 документів з тематики програмної інженерії, машинного навчання, систем RAG, виявлення аномалій, 3D-друку та лідарних систем — 100 запитів.</a:t>
+            </a:r>
+          </a:p>
+          <a:p>
+            <a:r>
+              <a:t>Юридичний домен: 13 документів — кодекси України, нормативно-правові акти, законодавчі тексти — 100 запитів.</a:t>
+            </a:r>
+          </a:p>
+          <a:p>
+            <a:r>
+              <a:t>Медичний домен: 9 документів — клінічні протоколи та медичні рекомендації — 100 запитів. У кожному домені по 100 україномовних запитів з ручною розміткою релевантних чанків.</a:t>
+            </a:r>
           </a:p>
         </p:txBody>
       </p:sp>
@@ -5618,7 +5667,15 @@
           <a:bodyPr/>
           <a:lstStyle/>
           <a:p>
+            <a:r>
+              <a:t>⏱ ~30 сек  ·  слайд 12/18</a:t>
+            </a:r>
             <a:endParaRPr lang="en-US" dirty="0"/>
+          </a:p>
+          <a:p>
+            <a:r>
+              <a:t>Приклади запитів для ілюстрації характеру benchmark-у. У технічному домені — запити на кшталт «виявлення аномалій у фінансових транзакціях» чи «прогноз відтоку клієнтів». У юридичному — «з якого віку настає повна цивільна дієздатність» або «що входить до складу спадщини». У медичному — «будова та функції серця людини», «велике і мале коло кровообігу». Тобто реальні питання, які могли б ставити користувачі корпоративних інформаційних систем.</a:t>
+            </a:r>
           </a:p>
         </p:txBody>
       </p:sp>
@@ -5702,7 +5759,30 @@
           <a:bodyPr/>
           <a:lstStyle/>
           <a:p>
+            <a:r>
+              <a:t>⏱ ~70 сек  ·  слайд 13/18</a:t>
+            </a:r>
             <a:endParaRPr lang="en-US" dirty="0"/>
+          </a:p>
+          <a:p>
+            <a:r>
+              <a:t>Перейдемо до головних результатів експерименту. У таблиці — середнє значення nDCG@10 по всіх трьох доменах.</a:t>
+            </a:r>
+          </a:p>
+          <a:p>
+            <a:r>
+              <a:t>Перше місце посідає BGE-M3 з результатом 0.4708. Друге — Qwen3 з результатом 0.4385. Третє — E5-base з 0.4199. Четверте — лексична baseline BM25 з результатом 0.3319. На останньому місці — nomic з результатом 0.2128, що навіть нижче BM25.</a:t>
+            </a:r>
+          </a:p>
+          <a:p>
+            <a:r>
+              <a:t>Ключовий висновок: три з чотирьох embedding-моделей перевершують лексичну baseline BM25.</a:t>
+            </a:r>
+          </a:p>
+          <a:p>
+            <a:r>
+              <a:t>Достовірність підтверджена бутстреп-аналізом: 2000 повторних вибірок з поверненням. На технічному домені 95% довірчий інтервал для BGE-M3 склав від 0.606 до 0.737, а для BM25 — від 0.431 до 0.541. Інтервали не перетинаються, отже перевага семантичного пошуку над лексичним є статистично значущою.</a:t>
+            </a:r>
           </a:p>
         </p:txBody>
       </p:sp>
@@ -5786,7 +5866,20 @@
           <a:bodyPr/>
           <a:lstStyle/>
           <a:p>
+            <a:r>
+              <a:t>⏱ ~40 сек  ·  слайд 14/18</a:t>
+            </a:r>
             <a:endParaRPr lang="en-US" dirty="0"/>
+          </a:p>
+          <a:p>
+            <a:r>
+              <a:t>На цьому слайді — деталізовані метрики у розрізі трьох доменів. Чотири підграфіки відповідають чотирьом метрикам якості: nDCG@10, MRR@10, Recall@10 та Precision@10.</a:t>
+            </a:r>
+          </a:p>
+          <a:p>
+            <a:r>
+              <a:t>Видно, що лідерство BGE-M3 є послідовним за всіма чотирма метриками — це додатковий доказ робастності результату. На юридичному домені усі моделі демонструють нижчі значення — він обʼєктивно складніший для семантичного пошуку через формальний стиль текстів і вузькоспеціалізовану термінологію.</a:t>
+            </a:r>
           </a:p>
         </p:txBody>
       </p:sp>
@@ -5870,7 +5963,40 @@
           <a:bodyPr/>
           <a:lstStyle/>
           <a:p>
+            <a:r>
+              <a:t>⏱ ~60 сек  ·  слайд 15/18</a:t>
+            </a:r>
             <a:endParaRPr lang="en-US" dirty="0"/>
+          </a:p>
+          <a:p>
+            <a:r>
+              <a:t>Тепер — багатокритеріальний вибір моделі. Парето-оптимальна множина складається з трьох альтернатив: BGE-M3, E5-base та BM25. Тобто три з п'яти моделей не домінуються жодною іншою за всіма критеріями одночасно.</a:t>
+            </a:r>
+          </a:p>
+          <a:p>
+            <a:r>
+              <a:t>BGE-M3 — лідер у всіх трьох доменах за nDCG, MRR та Recall.</a:t>
+            </a:r>
+          </a:p>
+          <a:p>
+            <a:r>
+              <a:t>E5-base — швидка альтернатива: близько 70 мілісекунд на запит проти 228 мілісекунд у BGE-M3, тобто приблизно у три рази швидше при прийнятній якості.</a:t>
+            </a:r>
+          </a:p>
+          <a:p>
+            <a:r>
+              <a:t>Qwen3 виявився лідером на юридичному домені з nDCG 0.320, але приблизно у два рази повільніший.</a:t>
+            </a:r>
+          </a:p>
+          <a:p>
+            <a:r>
+              <a:t>Nomic — найслабші результати; в окремих доменах поступається навіть BM25 за якістю.</a:t>
+            </a:r>
+          </a:p>
+          <a:p>
+            <a:r>
+              <a:t>Діаграма знизу показує інтегральні оцінки U по трьох доменах, обчислені за лінійною згорткою з рівними вагами.</a:t>
+            </a:r>
           </a:p>
         </p:txBody>
       </p:sp>
@@ -5954,7 +6080,40 @@
           <a:bodyPr/>
           <a:lstStyle/>
           <a:p>
+            <a:r>
+              <a:t>⏱ ~70 сек  ·  слайд 16/18</a:t>
+            </a:r>
             <a:endParaRPr lang="en-US" dirty="0"/>
+          </a:p>
+          <a:p>
+            <a:r>
+              <a:t>На цьому графіку — компроміс між якістю та швидкодією на технічному домені. По осі X — час відповіді в мілісекундах, по осі Y — nDCG@10. Парето-фронт виділено пунктирною лінією.</a:t>
+            </a:r>
+          </a:p>
+          <a:p>
+            <a:r>
+              <a:t>BGE-M3 — Парето-оптимальна, лідер за якістю: nDCG 0.672, приблизно 228 мілісекунд на запит. Це основний вибір для впровадження.</a:t>
+            </a:r>
+          </a:p>
+          <a:p>
+            <a:r>
+              <a:t>E5-base — також Парето-оптимальна, sweet spot: близько 70 мілісекунд, тобто у три рази швидше за BGE-M3 при незначній втраті якості.</a:t>
+            </a:r>
+          </a:p>
+          <a:p>
+            <a:r>
+              <a:t>BM25 — Парето-оптимальна як baseline: менше 3 мілісекунд, але стеля якості — приблизно 0.49 nDCG.</a:t>
+            </a:r>
+          </a:p>
+          <a:p>
+            <a:r>
+              <a:t>Qwen3 — спеціалізована модель, домінується на технічному домені, але краща на юридичному.</a:t>
+            </a:r>
+          </a:p>
+          <a:p>
+            <a:r>
+              <a:t>Nomic — не рекомендується: повністю домінується іншими моделями, поступається BM25 за якістю при більших вимогах до ресурсів.</a:t>
+            </a:r>
           </a:p>
         </p:txBody>
       </p:sp>
@@ -6038,7 +6197,30 @@
           <a:bodyPr/>
           <a:lstStyle/>
           <a:p>
+            <a:r>
+              <a:t>⏱ ~40 сек  ·  слайд 17/18</a:t>
+            </a:r>
             <a:endParaRPr lang="en-US" dirty="0"/>
+          </a:p>
+          <a:p>
+            <a:r>
+              <a:t>Апробація результатів дослідження. Опубліковано дві наукові праці у співавторстві з науковим керівником.</a:t>
+            </a:r>
+          </a:p>
+          <a:p>
+            <a:r>
+              <a:t>Перша — стаття на 2-й Міжнародній науково-практичній конференції «Innovative Research in Science and Economy» 2026 року, де представлено benchmark-методологію та порівняння чотирьох моделей.</a:t>
+            </a:r>
+          </a:p>
+          <a:p>
+            <a:r>
+              <a:t>Друга — тези на 30-му Міжнародному молодіжному форумі «Радіоелектроніка та молодь у XXI столітті» в ХНУРЕ, де подано підхід до підвищення якості семантичного пошуку на основі контрастивно-навчених embedding-моделей.</a:t>
+            </a:r>
+          </a:p>
+          <a:p>
+            <a:r>
+              <a:t>Загалом — два виступи на міжнародних конференціях.</a:t>
+            </a:r>
           </a:p>
         </p:txBody>
       </p:sp>
@@ -6122,7 +6304,45 @@
           <a:bodyPr/>
           <a:lstStyle/>
           <a:p>
+            <a:r>
+              <a:t>⏱ ~60 сек  ·  слайд 18/18</a:t>
+            </a:r>
             <a:endParaRPr lang="en-US" dirty="0"/>
+          </a:p>
+          <a:p>
+            <a:r>
+              <a:t>Підсумовуючи: у роботі обґрунтовано доцільність застосування сучасних embedding-моделей для семантичного пошуку у корпоративних базах знань. Сформульовано практичні рекомендації щодо вибору моделі.</a:t>
+            </a:r>
+          </a:p>
+          <a:p>
+            <a:r>
+              <a:t>BGE-M3 — основна модель для впровадження: найкраща якість і стабільність у різних доменах.</a:t>
+            </a:r>
+          </a:p>
+          <a:p>
+            <a:r>
+              <a:t>E5-base — швидка альтернатива з прийнятною якістю та триразовою перевагою за швидкодією.</a:t>
+            </a:r>
+          </a:p>
+          <a:p>
+            <a:r>
+              <a:t>Qwen3 — оптимальний вибір для юридичних колекцій, де він демонструє найвищу якість.</a:t>
+            </a:r>
+          </a:p>
+          <a:p>
+            <a:r>
+              <a:t>BM25 — залишається конкурентним baseline у певних доменах і за дуже жорстких вимог до швидкості.</a:t>
+            </a:r>
+          </a:p>
+          <a:p>
+            <a:r>
+              <a:t>Усі задачі, поставлені в роботі, виконано. Мета досягнута.</a:t>
+            </a:r>
+          </a:p>
+          <a:p>
+            <a:r>
+              <a:t>Дякую за увагу! Готовий відповісти на запитання.</a:t>
+            </a:r>
           </a:p>
         </p:txBody>
       </p:sp>
@@ -6206,7 +6426,30 @@
           <a:bodyPr/>
           <a:lstStyle/>
           <a:p>
+            <a:r>
+              <a:t>⏱ ~70 сек  ·  слайд 2/18</a:t>
+            </a:r>
             <a:endParaRPr lang="en-US" dirty="0"/>
+          </a:p>
+          <a:p>
+            <a:r>
+              <a:t>Актуальність роботи зумовлена тим, що обсяги корпоративної текстової інформації стрімко зростають, а традиційний лексичний пошук — за ключовими словами — погано працює з синонімією, перефразуванням і мультимовним контентом. Сучасні моделі векторних ембеддінгів дозволяють шукати за змістом, а не за збігом слів.</a:t>
+            </a:r>
+          </a:p>
+          <a:p>
+            <a:r>
+              <a:t>Мета дослідження — визначити доцільність застосування сучасних embedding-моделей для підвищення ефективності семантичного пошуку у корпоративних базах знань шляхом порівняльного експериментального дослідження.</a:t>
+            </a:r>
+          </a:p>
+          <a:p>
+            <a:r>
+              <a:t>Об'єктом дослідження є процеси формування та використання векторних подань текстових даних у системах семантичного пошуку. Предметом — самі моделі векторних ембеддінгів для застосування в корпоративних базах знань.</a:t>
+            </a:r>
+          </a:p>
+          <a:p>
+            <a:r>
+              <a:t>Для досягнення мети поставлено шість задач: проаналізувати предметну галузь; здійснити огляд сучасних embedding-моделей; сформувати україномовний benchmark-набір; реалізувати систему пошуку; оцінити якість моделей за стандартними метриками; та обґрунтовано обрати оптимальну модель.</a:t>
+            </a:r>
           </a:p>
         </p:txBody>
       </p:sp>
@@ -6290,7 +6533,20 @@
           <a:bodyPr/>
           <a:lstStyle/>
           <a:p>
+            <a:r>
+              <a:t>⏱ ~60 сек  ·  слайд 3/18</a:t>
+            </a:r>
             <a:endParaRPr lang="en-US" dirty="0"/>
+          </a:p>
+          <a:p>
+            <a:r>
+              <a:t>Огляд літератури охоплює період з 2013 по 2025 рік — понад дванадцять років еволюції embedding-моделей. На таймлайні представлено ключові віхи: Word2Vec Міколова 2013 року заклав статистичні векторні подання; BERT 2018 року Девліна приніс контекстність через трансформери; Sentence-BERT 2019 року Реймерса оптимізував архітектуру під семантичну схожість речень. У 2022 році з'явилась модель E5 з контрастивним навчанням та мультимовністю. У 2024 році — BGE-M3 та nomic-embed, які підтримують довгий контекст до восьми тисяч токенів. І найновіша — Qwen3-Embedding 2025 року, побудована на декодерній архітектурі з підтримкою інструкцій.</a:t>
+            </a:r>
+          </a:p>
+          <a:p>
+            <a:r>
+              <a:t>Усього опрацьовано 29 наукових джерел. Виявлено дослідницьку прогалину: на момент виконання роботи відсутні порівняльні дослідження сучасних embedding-моделей саме на україномовних доменно-специфічних колекціях.</a:t>
+            </a:r>
           </a:p>
         </p:txBody>
       </p:sp>
@@ -6374,7 +6630,20 @@
           <a:bodyPr/>
           <a:lstStyle/>
           <a:p>
+            <a:r>
+              <a:t>⏱ ~50 сек  ·  слайд 4/18</a:t>
+            </a:r>
             <a:endParaRPr lang="en-US" dirty="0"/>
+          </a:p>
+          <a:p>
+            <a:r>
+              <a:t>З огляду на виявлену прогалину сформульовано постановку задачі. Просто застосувати сучасну embedding-модель недостатньо — необхідно обґрунтовано вибрати модель, яка забезпечує оптимальний баланс між якістю пошуку, швидкодією, вимогами до ресурсів, мовною підтримкою та типом колекції документів.</a:t>
+            </a:r>
+          </a:p>
+          <a:p>
+            <a:r>
+              <a:t>Очікувані результати роботи: перше — повноцінна система семантичного пошуку з підтримкою форматів PDF, DOCX, TXT та Markdown. Друге — власноруч сформований україномовний benchmark з трьох доменів. Третє — кількісне порівняння чотирьох embedding-моделей та лексичної baseline-моделі BM25. Четверте — багатокритеріальний вибір моделі за Парето-фронтом і лінійною згорткою. І п'яте — обґрунтовані практичні рекомендації для впровадження у виробничі системи.</a:t>
+            </a:r>
           </a:p>
         </p:txBody>
       </p:sp>
@@ -6458,7 +6727,40 @@
           <a:bodyPr/>
           <a:lstStyle/>
           <a:p>
+            <a:r>
+              <a:t>⏱ ~60 сек  ·  слайд 5/18</a:t>
+            </a:r>
             <a:endParaRPr lang="en-US" dirty="0"/>
+          </a:p>
+          <a:p>
+            <a:r>
+              <a:t>Для дослідження обрано чотири сучасні моделі векторних ембеддінгів.</a:t>
+            </a:r>
+          </a:p>
+          <a:p>
+            <a:r>
+              <a:t>Перша — BGE-M3 від BAAI: 568 мільйонів параметрів, контекстне вікно до 8192 токенів, енкодерна архітектура. Її особливість — три режими роботи: dense, sparse та multi-vector.</a:t>
+            </a:r>
+          </a:p>
+          <a:p>
+            <a:r>
+              <a:t>Друга — multilingual E5-base від intfloat: 278 мільйонів параметрів, контекст 512 токенів. Особливість — обов'язкові префікси query та passage перед текстом для запитів і документів.</a:t>
+            </a:r>
+          </a:p>
+          <a:p>
+            <a:r>
+              <a:t>Третя — nomic-embed v1.5: всього 137 мільйонів параметрів, але контекст до 8192 токенів і техніка Matryoshka representations, що дозволяє динамічно зменшувати розмірність вектора.</a:t>
+            </a:r>
+          </a:p>
+          <a:p>
+            <a:r>
+              <a:t>Четверта — Qwen3-Embedding-0.6B від Alibaba: 596 мільйонів параметрів, контекст 32768 токенів. На відміну від інших трьох, побудована на декодерній LLM-архітектурі та підтримує інструкції.</a:t>
+            </a:r>
+          </a:p>
+          <a:p>
+            <a:r>
+              <a:t>Як лексична baseline використано BM25.</a:t>
+            </a:r>
           </a:p>
         </p:txBody>
       </p:sp>
@@ -6542,7 +6844,20 @@
           <a:bodyPr/>
           <a:lstStyle/>
           <a:p>
+            <a:r>
+              <a:t>⏱ ~50 сек  ·  слайд 6/18</a:t>
+            </a:r>
             <a:endParaRPr lang="en-US" dirty="0"/>
+          </a:p>
+          <a:p>
+            <a:r>
+              <a:t>Методологія оцінювання базується на чотирьох метриках retrieval-якості, які є стандартом у сфері інформаційного пошуку: nDCG@10 — основна метрика якості ранжування; MRR@10 — позиція першого релевантного документа; Recall@10 — повнота пошуку; та Precision@10 — точність видачі. Окремо вимірюється швидкодія в мілісекундах на запит.</a:t>
+            </a:r>
+          </a:p>
+          <a:p>
+            <a:r>
+              <a:t>Для забезпечення достовірності результатів застосовано три методи аналізу. Перший — бутстреп-довірчі інтервали: 2000 повторних вибірок із поверненням, що дозволяє оцінити 95% довірчий інтервал для nDCG@10. Другий — Парето-домінування для виявлення недомінованих альтернатив. Третій — лінійна адитивна згортка для обчислення інтегральної оцінки корисності з ваговими коефіцієнтами критеріїв.</a:t>
+            </a:r>
           </a:p>
         </p:txBody>
       </p:sp>
@@ -6626,7 +6941,35 @@
           <a:bodyPr/>
           <a:lstStyle/>
           <a:p>
+            <a:r>
+              <a:t>⏱ ~60 сек  ·  слайд 7/18</a:t>
+            </a:r>
             <a:endParaRPr lang="en-US" dirty="0"/>
+          </a:p>
+          <a:p>
+            <a:r>
+              <a:t>Розгляну формули метрик детальніше. nDCG@k — нормалізована якість ранжування, обчислюється як DCG поділене на ідеальне DCG. Сама DCG враховує і факт релевантності, і позицію документа — кожен документ ділиться на логарифм його позиції плюс один.</a:t>
+            </a:r>
+          </a:p>
+          <a:p>
+            <a:r>
+              <a:t>MRR — це середнє значення оберненої позиції першого релевантного документа по всіх запитах. Якщо релевантний документ на першому місці — MRR дорівнює одиниці; на десятому — одній десятій.</a:t>
+            </a:r>
+          </a:p>
+          <a:p>
+            <a:r>
+              <a:t>Recall@k — частка релевантних документів, знайдених у топ-k результатів, серед усіх релевантних у колекції.</a:t>
+            </a:r>
+          </a:p>
+          <a:p>
+            <a:r>
+              <a:t>Precision@k — частка релевантних документів серед перших k результатів видачі.</a:t>
+            </a:r>
+          </a:p>
+          <a:p>
+            <a:r>
+              <a:t>Усі чотири метрики приймають значення від нуля до одиниці, і чим вище — тим краще.</a:t>
+            </a:r>
           </a:p>
         </p:txBody>
       </p:sp>
@@ -6710,7 +7053,30 @@
           <a:bodyPr/>
           <a:lstStyle/>
           <a:p>
+            <a:r>
+              <a:t>⏱ ~60 сек  ·  слайд 8/18</a:t>
+            </a:r>
             <a:endParaRPr lang="en-US" dirty="0"/>
+          </a:p>
+          <a:p>
+            <a:r>
+              <a:t>Багатокритеріальний вибір моделі реалізовано у три кроки.</a:t>
+            </a:r>
+          </a:p>
+          <a:p>
+            <a:r>
+              <a:t>Крок перший — Парето-домінування. Альтернатива є Парето-оптимальною, якщо не існує іншої альтернативи, яка домінує над нею за всіма критеріями одночасно. Це дозволяє відсіяти заздалегідь гірші варіанти.</a:t>
+            </a:r>
+          </a:p>
+          <a:p>
+            <a:r>
+              <a:t>Крок другий — нормалізація шкал. Критерії мають різні одиниці виміру: nDCG в межах від нуля до одиниці, а швидкодія в мілісекундах. Тому всі критерії приводяться до спільної шкали від нуля до одиниці з урахуванням напряму оптимізації — максимізувати чи мінімізувати.</a:t>
+            </a:r>
+          </a:p>
+          <a:p>
+            <a:r>
+              <a:t>Крок третій — лінійна адитивна згортка. Інтегральна оцінка корисності U від альтернативи дорівнює сумі добутків ваг на нормалізовані значення критеріїв. Сума ваг дорівнює одиниці. Користувач задає ваги залежно від своїх пріоритетів — наприклад, якість важливіша за швидкість або навпаки.</a:t>
+            </a:r>
           </a:p>
         </p:txBody>
       </p:sp>
@@ -6794,7 +7160,25 @@
           <a:bodyPr/>
           <a:lstStyle/>
           <a:p>
+            <a:r>
+              <a:t>⏱ ~50 сек  ·  слайд 9/18</a:t>
+            </a:r>
             <a:endParaRPr lang="en-US" dirty="0"/>
+          </a:p>
+          <a:p>
+            <a:r>
+              <a:t>Архітектура системи побудована у вигляді pipeline. На вході — документи у форматах PDF, DOCX, TXT або Markdown. Документи розбиваються на чанки приблизно по 600 слів з перекриттям, що зберігає контекстну зв'язність.</a:t>
+            </a:r>
+          </a:p>
+          <a:p>
+            <a:r>
+              <a:t>Далі кожен чанк перетворюється на вектор за допомогою однієї з чотирьох embedding-моделей. Вектори L2-нормалізуються та індексуються у FAISS — використовується точний індекс IndexFlatIP, який обчислює внутрішній добуток, що для нормалізованих векторів еквівалентне косинусній мірі.</a:t>
+            </a:r>
+          </a:p>
+          <a:p>
+            <a:r>
+              <a:t>Запит користувача проходить ту саму обробку, і за косинусною схожістю повертаються топ-K найрелевантніших чанків. Усе це обгорнуто у Flask веб-застосунок. Основні модулі — build_index, evaluate_benchmark, embedding_models та app.</a:t>
+            </a:r>
           </a:p>
         </p:txBody>
       </p:sp>

--- a/thesis/Nesterenko_Presentation.pptx
+++ b/thesis/Nesterenko_Presentation.pptx
@@ -5459,23 +5459,13 @@
           <a:lstStyle/>
           <a:p>
             <a:r>
-              <a:t>⏱ ~35 сек  ·  слайд 10/18</a:t>
+              <a:t>⏱ ~20 сек  ·  слайд 10/18</a:t>
             </a:r>
             <a:endParaRPr lang="en-US" dirty="0"/>
           </a:p>
           <a:p>
             <a:r>
-              <a:t>Програмне забезпечення реалізоване на Python 3.11. Для ML-частини використано бібліотеки sentence-transformers, transformers від Hugging Face та PyTorch у CPU-режимі.</a:t>
-            </a:r>
-          </a:p>
-          <a:p>
-            <a:r>
-              <a:t>Для retrieval — бібліотеки FAISS з точним індексом IndexFlatIP та rank_bm25 для лексичної baseline. Дані зберігаються у форматі JSONL — це і чанки, і релевантність qrels.</a:t>
-            </a:r>
-          </a:p>
-          <a:p>
-            <a:r>
-              <a:t>Веб-частина побудована на Flask. Аналіз результатів виконано через NumPy, scikit-learn та власну реалізацію бутстреп-довірчих інтервалів. Версіонування — Git і GitHub.</a:t>
+              <a:t>Програмне забезпечення: Python 3.11, sentence-transformers, transformers від Hugging Face, PyTorch у CPU-режимі, FAISS і rank_bm25 для retrieval, Flask для веб-частини, NumPy і scikit-learn для аналізу, бутстреп-CI власної реалізації.</a:t>
             </a:r>
           </a:p>
         </p:txBody>
@@ -5668,13 +5658,13 @@
           <a:lstStyle/>
           <a:p>
             <a:r>
-              <a:t>⏱ ~30 сек  ·  слайд 12/18</a:t>
+              <a:t>⏱ ~15 сек  ·  слайд 12/18</a:t>
             </a:r>
             <a:endParaRPr lang="en-US" dirty="0"/>
           </a:p>
           <a:p>
             <a:r>
-              <a:t>Приклади запитів для ілюстрації характеру benchmark-у. У технічному домені — запити на кшталт «виявлення аномалій у фінансових транзакціях» чи «прогноз відтоку клієнтів». У юридичному — «з якого віку настає повна цивільна дієздатність» або «що входить до складу спадщини». У медичному — «будова та функції серця людини», «велике і мале коло кровообігу». Тобто реальні питання, які могли б ставити користувачі корпоративних інформаційних систем.</a:t>
+              <a:t>Приклади запитів — у технічному домені про відтік клієнтів і аномалії; у юридичному — про цивільну дієздатність і спадщину; у медичному — про будову серця і кровообіг. Реальні питання користувачів.</a:t>
             </a:r>
           </a:p>
         </p:txBody>
@@ -5867,18 +5857,13 @@
           <a:lstStyle/>
           <a:p>
             <a:r>
-              <a:t>⏱ ~40 сек  ·  слайд 14/18</a:t>
+              <a:t>⏱ ~25 сек  ·  слайд 14/18</a:t>
             </a:r>
             <a:endParaRPr lang="en-US" dirty="0"/>
           </a:p>
           <a:p>
             <a:r>
-              <a:t>На цьому слайді — деталізовані метрики у розрізі трьох доменів. Чотири підграфіки відповідають чотирьом метрикам якості: nDCG@10, MRR@10, Recall@10 та Precision@10.</a:t>
-            </a:r>
-          </a:p>
-          <a:p>
-            <a:r>
-              <a:t>Видно, що лідерство BGE-M3 є послідовним за всіма чотирма метриками — це додатковий доказ робастності результату. На юридичному домені усі моделі демонструють нижчі значення — він обʼєктивно складніший для семантичного пошуку через формальний стиль текстів і вузькоспеціалізовану термінологію.</a:t>
+              <a:t>Деталізовані метрики у розрізі трьох доменів — nDCG, MRR, Recall, Precision. Лідерство BGE-M3 послідовне за всіма чотирма метриками — це підтверджує робастність результату. На юридичному домені усі моделі показують нижчі значення — він складніший через формальний стиль і вузькоспеціалізовану термінологію.</a:t>
             </a:r>
           </a:p>
         </p:txBody>
@@ -5964,38 +5949,13 @@
           <a:lstStyle/>
           <a:p>
             <a:r>
-              <a:t>⏱ ~60 сек  ·  слайд 15/18</a:t>
+              <a:t>⏱ ~35 сек  ·  слайд 15/18</a:t>
             </a:r>
             <a:endParaRPr lang="en-US" dirty="0"/>
           </a:p>
           <a:p>
             <a:r>
-              <a:t>Тепер — багатокритеріальний вибір моделі. Парето-оптимальна множина складається з трьох альтернатив: BGE-M3, E5-base та BM25. Тобто три з п'яти моделей не домінуються жодною іншою за всіма критеріями одночасно.</a:t>
-            </a:r>
-          </a:p>
-          <a:p>
-            <a:r>
-              <a:t>BGE-M3 — лідер у всіх трьох доменах за nDCG, MRR та Recall.</a:t>
-            </a:r>
-          </a:p>
-          <a:p>
-            <a:r>
-              <a:t>E5-base — швидка альтернатива: близько 70 мілісекунд на запит проти 228 мілісекунд у BGE-M3, тобто приблизно у три рази швидше при прийнятній якості.</a:t>
-            </a:r>
-          </a:p>
-          <a:p>
-            <a:r>
-              <a:t>Qwen3 виявився лідером на юридичному домені з nDCG 0.320, але приблизно у два рази повільніший.</a:t>
-            </a:r>
-          </a:p>
-          <a:p>
-            <a:r>
-              <a:t>Nomic — найслабші результати; в окремих доменах поступається навіть BM25 за якістю.</a:t>
-            </a:r>
-          </a:p>
-          <a:p>
-            <a:r>
-              <a:t>Діаграма знизу показує інтегральні оцінки U по трьох доменах, обчислені за лінійною згорткою з рівними вагами.</a:t>
+              <a:t>Результати багатокритеріального вибору. Парето-оптимальна множина — BGE-M3, E5-base та BM25: три з п'яти моделей не домінуються жодною. BGE-M3 — лідер у трьох доменах за nDCG, MRR, Recall. E5-base — швидка альтернатива: 70 мілісекунд проти 228 у BGE-M3, тобто у три рази швидше. Qwen3 — лідер на юридичному (nDCG 0.320), але удвічі повільніший. Nomic — найслабші результати, в окремих доменах поступається навіть BM25.</a:t>
             </a:r>
           </a:p>
         </p:txBody>
@@ -6081,38 +6041,33 @@
           <a:lstStyle/>
           <a:p>
             <a:r>
-              <a:t>⏱ ~70 сек  ·  слайд 16/18</a:t>
+              <a:t>⏱ ~55 сек  ·  слайд 16/18</a:t>
             </a:r>
             <a:endParaRPr lang="en-US" dirty="0"/>
           </a:p>
           <a:p>
             <a:r>
-              <a:t>На цьому графіку — компроміс між якістю та швидкодією на технічному домені. По осі X — час відповіді в мілісекундах, по осі Y — nDCG@10. Парето-фронт виділено пунктирною лінією.</a:t>
-            </a:r>
-          </a:p>
-          <a:p>
-            <a:r>
-              <a:t>BGE-M3 — Парето-оптимальна, лідер за якістю: nDCG 0.672, приблизно 228 мілісекунд на запит. Це основний вибір для впровадження.</a:t>
-            </a:r>
-          </a:p>
-          <a:p>
-            <a:r>
-              <a:t>E5-base — також Парето-оптимальна, sweet spot: близько 70 мілісекунд, тобто у три рази швидше за BGE-M3 при незначній втраті якості.</a:t>
-            </a:r>
-          </a:p>
-          <a:p>
-            <a:r>
-              <a:t>BM25 — Парето-оптимальна як baseline: менше 3 мілісекунд, але стеля якості — приблизно 0.49 nDCG.</a:t>
-            </a:r>
-          </a:p>
-          <a:p>
-            <a:r>
-              <a:t>Qwen3 — спеціалізована модель, домінується на технічному домені, але краща на юридичному.</a:t>
-            </a:r>
-          </a:p>
-          <a:p>
-            <a:r>
-              <a:t>Nomic — не рекомендується: повністю домінується іншими моделями, поступається BM25 за якістю при більших вимогах до ресурсів.</a:t>
+              <a:t>Компроміс якості та швидкодії на технічному домені. По осі X — час відповіді, по осі Y — nDCG@10. Парето-фронт виділено пунктиром.</a:t>
+            </a:r>
+          </a:p>
+          <a:p>
+            <a:r>
+              <a:t>BGE-M3 — Парето-оптимальна, лідер якості: nDCG 0.672, ~228 мілісекунд. Основний вибір для впровадження.</a:t>
+            </a:r>
+          </a:p>
+          <a:p>
+            <a:r>
+              <a:t>E5-base — Парето-оптимальна sweet spot: ~70 мілісекунд, утричі швидше за BGE-M3 при незначній втраті якості.</a:t>
+            </a:r>
+          </a:p>
+          <a:p>
+            <a:r>
+              <a:t>BM25 — Парето-оптимальна як baseline: менше 3 мілісекунд, але стеля якості ~0.49.</a:t>
+            </a:r>
+          </a:p>
+          <a:p>
+            <a:r>
+              <a:t>Qwen3 домінується на tech, але кращий на legal. Nomic не рекомендується — повністю домінується, поступається BM25 за якістю.</a:t>
             </a:r>
           </a:p>
         </p:txBody>
@@ -6198,28 +6153,13 @@
           <a:lstStyle/>
           <a:p>
             <a:r>
-              <a:t>⏱ ~40 сек  ·  слайд 17/18</a:t>
+              <a:t>⏱ ~25 сек  ·  слайд 17/18</a:t>
             </a:r>
             <a:endParaRPr lang="en-US" dirty="0"/>
           </a:p>
           <a:p>
             <a:r>
-              <a:t>Апробація результатів дослідження. Опубліковано дві наукові праці у співавторстві з науковим керівником.</a:t>
-            </a:r>
-          </a:p>
-          <a:p>
-            <a:r>
-              <a:t>Перша — стаття на 2-й Міжнародній науково-практичній конференції «Innovative Research in Science and Economy» 2026 року, де представлено benchmark-методологію та порівняння чотирьох моделей.</a:t>
-            </a:r>
-          </a:p>
-          <a:p>
-            <a:r>
-              <a:t>Друга — тези на 30-му Міжнародному молодіжному форумі «Радіоелектроніка та молодь у XXI столітті» в ХНУРЕ, де подано підхід до підвищення якості семантичного пошуку на основі контрастивно-навчених embedding-моделей.</a:t>
-            </a:r>
-          </a:p>
-          <a:p>
-            <a:r>
-              <a:t>Загалом — два виступи на міжнародних конференціях.</a:t>
+              <a:t>Апробація: опубліковано дві наукові праці у співавторстві з науковим керівником. Перша — стаття на 2-й конференції «Innovative Research in Science and Economy» з benchmark-методологією. Друга — тези на 30-му форумі «Радіоелектроніка та молодь у XXI столітті» в ХНУРЕ про підвищення якості retrieval. Загалом — два виступи на міжнародних конференціях.</a:t>
             </a:r>
           </a:p>
         </p:txBody>
@@ -6534,18 +6474,13 @@
           <a:lstStyle/>
           <a:p>
             <a:r>
-              <a:t>⏱ ~60 сек  ·  слайд 3/18</a:t>
+              <a:t>⏱ ~35 сек  ·  слайд 3/18</a:t>
             </a:r>
             <a:endParaRPr lang="en-US" dirty="0"/>
           </a:p>
           <a:p>
             <a:r>
-              <a:t>Огляд літератури охоплює період з 2013 по 2025 рік — понад дванадцять років еволюції embedding-моделей. На таймлайні представлено ключові віхи: Word2Vec Міколова 2013 року заклав статистичні векторні подання; BERT 2018 року Девліна приніс контекстність через трансформери; Sentence-BERT 2019 року Реймерса оптимізував архітектуру під семантичну схожість речень. У 2022 році з'явилась модель E5 з контрастивним навчанням та мультимовністю. У 2024 році — BGE-M3 та nomic-embed, які підтримують довгий контекст до восьми тисяч токенів. І найновіша — Qwen3-Embedding 2025 року, побудована на декодерній архітектурі з підтримкою інструкцій.</a:t>
-            </a:r>
-          </a:p>
-          <a:p>
-            <a:r>
-              <a:t>Усього опрацьовано 29 наукових джерел. Виявлено дослідницьку прогалину: на момент виконання роботи відсутні порівняльні дослідження сучасних embedding-моделей саме на україномовних доменно-специфічних колекціях.</a:t>
+              <a:t>Огляд літератури охоплює період 2013–2025 — від статистичних подань Word2Vec через контекстний BERT і Sentence-BERT, до сучасних мультимовних моделей: E5, BGE-M3, nomic та Qwen3-Embedding. Усього опрацьовано 29 джерел. Виявлено ключову дослідницьку прогалину: відсутність порівняльних досліджень embedding-моделей саме на україномовних доменно-специфічних колекціях.</a:t>
             </a:r>
           </a:p>
         </p:txBody>
@@ -6728,38 +6663,13 @@
           <a:lstStyle/>
           <a:p>
             <a:r>
-              <a:t>⏱ ~60 сек  ·  слайд 5/18</a:t>
+              <a:t>⏱ ~45 сек  ·  слайд 5/18</a:t>
             </a:r>
             <a:endParaRPr lang="en-US" dirty="0"/>
           </a:p>
           <a:p>
             <a:r>
-              <a:t>Для дослідження обрано чотири сучасні моделі векторних ембеддінгів.</a:t>
-            </a:r>
-          </a:p>
-          <a:p>
-            <a:r>
-              <a:t>Перша — BGE-M3 від BAAI: 568 мільйонів параметрів, контекстне вікно до 8192 токенів, енкодерна архітектура. Її особливість — три режими роботи: dense, sparse та multi-vector.</a:t>
-            </a:r>
-          </a:p>
-          <a:p>
-            <a:r>
-              <a:t>Друга — multilingual E5-base від intfloat: 278 мільйонів параметрів, контекст 512 токенів. Особливість — обов'язкові префікси query та passage перед текстом для запитів і документів.</a:t>
-            </a:r>
-          </a:p>
-          <a:p>
-            <a:r>
-              <a:t>Третя — nomic-embed v1.5: всього 137 мільйонів параметрів, але контекст до 8192 токенів і техніка Matryoshka representations, що дозволяє динамічно зменшувати розмірність вектора.</a:t>
-            </a:r>
-          </a:p>
-          <a:p>
-            <a:r>
-              <a:t>Четверта — Qwen3-Embedding-0.6B від Alibaba: 596 мільйонів параметрів, контекст 32768 токенів. На відміну від інших трьох, побудована на декодерній LLM-архітектурі та підтримує інструкції.</a:t>
-            </a:r>
-          </a:p>
-          <a:p>
-            <a:r>
-              <a:t>Як лексична baseline використано BM25.</a:t>
+              <a:t>Для дослідження обрано чотири сучасні моделі. BGE-M3 від BAAI — 568 мільйонів параметрів, контекст 8192 токенів, мультифункціональна (dense, sparse, multi-vector). E5-base від intfloat — 278 мільйонів параметрів, контекст 512, з обов'язковими префіксами query та passage. Nomic-embed v1.5 — найменша, 137 мільйонів, з технікою Matryoshka. Qwen3-Embedding-0.6B від Alibaba — 596 мільйонів, контекст 32 тисячі токенів, єдина побудована на декодерній LLM-архітектурі. Як лексичну baseline використано BM25.</a:t>
             </a:r>
           </a:p>
         </p:txBody>
@@ -6942,33 +6852,13 @@
           <a:lstStyle/>
           <a:p>
             <a:r>
-              <a:t>⏱ ~60 сек  ·  слайд 7/18</a:t>
+              <a:t>⏱ ~35 сек  ·  слайд 7/18</a:t>
             </a:r>
             <a:endParaRPr lang="en-US" dirty="0"/>
           </a:p>
           <a:p>
             <a:r>
-              <a:t>Розгляну формули метрик детальніше. nDCG@k — нормалізована якість ранжування, обчислюється як DCG поділене на ідеальне DCG. Сама DCG враховує і факт релевантності, і позицію документа — кожен документ ділиться на логарифм його позиції плюс один.</a:t>
-            </a:r>
-          </a:p>
-          <a:p>
-            <a:r>
-              <a:t>MRR — це середнє значення оберненої позиції першого релевантного документа по всіх запитах. Якщо релевантний документ на першому місці — MRR дорівнює одиниці; на десятому — одній десятій.</a:t>
-            </a:r>
-          </a:p>
-          <a:p>
-            <a:r>
-              <a:t>Recall@k — частка релевантних документів, знайдених у топ-k результатів, серед усіх релевантних у колекції.</a:t>
-            </a:r>
-          </a:p>
-          <a:p>
-            <a:r>
-              <a:t>Precision@k — частка релевантних документів серед перших k результатів видачі.</a:t>
-            </a:r>
-          </a:p>
-          <a:p>
-            <a:r>
-              <a:t>Усі чотири метрики приймають значення від нуля до одиниці, і чим вище — тим краще.</a:t>
+              <a:t>Стисло про формули. nDCG@k — нормалізована якість ранжування, DCG поділене на ідеальне DCG; враховує і релевантність, і позицію. MRR — середня обернена позиція першого релевантного документа. Recall@k — частка знайдених релевантних серед усіх релевантних. Precision@k — частка релевантних серед перших k результатів. Усі метрики від 0 до 1; що вище — то краще.</a:t>
             </a:r>
           </a:p>
         </p:txBody>
@@ -7054,28 +6944,13 @@
           <a:lstStyle/>
           <a:p>
             <a:r>
-              <a:t>⏱ ~60 сек  ·  слайд 8/18</a:t>
+              <a:t>⏱ ~40 сек  ·  слайд 8/18</a:t>
             </a:r>
             <a:endParaRPr lang="en-US" dirty="0"/>
           </a:p>
           <a:p>
             <a:r>
-              <a:t>Багатокритеріальний вибір моделі реалізовано у три кроки.</a:t>
-            </a:r>
-          </a:p>
-          <a:p>
-            <a:r>
-              <a:t>Крок перший — Парето-домінування. Альтернатива є Парето-оптимальною, якщо не існує іншої альтернативи, яка домінує над нею за всіма критеріями одночасно. Це дозволяє відсіяти заздалегідь гірші варіанти.</a:t>
-            </a:r>
-          </a:p>
-          <a:p>
-            <a:r>
-              <a:t>Крок другий — нормалізація шкал. Критерії мають різні одиниці виміру: nDCG в межах від нуля до одиниці, а швидкодія в мілісекундах. Тому всі критерії приводяться до спільної шкали від нуля до одиниці з урахуванням напряму оптимізації — максимізувати чи мінімізувати.</a:t>
-            </a:r>
-          </a:p>
-          <a:p>
-            <a:r>
-              <a:t>Крок третій — лінійна адитивна згортка. Інтегральна оцінка корисності U від альтернативи дорівнює сумі добутків ваг на нормалізовані значення критеріїв. Сума ваг дорівнює одиниці. Користувач задає ваги залежно від своїх пріоритетів — наприклад, якість важливіша за швидкість або навпаки.</a:t>
+              <a:t>Багатокритеріальний вибір реалізовано у три кроки. Перший — Парето-домінування: відсіюємо альтернативи, які гірші за іншу одразу за всіма критеріями. Другий — нормалізація: приведення всіх критеріїв до спільної шкали від 0 до 1 з урахуванням напряму оптимізації. Третій — лінійна адитивна згортка: інтегральна оцінка U — це сума добутків ваг на нормалізовані значення; сума ваг дорівнює одиниці. Ваги задає користувач залежно від пріоритетів — якість, швидкодія, ресурси.</a:t>
             </a:r>
           </a:p>
         </p:txBody>
